--- a/docs/plots/carbo/jx_carbo_linsubhr_ratio_throm2.pptx
+++ b/docs/plots/carbo/jx_carbo_linsubhr_ratio_throm2.pptx
@@ -3003,512 +3003,512 @@
           <p:spPr>
             <a:xfrm>
               <a:off x="817517" y="1896563"/>
-              <a:ext cx="7370972" cy="3636415"/>
+              <a:ext cx="7370972" cy="3639306"/>
             </a:xfrm>
             <a:custGeom>
               <a:avLst/>
               <a:pathLst>
-                <a:path w="7370972" h="3636415">
+                <a:path w="7370972" h="3639306">
                   <a:moveTo>
-                    <a:pt x="1950254" y="0"/>
+                    <a:pt x="2017411" y="0"/>
                   </a:moveTo>
                   <a:lnTo>
-                    <a:pt x="2014223" y="227618"/>
-                  </a:lnTo>
-                  <a:lnTo>
-                    <a:pt x="2091857" y="483244"/>
-                  </a:lnTo>
-                  <a:lnTo>
-                    <a:pt x="2169491" y="719791"/>
-                  </a:lnTo>
-                  <a:lnTo>
-                    <a:pt x="2247125" y="938684"/>
-                  </a:lnTo>
-                  <a:lnTo>
-                    <a:pt x="2324759" y="1141239"/>
-                  </a:lnTo>
-                  <a:lnTo>
-                    <a:pt x="2402393" y="1328677"/>
-                  </a:lnTo>
-                  <a:lnTo>
-                    <a:pt x="2480027" y="1502126"/>
-                  </a:lnTo>
-                  <a:lnTo>
-                    <a:pt x="2557661" y="1662629"/>
-                  </a:lnTo>
-                  <a:lnTo>
-                    <a:pt x="2635295" y="1811153"/>
-                  </a:lnTo>
-                  <a:lnTo>
-                    <a:pt x="2712930" y="1948592"/>
-                  </a:lnTo>
-                  <a:lnTo>
-                    <a:pt x="2790564" y="2075774"/>
-                  </a:lnTo>
-                  <a:lnTo>
-                    <a:pt x="2868198" y="2193463"/>
-                  </a:lnTo>
-                  <a:lnTo>
-                    <a:pt x="2945832" y="2302369"/>
-                  </a:lnTo>
-                  <a:lnTo>
-                    <a:pt x="3023466" y="2403146"/>
-                  </a:lnTo>
-                  <a:lnTo>
-                    <a:pt x="3101100" y="2496402"/>
-                  </a:lnTo>
-                  <a:lnTo>
-                    <a:pt x="3178734" y="2582698"/>
-                  </a:lnTo>
-                  <a:lnTo>
-                    <a:pt x="3256368" y="2662553"/>
-                  </a:lnTo>
-                  <a:lnTo>
-                    <a:pt x="3334002" y="2736448"/>
-                  </a:lnTo>
-                  <a:lnTo>
-                    <a:pt x="3411636" y="2786765"/>
-                  </a:lnTo>
-                  <a:lnTo>
-                    <a:pt x="3489270" y="2798236"/>
-                  </a:lnTo>
-                  <a:lnTo>
-                    <a:pt x="3566904" y="2809556"/>
-                  </a:lnTo>
-                  <a:lnTo>
-                    <a:pt x="3644538" y="2820725"/>
-                  </a:lnTo>
-                  <a:lnTo>
-                    <a:pt x="3722172" y="2831747"/>
-                  </a:lnTo>
-                  <a:lnTo>
-                    <a:pt x="3799806" y="2842622"/>
-                  </a:lnTo>
-                  <a:lnTo>
-                    <a:pt x="3877440" y="2853354"/>
-                  </a:lnTo>
-                  <a:lnTo>
-                    <a:pt x="3955074" y="2863943"/>
-                  </a:lnTo>
-                  <a:lnTo>
-                    <a:pt x="4032708" y="2874392"/>
-                  </a:lnTo>
-                  <a:lnTo>
-                    <a:pt x="4110342" y="2884703"/>
-                  </a:lnTo>
-                  <a:lnTo>
-                    <a:pt x="4187976" y="2894877"/>
-                  </a:lnTo>
-                  <a:lnTo>
-                    <a:pt x="4265610" y="2904916"/>
-                  </a:lnTo>
-                  <a:lnTo>
-                    <a:pt x="4343244" y="2914822"/>
-                  </a:lnTo>
-                  <a:lnTo>
-                    <a:pt x="4420879" y="2924597"/>
-                  </a:lnTo>
-                  <a:lnTo>
-                    <a:pt x="4498513" y="2934242"/>
-                  </a:lnTo>
-                  <a:lnTo>
-                    <a:pt x="4576147" y="2943760"/>
-                  </a:lnTo>
-                  <a:lnTo>
-                    <a:pt x="4653781" y="2953151"/>
-                  </a:lnTo>
-                  <a:lnTo>
-                    <a:pt x="4731415" y="2962418"/>
-                  </a:lnTo>
-                  <a:lnTo>
-                    <a:pt x="4809049" y="2971563"/>
-                  </a:lnTo>
-                  <a:lnTo>
-                    <a:pt x="4886683" y="2980586"/>
-                  </a:lnTo>
-                  <a:lnTo>
-                    <a:pt x="4964317" y="2989490"/>
-                  </a:lnTo>
-                  <a:lnTo>
-                    <a:pt x="5041951" y="2998275"/>
-                  </a:lnTo>
-                  <a:lnTo>
-                    <a:pt x="5119585" y="3006945"/>
-                  </a:lnTo>
-                  <a:lnTo>
-                    <a:pt x="5197219" y="3015499"/>
-                  </a:lnTo>
-                  <a:lnTo>
-                    <a:pt x="5274853" y="3023940"/>
-                  </a:lnTo>
-                  <a:lnTo>
-                    <a:pt x="5352487" y="3032269"/>
-                  </a:lnTo>
-                  <a:lnTo>
-                    <a:pt x="5430121" y="3040488"/>
-                  </a:lnTo>
-                  <a:lnTo>
-                    <a:pt x="5507755" y="3048598"/>
-                  </a:lnTo>
-                  <a:lnTo>
-                    <a:pt x="5585389" y="3056601"/>
-                  </a:lnTo>
-                  <a:lnTo>
-                    <a:pt x="5663023" y="3064498"/>
-                  </a:lnTo>
-                  <a:lnTo>
-                    <a:pt x="5740657" y="3072290"/>
-                  </a:lnTo>
-                  <a:lnTo>
-                    <a:pt x="5818291" y="3079978"/>
-                  </a:lnTo>
-                  <a:lnTo>
-                    <a:pt x="5895925" y="3087565"/>
-                  </a:lnTo>
-                  <a:lnTo>
-                    <a:pt x="5973559" y="3095051"/>
-                  </a:lnTo>
-                  <a:lnTo>
-                    <a:pt x="6051193" y="3102439"/>
-                  </a:lnTo>
-                  <a:lnTo>
-                    <a:pt x="6128827" y="3109728"/>
-                  </a:lnTo>
-                  <a:lnTo>
-                    <a:pt x="6206462" y="3116921"/>
-                  </a:lnTo>
-                  <a:lnTo>
-                    <a:pt x="6284096" y="3124018"/>
-                  </a:lnTo>
-                  <a:lnTo>
-                    <a:pt x="6361730" y="3131022"/>
-                  </a:lnTo>
-                  <a:lnTo>
-                    <a:pt x="6439364" y="3137932"/>
-                  </a:lnTo>
-                  <a:lnTo>
-                    <a:pt x="6516998" y="3144751"/>
-                  </a:lnTo>
-                  <a:lnTo>
-                    <a:pt x="6594632" y="3151480"/>
-                  </a:lnTo>
-                  <a:lnTo>
-                    <a:pt x="6672266" y="3158120"/>
-                  </a:lnTo>
-                  <a:lnTo>
-                    <a:pt x="6749900" y="3164671"/>
-                  </a:lnTo>
-                  <a:lnTo>
-                    <a:pt x="6827534" y="3171136"/>
-                  </a:lnTo>
-                  <a:lnTo>
-                    <a:pt x="6905168" y="3177515"/>
-                  </a:lnTo>
-                  <a:lnTo>
-                    <a:pt x="6982802" y="3183810"/>
-                  </a:lnTo>
-                  <a:lnTo>
-                    <a:pt x="7060436" y="3190021"/>
-                  </a:lnTo>
-                  <a:lnTo>
-                    <a:pt x="7138070" y="3196150"/>
-                  </a:lnTo>
-                  <a:lnTo>
-                    <a:pt x="7215704" y="3202198"/>
-                  </a:lnTo>
-                  <a:lnTo>
-                    <a:pt x="7293338" y="3208165"/>
-                  </a:lnTo>
-                  <a:lnTo>
-                    <a:pt x="7370972" y="3214054"/>
-                  </a:lnTo>
-                  <a:lnTo>
-                    <a:pt x="7370972" y="3636415"/>
-                  </a:lnTo>
-                  <a:lnTo>
-                    <a:pt x="7293338" y="3635106"/>
-                  </a:lnTo>
-                  <a:lnTo>
-                    <a:pt x="7215704" y="3633692"/>
-                  </a:lnTo>
-                  <a:lnTo>
-                    <a:pt x="7138070" y="3632163"/>
-                  </a:lnTo>
-                  <a:lnTo>
-                    <a:pt x="7060436" y="3630511"/>
-                  </a:lnTo>
-                  <a:lnTo>
-                    <a:pt x="6982802" y="3628726"/>
-                  </a:lnTo>
-                  <a:lnTo>
-                    <a:pt x="6905168" y="3626797"/>
-                  </a:lnTo>
-                  <a:lnTo>
-                    <a:pt x="6827534" y="3624713"/>
-                  </a:lnTo>
-                  <a:lnTo>
-                    <a:pt x="6749900" y="3622460"/>
-                  </a:lnTo>
-                  <a:lnTo>
-                    <a:pt x="6672266" y="3620025"/>
-                  </a:lnTo>
-                  <a:lnTo>
-                    <a:pt x="6594632" y="3617395"/>
-                  </a:lnTo>
-                  <a:lnTo>
-                    <a:pt x="6516998" y="3614552"/>
-                  </a:lnTo>
-                  <a:lnTo>
-                    <a:pt x="6439364" y="3611479"/>
-                  </a:lnTo>
-                  <a:lnTo>
-                    <a:pt x="6361730" y="3608159"/>
-                  </a:lnTo>
-                  <a:lnTo>
-                    <a:pt x="6284096" y="3604572"/>
-                  </a:lnTo>
-                  <a:lnTo>
-                    <a:pt x="6206462" y="3600694"/>
-                  </a:lnTo>
-                  <a:lnTo>
-                    <a:pt x="6128827" y="3596504"/>
-                  </a:lnTo>
-                  <a:lnTo>
-                    <a:pt x="6051193" y="3591977"/>
-                  </a:lnTo>
-                  <a:lnTo>
-                    <a:pt x="5973559" y="3587084"/>
-                  </a:lnTo>
-                  <a:lnTo>
-                    <a:pt x="5895925" y="3581796"/>
-                  </a:lnTo>
-                  <a:lnTo>
-                    <a:pt x="5818291" y="3576082"/>
-                  </a:lnTo>
-                  <a:lnTo>
-                    <a:pt x="5740657" y="3569907"/>
-                  </a:lnTo>
-                  <a:lnTo>
-                    <a:pt x="5663023" y="3563234"/>
-                  </a:lnTo>
-                  <a:lnTo>
-                    <a:pt x="5585389" y="3556022"/>
-                  </a:lnTo>
-                  <a:lnTo>
-                    <a:pt x="5507755" y="3548230"/>
-                  </a:lnTo>
-                  <a:lnTo>
-                    <a:pt x="5430121" y="3539808"/>
-                  </a:lnTo>
-                  <a:lnTo>
-                    <a:pt x="5352487" y="3530707"/>
-                  </a:lnTo>
-                  <a:lnTo>
-                    <a:pt x="5274853" y="3520873"/>
-                  </a:lnTo>
-                  <a:lnTo>
-                    <a:pt x="5197219" y="3510245"/>
-                  </a:lnTo>
-                  <a:lnTo>
-                    <a:pt x="5119585" y="3498760"/>
-                  </a:lnTo>
-                  <a:lnTo>
-                    <a:pt x="5041951" y="3486349"/>
-                  </a:lnTo>
-                  <a:lnTo>
-                    <a:pt x="4964317" y="3472936"/>
-                  </a:lnTo>
-                  <a:lnTo>
-                    <a:pt x="4886683" y="3458442"/>
-                  </a:lnTo>
-                  <a:lnTo>
-                    <a:pt x="4809049" y="3442779"/>
-                  </a:lnTo>
-                  <a:lnTo>
-                    <a:pt x="4731415" y="3425852"/>
-                  </a:lnTo>
-                  <a:lnTo>
-                    <a:pt x="4653781" y="3407561"/>
-                  </a:lnTo>
-                  <a:lnTo>
-                    <a:pt x="4576147" y="3387794"/>
-                  </a:lnTo>
-                  <a:lnTo>
-                    <a:pt x="4498513" y="3366432"/>
-                  </a:lnTo>
-                  <a:lnTo>
-                    <a:pt x="4420879" y="3343348"/>
-                  </a:lnTo>
-                  <a:lnTo>
-                    <a:pt x="4343244" y="3318402"/>
-                  </a:lnTo>
-                  <a:lnTo>
-                    <a:pt x="4265610" y="3291444"/>
-                  </a:lnTo>
-                  <a:lnTo>
-                    <a:pt x="4187976" y="3262312"/>
-                  </a:lnTo>
-                  <a:lnTo>
-                    <a:pt x="4110342" y="3230830"/>
-                  </a:lnTo>
-                  <a:lnTo>
-                    <a:pt x="4032708" y="3196809"/>
-                  </a:lnTo>
-                  <a:lnTo>
-                    <a:pt x="3955074" y="3160044"/>
-                  </a:lnTo>
-                  <a:lnTo>
-                    <a:pt x="3877440" y="3120314"/>
-                  </a:lnTo>
-                  <a:lnTo>
-                    <a:pt x="3799806" y="3077379"/>
-                  </a:lnTo>
-                  <a:lnTo>
-                    <a:pt x="3722172" y="3030982"/>
-                  </a:lnTo>
-                  <a:lnTo>
-                    <a:pt x="3644538" y="2980842"/>
-                  </a:lnTo>
-                  <a:lnTo>
-                    <a:pt x="3566904" y="2926658"/>
-                  </a:lnTo>
-                  <a:lnTo>
-                    <a:pt x="3489270" y="2868104"/>
-                  </a:lnTo>
-                  <a:lnTo>
-                    <a:pt x="3411636" y="2804828"/>
-                  </a:lnTo>
-                  <a:lnTo>
-                    <a:pt x="3334002" y="2775139"/>
-                  </a:lnTo>
-                  <a:lnTo>
-                    <a:pt x="3256368" y="2763358"/>
-                  </a:lnTo>
-                  <a:lnTo>
-                    <a:pt x="3178734" y="2751418"/>
-                  </a:lnTo>
-                  <a:lnTo>
-                    <a:pt x="3101100" y="2739318"/>
-                  </a:lnTo>
-                  <a:lnTo>
-                    <a:pt x="3023466" y="2727056"/>
-                  </a:lnTo>
-                  <a:lnTo>
-                    <a:pt x="2945832" y="2714628"/>
-                  </a:lnTo>
-                  <a:lnTo>
-                    <a:pt x="2868198" y="2702034"/>
-                  </a:lnTo>
-                  <a:lnTo>
-                    <a:pt x="2790564" y="2689271"/>
-                  </a:lnTo>
-                  <a:lnTo>
-                    <a:pt x="2712930" y="2676337"/>
-                  </a:lnTo>
-                  <a:lnTo>
-                    <a:pt x="2635295" y="2663229"/>
-                  </a:lnTo>
-                  <a:lnTo>
-                    <a:pt x="2557661" y="2649945"/>
-                  </a:lnTo>
-                  <a:lnTo>
-                    <a:pt x="2480027" y="2636482"/>
-                  </a:lnTo>
-                  <a:lnTo>
-                    <a:pt x="2402393" y="2622839"/>
-                  </a:lnTo>
-                  <a:lnTo>
-                    <a:pt x="2324759" y="2609013"/>
-                  </a:lnTo>
-                  <a:lnTo>
-                    <a:pt x="2247125" y="2595001"/>
-                  </a:lnTo>
-                  <a:lnTo>
-                    <a:pt x="2169491" y="2580800"/>
-                  </a:lnTo>
-                  <a:lnTo>
-                    <a:pt x="2091857" y="2566410"/>
-                  </a:lnTo>
-                  <a:lnTo>
-                    <a:pt x="2014223" y="2551826"/>
-                  </a:lnTo>
-                  <a:lnTo>
-                    <a:pt x="1936589" y="2537046"/>
-                  </a:lnTo>
-                  <a:lnTo>
-                    <a:pt x="1858955" y="2522068"/>
-                  </a:lnTo>
-                  <a:lnTo>
-                    <a:pt x="1781321" y="2506888"/>
-                  </a:lnTo>
-                  <a:lnTo>
-                    <a:pt x="1703687" y="2491505"/>
-                  </a:lnTo>
-                  <a:lnTo>
-                    <a:pt x="1626053" y="2475915"/>
-                  </a:lnTo>
-                  <a:lnTo>
-                    <a:pt x="1548419" y="2460116"/>
-                  </a:lnTo>
-                  <a:lnTo>
-                    <a:pt x="1470785" y="2444105"/>
-                  </a:lnTo>
-                  <a:lnTo>
-                    <a:pt x="1393151" y="2427879"/>
-                  </a:lnTo>
-                  <a:lnTo>
-                    <a:pt x="1315517" y="2411435"/>
-                  </a:lnTo>
-                  <a:lnTo>
-                    <a:pt x="1237883" y="2394770"/>
-                  </a:lnTo>
-                  <a:lnTo>
-                    <a:pt x="1160249" y="2377882"/>
-                  </a:lnTo>
-                  <a:lnTo>
-                    <a:pt x="1082615" y="2360767"/>
-                  </a:lnTo>
-                  <a:lnTo>
-                    <a:pt x="1004981" y="2343422"/>
-                  </a:lnTo>
-                  <a:lnTo>
-                    <a:pt x="927346" y="2325844"/>
-                  </a:lnTo>
-                  <a:lnTo>
-                    <a:pt x="849712" y="2308030"/>
-                  </a:lnTo>
-                  <a:lnTo>
-                    <a:pt x="772078" y="2289977"/>
-                  </a:lnTo>
-                  <a:lnTo>
-                    <a:pt x="694444" y="2271681"/>
-                  </a:lnTo>
-                  <a:lnTo>
-                    <a:pt x="616810" y="2253140"/>
-                  </a:lnTo>
-                  <a:lnTo>
-                    <a:pt x="539176" y="2234350"/>
-                  </a:lnTo>
-                  <a:lnTo>
-                    <a:pt x="461542" y="2215308"/>
-                  </a:lnTo>
-                  <a:lnTo>
-                    <a:pt x="383908" y="2196010"/>
-                  </a:lnTo>
-                  <a:lnTo>
-                    <a:pt x="306274" y="2176453"/>
-                  </a:lnTo>
-                  <a:lnTo>
-                    <a:pt x="228640" y="2156633"/>
-                  </a:lnTo>
-                  <a:lnTo>
-                    <a:pt x="151006" y="2136547"/>
-                  </a:lnTo>
-                  <a:lnTo>
-                    <a:pt x="73372" y="2116192"/>
-                  </a:lnTo>
-                  <a:lnTo>
-                    <a:pt x="0" y="2096696"/>
+                    <a:pt x="2091857" y="274669"/>
+                  </a:lnTo>
+                  <a:lnTo>
+                    <a:pt x="2169491" y="538711"/>
+                  </a:lnTo>
+                  <a:lnTo>
+                    <a:pt x="2247125" y="782113"/>
+                  </a:lnTo>
+                  <a:lnTo>
+                    <a:pt x="2324759" y="1006489"/>
+                  </a:lnTo>
+                  <a:lnTo>
+                    <a:pt x="2402393" y="1213327"/>
+                  </a:lnTo>
+                  <a:lnTo>
+                    <a:pt x="2480027" y="1403998"/>
+                  </a:lnTo>
+                  <a:lnTo>
+                    <a:pt x="2557661" y="1579764"/>
+                  </a:lnTo>
+                  <a:lnTo>
+                    <a:pt x="2635295" y="1741792"/>
+                  </a:lnTo>
+                  <a:lnTo>
+                    <a:pt x="2712930" y="1891155"/>
+                  </a:lnTo>
+                  <a:lnTo>
+                    <a:pt x="2790564" y="2028842"/>
+                  </a:lnTo>
+                  <a:lnTo>
+                    <a:pt x="2868198" y="2155768"/>
+                  </a:lnTo>
+                  <a:lnTo>
+                    <a:pt x="2945832" y="2272772"/>
+                  </a:lnTo>
+                  <a:lnTo>
+                    <a:pt x="3023466" y="2380630"/>
+                  </a:lnTo>
+                  <a:lnTo>
+                    <a:pt x="3101100" y="2480058"/>
+                  </a:lnTo>
+                  <a:lnTo>
+                    <a:pt x="3178734" y="2571713"/>
+                  </a:lnTo>
+                  <a:lnTo>
+                    <a:pt x="3256368" y="2656205"/>
+                  </a:lnTo>
+                  <a:lnTo>
+                    <a:pt x="3334002" y="2734092"/>
+                  </a:lnTo>
+                  <a:lnTo>
+                    <a:pt x="3411636" y="2784840"/>
+                  </a:lnTo>
+                  <a:lnTo>
+                    <a:pt x="3489270" y="2790525"/>
+                  </a:lnTo>
+                  <a:lnTo>
+                    <a:pt x="3566904" y="2796173"/>
+                  </a:lnTo>
+                  <a:lnTo>
+                    <a:pt x="3644538" y="2801784"/>
+                  </a:lnTo>
+                  <a:lnTo>
+                    <a:pt x="3722172" y="2807358"/>
+                  </a:lnTo>
+                  <a:lnTo>
+                    <a:pt x="3799806" y="2812895"/>
+                  </a:lnTo>
+                  <a:lnTo>
+                    <a:pt x="3877440" y="2818396"/>
+                  </a:lnTo>
+                  <a:lnTo>
+                    <a:pt x="3955074" y="2823861"/>
+                  </a:lnTo>
+                  <a:lnTo>
+                    <a:pt x="4032708" y="2829291"/>
+                  </a:lnTo>
+                  <a:lnTo>
+                    <a:pt x="4110342" y="2834685"/>
+                  </a:lnTo>
+                  <a:lnTo>
+                    <a:pt x="4187976" y="2840043"/>
+                  </a:lnTo>
+                  <a:lnTo>
+                    <a:pt x="4265610" y="2845366"/>
+                  </a:lnTo>
+                  <a:lnTo>
+                    <a:pt x="4343244" y="2850655"/>
+                  </a:lnTo>
+                  <a:lnTo>
+                    <a:pt x="4420879" y="2855909"/>
+                  </a:lnTo>
+                  <a:lnTo>
+                    <a:pt x="4498513" y="2861128"/>
+                  </a:lnTo>
+                  <a:lnTo>
+                    <a:pt x="4576147" y="2866313"/>
+                  </a:lnTo>
+                  <a:lnTo>
+                    <a:pt x="4653781" y="2871464"/>
+                  </a:lnTo>
+                  <a:lnTo>
+                    <a:pt x="4731415" y="2876582"/>
+                  </a:lnTo>
+                  <a:lnTo>
+                    <a:pt x="4809049" y="2881666"/>
+                  </a:lnTo>
+                  <a:lnTo>
+                    <a:pt x="4886683" y="2886717"/>
+                  </a:lnTo>
+                  <a:lnTo>
+                    <a:pt x="4964317" y="2891734"/>
+                  </a:lnTo>
+                  <a:lnTo>
+                    <a:pt x="5041951" y="2896719"/>
+                  </a:lnTo>
+                  <a:lnTo>
+                    <a:pt x="5119585" y="2901671"/>
+                  </a:lnTo>
+                  <a:lnTo>
+                    <a:pt x="5197219" y="2906590"/>
+                  </a:lnTo>
+                  <a:lnTo>
+                    <a:pt x="5274853" y="2911478"/>
+                  </a:lnTo>
+                  <a:lnTo>
+                    <a:pt x="5352487" y="2916333"/>
+                  </a:lnTo>
+                  <a:lnTo>
+                    <a:pt x="5430121" y="2921157"/>
+                  </a:lnTo>
+                  <a:lnTo>
+                    <a:pt x="5507755" y="2925949"/>
+                  </a:lnTo>
+                  <a:lnTo>
+                    <a:pt x="5585389" y="2930709"/>
+                  </a:lnTo>
+                  <a:lnTo>
+                    <a:pt x="5663023" y="2935439"/>
+                  </a:lnTo>
+                  <a:lnTo>
+                    <a:pt x="5740657" y="2940137"/>
+                  </a:lnTo>
+                  <a:lnTo>
+                    <a:pt x="5818291" y="2944805"/>
+                  </a:lnTo>
+                  <a:lnTo>
+                    <a:pt x="5895925" y="2949442"/>
+                  </a:lnTo>
+                  <a:lnTo>
+                    <a:pt x="5973559" y="2954048"/>
+                  </a:lnTo>
+                  <a:lnTo>
+                    <a:pt x="6051193" y="2958625"/>
+                  </a:lnTo>
+                  <a:lnTo>
+                    <a:pt x="6128827" y="2963171"/>
+                  </a:lnTo>
+                  <a:lnTo>
+                    <a:pt x="6206462" y="2967688"/>
+                  </a:lnTo>
+                  <a:lnTo>
+                    <a:pt x="6284096" y="2972175"/>
+                  </a:lnTo>
+                  <a:lnTo>
+                    <a:pt x="6361730" y="2976633"/>
+                  </a:lnTo>
+                  <a:lnTo>
+                    <a:pt x="6439364" y="2981061"/>
+                  </a:lnTo>
+                  <a:lnTo>
+                    <a:pt x="6516998" y="2985461"/>
+                  </a:lnTo>
+                  <a:lnTo>
+                    <a:pt x="6594632" y="2989832"/>
+                  </a:lnTo>
+                  <a:lnTo>
+                    <a:pt x="6672266" y="2994174"/>
+                  </a:lnTo>
+                  <a:lnTo>
+                    <a:pt x="6749900" y="2998487"/>
+                  </a:lnTo>
+                  <a:lnTo>
+                    <a:pt x="6827534" y="3002773"/>
+                  </a:lnTo>
+                  <a:lnTo>
+                    <a:pt x="6905168" y="3007030"/>
+                  </a:lnTo>
+                  <a:lnTo>
+                    <a:pt x="6982802" y="3011259"/>
+                  </a:lnTo>
+                  <a:lnTo>
+                    <a:pt x="7060436" y="3015461"/>
+                  </a:lnTo>
+                  <a:lnTo>
+                    <a:pt x="7138070" y="3019635"/>
+                  </a:lnTo>
+                  <a:lnTo>
+                    <a:pt x="7215704" y="3023782"/>
+                  </a:lnTo>
+                  <a:lnTo>
+                    <a:pt x="7293338" y="3027902"/>
+                  </a:lnTo>
+                  <a:lnTo>
+                    <a:pt x="7370972" y="3031994"/>
+                  </a:lnTo>
+                  <a:lnTo>
+                    <a:pt x="7370972" y="3639306"/>
+                  </a:lnTo>
+                  <a:lnTo>
+                    <a:pt x="7293338" y="3638175"/>
+                  </a:lnTo>
+                  <a:lnTo>
+                    <a:pt x="7215704" y="3636949"/>
+                  </a:lnTo>
+                  <a:lnTo>
+                    <a:pt x="7138070" y="3635618"/>
+                  </a:lnTo>
+                  <a:lnTo>
+                    <a:pt x="7060436" y="3634174"/>
+                  </a:lnTo>
+                  <a:lnTo>
+                    <a:pt x="6982802" y="3632608"/>
+                  </a:lnTo>
+                  <a:lnTo>
+                    <a:pt x="6905168" y="3630909"/>
+                  </a:lnTo>
+                  <a:lnTo>
+                    <a:pt x="6827534" y="3629066"/>
+                  </a:lnTo>
+                  <a:lnTo>
+                    <a:pt x="6749900" y="3627067"/>
+                  </a:lnTo>
+                  <a:lnTo>
+                    <a:pt x="6672266" y="3624899"/>
+                  </a:lnTo>
+                  <a:lnTo>
+                    <a:pt x="6594632" y="3622546"/>
+                  </a:lnTo>
+                  <a:lnTo>
+                    <a:pt x="6516998" y="3619994"/>
+                  </a:lnTo>
+                  <a:lnTo>
+                    <a:pt x="6439364" y="3617226"/>
+                  </a:lnTo>
+                  <a:lnTo>
+                    <a:pt x="6361730" y="3614222"/>
+                  </a:lnTo>
+                  <a:lnTo>
+                    <a:pt x="6284096" y="3610964"/>
+                  </a:lnTo>
+                  <a:lnTo>
+                    <a:pt x="6206462" y="3607430"/>
+                  </a:lnTo>
+                  <a:lnTo>
+                    <a:pt x="6128827" y="3603597"/>
+                  </a:lnTo>
+                  <a:lnTo>
+                    <a:pt x="6051193" y="3599438"/>
+                  </a:lnTo>
+                  <a:lnTo>
+                    <a:pt x="5973559" y="3594926"/>
+                  </a:lnTo>
+                  <a:lnTo>
+                    <a:pt x="5895925" y="3590032"/>
+                  </a:lnTo>
+                  <a:lnTo>
+                    <a:pt x="5818291" y="3584723"/>
+                  </a:lnTo>
+                  <a:lnTo>
+                    <a:pt x="5740657" y="3578964"/>
+                  </a:lnTo>
+                  <a:lnTo>
+                    <a:pt x="5663023" y="3572717"/>
+                  </a:lnTo>
+                  <a:lnTo>
+                    <a:pt x="5585389" y="3565939"/>
+                  </a:lnTo>
+                  <a:lnTo>
+                    <a:pt x="5507755" y="3558587"/>
+                  </a:lnTo>
+                  <a:lnTo>
+                    <a:pt x="5430121" y="3550612"/>
+                  </a:lnTo>
+                  <a:lnTo>
+                    <a:pt x="5352487" y="3541961"/>
+                  </a:lnTo>
+                  <a:lnTo>
+                    <a:pt x="5274853" y="3532575"/>
+                  </a:lnTo>
+                  <a:lnTo>
+                    <a:pt x="5197219" y="3522394"/>
+                  </a:lnTo>
+                  <a:lnTo>
+                    <a:pt x="5119585" y="3511350"/>
+                  </a:lnTo>
+                  <a:lnTo>
+                    <a:pt x="5041951" y="3499369"/>
+                  </a:lnTo>
+                  <a:lnTo>
+                    <a:pt x="4964317" y="3486373"/>
+                  </a:lnTo>
+                  <a:lnTo>
+                    <a:pt x="4886683" y="3472274"/>
+                  </a:lnTo>
+                  <a:lnTo>
+                    <a:pt x="4809049" y="3456980"/>
+                  </a:lnTo>
+                  <a:lnTo>
+                    <a:pt x="4731415" y="3440389"/>
+                  </a:lnTo>
+                  <a:lnTo>
+                    <a:pt x="4653781" y="3422391"/>
+                  </a:lnTo>
+                  <a:lnTo>
+                    <a:pt x="4576147" y="3402867"/>
+                  </a:lnTo>
+                  <a:lnTo>
+                    <a:pt x="4498513" y="3381688"/>
+                  </a:lnTo>
+                  <a:lnTo>
+                    <a:pt x="4420879" y="3358713"/>
+                  </a:lnTo>
+                  <a:lnTo>
+                    <a:pt x="4343244" y="3333789"/>
+                  </a:lnTo>
+                  <a:lnTo>
+                    <a:pt x="4265610" y="3306753"/>
+                  </a:lnTo>
+                  <a:lnTo>
+                    <a:pt x="4187976" y="3277423"/>
+                  </a:lnTo>
+                  <a:lnTo>
+                    <a:pt x="4110342" y="3245607"/>
+                  </a:lnTo>
+                  <a:lnTo>
+                    <a:pt x="4032708" y="3211093"/>
+                  </a:lnTo>
+                  <a:lnTo>
+                    <a:pt x="3955074" y="3173653"/>
+                  </a:lnTo>
+                  <a:lnTo>
+                    <a:pt x="3877440" y="3133037"/>
+                  </a:lnTo>
+                  <a:lnTo>
+                    <a:pt x="3799806" y="3088978"/>
+                  </a:lnTo>
+                  <a:lnTo>
+                    <a:pt x="3722172" y="3041183"/>
+                  </a:lnTo>
+                  <a:lnTo>
+                    <a:pt x="3644538" y="2989335"/>
+                  </a:lnTo>
+                  <a:lnTo>
+                    <a:pt x="3566904" y="2933091"/>
+                  </a:lnTo>
+                  <a:lnTo>
+                    <a:pt x="3489270" y="2872078"/>
+                  </a:lnTo>
+                  <a:lnTo>
+                    <a:pt x="3411636" y="2805891"/>
+                  </a:lnTo>
+                  <a:lnTo>
+                    <a:pt x="3334002" y="2779118"/>
+                  </a:lnTo>
+                  <a:lnTo>
+                    <a:pt x="3256368" y="2773358"/>
+                  </a:lnTo>
+                  <a:lnTo>
+                    <a:pt x="3178734" y="2767559"/>
+                  </a:lnTo>
+                  <a:lnTo>
+                    <a:pt x="3101100" y="2761723"/>
+                  </a:lnTo>
+                  <a:lnTo>
+                    <a:pt x="3023466" y="2755848"/>
+                  </a:lnTo>
+                  <a:lnTo>
+                    <a:pt x="2945832" y="2749935"/>
+                  </a:lnTo>
+                  <a:lnTo>
+                    <a:pt x="2868198" y="2743982"/>
+                  </a:lnTo>
+                  <a:lnTo>
+                    <a:pt x="2790564" y="2737990"/>
+                  </a:lnTo>
+                  <a:lnTo>
+                    <a:pt x="2712930" y="2731959"/>
+                  </a:lnTo>
+                  <a:lnTo>
+                    <a:pt x="2635295" y="2725888"/>
+                  </a:lnTo>
+                  <a:lnTo>
+                    <a:pt x="2557661" y="2719776"/>
+                  </a:lnTo>
+                  <a:lnTo>
+                    <a:pt x="2480027" y="2713625"/>
+                  </a:lnTo>
+                  <a:lnTo>
+                    <a:pt x="2402393" y="2707433"/>
+                  </a:lnTo>
+                  <a:lnTo>
+                    <a:pt x="2324759" y="2701200"/>
+                  </a:lnTo>
+                  <a:lnTo>
+                    <a:pt x="2247125" y="2694926"/>
+                  </a:lnTo>
+                  <a:lnTo>
+                    <a:pt x="2169491" y="2688611"/>
+                  </a:lnTo>
+                  <a:lnTo>
+                    <a:pt x="2091857" y="2682254"/>
+                  </a:lnTo>
+                  <a:lnTo>
+                    <a:pt x="2014223" y="2675855"/>
+                  </a:lnTo>
+                  <a:lnTo>
+                    <a:pt x="1936589" y="2669413"/>
+                  </a:lnTo>
+                  <a:lnTo>
+                    <a:pt x="1858955" y="2662930"/>
+                  </a:lnTo>
+                  <a:lnTo>
+                    <a:pt x="1781321" y="2656404"/>
+                  </a:lnTo>
+                  <a:lnTo>
+                    <a:pt x="1703687" y="2649834"/>
+                  </a:lnTo>
+                  <a:lnTo>
+                    <a:pt x="1626053" y="2643221"/>
+                  </a:lnTo>
+                  <a:lnTo>
+                    <a:pt x="1548419" y="2636565"/>
+                  </a:lnTo>
+                  <a:lnTo>
+                    <a:pt x="1470785" y="2629865"/>
+                  </a:lnTo>
+                  <a:lnTo>
+                    <a:pt x="1393151" y="2623121"/>
+                  </a:lnTo>
+                  <a:lnTo>
+                    <a:pt x="1315517" y="2616332"/>
+                  </a:lnTo>
+                  <a:lnTo>
+                    <a:pt x="1237883" y="2609498"/>
+                  </a:lnTo>
+                  <a:lnTo>
+                    <a:pt x="1160249" y="2602619"/>
+                  </a:lnTo>
+                  <a:lnTo>
+                    <a:pt x="1082615" y="2595695"/>
+                  </a:lnTo>
+                  <a:lnTo>
+                    <a:pt x="1004981" y="2588726"/>
+                  </a:lnTo>
+                  <a:lnTo>
+                    <a:pt x="927346" y="2581710"/>
+                  </a:lnTo>
+                  <a:lnTo>
+                    <a:pt x="849712" y="2574648"/>
+                  </a:lnTo>
+                  <a:lnTo>
+                    <a:pt x="772078" y="2567540"/>
+                  </a:lnTo>
+                  <a:lnTo>
+                    <a:pt x="694444" y="2560384"/>
+                  </a:lnTo>
+                  <a:lnTo>
+                    <a:pt x="616810" y="2553182"/>
+                  </a:lnTo>
+                  <a:lnTo>
+                    <a:pt x="539176" y="2545932"/>
+                  </a:lnTo>
+                  <a:lnTo>
+                    <a:pt x="461542" y="2538634"/>
+                  </a:lnTo>
+                  <a:lnTo>
+                    <a:pt x="383908" y="2531288"/>
+                  </a:lnTo>
+                  <a:lnTo>
+                    <a:pt x="306274" y="2523893"/>
+                  </a:lnTo>
+                  <a:lnTo>
+                    <a:pt x="228640" y="2516450"/>
+                  </a:lnTo>
+                  <a:lnTo>
+                    <a:pt x="151006" y="2508958"/>
+                  </a:lnTo>
+                  <a:lnTo>
+                    <a:pt x="73372" y="2501416"/>
+                  </a:lnTo>
+                  <a:lnTo>
+                    <a:pt x="0" y="2494241"/>
+                  </a:lnTo>
+                  <a:lnTo>
+                    <a:pt x="0" y="0"/>
                   </a:lnTo>
                   <a:close/>
                 </a:path>
@@ -3534,225 +3534,222 @@
           </p:nvSpPr>
           <p:spPr>
             <a:xfrm>
-              <a:off x="2767772" y="1896563"/>
-              <a:ext cx="5420717" cy="3214054"/>
+              <a:off x="2834928" y="1896563"/>
+              <a:ext cx="5353561" cy="3031994"/>
             </a:xfrm>
             <a:custGeom>
               <a:avLst/>
               <a:pathLst>
-                <a:path w="5420717" h="3214054">
+                <a:path w="5353561" h="3031994">
                   <a:moveTo>
                     <a:pt x="0" y="0"/>
                   </a:moveTo>
                   <a:lnTo>
-                    <a:pt x="63968" y="227618"/>
-                  </a:lnTo>
-                  <a:lnTo>
-                    <a:pt x="141602" y="483244"/>
-                  </a:lnTo>
-                  <a:lnTo>
-                    <a:pt x="219236" y="719791"/>
-                  </a:lnTo>
-                  <a:lnTo>
-                    <a:pt x="296870" y="938684"/>
-                  </a:lnTo>
-                  <a:lnTo>
-                    <a:pt x="374505" y="1141239"/>
-                  </a:lnTo>
-                  <a:lnTo>
-                    <a:pt x="452139" y="1328677"/>
-                  </a:lnTo>
-                  <a:lnTo>
-                    <a:pt x="529773" y="1502126"/>
-                  </a:lnTo>
-                  <a:lnTo>
-                    <a:pt x="607407" y="1662629"/>
-                  </a:lnTo>
-                  <a:lnTo>
-                    <a:pt x="685041" y="1811153"/>
-                  </a:lnTo>
-                  <a:lnTo>
-                    <a:pt x="762675" y="1948592"/>
-                  </a:lnTo>
-                  <a:lnTo>
-                    <a:pt x="840309" y="2075774"/>
-                  </a:lnTo>
-                  <a:lnTo>
-                    <a:pt x="917943" y="2193463"/>
-                  </a:lnTo>
-                  <a:lnTo>
-                    <a:pt x="995577" y="2302369"/>
-                  </a:lnTo>
-                  <a:lnTo>
-                    <a:pt x="1073211" y="2403146"/>
-                  </a:lnTo>
-                  <a:lnTo>
-                    <a:pt x="1150845" y="2496402"/>
-                  </a:lnTo>
-                  <a:lnTo>
-                    <a:pt x="1228479" y="2582698"/>
-                  </a:lnTo>
-                  <a:lnTo>
-                    <a:pt x="1306113" y="2662553"/>
-                  </a:lnTo>
-                  <a:lnTo>
-                    <a:pt x="1383747" y="2736448"/>
-                  </a:lnTo>
-                  <a:lnTo>
-                    <a:pt x="1461381" y="2786765"/>
-                  </a:lnTo>
-                  <a:lnTo>
-                    <a:pt x="1539015" y="2798236"/>
-                  </a:lnTo>
-                  <a:lnTo>
-                    <a:pt x="1616649" y="2809556"/>
-                  </a:lnTo>
-                  <a:lnTo>
-                    <a:pt x="1694283" y="2820725"/>
-                  </a:lnTo>
-                  <a:lnTo>
-                    <a:pt x="1771917" y="2831747"/>
-                  </a:lnTo>
-                  <a:lnTo>
-                    <a:pt x="1849551" y="2842622"/>
-                  </a:lnTo>
-                  <a:lnTo>
-                    <a:pt x="1927185" y="2853354"/>
-                  </a:lnTo>
-                  <a:lnTo>
-                    <a:pt x="2004819" y="2863943"/>
-                  </a:lnTo>
-                  <a:lnTo>
-                    <a:pt x="2082454" y="2874392"/>
-                  </a:lnTo>
-                  <a:lnTo>
-                    <a:pt x="2160088" y="2884703"/>
-                  </a:lnTo>
-                  <a:lnTo>
-                    <a:pt x="2237722" y="2894877"/>
-                  </a:lnTo>
-                  <a:lnTo>
-                    <a:pt x="2315356" y="2904916"/>
-                  </a:lnTo>
-                  <a:lnTo>
-                    <a:pt x="2392990" y="2914822"/>
-                  </a:lnTo>
-                  <a:lnTo>
-                    <a:pt x="2470624" y="2924597"/>
-                  </a:lnTo>
-                  <a:lnTo>
-                    <a:pt x="2548258" y="2934242"/>
-                  </a:lnTo>
-                  <a:lnTo>
-                    <a:pt x="2625892" y="2943760"/>
-                  </a:lnTo>
-                  <a:lnTo>
-                    <a:pt x="2703526" y="2953151"/>
-                  </a:lnTo>
-                  <a:lnTo>
-                    <a:pt x="2781160" y="2962418"/>
-                  </a:lnTo>
-                  <a:lnTo>
-                    <a:pt x="2858794" y="2971563"/>
-                  </a:lnTo>
-                  <a:lnTo>
-                    <a:pt x="2936428" y="2980586"/>
-                  </a:lnTo>
-                  <a:lnTo>
-                    <a:pt x="3014062" y="2989490"/>
-                  </a:lnTo>
-                  <a:lnTo>
-                    <a:pt x="3091696" y="2998275"/>
-                  </a:lnTo>
-                  <a:lnTo>
-                    <a:pt x="3169330" y="3006945"/>
-                  </a:lnTo>
-                  <a:lnTo>
-                    <a:pt x="3246964" y="3015499"/>
-                  </a:lnTo>
-                  <a:lnTo>
-                    <a:pt x="3324598" y="3023940"/>
-                  </a:lnTo>
-                  <a:lnTo>
-                    <a:pt x="3402232" y="3032269"/>
-                  </a:lnTo>
-                  <a:lnTo>
-                    <a:pt x="3479866" y="3040488"/>
-                  </a:lnTo>
-                  <a:lnTo>
-                    <a:pt x="3557500" y="3048598"/>
-                  </a:lnTo>
-                  <a:lnTo>
-                    <a:pt x="3635134" y="3056601"/>
-                  </a:lnTo>
-                  <a:lnTo>
-                    <a:pt x="3712768" y="3064498"/>
-                  </a:lnTo>
-                  <a:lnTo>
-                    <a:pt x="3790403" y="3072290"/>
-                  </a:lnTo>
-                  <a:lnTo>
-                    <a:pt x="3868037" y="3079978"/>
-                  </a:lnTo>
-                  <a:lnTo>
-                    <a:pt x="3945671" y="3087565"/>
-                  </a:lnTo>
-                  <a:lnTo>
-                    <a:pt x="4023305" y="3095051"/>
-                  </a:lnTo>
-                  <a:lnTo>
-                    <a:pt x="4100939" y="3102439"/>
-                  </a:lnTo>
-                  <a:lnTo>
-                    <a:pt x="4178573" y="3109728"/>
-                  </a:lnTo>
-                  <a:lnTo>
-                    <a:pt x="4256207" y="3116921"/>
-                  </a:lnTo>
-                  <a:lnTo>
-                    <a:pt x="4333841" y="3124018"/>
-                  </a:lnTo>
-                  <a:lnTo>
-                    <a:pt x="4411475" y="3131022"/>
-                  </a:lnTo>
-                  <a:lnTo>
-                    <a:pt x="4489109" y="3137932"/>
-                  </a:lnTo>
-                  <a:lnTo>
-                    <a:pt x="4566743" y="3144751"/>
-                  </a:lnTo>
-                  <a:lnTo>
-                    <a:pt x="4644377" y="3151480"/>
-                  </a:lnTo>
-                  <a:lnTo>
-                    <a:pt x="4722011" y="3158120"/>
-                  </a:lnTo>
-                  <a:lnTo>
-                    <a:pt x="4799645" y="3164671"/>
-                  </a:lnTo>
-                  <a:lnTo>
-                    <a:pt x="4877279" y="3171136"/>
-                  </a:lnTo>
-                  <a:lnTo>
-                    <a:pt x="4954913" y="3177515"/>
-                  </a:lnTo>
-                  <a:lnTo>
-                    <a:pt x="5032547" y="3183810"/>
-                  </a:lnTo>
-                  <a:lnTo>
-                    <a:pt x="5110181" y="3190021"/>
-                  </a:lnTo>
-                  <a:lnTo>
-                    <a:pt x="5187815" y="3196150"/>
-                  </a:lnTo>
-                  <a:lnTo>
-                    <a:pt x="5265449" y="3202198"/>
-                  </a:lnTo>
-                  <a:lnTo>
-                    <a:pt x="5343083" y="3208165"/>
-                  </a:lnTo>
-                  <a:lnTo>
-                    <a:pt x="5420717" y="3214054"/>
+                    <a:pt x="74446" y="274669"/>
+                  </a:lnTo>
+                  <a:lnTo>
+                    <a:pt x="152080" y="538711"/>
+                  </a:lnTo>
+                  <a:lnTo>
+                    <a:pt x="229714" y="782113"/>
+                  </a:lnTo>
+                  <a:lnTo>
+                    <a:pt x="307348" y="1006489"/>
+                  </a:lnTo>
+                  <a:lnTo>
+                    <a:pt x="384982" y="1213327"/>
+                  </a:lnTo>
+                  <a:lnTo>
+                    <a:pt x="462616" y="1403998"/>
+                  </a:lnTo>
+                  <a:lnTo>
+                    <a:pt x="540250" y="1579764"/>
+                  </a:lnTo>
+                  <a:lnTo>
+                    <a:pt x="617884" y="1741792"/>
+                  </a:lnTo>
+                  <a:lnTo>
+                    <a:pt x="695518" y="1891155"/>
+                  </a:lnTo>
+                  <a:lnTo>
+                    <a:pt x="773152" y="2028842"/>
+                  </a:lnTo>
+                  <a:lnTo>
+                    <a:pt x="850787" y="2155768"/>
+                  </a:lnTo>
+                  <a:lnTo>
+                    <a:pt x="928421" y="2272772"/>
+                  </a:lnTo>
+                  <a:lnTo>
+                    <a:pt x="1006055" y="2380630"/>
+                  </a:lnTo>
+                  <a:lnTo>
+                    <a:pt x="1083689" y="2480058"/>
+                  </a:lnTo>
+                  <a:lnTo>
+                    <a:pt x="1161323" y="2571713"/>
+                  </a:lnTo>
+                  <a:lnTo>
+                    <a:pt x="1238957" y="2656205"/>
+                  </a:lnTo>
+                  <a:lnTo>
+                    <a:pt x="1316591" y="2734092"/>
+                  </a:lnTo>
+                  <a:lnTo>
+                    <a:pt x="1394225" y="2784840"/>
+                  </a:lnTo>
+                  <a:lnTo>
+                    <a:pt x="1471859" y="2790525"/>
+                  </a:lnTo>
+                  <a:lnTo>
+                    <a:pt x="1549493" y="2796173"/>
+                  </a:lnTo>
+                  <a:lnTo>
+                    <a:pt x="1627127" y="2801784"/>
+                  </a:lnTo>
+                  <a:lnTo>
+                    <a:pt x="1704761" y="2807358"/>
+                  </a:lnTo>
+                  <a:lnTo>
+                    <a:pt x="1782395" y="2812895"/>
+                  </a:lnTo>
+                  <a:lnTo>
+                    <a:pt x="1860029" y="2818396"/>
+                  </a:lnTo>
+                  <a:lnTo>
+                    <a:pt x="1937663" y="2823861"/>
+                  </a:lnTo>
+                  <a:lnTo>
+                    <a:pt x="2015297" y="2829291"/>
+                  </a:lnTo>
+                  <a:lnTo>
+                    <a:pt x="2092931" y="2834685"/>
+                  </a:lnTo>
+                  <a:lnTo>
+                    <a:pt x="2170565" y="2840043"/>
+                  </a:lnTo>
+                  <a:lnTo>
+                    <a:pt x="2248199" y="2845366"/>
+                  </a:lnTo>
+                  <a:lnTo>
+                    <a:pt x="2325833" y="2850655"/>
+                  </a:lnTo>
+                  <a:lnTo>
+                    <a:pt x="2403467" y="2855909"/>
+                  </a:lnTo>
+                  <a:lnTo>
+                    <a:pt x="2481101" y="2861128"/>
+                  </a:lnTo>
+                  <a:lnTo>
+                    <a:pt x="2558736" y="2866313"/>
+                  </a:lnTo>
+                  <a:lnTo>
+                    <a:pt x="2636370" y="2871464"/>
+                  </a:lnTo>
+                  <a:lnTo>
+                    <a:pt x="2714004" y="2876582"/>
+                  </a:lnTo>
+                  <a:lnTo>
+                    <a:pt x="2791638" y="2881666"/>
+                  </a:lnTo>
+                  <a:lnTo>
+                    <a:pt x="2869272" y="2886717"/>
+                  </a:lnTo>
+                  <a:lnTo>
+                    <a:pt x="2946906" y="2891734"/>
+                  </a:lnTo>
+                  <a:lnTo>
+                    <a:pt x="3024540" y="2896719"/>
+                  </a:lnTo>
+                  <a:lnTo>
+                    <a:pt x="3102174" y="2901671"/>
+                  </a:lnTo>
+                  <a:lnTo>
+                    <a:pt x="3179808" y="2906590"/>
+                  </a:lnTo>
+                  <a:lnTo>
+                    <a:pt x="3257442" y="2911478"/>
+                  </a:lnTo>
+                  <a:lnTo>
+                    <a:pt x="3335076" y="2916333"/>
+                  </a:lnTo>
+                  <a:lnTo>
+                    <a:pt x="3412710" y="2921157"/>
+                  </a:lnTo>
+                  <a:lnTo>
+                    <a:pt x="3490344" y="2925949"/>
+                  </a:lnTo>
+                  <a:lnTo>
+                    <a:pt x="3567978" y="2930709"/>
+                  </a:lnTo>
+                  <a:lnTo>
+                    <a:pt x="3645612" y="2935439"/>
+                  </a:lnTo>
+                  <a:lnTo>
+                    <a:pt x="3723246" y="2940137"/>
+                  </a:lnTo>
+                  <a:lnTo>
+                    <a:pt x="3800880" y="2944805"/>
+                  </a:lnTo>
+                  <a:lnTo>
+                    <a:pt x="3878514" y="2949442"/>
+                  </a:lnTo>
+                  <a:lnTo>
+                    <a:pt x="3956148" y="2954048"/>
+                  </a:lnTo>
+                  <a:lnTo>
+                    <a:pt x="4033782" y="2958625"/>
+                  </a:lnTo>
+                  <a:lnTo>
+                    <a:pt x="4111416" y="2963171"/>
+                  </a:lnTo>
+                  <a:lnTo>
+                    <a:pt x="4189050" y="2967688"/>
+                  </a:lnTo>
+                  <a:lnTo>
+                    <a:pt x="4266685" y="2972175"/>
+                  </a:lnTo>
+                  <a:lnTo>
+                    <a:pt x="4344319" y="2976633"/>
+                  </a:lnTo>
+                  <a:lnTo>
+                    <a:pt x="4421953" y="2981061"/>
+                  </a:lnTo>
+                  <a:lnTo>
+                    <a:pt x="4499587" y="2985461"/>
+                  </a:lnTo>
+                  <a:lnTo>
+                    <a:pt x="4577221" y="2989832"/>
+                  </a:lnTo>
+                  <a:lnTo>
+                    <a:pt x="4654855" y="2994174"/>
+                  </a:lnTo>
+                  <a:lnTo>
+                    <a:pt x="4732489" y="2998487"/>
+                  </a:lnTo>
+                  <a:lnTo>
+                    <a:pt x="4810123" y="3002773"/>
+                  </a:lnTo>
+                  <a:lnTo>
+                    <a:pt x="4887757" y="3007030"/>
+                  </a:lnTo>
+                  <a:lnTo>
+                    <a:pt x="4965391" y="3011259"/>
+                  </a:lnTo>
+                  <a:lnTo>
+                    <a:pt x="5043025" y="3015461"/>
+                  </a:lnTo>
+                  <a:lnTo>
+                    <a:pt x="5120659" y="3019635"/>
+                  </a:lnTo>
+                  <a:lnTo>
+                    <a:pt x="5198293" y="3023782"/>
+                  </a:lnTo>
+                  <a:lnTo>
+                    <a:pt x="5275927" y="3027902"/>
+                  </a:lnTo>
+                  <a:lnTo>
+                    <a:pt x="5353561" y="3031994"/>
                   </a:lnTo>
                 </a:path>
               </a:pathLst>
@@ -3772,297 +3769,297 @@
           </p:nvSpPr>
           <p:spPr>
             <a:xfrm>
-              <a:off x="817517" y="3993259"/>
-              <a:ext cx="7370972" cy="1539719"/>
+              <a:off x="817517" y="4390805"/>
+              <a:ext cx="7370972" cy="1145064"/>
             </a:xfrm>
             <a:custGeom>
               <a:avLst/>
               <a:pathLst>
-                <a:path w="7370972" h="1539719">
+                <a:path w="7370972" h="1145064">
                   <a:moveTo>
-                    <a:pt x="7370972" y="1539719"/>
+                    <a:pt x="7370972" y="1145064"/>
                   </a:moveTo>
                   <a:lnTo>
-                    <a:pt x="7293338" y="1538410"/>
-                  </a:lnTo>
-                  <a:lnTo>
-                    <a:pt x="7215704" y="1536996"/>
-                  </a:lnTo>
-                  <a:lnTo>
-                    <a:pt x="7138070" y="1535467"/>
-                  </a:lnTo>
-                  <a:lnTo>
-                    <a:pt x="7060436" y="1533815"/>
-                  </a:lnTo>
-                  <a:lnTo>
-                    <a:pt x="6982802" y="1532030"/>
-                  </a:lnTo>
-                  <a:lnTo>
-                    <a:pt x="6905168" y="1530101"/>
-                  </a:lnTo>
-                  <a:lnTo>
-                    <a:pt x="6827534" y="1528017"/>
-                  </a:lnTo>
-                  <a:lnTo>
-                    <a:pt x="6749900" y="1525764"/>
-                  </a:lnTo>
-                  <a:lnTo>
-                    <a:pt x="6672266" y="1523329"/>
-                  </a:lnTo>
-                  <a:lnTo>
-                    <a:pt x="6594632" y="1520699"/>
-                  </a:lnTo>
-                  <a:lnTo>
-                    <a:pt x="6516998" y="1517856"/>
-                  </a:lnTo>
-                  <a:lnTo>
-                    <a:pt x="6439364" y="1514783"/>
-                  </a:lnTo>
-                  <a:lnTo>
-                    <a:pt x="6361730" y="1511463"/>
-                  </a:lnTo>
-                  <a:lnTo>
-                    <a:pt x="6284096" y="1507876"/>
-                  </a:lnTo>
-                  <a:lnTo>
-                    <a:pt x="6206462" y="1503998"/>
-                  </a:lnTo>
-                  <a:lnTo>
-                    <a:pt x="6128827" y="1499808"/>
-                  </a:lnTo>
-                  <a:lnTo>
-                    <a:pt x="6051193" y="1495281"/>
-                  </a:lnTo>
-                  <a:lnTo>
-                    <a:pt x="5973559" y="1490388"/>
-                  </a:lnTo>
-                  <a:lnTo>
-                    <a:pt x="5895925" y="1485100"/>
-                  </a:lnTo>
-                  <a:lnTo>
-                    <a:pt x="5818291" y="1479386"/>
-                  </a:lnTo>
-                  <a:lnTo>
-                    <a:pt x="5740657" y="1473211"/>
-                  </a:lnTo>
-                  <a:lnTo>
-                    <a:pt x="5663023" y="1466538"/>
-                  </a:lnTo>
-                  <a:lnTo>
-                    <a:pt x="5585389" y="1459326"/>
-                  </a:lnTo>
-                  <a:lnTo>
-                    <a:pt x="5507755" y="1451534"/>
-                  </a:lnTo>
-                  <a:lnTo>
-                    <a:pt x="5430121" y="1443112"/>
-                  </a:lnTo>
-                  <a:lnTo>
-                    <a:pt x="5352487" y="1434011"/>
-                  </a:lnTo>
-                  <a:lnTo>
-                    <a:pt x="5274853" y="1424177"/>
-                  </a:lnTo>
-                  <a:lnTo>
-                    <a:pt x="5197219" y="1413549"/>
-                  </a:lnTo>
-                  <a:lnTo>
-                    <a:pt x="5119585" y="1402064"/>
-                  </a:lnTo>
-                  <a:lnTo>
-                    <a:pt x="5041951" y="1389653"/>
-                  </a:lnTo>
-                  <a:lnTo>
-                    <a:pt x="4964317" y="1376240"/>
-                  </a:lnTo>
-                  <a:lnTo>
-                    <a:pt x="4886683" y="1361746"/>
-                  </a:lnTo>
-                  <a:lnTo>
-                    <a:pt x="4809049" y="1346083"/>
-                  </a:lnTo>
-                  <a:lnTo>
-                    <a:pt x="4731415" y="1329156"/>
-                  </a:lnTo>
-                  <a:lnTo>
-                    <a:pt x="4653781" y="1310865"/>
-                  </a:lnTo>
-                  <a:lnTo>
-                    <a:pt x="4576147" y="1291098"/>
-                  </a:lnTo>
-                  <a:lnTo>
-                    <a:pt x="4498513" y="1269736"/>
-                  </a:lnTo>
-                  <a:lnTo>
-                    <a:pt x="4420879" y="1246652"/>
-                  </a:lnTo>
-                  <a:lnTo>
-                    <a:pt x="4343244" y="1221706"/>
-                  </a:lnTo>
-                  <a:lnTo>
-                    <a:pt x="4265610" y="1194748"/>
-                  </a:lnTo>
-                  <a:lnTo>
-                    <a:pt x="4187976" y="1165616"/>
-                  </a:lnTo>
-                  <a:lnTo>
-                    <a:pt x="4110342" y="1134134"/>
-                  </a:lnTo>
-                  <a:lnTo>
-                    <a:pt x="4032708" y="1100113"/>
-                  </a:lnTo>
-                  <a:lnTo>
-                    <a:pt x="3955074" y="1063348"/>
-                  </a:lnTo>
-                  <a:lnTo>
-                    <a:pt x="3877440" y="1023618"/>
-                  </a:lnTo>
-                  <a:lnTo>
-                    <a:pt x="3799806" y="980683"/>
-                  </a:lnTo>
-                  <a:lnTo>
-                    <a:pt x="3722172" y="934286"/>
-                  </a:lnTo>
-                  <a:lnTo>
-                    <a:pt x="3644538" y="884146"/>
-                  </a:lnTo>
-                  <a:lnTo>
-                    <a:pt x="3566904" y="829962"/>
-                  </a:lnTo>
-                  <a:lnTo>
-                    <a:pt x="3489270" y="771408"/>
-                  </a:lnTo>
-                  <a:lnTo>
-                    <a:pt x="3411636" y="708132"/>
-                  </a:lnTo>
-                  <a:lnTo>
-                    <a:pt x="3334002" y="678443"/>
-                  </a:lnTo>
-                  <a:lnTo>
-                    <a:pt x="3256368" y="666662"/>
-                  </a:lnTo>
-                  <a:lnTo>
-                    <a:pt x="3178734" y="654722"/>
-                  </a:lnTo>
-                  <a:lnTo>
-                    <a:pt x="3101100" y="642622"/>
-                  </a:lnTo>
-                  <a:lnTo>
-                    <a:pt x="3023466" y="630359"/>
-                  </a:lnTo>
-                  <a:lnTo>
-                    <a:pt x="2945832" y="617932"/>
-                  </a:lnTo>
-                  <a:lnTo>
-                    <a:pt x="2868198" y="605338"/>
-                  </a:lnTo>
-                  <a:lnTo>
-                    <a:pt x="2790564" y="592575"/>
-                  </a:lnTo>
-                  <a:lnTo>
-                    <a:pt x="2712930" y="579641"/>
-                  </a:lnTo>
-                  <a:lnTo>
-                    <a:pt x="2635295" y="566533"/>
-                  </a:lnTo>
-                  <a:lnTo>
-                    <a:pt x="2557661" y="553249"/>
-                  </a:lnTo>
-                  <a:lnTo>
-                    <a:pt x="2480027" y="539786"/>
-                  </a:lnTo>
-                  <a:lnTo>
-                    <a:pt x="2402393" y="526143"/>
-                  </a:lnTo>
-                  <a:lnTo>
-                    <a:pt x="2324759" y="512317"/>
-                  </a:lnTo>
-                  <a:lnTo>
-                    <a:pt x="2247125" y="498305"/>
-                  </a:lnTo>
-                  <a:lnTo>
-                    <a:pt x="2169491" y="484104"/>
-                  </a:lnTo>
-                  <a:lnTo>
-                    <a:pt x="2091857" y="469714"/>
-                  </a:lnTo>
-                  <a:lnTo>
-                    <a:pt x="2014223" y="455130"/>
-                  </a:lnTo>
-                  <a:lnTo>
-                    <a:pt x="1936589" y="440350"/>
-                  </a:lnTo>
-                  <a:lnTo>
-                    <a:pt x="1858955" y="425371"/>
-                  </a:lnTo>
-                  <a:lnTo>
-                    <a:pt x="1781321" y="410192"/>
-                  </a:lnTo>
-                  <a:lnTo>
-                    <a:pt x="1703687" y="394809"/>
-                  </a:lnTo>
-                  <a:lnTo>
-                    <a:pt x="1626053" y="379219"/>
-                  </a:lnTo>
-                  <a:lnTo>
-                    <a:pt x="1548419" y="363420"/>
-                  </a:lnTo>
-                  <a:lnTo>
-                    <a:pt x="1470785" y="347409"/>
-                  </a:lnTo>
-                  <a:lnTo>
-                    <a:pt x="1393151" y="331183"/>
-                  </a:lnTo>
-                  <a:lnTo>
-                    <a:pt x="1315517" y="314739"/>
-                  </a:lnTo>
-                  <a:lnTo>
-                    <a:pt x="1237883" y="298074"/>
-                  </a:lnTo>
-                  <a:lnTo>
-                    <a:pt x="1160249" y="281186"/>
-                  </a:lnTo>
-                  <a:lnTo>
-                    <a:pt x="1082615" y="264071"/>
-                  </a:lnTo>
-                  <a:lnTo>
-                    <a:pt x="1004981" y="246726"/>
-                  </a:lnTo>
-                  <a:lnTo>
-                    <a:pt x="927346" y="229148"/>
-                  </a:lnTo>
-                  <a:lnTo>
-                    <a:pt x="849712" y="211334"/>
-                  </a:lnTo>
-                  <a:lnTo>
-                    <a:pt x="772078" y="193281"/>
-                  </a:lnTo>
-                  <a:lnTo>
-                    <a:pt x="694444" y="174985"/>
-                  </a:lnTo>
-                  <a:lnTo>
-                    <a:pt x="616810" y="156444"/>
-                  </a:lnTo>
-                  <a:lnTo>
-                    <a:pt x="539176" y="137654"/>
-                  </a:lnTo>
-                  <a:lnTo>
-                    <a:pt x="461542" y="118612"/>
-                  </a:lnTo>
-                  <a:lnTo>
-                    <a:pt x="383908" y="99314"/>
-                  </a:lnTo>
-                  <a:lnTo>
-                    <a:pt x="306274" y="79757"/>
-                  </a:lnTo>
-                  <a:lnTo>
-                    <a:pt x="228640" y="59937"/>
-                  </a:lnTo>
-                  <a:lnTo>
-                    <a:pt x="151006" y="39851"/>
-                  </a:lnTo>
-                  <a:lnTo>
-                    <a:pt x="73372" y="19496"/>
+                    <a:pt x="7293338" y="1143933"/>
+                  </a:lnTo>
+                  <a:lnTo>
+                    <a:pt x="7215704" y="1142707"/>
+                  </a:lnTo>
+                  <a:lnTo>
+                    <a:pt x="7138070" y="1141376"/>
+                  </a:lnTo>
+                  <a:lnTo>
+                    <a:pt x="7060436" y="1139932"/>
+                  </a:lnTo>
+                  <a:lnTo>
+                    <a:pt x="6982802" y="1138366"/>
+                  </a:lnTo>
+                  <a:lnTo>
+                    <a:pt x="6905168" y="1136667"/>
+                  </a:lnTo>
+                  <a:lnTo>
+                    <a:pt x="6827534" y="1134824"/>
+                  </a:lnTo>
+                  <a:lnTo>
+                    <a:pt x="6749900" y="1132825"/>
+                  </a:lnTo>
+                  <a:lnTo>
+                    <a:pt x="6672266" y="1130657"/>
+                  </a:lnTo>
+                  <a:lnTo>
+                    <a:pt x="6594632" y="1128304"/>
+                  </a:lnTo>
+                  <a:lnTo>
+                    <a:pt x="6516998" y="1125752"/>
+                  </a:lnTo>
+                  <a:lnTo>
+                    <a:pt x="6439364" y="1122984"/>
+                  </a:lnTo>
+                  <a:lnTo>
+                    <a:pt x="6361730" y="1119980"/>
+                  </a:lnTo>
+                  <a:lnTo>
+                    <a:pt x="6284096" y="1116723"/>
+                  </a:lnTo>
+                  <a:lnTo>
+                    <a:pt x="6206462" y="1113188"/>
+                  </a:lnTo>
+                  <a:lnTo>
+                    <a:pt x="6128827" y="1109355"/>
+                  </a:lnTo>
+                  <a:lnTo>
+                    <a:pt x="6051193" y="1105196"/>
+                  </a:lnTo>
+                  <a:lnTo>
+                    <a:pt x="5973559" y="1100684"/>
+                  </a:lnTo>
+                  <a:lnTo>
+                    <a:pt x="5895925" y="1095790"/>
+                  </a:lnTo>
+                  <a:lnTo>
+                    <a:pt x="5818291" y="1090481"/>
+                  </a:lnTo>
+                  <a:lnTo>
+                    <a:pt x="5740657" y="1084722"/>
+                  </a:lnTo>
+                  <a:lnTo>
+                    <a:pt x="5663023" y="1078475"/>
+                  </a:lnTo>
+                  <a:lnTo>
+                    <a:pt x="5585389" y="1071697"/>
+                  </a:lnTo>
+                  <a:lnTo>
+                    <a:pt x="5507755" y="1064345"/>
+                  </a:lnTo>
+                  <a:lnTo>
+                    <a:pt x="5430121" y="1056370"/>
+                  </a:lnTo>
+                  <a:lnTo>
+                    <a:pt x="5352487" y="1047719"/>
+                  </a:lnTo>
+                  <a:lnTo>
+                    <a:pt x="5274853" y="1038333"/>
+                  </a:lnTo>
+                  <a:lnTo>
+                    <a:pt x="5197219" y="1028152"/>
+                  </a:lnTo>
+                  <a:lnTo>
+                    <a:pt x="5119585" y="1017108"/>
+                  </a:lnTo>
+                  <a:lnTo>
+                    <a:pt x="5041951" y="1005127"/>
+                  </a:lnTo>
+                  <a:lnTo>
+                    <a:pt x="4964317" y="992131"/>
+                  </a:lnTo>
+                  <a:lnTo>
+                    <a:pt x="4886683" y="978032"/>
+                  </a:lnTo>
+                  <a:lnTo>
+                    <a:pt x="4809049" y="962738"/>
+                  </a:lnTo>
+                  <a:lnTo>
+                    <a:pt x="4731415" y="946147"/>
+                  </a:lnTo>
+                  <a:lnTo>
+                    <a:pt x="4653781" y="928149"/>
+                  </a:lnTo>
+                  <a:lnTo>
+                    <a:pt x="4576147" y="908625"/>
+                  </a:lnTo>
+                  <a:lnTo>
+                    <a:pt x="4498513" y="887446"/>
+                  </a:lnTo>
+                  <a:lnTo>
+                    <a:pt x="4420879" y="864471"/>
+                  </a:lnTo>
+                  <a:lnTo>
+                    <a:pt x="4343244" y="839547"/>
+                  </a:lnTo>
+                  <a:lnTo>
+                    <a:pt x="4265610" y="812511"/>
+                  </a:lnTo>
+                  <a:lnTo>
+                    <a:pt x="4187976" y="783181"/>
+                  </a:lnTo>
+                  <a:lnTo>
+                    <a:pt x="4110342" y="751365"/>
+                  </a:lnTo>
+                  <a:lnTo>
+                    <a:pt x="4032708" y="716851"/>
+                  </a:lnTo>
+                  <a:lnTo>
+                    <a:pt x="3955074" y="679411"/>
+                  </a:lnTo>
+                  <a:lnTo>
+                    <a:pt x="3877440" y="638795"/>
+                  </a:lnTo>
+                  <a:lnTo>
+                    <a:pt x="3799806" y="594736"/>
+                  </a:lnTo>
+                  <a:lnTo>
+                    <a:pt x="3722172" y="546941"/>
+                  </a:lnTo>
+                  <a:lnTo>
+                    <a:pt x="3644538" y="495093"/>
+                  </a:lnTo>
+                  <a:lnTo>
+                    <a:pt x="3566904" y="438849"/>
+                  </a:lnTo>
+                  <a:lnTo>
+                    <a:pt x="3489270" y="377836"/>
+                  </a:lnTo>
+                  <a:lnTo>
+                    <a:pt x="3411636" y="311649"/>
+                  </a:lnTo>
+                  <a:lnTo>
+                    <a:pt x="3334002" y="284876"/>
+                  </a:lnTo>
+                  <a:lnTo>
+                    <a:pt x="3256368" y="279116"/>
+                  </a:lnTo>
+                  <a:lnTo>
+                    <a:pt x="3178734" y="273318"/>
+                  </a:lnTo>
+                  <a:lnTo>
+                    <a:pt x="3101100" y="267481"/>
+                  </a:lnTo>
+                  <a:lnTo>
+                    <a:pt x="3023466" y="261606"/>
+                  </a:lnTo>
+                  <a:lnTo>
+                    <a:pt x="2945832" y="255693"/>
+                  </a:lnTo>
+                  <a:lnTo>
+                    <a:pt x="2868198" y="249740"/>
+                  </a:lnTo>
+                  <a:lnTo>
+                    <a:pt x="2790564" y="243748"/>
+                  </a:lnTo>
+                  <a:lnTo>
+                    <a:pt x="2712930" y="237717"/>
+                  </a:lnTo>
+                  <a:lnTo>
+                    <a:pt x="2635295" y="231646"/>
+                  </a:lnTo>
+                  <a:lnTo>
+                    <a:pt x="2557661" y="225534"/>
+                  </a:lnTo>
+                  <a:lnTo>
+                    <a:pt x="2480027" y="219383"/>
+                  </a:lnTo>
+                  <a:lnTo>
+                    <a:pt x="2402393" y="213191"/>
+                  </a:lnTo>
+                  <a:lnTo>
+                    <a:pt x="2324759" y="206958"/>
+                  </a:lnTo>
+                  <a:lnTo>
+                    <a:pt x="2247125" y="200684"/>
+                  </a:lnTo>
+                  <a:lnTo>
+                    <a:pt x="2169491" y="194369"/>
+                  </a:lnTo>
+                  <a:lnTo>
+                    <a:pt x="2091857" y="188012"/>
+                  </a:lnTo>
+                  <a:lnTo>
+                    <a:pt x="2014223" y="181613"/>
+                  </a:lnTo>
+                  <a:lnTo>
+                    <a:pt x="1936589" y="175171"/>
+                  </a:lnTo>
+                  <a:lnTo>
+                    <a:pt x="1858955" y="168688"/>
+                  </a:lnTo>
+                  <a:lnTo>
+                    <a:pt x="1781321" y="162162"/>
+                  </a:lnTo>
+                  <a:lnTo>
+                    <a:pt x="1703687" y="155592"/>
+                  </a:lnTo>
+                  <a:lnTo>
+                    <a:pt x="1626053" y="148979"/>
+                  </a:lnTo>
+                  <a:lnTo>
+                    <a:pt x="1548419" y="142323"/>
+                  </a:lnTo>
+                  <a:lnTo>
+                    <a:pt x="1470785" y="135623"/>
+                  </a:lnTo>
+                  <a:lnTo>
+                    <a:pt x="1393151" y="128879"/>
+                  </a:lnTo>
+                  <a:lnTo>
+                    <a:pt x="1315517" y="122090"/>
+                  </a:lnTo>
+                  <a:lnTo>
+                    <a:pt x="1237883" y="115256"/>
+                  </a:lnTo>
+                  <a:lnTo>
+                    <a:pt x="1160249" y="108377"/>
+                  </a:lnTo>
+                  <a:lnTo>
+                    <a:pt x="1082615" y="101453"/>
+                  </a:lnTo>
+                  <a:lnTo>
+                    <a:pt x="1004981" y="94484"/>
+                  </a:lnTo>
+                  <a:lnTo>
+                    <a:pt x="927346" y="87468"/>
+                  </a:lnTo>
+                  <a:lnTo>
+                    <a:pt x="849712" y="80406"/>
+                  </a:lnTo>
+                  <a:lnTo>
+                    <a:pt x="772078" y="73298"/>
+                  </a:lnTo>
+                  <a:lnTo>
+                    <a:pt x="694444" y="66142"/>
+                  </a:lnTo>
+                  <a:lnTo>
+                    <a:pt x="616810" y="58940"/>
+                  </a:lnTo>
+                  <a:lnTo>
+                    <a:pt x="539176" y="51690"/>
+                  </a:lnTo>
+                  <a:lnTo>
+                    <a:pt x="461542" y="44392"/>
+                  </a:lnTo>
+                  <a:lnTo>
+                    <a:pt x="383908" y="37046"/>
+                  </a:lnTo>
+                  <a:lnTo>
+                    <a:pt x="306274" y="29651"/>
+                  </a:lnTo>
+                  <a:lnTo>
+                    <a:pt x="228640" y="22208"/>
+                  </a:lnTo>
+                  <a:lnTo>
+                    <a:pt x="151006" y="14716"/>
+                  </a:lnTo>
+                  <a:lnTo>
+                    <a:pt x="73372" y="7174"/>
                   </a:lnTo>
                   <a:lnTo>
                     <a:pt x="0" y="0"/>
@@ -4085,264 +4082,267 @@
           </p:nvSpPr>
           <p:spPr>
             <a:xfrm>
-              <a:off x="1752631" y="1896563"/>
-              <a:ext cx="6435859" cy="3568278"/>
+              <a:off x="1670574" y="1896563"/>
+              <a:ext cx="6517915" cy="3561662"/>
             </a:xfrm>
             <a:custGeom>
               <a:avLst/>
               <a:pathLst>
-                <a:path w="6435859" h="3568278">
+                <a:path w="6517915" h="3561662">
                   <a:moveTo>
                     <a:pt x="0" y="0"/>
                   </a:moveTo>
                   <a:lnTo>
-                    <a:pt x="69867" y="146718"/>
-                  </a:lnTo>
-                  <a:lnTo>
-                    <a:pt x="147501" y="302501"/>
-                  </a:lnTo>
-                  <a:lnTo>
-                    <a:pt x="225135" y="451363"/>
-                  </a:lnTo>
-                  <a:lnTo>
-                    <a:pt x="302769" y="593609"/>
-                  </a:lnTo>
-                  <a:lnTo>
-                    <a:pt x="380403" y="729536"/>
-                  </a:lnTo>
-                  <a:lnTo>
-                    <a:pt x="458037" y="859422"/>
-                  </a:lnTo>
-                  <a:lnTo>
-                    <a:pt x="535671" y="983537"/>
-                  </a:lnTo>
-                  <a:lnTo>
-                    <a:pt x="613305" y="1102137"/>
-                  </a:lnTo>
-                  <a:lnTo>
-                    <a:pt x="690939" y="1215467"/>
-                  </a:lnTo>
-                  <a:lnTo>
-                    <a:pt x="768573" y="1323761"/>
-                  </a:lnTo>
-                  <a:lnTo>
-                    <a:pt x="846207" y="1427244"/>
-                  </a:lnTo>
-                  <a:lnTo>
-                    <a:pt x="923842" y="1526128"/>
-                  </a:lnTo>
-                  <a:lnTo>
-                    <a:pt x="1001476" y="1620618"/>
-                  </a:lnTo>
-                  <a:lnTo>
-                    <a:pt x="1079110" y="1710910"/>
-                  </a:lnTo>
-                  <a:lnTo>
-                    <a:pt x="1156744" y="1797190"/>
-                  </a:lnTo>
-                  <a:lnTo>
-                    <a:pt x="1234378" y="1879636"/>
-                  </a:lnTo>
-                  <a:lnTo>
-                    <a:pt x="1312012" y="1958418"/>
-                  </a:lnTo>
-                  <a:lnTo>
-                    <a:pt x="1389646" y="2033700"/>
-                  </a:lnTo>
-                  <a:lnTo>
-                    <a:pt x="1467280" y="2105636"/>
-                  </a:lnTo>
-                  <a:lnTo>
-                    <a:pt x="1544914" y="2174377"/>
-                  </a:lnTo>
-                  <a:lnTo>
-                    <a:pt x="1622548" y="2240063"/>
-                  </a:lnTo>
-                  <a:lnTo>
-                    <a:pt x="1700182" y="2302830"/>
-                  </a:lnTo>
-                  <a:lnTo>
-                    <a:pt x="1777816" y="2362808"/>
-                  </a:lnTo>
-                  <a:lnTo>
-                    <a:pt x="1855450" y="2420121"/>
-                  </a:lnTo>
-                  <a:lnTo>
-                    <a:pt x="1933084" y="2474887"/>
-                  </a:lnTo>
-                  <a:lnTo>
-                    <a:pt x="2010718" y="2527220"/>
-                  </a:lnTo>
-                  <a:lnTo>
-                    <a:pt x="2088352" y="2577227"/>
-                  </a:lnTo>
-                  <a:lnTo>
-                    <a:pt x="2165986" y="2625013"/>
-                  </a:lnTo>
-                  <a:lnTo>
-                    <a:pt x="2243620" y="2670675"/>
-                  </a:lnTo>
-                  <a:lnTo>
-                    <a:pt x="2321254" y="2714308"/>
-                  </a:lnTo>
-                  <a:lnTo>
-                    <a:pt x="2398888" y="2756002"/>
-                  </a:lnTo>
-                  <a:lnTo>
-                    <a:pt x="2476522" y="2795844"/>
-                  </a:lnTo>
-                  <a:lnTo>
-                    <a:pt x="2554156" y="2833915"/>
-                  </a:lnTo>
-                  <a:lnTo>
-                    <a:pt x="2631791" y="2870295"/>
-                  </a:lnTo>
-                  <a:lnTo>
-                    <a:pt x="2709425" y="2905058"/>
-                  </a:lnTo>
-                  <a:lnTo>
-                    <a:pt x="2787059" y="2938277"/>
-                  </a:lnTo>
-                  <a:lnTo>
-                    <a:pt x="2864693" y="2970019"/>
-                  </a:lnTo>
-                  <a:lnTo>
-                    <a:pt x="2942327" y="3000351"/>
-                  </a:lnTo>
-                  <a:lnTo>
-                    <a:pt x="3019961" y="3029335"/>
-                  </a:lnTo>
-                  <a:lnTo>
-                    <a:pt x="3097595" y="3057031"/>
-                  </a:lnTo>
-                  <a:lnTo>
-                    <a:pt x="3175229" y="3083497"/>
-                  </a:lnTo>
-                  <a:lnTo>
-                    <a:pt x="3252863" y="3108787"/>
-                  </a:lnTo>
-                  <a:lnTo>
-                    <a:pt x="3330497" y="3132953"/>
-                  </a:lnTo>
-                  <a:lnTo>
-                    <a:pt x="3408131" y="3156045"/>
-                  </a:lnTo>
-                  <a:lnTo>
-                    <a:pt x="3485765" y="3178111"/>
-                  </a:lnTo>
-                  <a:lnTo>
-                    <a:pt x="3563399" y="3199196"/>
-                  </a:lnTo>
-                  <a:lnTo>
-                    <a:pt x="3641033" y="3219345"/>
-                  </a:lnTo>
-                  <a:lnTo>
-                    <a:pt x="3718667" y="3238598"/>
-                  </a:lnTo>
-                  <a:lnTo>
-                    <a:pt x="3796301" y="3256996"/>
-                  </a:lnTo>
-                  <a:lnTo>
-                    <a:pt x="3873935" y="3274576"/>
-                  </a:lnTo>
-                  <a:lnTo>
-                    <a:pt x="3951569" y="3291376"/>
-                  </a:lnTo>
-                  <a:lnTo>
-                    <a:pt x="4029203" y="3307428"/>
-                  </a:lnTo>
-                  <a:lnTo>
-                    <a:pt x="4106837" y="3322768"/>
-                  </a:lnTo>
-                  <a:lnTo>
-                    <a:pt x="4184471" y="3337425"/>
-                  </a:lnTo>
-                  <a:lnTo>
-                    <a:pt x="4262105" y="3351432"/>
-                  </a:lnTo>
-                  <a:lnTo>
-                    <a:pt x="4339740" y="3364816"/>
-                  </a:lnTo>
-                  <a:lnTo>
-                    <a:pt x="4417374" y="3377606"/>
-                  </a:lnTo>
-                  <a:lnTo>
-                    <a:pt x="4495008" y="3389827"/>
-                  </a:lnTo>
-                  <a:lnTo>
-                    <a:pt x="4572642" y="3401505"/>
-                  </a:lnTo>
-                  <a:lnTo>
-                    <a:pt x="4650276" y="3412664"/>
-                  </a:lnTo>
-                  <a:lnTo>
-                    <a:pt x="4727910" y="3423327"/>
-                  </a:lnTo>
-                  <a:lnTo>
-                    <a:pt x="4805544" y="3433517"/>
-                  </a:lnTo>
-                  <a:lnTo>
-                    <a:pt x="4883178" y="3443253"/>
-                  </a:lnTo>
-                  <a:lnTo>
-                    <a:pt x="4960812" y="3452558"/>
-                  </a:lnTo>
-                  <a:lnTo>
-                    <a:pt x="5038446" y="3461448"/>
-                  </a:lnTo>
-                  <a:lnTo>
-                    <a:pt x="5116080" y="3469944"/>
-                  </a:lnTo>
-                  <a:lnTo>
-                    <a:pt x="5193714" y="3478062"/>
-                  </a:lnTo>
-                  <a:lnTo>
-                    <a:pt x="5271348" y="3485819"/>
-                  </a:lnTo>
-                  <a:lnTo>
-                    <a:pt x="5348982" y="3493232"/>
-                  </a:lnTo>
-                  <a:lnTo>
-                    <a:pt x="5426616" y="3500315"/>
-                  </a:lnTo>
-                  <a:lnTo>
-                    <a:pt x="5504250" y="3507084"/>
-                  </a:lnTo>
-                  <a:lnTo>
-                    <a:pt x="5581884" y="3513552"/>
-                  </a:lnTo>
-                  <a:lnTo>
-                    <a:pt x="5659518" y="3519732"/>
-                  </a:lnTo>
-                  <a:lnTo>
-                    <a:pt x="5737152" y="3525638"/>
-                  </a:lnTo>
-                  <a:lnTo>
-                    <a:pt x="5814786" y="3531282"/>
-                  </a:lnTo>
-                  <a:lnTo>
-                    <a:pt x="5892420" y="3536674"/>
-                  </a:lnTo>
-                  <a:lnTo>
-                    <a:pt x="5970054" y="3541827"/>
-                  </a:lnTo>
-                  <a:lnTo>
-                    <a:pt x="6047689" y="3546751"/>
-                  </a:lnTo>
-                  <a:lnTo>
-                    <a:pt x="6125323" y="3551456"/>
-                  </a:lnTo>
-                  <a:lnTo>
-                    <a:pt x="6202957" y="3555953"/>
-                  </a:lnTo>
-                  <a:lnTo>
-                    <a:pt x="6280591" y="3560249"/>
-                  </a:lnTo>
-                  <a:lnTo>
-                    <a:pt x="6358225" y="3564354"/>
-                  </a:lnTo>
-                  <a:lnTo>
-                    <a:pt x="6435859" y="3568278"/>
+                    <a:pt x="74290" y="150675"/>
+                  </a:lnTo>
+                  <a:lnTo>
+                    <a:pt x="151924" y="301357"/>
+                  </a:lnTo>
+                  <a:lnTo>
+                    <a:pt x="229558" y="445556"/>
+                  </a:lnTo>
+                  <a:lnTo>
+                    <a:pt x="307192" y="583550"/>
+                  </a:lnTo>
+                  <a:lnTo>
+                    <a:pt x="384826" y="715607"/>
+                  </a:lnTo>
+                  <a:lnTo>
+                    <a:pt x="462460" y="841982"/>
+                  </a:lnTo>
+                  <a:lnTo>
+                    <a:pt x="540094" y="962918"/>
+                  </a:lnTo>
+                  <a:lnTo>
+                    <a:pt x="617728" y="1078652"/>
+                  </a:lnTo>
+                  <a:lnTo>
+                    <a:pt x="695362" y="1189405"/>
+                  </a:lnTo>
+                  <a:lnTo>
+                    <a:pt x="772996" y="1295393"/>
+                  </a:lnTo>
+                  <a:lnTo>
+                    <a:pt x="850630" y="1396821"/>
+                  </a:lnTo>
+                  <a:lnTo>
+                    <a:pt x="928264" y="1493884"/>
+                  </a:lnTo>
+                  <a:lnTo>
+                    <a:pt x="1005898" y="1586771"/>
+                  </a:lnTo>
+                  <a:lnTo>
+                    <a:pt x="1083532" y="1675661"/>
+                  </a:lnTo>
+                  <a:lnTo>
+                    <a:pt x="1161166" y="1760727"/>
+                  </a:lnTo>
+                  <a:lnTo>
+                    <a:pt x="1238800" y="1842132"/>
+                  </a:lnTo>
+                  <a:lnTo>
+                    <a:pt x="1316434" y="1920035"/>
+                  </a:lnTo>
+                  <a:lnTo>
+                    <a:pt x="1394068" y="1994585"/>
+                  </a:lnTo>
+                  <a:lnTo>
+                    <a:pt x="1471702" y="2065928"/>
+                  </a:lnTo>
+                  <a:lnTo>
+                    <a:pt x="1549336" y="2134201"/>
+                  </a:lnTo>
+                  <a:lnTo>
+                    <a:pt x="1626970" y="2199536"/>
+                  </a:lnTo>
+                  <a:lnTo>
+                    <a:pt x="1704604" y="2262061"/>
+                  </a:lnTo>
+                  <a:lnTo>
+                    <a:pt x="1782238" y="2321894"/>
+                  </a:lnTo>
+                  <a:lnTo>
+                    <a:pt x="1859873" y="2379154"/>
+                  </a:lnTo>
+                  <a:lnTo>
+                    <a:pt x="1937507" y="2433949"/>
+                  </a:lnTo>
+                  <a:lnTo>
+                    <a:pt x="2015141" y="2486387"/>
+                  </a:lnTo>
+                  <a:lnTo>
+                    <a:pt x="2092775" y="2536569"/>
+                  </a:lnTo>
+                  <a:lnTo>
+                    <a:pt x="2170409" y="2584591"/>
+                  </a:lnTo>
+                  <a:lnTo>
+                    <a:pt x="2248043" y="2630547"/>
+                  </a:lnTo>
+                  <a:lnTo>
+                    <a:pt x="2325677" y="2674526"/>
+                  </a:lnTo>
+                  <a:lnTo>
+                    <a:pt x="2403311" y="2716612"/>
+                  </a:lnTo>
+                  <a:lnTo>
+                    <a:pt x="2480945" y="2756888"/>
+                  </a:lnTo>
+                  <a:lnTo>
+                    <a:pt x="2558579" y="2795430"/>
+                  </a:lnTo>
+                  <a:lnTo>
+                    <a:pt x="2636213" y="2832314"/>
+                  </a:lnTo>
+                  <a:lnTo>
+                    <a:pt x="2713847" y="2867611"/>
+                  </a:lnTo>
+                  <a:lnTo>
+                    <a:pt x="2791481" y="2901390"/>
+                  </a:lnTo>
+                  <a:lnTo>
+                    <a:pt x="2869115" y="2933715"/>
+                  </a:lnTo>
+                  <a:lnTo>
+                    <a:pt x="2946749" y="2964649"/>
+                  </a:lnTo>
+                  <a:lnTo>
+                    <a:pt x="3024383" y="2994252"/>
+                  </a:lnTo>
+                  <a:lnTo>
+                    <a:pt x="3102017" y="3022581"/>
+                  </a:lnTo>
+                  <a:lnTo>
+                    <a:pt x="3179651" y="3049691"/>
+                  </a:lnTo>
+                  <a:lnTo>
+                    <a:pt x="3257285" y="3075635"/>
+                  </a:lnTo>
+                  <a:lnTo>
+                    <a:pt x="3334919" y="3100462"/>
+                  </a:lnTo>
+                  <a:lnTo>
+                    <a:pt x="3412553" y="3124222"/>
+                  </a:lnTo>
+                  <a:lnTo>
+                    <a:pt x="3490187" y="3146958"/>
+                  </a:lnTo>
+                  <a:lnTo>
+                    <a:pt x="3567822" y="3168717"/>
+                  </a:lnTo>
+                  <a:lnTo>
+                    <a:pt x="3645456" y="3189539"/>
+                  </a:lnTo>
+                  <a:lnTo>
+                    <a:pt x="3723090" y="3209466"/>
+                  </a:lnTo>
+                  <a:lnTo>
+                    <a:pt x="3800724" y="3228535"/>
+                  </a:lnTo>
+                  <a:lnTo>
+                    <a:pt x="3878358" y="3246783"/>
+                  </a:lnTo>
+                  <a:lnTo>
+                    <a:pt x="3955992" y="3264247"/>
+                  </a:lnTo>
+                  <a:lnTo>
+                    <a:pt x="4033626" y="3280958"/>
+                  </a:lnTo>
+                  <a:lnTo>
+                    <a:pt x="4111260" y="3296951"/>
+                  </a:lnTo>
+                  <a:lnTo>
+                    <a:pt x="4188894" y="3312256"/>
+                  </a:lnTo>
+                  <a:lnTo>
+                    <a:pt x="4266528" y="3326902"/>
+                  </a:lnTo>
+                  <a:lnTo>
+                    <a:pt x="4344162" y="3340918"/>
+                  </a:lnTo>
+                  <a:lnTo>
+                    <a:pt x="4421796" y="3354331"/>
+                  </a:lnTo>
+                  <a:lnTo>
+                    <a:pt x="4499430" y="3367167"/>
+                  </a:lnTo>
+                  <a:lnTo>
+                    <a:pt x="4577064" y="3379450"/>
+                  </a:lnTo>
+                  <a:lnTo>
+                    <a:pt x="4654698" y="3391205"/>
+                  </a:lnTo>
+                  <a:lnTo>
+                    <a:pt x="4732332" y="3402454"/>
+                  </a:lnTo>
+                  <a:lnTo>
+                    <a:pt x="4809966" y="3413219"/>
+                  </a:lnTo>
+                  <a:lnTo>
+                    <a:pt x="4887600" y="3423521"/>
+                  </a:lnTo>
+                  <a:lnTo>
+                    <a:pt x="4965234" y="3433380"/>
+                  </a:lnTo>
+                  <a:lnTo>
+                    <a:pt x="5042868" y="3442814"/>
+                  </a:lnTo>
+                  <a:lnTo>
+                    <a:pt x="5120502" y="3451843"/>
+                  </a:lnTo>
+                  <a:lnTo>
+                    <a:pt x="5198136" y="3460483"/>
+                  </a:lnTo>
+                  <a:lnTo>
+                    <a:pt x="5275771" y="3468751"/>
+                  </a:lnTo>
+                  <a:lnTo>
+                    <a:pt x="5353405" y="3476664"/>
+                  </a:lnTo>
+                  <a:lnTo>
+                    <a:pt x="5431039" y="3484236"/>
+                  </a:lnTo>
+                  <a:lnTo>
+                    <a:pt x="5508673" y="3491482"/>
+                  </a:lnTo>
+                  <a:lnTo>
+                    <a:pt x="5586307" y="3498416"/>
+                  </a:lnTo>
+                  <a:lnTo>
+                    <a:pt x="5663941" y="3505052"/>
+                  </a:lnTo>
+                  <a:lnTo>
+                    <a:pt x="5741575" y="3511403"/>
+                  </a:lnTo>
+                  <a:lnTo>
+                    <a:pt x="5819209" y="3517480"/>
+                  </a:lnTo>
+                  <a:lnTo>
+                    <a:pt x="5896843" y="3523296"/>
+                  </a:lnTo>
+                  <a:lnTo>
+                    <a:pt x="5974477" y="3528862"/>
+                  </a:lnTo>
+                  <a:lnTo>
+                    <a:pt x="6052111" y="3534188"/>
+                  </a:lnTo>
+                  <a:lnTo>
+                    <a:pt x="6129745" y="3539285"/>
+                  </a:lnTo>
+                  <a:lnTo>
+                    <a:pt x="6207379" y="3544162"/>
+                  </a:lnTo>
+                  <a:lnTo>
+                    <a:pt x="6285013" y="3548830"/>
+                  </a:lnTo>
+                  <a:lnTo>
+                    <a:pt x="6362647" y="3553297"/>
+                  </a:lnTo>
+                  <a:lnTo>
+                    <a:pt x="6440281" y="3557571"/>
+                  </a:lnTo>
+                  <a:lnTo>
+                    <a:pt x="6517915" y="3561662"/>
                   </a:lnTo>
                 </a:path>
               </a:pathLst>

--- a/docs/plots/carbo/jx_carbo_linsubhr_ratio_throm2.pptx
+++ b/docs/plots/carbo/jx_carbo_linsubhr_ratio_throm2.pptx
@@ -3003,512 +3003,518 @@
           <p:spPr>
             <a:xfrm>
               <a:off x="817517" y="1896563"/>
-              <a:ext cx="7370972" cy="3639306"/>
+              <a:ext cx="7370972" cy="3629386"/>
             </a:xfrm>
             <a:custGeom>
               <a:avLst/>
               <a:pathLst>
-                <a:path w="7370972" h="3639306">
+                <a:path w="7370972" h="3629386">
                   <a:moveTo>
-                    <a:pt x="2017411" y="0"/>
+                    <a:pt x="1807701" y="0"/>
                   </a:moveTo>
                   <a:lnTo>
-                    <a:pt x="2091857" y="274669"/>
-                  </a:lnTo>
-                  <a:lnTo>
-                    <a:pt x="2169491" y="538711"/>
-                  </a:lnTo>
-                  <a:lnTo>
-                    <a:pt x="2247125" y="782113"/>
-                  </a:lnTo>
-                  <a:lnTo>
-                    <a:pt x="2324759" y="1006489"/>
-                  </a:lnTo>
-                  <a:lnTo>
-                    <a:pt x="2402393" y="1213327"/>
-                  </a:lnTo>
-                  <a:lnTo>
-                    <a:pt x="2480027" y="1403998"/>
-                  </a:lnTo>
-                  <a:lnTo>
-                    <a:pt x="2557661" y="1579764"/>
-                  </a:lnTo>
-                  <a:lnTo>
-                    <a:pt x="2635295" y="1741792"/>
-                  </a:lnTo>
-                  <a:lnTo>
-                    <a:pt x="2712930" y="1891155"/>
-                  </a:lnTo>
-                  <a:lnTo>
-                    <a:pt x="2790564" y="2028842"/>
-                  </a:lnTo>
-                  <a:lnTo>
-                    <a:pt x="2868198" y="2155768"/>
-                  </a:lnTo>
-                  <a:lnTo>
-                    <a:pt x="2945832" y="2272772"/>
-                  </a:lnTo>
-                  <a:lnTo>
-                    <a:pt x="3023466" y="2380630"/>
-                  </a:lnTo>
-                  <a:lnTo>
-                    <a:pt x="3101100" y="2480058"/>
-                  </a:lnTo>
-                  <a:lnTo>
-                    <a:pt x="3178734" y="2571713"/>
-                  </a:lnTo>
-                  <a:lnTo>
-                    <a:pt x="3256368" y="2656205"/>
-                  </a:lnTo>
-                  <a:lnTo>
-                    <a:pt x="3334002" y="2734092"/>
-                  </a:lnTo>
-                  <a:lnTo>
-                    <a:pt x="3411636" y="2784840"/>
-                  </a:lnTo>
-                  <a:lnTo>
-                    <a:pt x="3489270" y="2790525"/>
-                  </a:lnTo>
-                  <a:lnTo>
-                    <a:pt x="3566904" y="2796173"/>
-                  </a:lnTo>
-                  <a:lnTo>
-                    <a:pt x="3644538" y="2801784"/>
-                  </a:lnTo>
-                  <a:lnTo>
-                    <a:pt x="3722172" y="2807358"/>
-                  </a:lnTo>
-                  <a:lnTo>
-                    <a:pt x="3799806" y="2812895"/>
-                  </a:lnTo>
-                  <a:lnTo>
-                    <a:pt x="3877440" y="2818396"/>
-                  </a:lnTo>
-                  <a:lnTo>
-                    <a:pt x="3955074" y="2823861"/>
-                  </a:lnTo>
-                  <a:lnTo>
-                    <a:pt x="4032708" y="2829291"/>
-                  </a:lnTo>
-                  <a:lnTo>
-                    <a:pt x="4110342" y="2834685"/>
-                  </a:lnTo>
-                  <a:lnTo>
-                    <a:pt x="4187976" y="2840043"/>
-                  </a:lnTo>
-                  <a:lnTo>
-                    <a:pt x="4265610" y="2845366"/>
-                  </a:lnTo>
-                  <a:lnTo>
-                    <a:pt x="4343244" y="2850655"/>
-                  </a:lnTo>
-                  <a:lnTo>
-                    <a:pt x="4420879" y="2855909"/>
-                  </a:lnTo>
-                  <a:lnTo>
-                    <a:pt x="4498513" y="2861128"/>
-                  </a:lnTo>
-                  <a:lnTo>
-                    <a:pt x="4576147" y="2866313"/>
-                  </a:lnTo>
-                  <a:lnTo>
-                    <a:pt x="4653781" y="2871464"/>
-                  </a:lnTo>
-                  <a:lnTo>
-                    <a:pt x="4731415" y="2876582"/>
-                  </a:lnTo>
-                  <a:lnTo>
-                    <a:pt x="4809049" y="2881666"/>
-                  </a:lnTo>
-                  <a:lnTo>
-                    <a:pt x="4886683" y="2886717"/>
-                  </a:lnTo>
-                  <a:lnTo>
-                    <a:pt x="4964317" y="2891734"/>
-                  </a:lnTo>
-                  <a:lnTo>
-                    <a:pt x="5041951" y="2896719"/>
-                  </a:lnTo>
-                  <a:lnTo>
-                    <a:pt x="5119585" y="2901671"/>
-                  </a:lnTo>
-                  <a:lnTo>
-                    <a:pt x="5197219" y="2906590"/>
-                  </a:lnTo>
-                  <a:lnTo>
-                    <a:pt x="5274853" y="2911478"/>
-                  </a:lnTo>
-                  <a:lnTo>
-                    <a:pt x="5352487" y="2916333"/>
-                  </a:lnTo>
-                  <a:lnTo>
-                    <a:pt x="5430121" y="2921157"/>
-                  </a:lnTo>
-                  <a:lnTo>
-                    <a:pt x="5507755" y="2925949"/>
-                  </a:lnTo>
-                  <a:lnTo>
-                    <a:pt x="5585389" y="2930709"/>
-                  </a:lnTo>
-                  <a:lnTo>
-                    <a:pt x="5663023" y="2935439"/>
-                  </a:lnTo>
-                  <a:lnTo>
-                    <a:pt x="5740657" y="2940137"/>
-                  </a:lnTo>
-                  <a:lnTo>
-                    <a:pt x="5818291" y="2944805"/>
-                  </a:lnTo>
-                  <a:lnTo>
-                    <a:pt x="5895925" y="2949442"/>
-                  </a:lnTo>
-                  <a:lnTo>
-                    <a:pt x="5973559" y="2954048"/>
-                  </a:lnTo>
-                  <a:lnTo>
-                    <a:pt x="6051193" y="2958625"/>
-                  </a:lnTo>
-                  <a:lnTo>
-                    <a:pt x="6128827" y="2963171"/>
-                  </a:lnTo>
-                  <a:lnTo>
-                    <a:pt x="6206462" y="2967688"/>
-                  </a:lnTo>
-                  <a:lnTo>
-                    <a:pt x="6284096" y="2972175"/>
-                  </a:lnTo>
-                  <a:lnTo>
-                    <a:pt x="6361730" y="2976633"/>
-                  </a:lnTo>
-                  <a:lnTo>
-                    <a:pt x="6439364" y="2981061"/>
-                  </a:lnTo>
-                  <a:lnTo>
-                    <a:pt x="6516998" y="2985461"/>
-                  </a:lnTo>
-                  <a:lnTo>
-                    <a:pt x="6594632" y="2989832"/>
-                  </a:lnTo>
-                  <a:lnTo>
-                    <a:pt x="6672266" y="2994174"/>
-                  </a:lnTo>
-                  <a:lnTo>
-                    <a:pt x="6749900" y="2998487"/>
-                  </a:lnTo>
-                  <a:lnTo>
-                    <a:pt x="6827534" y="3002773"/>
-                  </a:lnTo>
-                  <a:lnTo>
-                    <a:pt x="6905168" y="3007030"/>
-                  </a:lnTo>
-                  <a:lnTo>
-                    <a:pt x="6982802" y="3011259"/>
-                  </a:lnTo>
-                  <a:lnTo>
-                    <a:pt x="7060436" y="3015461"/>
-                  </a:lnTo>
-                  <a:lnTo>
-                    <a:pt x="7138070" y="3019635"/>
-                  </a:lnTo>
-                  <a:lnTo>
-                    <a:pt x="7215704" y="3023782"/>
-                  </a:lnTo>
-                  <a:lnTo>
-                    <a:pt x="7293338" y="3027902"/>
-                  </a:lnTo>
-                  <a:lnTo>
-                    <a:pt x="7370972" y="3031994"/>
-                  </a:lnTo>
-                  <a:lnTo>
-                    <a:pt x="7370972" y="3639306"/>
-                  </a:lnTo>
-                  <a:lnTo>
-                    <a:pt x="7293338" y="3638175"/>
-                  </a:lnTo>
-                  <a:lnTo>
-                    <a:pt x="7215704" y="3636949"/>
-                  </a:lnTo>
-                  <a:lnTo>
-                    <a:pt x="7138070" y="3635618"/>
-                  </a:lnTo>
-                  <a:lnTo>
-                    <a:pt x="7060436" y="3634174"/>
-                  </a:lnTo>
-                  <a:lnTo>
-                    <a:pt x="6982802" y="3632608"/>
-                  </a:lnTo>
-                  <a:lnTo>
-                    <a:pt x="6905168" y="3630909"/>
-                  </a:lnTo>
-                  <a:lnTo>
-                    <a:pt x="6827534" y="3629066"/>
-                  </a:lnTo>
-                  <a:lnTo>
-                    <a:pt x="6749900" y="3627067"/>
-                  </a:lnTo>
-                  <a:lnTo>
-                    <a:pt x="6672266" y="3624899"/>
-                  </a:lnTo>
-                  <a:lnTo>
-                    <a:pt x="6594632" y="3622546"/>
-                  </a:lnTo>
-                  <a:lnTo>
-                    <a:pt x="6516998" y="3619994"/>
-                  </a:lnTo>
-                  <a:lnTo>
-                    <a:pt x="6439364" y="3617226"/>
-                  </a:lnTo>
-                  <a:lnTo>
-                    <a:pt x="6361730" y="3614222"/>
-                  </a:lnTo>
-                  <a:lnTo>
-                    <a:pt x="6284096" y="3610964"/>
-                  </a:lnTo>
-                  <a:lnTo>
-                    <a:pt x="6206462" y="3607430"/>
-                  </a:lnTo>
-                  <a:lnTo>
-                    <a:pt x="6128827" y="3603597"/>
-                  </a:lnTo>
-                  <a:lnTo>
-                    <a:pt x="6051193" y="3599438"/>
-                  </a:lnTo>
-                  <a:lnTo>
-                    <a:pt x="5973559" y="3594926"/>
-                  </a:lnTo>
-                  <a:lnTo>
-                    <a:pt x="5895925" y="3590032"/>
-                  </a:lnTo>
-                  <a:lnTo>
-                    <a:pt x="5818291" y="3584723"/>
-                  </a:lnTo>
-                  <a:lnTo>
-                    <a:pt x="5740657" y="3578964"/>
-                  </a:lnTo>
-                  <a:lnTo>
-                    <a:pt x="5663023" y="3572717"/>
-                  </a:lnTo>
-                  <a:lnTo>
-                    <a:pt x="5585389" y="3565939"/>
-                  </a:lnTo>
-                  <a:lnTo>
-                    <a:pt x="5507755" y="3558587"/>
-                  </a:lnTo>
-                  <a:lnTo>
-                    <a:pt x="5430121" y="3550612"/>
-                  </a:lnTo>
-                  <a:lnTo>
-                    <a:pt x="5352487" y="3541961"/>
-                  </a:lnTo>
-                  <a:lnTo>
-                    <a:pt x="5274853" y="3532575"/>
-                  </a:lnTo>
-                  <a:lnTo>
-                    <a:pt x="5197219" y="3522394"/>
-                  </a:lnTo>
-                  <a:lnTo>
-                    <a:pt x="5119585" y="3511350"/>
-                  </a:lnTo>
-                  <a:lnTo>
-                    <a:pt x="5041951" y="3499369"/>
-                  </a:lnTo>
-                  <a:lnTo>
-                    <a:pt x="4964317" y="3486373"/>
-                  </a:lnTo>
-                  <a:lnTo>
-                    <a:pt x="4886683" y="3472274"/>
-                  </a:lnTo>
-                  <a:lnTo>
-                    <a:pt x="4809049" y="3456980"/>
-                  </a:lnTo>
-                  <a:lnTo>
-                    <a:pt x="4731415" y="3440389"/>
-                  </a:lnTo>
-                  <a:lnTo>
-                    <a:pt x="4653781" y="3422391"/>
-                  </a:lnTo>
-                  <a:lnTo>
-                    <a:pt x="4576147" y="3402867"/>
-                  </a:lnTo>
-                  <a:lnTo>
-                    <a:pt x="4498513" y="3381688"/>
-                  </a:lnTo>
-                  <a:lnTo>
-                    <a:pt x="4420879" y="3358713"/>
-                  </a:lnTo>
-                  <a:lnTo>
-                    <a:pt x="4343244" y="3333789"/>
-                  </a:lnTo>
-                  <a:lnTo>
-                    <a:pt x="4265610" y="3306753"/>
-                  </a:lnTo>
-                  <a:lnTo>
-                    <a:pt x="4187976" y="3277423"/>
-                  </a:lnTo>
-                  <a:lnTo>
-                    <a:pt x="4110342" y="3245607"/>
-                  </a:lnTo>
-                  <a:lnTo>
-                    <a:pt x="4032708" y="3211093"/>
-                  </a:lnTo>
-                  <a:lnTo>
-                    <a:pt x="3955074" y="3173653"/>
-                  </a:lnTo>
-                  <a:lnTo>
-                    <a:pt x="3877440" y="3133037"/>
-                  </a:lnTo>
-                  <a:lnTo>
-                    <a:pt x="3799806" y="3088978"/>
-                  </a:lnTo>
-                  <a:lnTo>
-                    <a:pt x="3722172" y="3041183"/>
-                  </a:lnTo>
-                  <a:lnTo>
-                    <a:pt x="3644538" y="2989335"/>
-                  </a:lnTo>
-                  <a:lnTo>
-                    <a:pt x="3566904" y="2933091"/>
-                  </a:lnTo>
-                  <a:lnTo>
-                    <a:pt x="3489270" y="2872078"/>
-                  </a:lnTo>
-                  <a:lnTo>
-                    <a:pt x="3411636" y="2805891"/>
-                  </a:lnTo>
-                  <a:lnTo>
-                    <a:pt x="3334002" y="2779118"/>
-                  </a:lnTo>
-                  <a:lnTo>
-                    <a:pt x="3256368" y="2773358"/>
-                  </a:lnTo>
-                  <a:lnTo>
-                    <a:pt x="3178734" y="2767559"/>
-                  </a:lnTo>
-                  <a:lnTo>
-                    <a:pt x="3101100" y="2761723"/>
-                  </a:lnTo>
-                  <a:lnTo>
-                    <a:pt x="3023466" y="2755848"/>
-                  </a:lnTo>
-                  <a:lnTo>
-                    <a:pt x="2945832" y="2749935"/>
-                  </a:lnTo>
-                  <a:lnTo>
-                    <a:pt x="2868198" y="2743982"/>
-                  </a:lnTo>
-                  <a:lnTo>
-                    <a:pt x="2790564" y="2737990"/>
-                  </a:lnTo>
-                  <a:lnTo>
-                    <a:pt x="2712930" y="2731959"/>
-                  </a:lnTo>
-                  <a:lnTo>
-                    <a:pt x="2635295" y="2725888"/>
-                  </a:lnTo>
-                  <a:lnTo>
-                    <a:pt x="2557661" y="2719776"/>
-                  </a:lnTo>
-                  <a:lnTo>
-                    <a:pt x="2480027" y="2713625"/>
-                  </a:lnTo>
-                  <a:lnTo>
-                    <a:pt x="2402393" y="2707433"/>
-                  </a:lnTo>
-                  <a:lnTo>
-                    <a:pt x="2324759" y="2701200"/>
-                  </a:lnTo>
-                  <a:lnTo>
-                    <a:pt x="2247125" y="2694926"/>
-                  </a:lnTo>
-                  <a:lnTo>
-                    <a:pt x="2169491" y="2688611"/>
-                  </a:lnTo>
-                  <a:lnTo>
-                    <a:pt x="2091857" y="2682254"/>
-                  </a:lnTo>
-                  <a:lnTo>
-                    <a:pt x="2014223" y="2675855"/>
-                  </a:lnTo>
-                  <a:lnTo>
-                    <a:pt x="1936589" y="2669413"/>
-                  </a:lnTo>
-                  <a:lnTo>
-                    <a:pt x="1858955" y="2662930"/>
-                  </a:lnTo>
-                  <a:lnTo>
-                    <a:pt x="1781321" y="2656404"/>
-                  </a:lnTo>
-                  <a:lnTo>
-                    <a:pt x="1703687" y="2649834"/>
-                  </a:lnTo>
-                  <a:lnTo>
-                    <a:pt x="1626053" y="2643221"/>
-                  </a:lnTo>
-                  <a:lnTo>
-                    <a:pt x="1548419" y="2636565"/>
-                  </a:lnTo>
-                  <a:lnTo>
-                    <a:pt x="1470785" y="2629865"/>
-                  </a:lnTo>
-                  <a:lnTo>
-                    <a:pt x="1393151" y="2623121"/>
-                  </a:lnTo>
-                  <a:lnTo>
-                    <a:pt x="1315517" y="2616332"/>
-                  </a:lnTo>
-                  <a:lnTo>
-                    <a:pt x="1237883" y="2609498"/>
-                  </a:lnTo>
-                  <a:lnTo>
-                    <a:pt x="1160249" y="2602619"/>
-                  </a:lnTo>
-                  <a:lnTo>
-                    <a:pt x="1082615" y="2595695"/>
-                  </a:lnTo>
-                  <a:lnTo>
-                    <a:pt x="1004981" y="2588726"/>
-                  </a:lnTo>
-                  <a:lnTo>
-                    <a:pt x="927346" y="2581710"/>
-                  </a:lnTo>
-                  <a:lnTo>
-                    <a:pt x="849712" y="2574648"/>
-                  </a:lnTo>
-                  <a:lnTo>
-                    <a:pt x="772078" y="2567540"/>
-                  </a:lnTo>
-                  <a:lnTo>
-                    <a:pt x="694444" y="2560384"/>
-                  </a:lnTo>
-                  <a:lnTo>
-                    <a:pt x="616810" y="2553182"/>
-                  </a:lnTo>
-                  <a:lnTo>
-                    <a:pt x="539176" y="2545932"/>
-                  </a:lnTo>
-                  <a:lnTo>
-                    <a:pt x="461542" y="2538634"/>
-                  </a:lnTo>
-                  <a:lnTo>
-                    <a:pt x="383908" y="2531288"/>
-                  </a:lnTo>
-                  <a:lnTo>
-                    <a:pt x="306274" y="2523893"/>
-                  </a:lnTo>
-                  <a:lnTo>
-                    <a:pt x="228640" y="2516450"/>
-                  </a:lnTo>
-                  <a:lnTo>
-                    <a:pt x="151006" y="2508958"/>
-                  </a:lnTo>
-                  <a:lnTo>
-                    <a:pt x="73372" y="2501416"/>
-                  </a:lnTo>
-                  <a:lnTo>
-                    <a:pt x="0" y="2494241"/>
-                  </a:lnTo>
-                  <a:lnTo>
-                    <a:pt x="0" y="0"/>
+                    <a:pt x="1858955" y="168171"/>
+                  </a:lnTo>
+                  <a:lnTo>
+                    <a:pt x="1936589" y="405547"/>
+                  </a:lnTo>
+                  <a:lnTo>
+                    <a:pt x="2014223" y="626752"/>
+                  </a:lnTo>
+                  <a:lnTo>
+                    <a:pt x="2091857" y="832887"/>
+                  </a:lnTo>
+                  <a:lnTo>
+                    <a:pt x="2169491" y="1024980"/>
+                  </a:lnTo>
+                  <a:lnTo>
+                    <a:pt x="2247125" y="1203986"/>
+                  </a:lnTo>
+                  <a:lnTo>
+                    <a:pt x="2324759" y="1370798"/>
+                  </a:lnTo>
+                  <a:lnTo>
+                    <a:pt x="2402393" y="1526246"/>
+                  </a:lnTo>
+                  <a:lnTo>
+                    <a:pt x="2480027" y="1671105"/>
+                  </a:lnTo>
+                  <a:lnTo>
+                    <a:pt x="2557661" y="1806095"/>
+                  </a:lnTo>
+                  <a:lnTo>
+                    <a:pt x="2635295" y="1931889"/>
+                  </a:lnTo>
+                  <a:lnTo>
+                    <a:pt x="2712930" y="2049113"/>
+                  </a:lnTo>
+                  <a:lnTo>
+                    <a:pt x="2790564" y="2158352"/>
+                  </a:lnTo>
+                  <a:lnTo>
+                    <a:pt x="2868198" y="2260149"/>
+                  </a:lnTo>
+                  <a:lnTo>
+                    <a:pt x="2945832" y="2355011"/>
+                  </a:lnTo>
+                  <a:lnTo>
+                    <a:pt x="3023466" y="2443411"/>
+                  </a:lnTo>
+                  <a:lnTo>
+                    <a:pt x="3101100" y="2525788"/>
+                  </a:lnTo>
+                  <a:lnTo>
+                    <a:pt x="3178734" y="2602554"/>
+                  </a:lnTo>
+                  <a:lnTo>
+                    <a:pt x="3256368" y="2674090"/>
+                  </a:lnTo>
+                  <a:lnTo>
+                    <a:pt x="3334002" y="2740753"/>
+                  </a:lnTo>
+                  <a:lnTo>
+                    <a:pt x="3411636" y="2784488"/>
+                  </a:lnTo>
+                  <a:lnTo>
+                    <a:pt x="3489270" y="2789109"/>
+                  </a:lnTo>
+                  <a:lnTo>
+                    <a:pt x="3566904" y="2793706"/>
+                  </a:lnTo>
+                  <a:lnTo>
+                    <a:pt x="3644538" y="2798278"/>
+                  </a:lnTo>
+                  <a:lnTo>
+                    <a:pt x="3722172" y="2802826"/>
+                  </a:lnTo>
+                  <a:lnTo>
+                    <a:pt x="3799806" y="2807349"/>
+                  </a:lnTo>
+                  <a:lnTo>
+                    <a:pt x="3877440" y="2811849"/>
+                  </a:lnTo>
+                  <a:lnTo>
+                    <a:pt x="3955074" y="2816324"/>
+                  </a:lnTo>
+                  <a:lnTo>
+                    <a:pt x="4032708" y="2820776"/>
+                  </a:lnTo>
+                  <a:lnTo>
+                    <a:pt x="4110342" y="2825204"/>
+                  </a:lnTo>
+                  <a:lnTo>
+                    <a:pt x="4187976" y="2829608"/>
+                  </a:lnTo>
+                  <a:lnTo>
+                    <a:pt x="4265610" y="2833989"/>
+                  </a:lnTo>
+                  <a:lnTo>
+                    <a:pt x="4343244" y="2838347"/>
+                  </a:lnTo>
+                  <a:lnTo>
+                    <a:pt x="4420879" y="2842681"/>
+                  </a:lnTo>
+                  <a:lnTo>
+                    <a:pt x="4498513" y="2846993"/>
+                  </a:lnTo>
+                  <a:lnTo>
+                    <a:pt x="4576147" y="2851281"/>
+                  </a:lnTo>
+                  <a:lnTo>
+                    <a:pt x="4653781" y="2855547"/>
+                  </a:lnTo>
+                  <a:lnTo>
+                    <a:pt x="4731415" y="2859790"/>
+                  </a:lnTo>
+                  <a:lnTo>
+                    <a:pt x="4809049" y="2864010"/>
+                  </a:lnTo>
+                  <a:lnTo>
+                    <a:pt x="4886683" y="2868208"/>
+                  </a:lnTo>
+                  <a:lnTo>
+                    <a:pt x="4964317" y="2872383"/>
+                  </a:lnTo>
+                  <a:lnTo>
+                    <a:pt x="5041951" y="2876537"/>
+                  </a:lnTo>
+                  <a:lnTo>
+                    <a:pt x="5119585" y="2880668"/>
+                  </a:lnTo>
+                  <a:lnTo>
+                    <a:pt x="5197219" y="2884777"/>
+                  </a:lnTo>
+                  <a:lnTo>
+                    <a:pt x="5274853" y="2888864"/>
+                  </a:lnTo>
+                  <a:lnTo>
+                    <a:pt x="5352487" y="2892930"/>
+                  </a:lnTo>
+                  <a:lnTo>
+                    <a:pt x="5430121" y="2896974"/>
+                  </a:lnTo>
+                  <a:lnTo>
+                    <a:pt x="5507755" y="2900996"/>
+                  </a:lnTo>
+                  <a:lnTo>
+                    <a:pt x="5585389" y="2904997"/>
+                  </a:lnTo>
+                  <a:lnTo>
+                    <a:pt x="5663023" y="2908977"/>
+                  </a:lnTo>
+                  <a:lnTo>
+                    <a:pt x="5740657" y="2912935"/>
+                  </a:lnTo>
+                  <a:lnTo>
+                    <a:pt x="5818291" y="2916873"/>
+                  </a:lnTo>
+                  <a:lnTo>
+                    <a:pt x="5895925" y="2920789"/>
+                  </a:lnTo>
+                  <a:lnTo>
+                    <a:pt x="5973559" y="2924685"/>
+                  </a:lnTo>
+                  <a:lnTo>
+                    <a:pt x="6051193" y="2928560"/>
+                  </a:lnTo>
+                  <a:lnTo>
+                    <a:pt x="6128827" y="2932414"/>
+                  </a:lnTo>
+                  <a:lnTo>
+                    <a:pt x="6206462" y="2936248"/>
+                  </a:lnTo>
+                  <a:lnTo>
+                    <a:pt x="6284096" y="2940061"/>
+                  </a:lnTo>
+                  <a:lnTo>
+                    <a:pt x="6361730" y="2943854"/>
+                  </a:lnTo>
+                  <a:lnTo>
+                    <a:pt x="6439364" y="2947627"/>
+                  </a:lnTo>
+                  <a:lnTo>
+                    <a:pt x="6516998" y="2951380"/>
+                  </a:lnTo>
+                  <a:lnTo>
+                    <a:pt x="6594632" y="2955112"/>
+                  </a:lnTo>
+                  <a:lnTo>
+                    <a:pt x="6672266" y="2958825"/>
+                  </a:lnTo>
+                  <a:lnTo>
+                    <a:pt x="6749900" y="2962518"/>
+                  </a:lnTo>
+                  <a:lnTo>
+                    <a:pt x="6827534" y="2966192"/>
+                  </a:lnTo>
+                  <a:lnTo>
+                    <a:pt x="6905168" y="2969846"/>
+                  </a:lnTo>
+                  <a:lnTo>
+                    <a:pt x="6982802" y="2973480"/>
+                  </a:lnTo>
+                  <a:lnTo>
+                    <a:pt x="7060436" y="2977095"/>
+                  </a:lnTo>
+                  <a:lnTo>
+                    <a:pt x="7138070" y="2980691"/>
+                  </a:lnTo>
+                  <a:lnTo>
+                    <a:pt x="7215704" y="2984268"/>
+                  </a:lnTo>
+                  <a:lnTo>
+                    <a:pt x="7293338" y="2987826"/>
+                  </a:lnTo>
+                  <a:lnTo>
+                    <a:pt x="7370972" y="2991365"/>
+                  </a:lnTo>
+                  <a:lnTo>
+                    <a:pt x="7370972" y="3629386"/>
+                  </a:lnTo>
+                  <a:lnTo>
+                    <a:pt x="7293338" y="3627685"/>
+                  </a:lnTo>
+                  <a:lnTo>
+                    <a:pt x="7215704" y="3625861"/>
+                  </a:lnTo>
+                  <a:lnTo>
+                    <a:pt x="7138070" y="3623903"/>
+                  </a:lnTo>
+                  <a:lnTo>
+                    <a:pt x="7060436" y="3621802"/>
+                  </a:lnTo>
+                  <a:lnTo>
+                    <a:pt x="6982802" y="3619547"/>
+                  </a:lnTo>
+                  <a:lnTo>
+                    <a:pt x="6905168" y="3617128"/>
+                  </a:lnTo>
+                  <a:lnTo>
+                    <a:pt x="6827534" y="3614531"/>
+                  </a:lnTo>
+                  <a:lnTo>
+                    <a:pt x="6749900" y="3611745"/>
+                  </a:lnTo>
+                  <a:lnTo>
+                    <a:pt x="6672266" y="3608755"/>
+                  </a:lnTo>
+                  <a:lnTo>
+                    <a:pt x="6594632" y="3605547"/>
+                  </a:lnTo>
+                  <a:lnTo>
+                    <a:pt x="6516998" y="3602104"/>
+                  </a:lnTo>
+                  <a:lnTo>
+                    <a:pt x="6439364" y="3598410"/>
+                  </a:lnTo>
+                  <a:lnTo>
+                    <a:pt x="6361730" y="3594445"/>
+                  </a:lnTo>
+                  <a:lnTo>
+                    <a:pt x="6284096" y="3590190"/>
+                  </a:lnTo>
+                  <a:lnTo>
+                    <a:pt x="6206462" y="3585625"/>
+                  </a:lnTo>
+                  <a:lnTo>
+                    <a:pt x="6128827" y="3580725"/>
+                  </a:lnTo>
+                  <a:lnTo>
+                    <a:pt x="6051193" y="3575468"/>
+                  </a:lnTo>
+                  <a:lnTo>
+                    <a:pt x="5973559" y="3569826"/>
+                  </a:lnTo>
+                  <a:lnTo>
+                    <a:pt x="5895925" y="3563772"/>
+                  </a:lnTo>
+                  <a:lnTo>
+                    <a:pt x="5818291" y="3557275"/>
+                  </a:lnTo>
+                  <a:lnTo>
+                    <a:pt x="5740657" y="3550303"/>
+                  </a:lnTo>
+                  <a:lnTo>
+                    <a:pt x="5663023" y="3542822"/>
+                  </a:lnTo>
+                  <a:lnTo>
+                    <a:pt x="5585389" y="3534793"/>
+                  </a:lnTo>
+                  <a:lnTo>
+                    <a:pt x="5507755" y="3526178"/>
+                  </a:lnTo>
+                  <a:lnTo>
+                    <a:pt x="5430121" y="3516933"/>
+                  </a:lnTo>
+                  <a:lnTo>
+                    <a:pt x="5352487" y="3507012"/>
+                  </a:lnTo>
+                  <a:lnTo>
+                    <a:pt x="5274853" y="3496366"/>
+                  </a:lnTo>
+                  <a:lnTo>
+                    <a:pt x="5197219" y="3484941"/>
+                  </a:lnTo>
+                  <a:lnTo>
+                    <a:pt x="5119585" y="3472681"/>
+                  </a:lnTo>
+                  <a:lnTo>
+                    <a:pt x="5041951" y="3459525"/>
+                  </a:lnTo>
+                  <a:lnTo>
+                    <a:pt x="4964317" y="3445408"/>
+                  </a:lnTo>
+                  <a:lnTo>
+                    <a:pt x="4886683" y="3430258"/>
+                  </a:lnTo>
+                  <a:lnTo>
+                    <a:pt x="4809049" y="3414001"/>
+                  </a:lnTo>
+                  <a:lnTo>
+                    <a:pt x="4731415" y="3396555"/>
+                  </a:lnTo>
+                  <a:lnTo>
+                    <a:pt x="4653781" y="3377834"/>
+                  </a:lnTo>
+                  <a:lnTo>
+                    <a:pt x="4576147" y="3357744"/>
+                  </a:lnTo>
+                  <a:lnTo>
+                    <a:pt x="4498513" y="3336186"/>
+                  </a:lnTo>
+                  <a:lnTo>
+                    <a:pt x="4420879" y="3313052"/>
+                  </a:lnTo>
+                  <a:lnTo>
+                    <a:pt x="4343244" y="3288226"/>
+                  </a:lnTo>
+                  <a:lnTo>
+                    <a:pt x="4265610" y="3261586"/>
+                  </a:lnTo>
+                  <a:lnTo>
+                    <a:pt x="4187976" y="3232998"/>
+                  </a:lnTo>
+                  <a:lnTo>
+                    <a:pt x="4110342" y="3202320"/>
+                  </a:lnTo>
+                  <a:lnTo>
+                    <a:pt x="4032708" y="3169400"/>
+                  </a:lnTo>
+                  <a:lnTo>
+                    <a:pt x="3955074" y="3134073"/>
+                  </a:lnTo>
+                  <a:lnTo>
+                    <a:pt x="3877440" y="3096163"/>
+                  </a:lnTo>
+                  <a:lnTo>
+                    <a:pt x="3799806" y="3055482"/>
+                  </a:lnTo>
+                  <a:lnTo>
+                    <a:pt x="3722172" y="3011827"/>
+                  </a:lnTo>
+                  <a:lnTo>
+                    <a:pt x="3644538" y="2964981"/>
+                  </a:lnTo>
+                  <a:lnTo>
+                    <a:pt x="3566904" y="2914710"/>
+                  </a:lnTo>
+                  <a:lnTo>
+                    <a:pt x="3489270" y="2860764"/>
+                  </a:lnTo>
+                  <a:lnTo>
+                    <a:pt x="3411636" y="2802875"/>
+                  </a:lnTo>
+                  <a:lnTo>
+                    <a:pt x="3334002" y="2779842"/>
+                  </a:lnTo>
+                  <a:lnTo>
+                    <a:pt x="3256368" y="2775172"/>
+                  </a:lnTo>
+                  <a:lnTo>
+                    <a:pt x="3178734" y="2770476"/>
+                  </a:lnTo>
+                  <a:lnTo>
+                    <a:pt x="3101100" y="2765755"/>
+                  </a:lnTo>
+                  <a:lnTo>
+                    <a:pt x="3023466" y="2761009"/>
+                  </a:lnTo>
+                  <a:lnTo>
+                    <a:pt x="2945832" y="2756238"/>
+                  </a:lnTo>
+                  <a:lnTo>
+                    <a:pt x="2868198" y="2751441"/>
+                  </a:lnTo>
+                  <a:lnTo>
+                    <a:pt x="2790564" y="2746618"/>
+                  </a:lnTo>
+                  <a:lnTo>
+                    <a:pt x="2712930" y="2741769"/>
+                  </a:lnTo>
+                  <a:lnTo>
+                    <a:pt x="2635295" y="2736895"/>
+                  </a:lnTo>
+                  <a:lnTo>
+                    <a:pt x="2557661" y="2731994"/>
+                  </a:lnTo>
+                  <a:lnTo>
+                    <a:pt x="2480027" y="2727067"/>
+                  </a:lnTo>
+                  <a:lnTo>
+                    <a:pt x="2402393" y="2722114"/>
+                  </a:lnTo>
+                  <a:lnTo>
+                    <a:pt x="2324759" y="2717135"/>
+                  </a:lnTo>
+                  <a:lnTo>
+                    <a:pt x="2247125" y="2712128"/>
+                  </a:lnTo>
+                  <a:lnTo>
+                    <a:pt x="2169491" y="2707095"/>
+                  </a:lnTo>
+                  <a:lnTo>
+                    <a:pt x="2091857" y="2702035"/>
+                  </a:lnTo>
+                  <a:lnTo>
+                    <a:pt x="2014223" y="2696948"/>
+                  </a:lnTo>
+                  <a:lnTo>
+                    <a:pt x="1936589" y="2691834"/>
+                  </a:lnTo>
+                  <a:lnTo>
+                    <a:pt x="1858955" y="2686692"/>
+                  </a:lnTo>
+                  <a:lnTo>
+                    <a:pt x="1781321" y="2681523"/>
+                  </a:lnTo>
+                  <a:lnTo>
+                    <a:pt x="1703687" y="2676326"/>
+                  </a:lnTo>
+                  <a:lnTo>
+                    <a:pt x="1626053" y="2671101"/>
+                  </a:lnTo>
+                  <a:lnTo>
+                    <a:pt x="1548419" y="2665849"/>
+                  </a:lnTo>
+                  <a:lnTo>
+                    <a:pt x="1470785" y="2660568"/>
+                  </a:lnTo>
+                  <a:lnTo>
+                    <a:pt x="1393151" y="2655259"/>
+                  </a:lnTo>
+                  <a:lnTo>
+                    <a:pt x="1315517" y="2649922"/>
+                  </a:lnTo>
+                  <a:lnTo>
+                    <a:pt x="1237883" y="2644556"/>
+                  </a:lnTo>
+                  <a:lnTo>
+                    <a:pt x="1160249" y="2639161"/>
+                  </a:lnTo>
+                  <a:lnTo>
+                    <a:pt x="1082615" y="2633737"/>
+                  </a:lnTo>
+                  <a:lnTo>
+                    <a:pt x="1004981" y="2628285"/>
+                  </a:lnTo>
+                  <a:lnTo>
+                    <a:pt x="927346" y="2622803"/>
+                  </a:lnTo>
+                  <a:lnTo>
+                    <a:pt x="849712" y="2617292"/>
+                  </a:lnTo>
+                  <a:lnTo>
+                    <a:pt x="772078" y="2611751"/>
+                  </a:lnTo>
+                  <a:lnTo>
+                    <a:pt x="694444" y="2606181"/>
+                  </a:lnTo>
+                  <a:lnTo>
+                    <a:pt x="616810" y="2600581"/>
+                  </a:lnTo>
+                  <a:lnTo>
+                    <a:pt x="539176" y="2594951"/>
+                  </a:lnTo>
+                  <a:lnTo>
+                    <a:pt x="461542" y="2589291"/>
+                  </a:lnTo>
+                  <a:lnTo>
+                    <a:pt x="383908" y="2583600"/>
+                  </a:lnTo>
+                  <a:lnTo>
+                    <a:pt x="306274" y="2577879"/>
+                  </a:lnTo>
+                  <a:lnTo>
+                    <a:pt x="228640" y="2572128"/>
+                  </a:lnTo>
+                  <a:lnTo>
+                    <a:pt x="151006" y="2566346"/>
+                  </a:lnTo>
+                  <a:lnTo>
+                    <a:pt x="73372" y="2560532"/>
+                  </a:lnTo>
+                  <a:lnTo>
+                    <a:pt x="0" y="2555009"/>
                   </a:lnTo>
                   <a:close/>
                 </a:path>
@@ -3534,222 +3540,231 @@
           </p:nvSpPr>
           <p:spPr>
             <a:xfrm>
-              <a:off x="2834928" y="1896563"/>
-              <a:ext cx="5353561" cy="3031994"/>
+              <a:off x="2625219" y="1896563"/>
+              <a:ext cx="5563271" cy="2991365"/>
             </a:xfrm>
             <a:custGeom>
               <a:avLst/>
               <a:pathLst>
-                <a:path w="5353561" h="3031994">
+                <a:path w="5563271" h="2991365">
                   <a:moveTo>
                     <a:pt x="0" y="0"/>
                   </a:moveTo>
                   <a:lnTo>
-                    <a:pt x="74446" y="274669"/>
-                  </a:lnTo>
-                  <a:lnTo>
-                    <a:pt x="152080" y="538711"/>
-                  </a:lnTo>
-                  <a:lnTo>
-                    <a:pt x="229714" y="782113"/>
-                  </a:lnTo>
-                  <a:lnTo>
-                    <a:pt x="307348" y="1006489"/>
-                  </a:lnTo>
-                  <a:lnTo>
-                    <a:pt x="384982" y="1213327"/>
-                  </a:lnTo>
-                  <a:lnTo>
-                    <a:pt x="462616" y="1403998"/>
-                  </a:lnTo>
-                  <a:lnTo>
-                    <a:pt x="540250" y="1579764"/>
-                  </a:lnTo>
-                  <a:lnTo>
-                    <a:pt x="617884" y="1741792"/>
-                  </a:lnTo>
-                  <a:lnTo>
-                    <a:pt x="695518" y="1891155"/>
-                  </a:lnTo>
-                  <a:lnTo>
-                    <a:pt x="773152" y="2028842"/>
-                  </a:lnTo>
-                  <a:lnTo>
-                    <a:pt x="850787" y="2155768"/>
-                  </a:lnTo>
-                  <a:lnTo>
-                    <a:pt x="928421" y="2272772"/>
-                  </a:lnTo>
-                  <a:lnTo>
-                    <a:pt x="1006055" y="2380630"/>
-                  </a:lnTo>
-                  <a:lnTo>
-                    <a:pt x="1083689" y="2480058"/>
-                  </a:lnTo>
-                  <a:lnTo>
-                    <a:pt x="1161323" y="2571713"/>
-                  </a:lnTo>
-                  <a:lnTo>
-                    <a:pt x="1238957" y="2656205"/>
-                  </a:lnTo>
-                  <a:lnTo>
-                    <a:pt x="1316591" y="2734092"/>
-                  </a:lnTo>
-                  <a:lnTo>
-                    <a:pt x="1394225" y="2784840"/>
-                  </a:lnTo>
-                  <a:lnTo>
-                    <a:pt x="1471859" y="2790525"/>
-                  </a:lnTo>
-                  <a:lnTo>
-                    <a:pt x="1549493" y="2796173"/>
-                  </a:lnTo>
-                  <a:lnTo>
-                    <a:pt x="1627127" y="2801784"/>
-                  </a:lnTo>
-                  <a:lnTo>
-                    <a:pt x="1704761" y="2807358"/>
-                  </a:lnTo>
-                  <a:lnTo>
-                    <a:pt x="1782395" y="2812895"/>
-                  </a:lnTo>
-                  <a:lnTo>
-                    <a:pt x="1860029" y="2818396"/>
-                  </a:lnTo>
-                  <a:lnTo>
-                    <a:pt x="1937663" y="2823861"/>
-                  </a:lnTo>
-                  <a:lnTo>
-                    <a:pt x="2015297" y="2829291"/>
-                  </a:lnTo>
-                  <a:lnTo>
-                    <a:pt x="2092931" y="2834685"/>
-                  </a:lnTo>
-                  <a:lnTo>
-                    <a:pt x="2170565" y="2840043"/>
-                  </a:lnTo>
-                  <a:lnTo>
-                    <a:pt x="2248199" y="2845366"/>
-                  </a:lnTo>
-                  <a:lnTo>
-                    <a:pt x="2325833" y="2850655"/>
-                  </a:lnTo>
-                  <a:lnTo>
-                    <a:pt x="2403467" y="2855909"/>
-                  </a:lnTo>
-                  <a:lnTo>
-                    <a:pt x="2481101" y="2861128"/>
-                  </a:lnTo>
-                  <a:lnTo>
-                    <a:pt x="2558736" y="2866313"/>
-                  </a:lnTo>
-                  <a:lnTo>
-                    <a:pt x="2636370" y="2871464"/>
-                  </a:lnTo>
-                  <a:lnTo>
-                    <a:pt x="2714004" y="2876582"/>
-                  </a:lnTo>
-                  <a:lnTo>
-                    <a:pt x="2791638" y="2881666"/>
-                  </a:lnTo>
-                  <a:lnTo>
-                    <a:pt x="2869272" y="2886717"/>
-                  </a:lnTo>
-                  <a:lnTo>
-                    <a:pt x="2946906" y="2891734"/>
-                  </a:lnTo>
-                  <a:lnTo>
-                    <a:pt x="3024540" y="2896719"/>
-                  </a:lnTo>
-                  <a:lnTo>
-                    <a:pt x="3102174" y="2901671"/>
-                  </a:lnTo>
-                  <a:lnTo>
-                    <a:pt x="3179808" y="2906590"/>
-                  </a:lnTo>
-                  <a:lnTo>
-                    <a:pt x="3257442" y="2911478"/>
-                  </a:lnTo>
-                  <a:lnTo>
-                    <a:pt x="3335076" y="2916333"/>
-                  </a:lnTo>
-                  <a:lnTo>
-                    <a:pt x="3412710" y="2921157"/>
-                  </a:lnTo>
-                  <a:lnTo>
-                    <a:pt x="3490344" y="2925949"/>
-                  </a:lnTo>
-                  <a:lnTo>
-                    <a:pt x="3567978" y="2930709"/>
-                  </a:lnTo>
-                  <a:lnTo>
-                    <a:pt x="3645612" y="2935439"/>
-                  </a:lnTo>
-                  <a:lnTo>
-                    <a:pt x="3723246" y="2940137"/>
-                  </a:lnTo>
-                  <a:lnTo>
-                    <a:pt x="3800880" y="2944805"/>
-                  </a:lnTo>
-                  <a:lnTo>
-                    <a:pt x="3878514" y="2949442"/>
-                  </a:lnTo>
-                  <a:lnTo>
-                    <a:pt x="3956148" y="2954048"/>
-                  </a:lnTo>
-                  <a:lnTo>
-                    <a:pt x="4033782" y="2958625"/>
-                  </a:lnTo>
-                  <a:lnTo>
-                    <a:pt x="4111416" y="2963171"/>
-                  </a:lnTo>
-                  <a:lnTo>
-                    <a:pt x="4189050" y="2967688"/>
-                  </a:lnTo>
-                  <a:lnTo>
-                    <a:pt x="4266685" y="2972175"/>
-                  </a:lnTo>
-                  <a:lnTo>
-                    <a:pt x="4344319" y="2976633"/>
-                  </a:lnTo>
-                  <a:lnTo>
-                    <a:pt x="4421953" y="2981061"/>
-                  </a:lnTo>
-                  <a:lnTo>
-                    <a:pt x="4499587" y="2985461"/>
-                  </a:lnTo>
-                  <a:lnTo>
-                    <a:pt x="4577221" y="2989832"/>
-                  </a:lnTo>
-                  <a:lnTo>
-                    <a:pt x="4654855" y="2994174"/>
-                  </a:lnTo>
-                  <a:lnTo>
-                    <a:pt x="4732489" y="2998487"/>
-                  </a:lnTo>
-                  <a:lnTo>
-                    <a:pt x="4810123" y="3002773"/>
-                  </a:lnTo>
-                  <a:lnTo>
-                    <a:pt x="4887757" y="3007030"/>
-                  </a:lnTo>
-                  <a:lnTo>
-                    <a:pt x="4965391" y="3011259"/>
-                  </a:lnTo>
-                  <a:lnTo>
-                    <a:pt x="5043025" y="3015461"/>
-                  </a:lnTo>
-                  <a:lnTo>
-                    <a:pt x="5120659" y="3019635"/>
-                  </a:lnTo>
-                  <a:lnTo>
-                    <a:pt x="5198293" y="3023782"/>
-                  </a:lnTo>
-                  <a:lnTo>
-                    <a:pt x="5275927" y="3027902"/>
-                  </a:lnTo>
-                  <a:lnTo>
-                    <a:pt x="5353561" y="3031994"/>
+                    <a:pt x="51253" y="168171"/>
+                  </a:lnTo>
+                  <a:lnTo>
+                    <a:pt x="128887" y="405547"/>
+                  </a:lnTo>
+                  <a:lnTo>
+                    <a:pt x="206521" y="626752"/>
+                  </a:lnTo>
+                  <a:lnTo>
+                    <a:pt x="284155" y="832887"/>
+                  </a:lnTo>
+                  <a:lnTo>
+                    <a:pt x="361790" y="1024980"/>
+                  </a:lnTo>
+                  <a:lnTo>
+                    <a:pt x="439424" y="1203986"/>
+                  </a:lnTo>
+                  <a:lnTo>
+                    <a:pt x="517058" y="1370798"/>
+                  </a:lnTo>
+                  <a:lnTo>
+                    <a:pt x="594692" y="1526246"/>
+                  </a:lnTo>
+                  <a:lnTo>
+                    <a:pt x="672326" y="1671105"/>
+                  </a:lnTo>
+                  <a:lnTo>
+                    <a:pt x="749960" y="1806095"/>
+                  </a:lnTo>
+                  <a:lnTo>
+                    <a:pt x="827594" y="1931889"/>
+                  </a:lnTo>
+                  <a:lnTo>
+                    <a:pt x="905228" y="2049113"/>
+                  </a:lnTo>
+                  <a:lnTo>
+                    <a:pt x="982862" y="2158352"/>
+                  </a:lnTo>
+                  <a:lnTo>
+                    <a:pt x="1060496" y="2260149"/>
+                  </a:lnTo>
+                  <a:lnTo>
+                    <a:pt x="1138130" y="2355011"/>
+                  </a:lnTo>
+                  <a:lnTo>
+                    <a:pt x="1215764" y="2443411"/>
+                  </a:lnTo>
+                  <a:lnTo>
+                    <a:pt x="1293398" y="2525788"/>
+                  </a:lnTo>
+                  <a:lnTo>
+                    <a:pt x="1371032" y="2602554"/>
+                  </a:lnTo>
+                  <a:lnTo>
+                    <a:pt x="1448666" y="2674090"/>
+                  </a:lnTo>
+                  <a:lnTo>
+                    <a:pt x="1526300" y="2740753"/>
+                  </a:lnTo>
+                  <a:lnTo>
+                    <a:pt x="1603934" y="2784488"/>
+                  </a:lnTo>
+                  <a:lnTo>
+                    <a:pt x="1681568" y="2789109"/>
+                  </a:lnTo>
+                  <a:lnTo>
+                    <a:pt x="1759202" y="2793706"/>
+                  </a:lnTo>
+                  <a:lnTo>
+                    <a:pt x="1836836" y="2798278"/>
+                  </a:lnTo>
+                  <a:lnTo>
+                    <a:pt x="1914470" y="2802826"/>
+                  </a:lnTo>
+                  <a:lnTo>
+                    <a:pt x="1992104" y="2807349"/>
+                  </a:lnTo>
+                  <a:lnTo>
+                    <a:pt x="2069739" y="2811849"/>
+                  </a:lnTo>
+                  <a:lnTo>
+                    <a:pt x="2147373" y="2816324"/>
+                  </a:lnTo>
+                  <a:lnTo>
+                    <a:pt x="2225007" y="2820776"/>
+                  </a:lnTo>
+                  <a:lnTo>
+                    <a:pt x="2302641" y="2825204"/>
+                  </a:lnTo>
+                  <a:lnTo>
+                    <a:pt x="2380275" y="2829608"/>
+                  </a:lnTo>
+                  <a:lnTo>
+                    <a:pt x="2457909" y="2833989"/>
+                  </a:lnTo>
+                  <a:lnTo>
+                    <a:pt x="2535543" y="2838347"/>
+                  </a:lnTo>
+                  <a:lnTo>
+                    <a:pt x="2613177" y="2842681"/>
+                  </a:lnTo>
+                  <a:lnTo>
+                    <a:pt x="2690811" y="2846993"/>
+                  </a:lnTo>
+                  <a:lnTo>
+                    <a:pt x="2768445" y="2851281"/>
+                  </a:lnTo>
+                  <a:lnTo>
+                    <a:pt x="2846079" y="2855547"/>
+                  </a:lnTo>
+                  <a:lnTo>
+                    <a:pt x="2923713" y="2859790"/>
+                  </a:lnTo>
+                  <a:lnTo>
+                    <a:pt x="3001347" y="2864010"/>
+                  </a:lnTo>
+                  <a:lnTo>
+                    <a:pt x="3078981" y="2868208"/>
+                  </a:lnTo>
+                  <a:lnTo>
+                    <a:pt x="3156615" y="2872383"/>
+                  </a:lnTo>
+                  <a:lnTo>
+                    <a:pt x="3234249" y="2876537"/>
+                  </a:lnTo>
+                  <a:lnTo>
+                    <a:pt x="3311883" y="2880668"/>
+                  </a:lnTo>
+                  <a:lnTo>
+                    <a:pt x="3389517" y="2884777"/>
+                  </a:lnTo>
+                  <a:lnTo>
+                    <a:pt x="3467151" y="2888864"/>
+                  </a:lnTo>
+                  <a:lnTo>
+                    <a:pt x="3544785" y="2892930"/>
+                  </a:lnTo>
+                  <a:lnTo>
+                    <a:pt x="3622419" y="2896974"/>
+                  </a:lnTo>
+                  <a:lnTo>
+                    <a:pt x="3700053" y="2900996"/>
+                  </a:lnTo>
+                  <a:lnTo>
+                    <a:pt x="3777687" y="2904997"/>
+                  </a:lnTo>
+                  <a:lnTo>
+                    <a:pt x="3855322" y="2908977"/>
+                  </a:lnTo>
+                  <a:lnTo>
+                    <a:pt x="3932956" y="2912935"/>
+                  </a:lnTo>
+                  <a:lnTo>
+                    <a:pt x="4010590" y="2916873"/>
+                  </a:lnTo>
+                  <a:lnTo>
+                    <a:pt x="4088224" y="2920789"/>
+                  </a:lnTo>
+                  <a:lnTo>
+                    <a:pt x="4165858" y="2924685"/>
+                  </a:lnTo>
+                  <a:lnTo>
+                    <a:pt x="4243492" y="2928560"/>
+                  </a:lnTo>
+                  <a:lnTo>
+                    <a:pt x="4321126" y="2932414"/>
+                  </a:lnTo>
+                  <a:lnTo>
+                    <a:pt x="4398760" y="2936248"/>
+                  </a:lnTo>
+                  <a:lnTo>
+                    <a:pt x="4476394" y="2940061"/>
+                  </a:lnTo>
+                  <a:lnTo>
+                    <a:pt x="4554028" y="2943854"/>
+                  </a:lnTo>
+                  <a:lnTo>
+                    <a:pt x="4631662" y="2947627"/>
+                  </a:lnTo>
+                  <a:lnTo>
+                    <a:pt x="4709296" y="2951380"/>
+                  </a:lnTo>
+                  <a:lnTo>
+                    <a:pt x="4786930" y="2955112"/>
+                  </a:lnTo>
+                  <a:lnTo>
+                    <a:pt x="4864564" y="2958825"/>
+                  </a:lnTo>
+                  <a:lnTo>
+                    <a:pt x="4942198" y="2962518"/>
+                  </a:lnTo>
+                  <a:lnTo>
+                    <a:pt x="5019832" y="2966192"/>
+                  </a:lnTo>
+                  <a:lnTo>
+                    <a:pt x="5097466" y="2969846"/>
+                  </a:lnTo>
+                  <a:lnTo>
+                    <a:pt x="5175100" y="2973480"/>
+                  </a:lnTo>
+                  <a:lnTo>
+                    <a:pt x="5252734" y="2977095"/>
+                  </a:lnTo>
+                  <a:lnTo>
+                    <a:pt x="5330368" y="2980691"/>
+                  </a:lnTo>
+                  <a:lnTo>
+                    <a:pt x="5408002" y="2984268"/>
+                  </a:lnTo>
+                  <a:lnTo>
+                    <a:pt x="5485636" y="2987826"/>
+                  </a:lnTo>
+                  <a:lnTo>
+                    <a:pt x="5563271" y="2991365"/>
                   </a:lnTo>
                 </a:path>
               </a:pathLst>
@@ -3769,297 +3784,297 @@
           </p:nvSpPr>
           <p:spPr>
             <a:xfrm>
-              <a:off x="817517" y="4390805"/>
-              <a:ext cx="7370972" cy="1145064"/>
+              <a:off x="817517" y="4451572"/>
+              <a:ext cx="7370972" cy="1074376"/>
             </a:xfrm>
             <a:custGeom>
               <a:avLst/>
               <a:pathLst>
-                <a:path w="7370972" h="1145064">
+                <a:path w="7370972" h="1074376">
                   <a:moveTo>
-                    <a:pt x="7370972" y="1145064"/>
+                    <a:pt x="7370972" y="1074376"/>
                   </a:moveTo>
                   <a:lnTo>
-                    <a:pt x="7293338" y="1143933"/>
-                  </a:lnTo>
-                  <a:lnTo>
-                    <a:pt x="7215704" y="1142707"/>
-                  </a:lnTo>
-                  <a:lnTo>
-                    <a:pt x="7138070" y="1141376"/>
-                  </a:lnTo>
-                  <a:lnTo>
-                    <a:pt x="7060436" y="1139932"/>
-                  </a:lnTo>
-                  <a:lnTo>
-                    <a:pt x="6982802" y="1138366"/>
-                  </a:lnTo>
-                  <a:lnTo>
-                    <a:pt x="6905168" y="1136667"/>
-                  </a:lnTo>
-                  <a:lnTo>
-                    <a:pt x="6827534" y="1134824"/>
-                  </a:lnTo>
-                  <a:lnTo>
-                    <a:pt x="6749900" y="1132825"/>
-                  </a:lnTo>
-                  <a:lnTo>
-                    <a:pt x="6672266" y="1130657"/>
-                  </a:lnTo>
-                  <a:lnTo>
-                    <a:pt x="6594632" y="1128304"/>
-                  </a:lnTo>
-                  <a:lnTo>
-                    <a:pt x="6516998" y="1125752"/>
-                  </a:lnTo>
-                  <a:lnTo>
-                    <a:pt x="6439364" y="1122984"/>
-                  </a:lnTo>
-                  <a:lnTo>
-                    <a:pt x="6361730" y="1119980"/>
-                  </a:lnTo>
-                  <a:lnTo>
-                    <a:pt x="6284096" y="1116723"/>
-                  </a:lnTo>
-                  <a:lnTo>
-                    <a:pt x="6206462" y="1113188"/>
-                  </a:lnTo>
-                  <a:lnTo>
-                    <a:pt x="6128827" y="1109355"/>
-                  </a:lnTo>
-                  <a:lnTo>
-                    <a:pt x="6051193" y="1105196"/>
-                  </a:lnTo>
-                  <a:lnTo>
-                    <a:pt x="5973559" y="1100684"/>
-                  </a:lnTo>
-                  <a:lnTo>
-                    <a:pt x="5895925" y="1095790"/>
-                  </a:lnTo>
-                  <a:lnTo>
-                    <a:pt x="5818291" y="1090481"/>
-                  </a:lnTo>
-                  <a:lnTo>
-                    <a:pt x="5740657" y="1084722"/>
-                  </a:lnTo>
-                  <a:lnTo>
-                    <a:pt x="5663023" y="1078475"/>
-                  </a:lnTo>
-                  <a:lnTo>
-                    <a:pt x="5585389" y="1071697"/>
-                  </a:lnTo>
-                  <a:lnTo>
-                    <a:pt x="5507755" y="1064345"/>
-                  </a:lnTo>
-                  <a:lnTo>
-                    <a:pt x="5430121" y="1056370"/>
-                  </a:lnTo>
-                  <a:lnTo>
-                    <a:pt x="5352487" y="1047719"/>
-                  </a:lnTo>
-                  <a:lnTo>
-                    <a:pt x="5274853" y="1038333"/>
-                  </a:lnTo>
-                  <a:lnTo>
-                    <a:pt x="5197219" y="1028152"/>
-                  </a:lnTo>
-                  <a:lnTo>
-                    <a:pt x="5119585" y="1017108"/>
-                  </a:lnTo>
-                  <a:lnTo>
-                    <a:pt x="5041951" y="1005127"/>
-                  </a:lnTo>
-                  <a:lnTo>
-                    <a:pt x="4964317" y="992131"/>
-                  </a:lnTo>
-                  <a:lnTo>
-                    <a:pt x="4886683" y="978032"/>
-                  </a:lnTo>
-                  <a:lnTo>
-                    <a:pt x="4809049" y="962738"/>
-                  </a:lnTo>
-                  <a:lnTo>
-                    <a:pt x="4731415" y="946147"/>
-                  </a:lnTo>
-                  <a:lnTo>
-                    <a:pt x="4653781" y="928149"/>
-                  </a:lnTo>
-                  <a:lnTo>
-                    <a:pt x="4576147" y="908625"/>
-                  </a:lnTo>
-                  <a:lnTo>
-                    <a:pt x="4498513" y="887446"/>
-                  </a:lnTo>
-                  <a:lnTo>
-                    <a:pt x="4420879" y="864471"/>
-                  </a:lnTo>
-                  <a:lnTo>
-                    <a:pt x="4343244" y="839547"/>
-                  </a:lnTo>
-                  <a:lnTo>
-                    <a:pt x="4265610" y="812511"/>
-                  </a:lnTo>
-                  <a:lnTo>
-                    <a:pt x="4187976" y="783181"/>
-                  </a:lnTo>
-                  <a:lnTo>
-                    <a:pt x="4110342" y="751365"/>
-                  </a:lnTo>
-                  <a:lnTo>
-                    <a:pt x="4032708" y="716851"/>
-                  </a:lnTo>
-                  <a:lnTo>
-                    <a:pt x="3955074" y="679411"/>
-                  </a:lnTo>
-                  <a:lnTo>
-                    <a:pt x="3877440" y="638795"/>
-                  </a:lnTo>
-                  <a:lnTo>
-                    <a:pt x="3799806" y="594736"/>
-                  </a:lnTo>
-                  <a:lnTo>
-                    <a:pt x="3722172" y="546941"/>
-                  </a:lnTo>
-                  <a:lnTo>
-                    <a:pt x="3644538" y="495093"/>
-                  </a:lnTo>
-                  <a:lnTo>
-                    <a:pt x="3566904" y="438849"/>
-                  </a:lnTo>
-                  <a:lnTo>
-                    <a:pt x="3489270" y="377836"/>
-                  </a:lnTo>
-                  <a:lnTo>
-                    <a:pt x="3411636" y="311649"/>
-                  </a:lnTo>
-                  <a:lnTo>
-                    <a:pt x="3334002" y="284876"/>
-                  </a:lnTo>
-                  <a:lnTo>
-                    <a:pt x="3256368" y="279116"/>
-                  </a:lnTo>
-                  <a:lnTo>
-                    <a:pt x="3178734" y="273318"/>
-                  </a:lnTo>
-                  <a:lnTo>
-                    <a:pt x="3101100" y="267481"/>
-                  </a:lnTo>
-                  <a:lnTo>
-                    <a:pt x="3023466" y="261606"/>
-                  </a:lnTo>
-                  <a:lnTo>
-                    <a:pt x="2945832" y="255693"/>
-                  </a:lnTo>
-                  <a:lnTo>
-                    <a:pt x="2868198" y="249740"/>
-                  </a:lnTo>
-                  <a:lnTo>
-                    <a:pt x="2790564" y="243748"/>
-                  </a:lnTo>
-                  <a:lnTo>
-                    <a:pt x="2712930" y="237717"/>
-                  </a:lnTo>
-                  <a:lnTo>
-                    <a:pt x="2635295" y="231646"/>
-                  </a:lnTo>
-                  <a:lnTo>
-                    <a:pt x="2557661" y="225534"/>
-                  </a:lnTo>
-                  <a:lnTo>
-                    <a:pt x="2480027" y="219383"/>
-                  </a:lnTo>
-                  <a:lnTo>
-                    <a:pt x="2402393" y="213191"/>
-                  </a:lnTo>
-                  <a:lnTo>
-                    <a:pt x="2324759" y="206958"/>
-                  </a:lnTo>
-                  <a:lnTo>
-                    <a:pt x="2247125" y="200684"/>
-                  </a:lnTo>
-                  <a:lnTo>
-                    <a:pt x="2169491" y="194369"/>
-                  </a:lnTo>
-                  <a:lnTo>
-                    <a:pt x="2091857" y="188012"/>
-                  </a:lnTo>
-                  <a:lnTo>
-                    <a:pt x="2014223" y="181613"/>
-                  </a:lnTo>
-                  <a:lnTo>
-                    <a:pt x="1936589" y="175171"/>
-                  </a:lnTo>
-                  <a:lnTo>
-                    <a:pt x="1858955" y="168688"/>
-                  </a:lnTo>
-                  <a:lnTo>
-                    <a:pt x="1781321" y="162162"/>
-                  </a:lnTo>
-                  <a:lnTo>
-                    <a:pt x="1703687" y="155592"/>
-                  </a:lnTo>
-                  <a:lnTo>
-                    <a:pt x="1626053" y="148979"/>
-                  </a:lnTo>
-                  <a:lnTo>
-                    <a:pt x="1548419" y="142323"/>
-                  </a:lnTo>
-                  <a:lnTo>
-                    <a:pt x="1470785" y="135623"/>
-                  </a:lnTo>
-                  <a:lnTo>
-                    <a:pt x="1393151" y="128879"/>
-                  </a:lnTo>
-                  <a:lnTo>
-                    <a:pt x="1315517" y="122090"/>
-                  </a:lnTo>
-                  <a:lnTo>
-                    <a:pt x="1237883" y="115256"/>
-                  </a:lnTo>
-                  <a:lnTo>
-                    <a:pt x="1160249" y="108377"/>
-                  </a:lnTo>
-                  <a:lnTo>
-                    <a:pt x="1082615" y="101453"/>
-                  </a:lnTo>
-                  <a:lnTo>
-                    <a:pt x="1004981" y="94484"/>
-                  </a:lnTo>
-                  <a:lnTo>
-                    <a:pt x="927346" y="87468"/>
-                  </a:lnTo>
-                  <a:lnTo>
-                    <a:pt x="849712" y="80406"/>
-                  </a:lnTo>
-                  <a:lnTo>
-                    <a:pt x="772078" y="73298"/>
-                  </a:lnTo>
-                  <a:lnTo>
-                    <a:pt x="694444" y="66142"/>
-                  </a:lnTo>
-                  <a:lnTo>
-                    <a:pt x="616810" y="58940"/>
-                  </a:lnTo>
-                  <a:lnTo>
-                    <a:pt x="539176" y="51690"/>
-                  </a:lnTo>
-                  <a:lnTo>
-                    <a:pt x="461542" y="44392"/>
-                  </a:lnTo>
-                  <a:lnTo>
-                    <a:pt x="383908" y="37046"/>
-                  </a:lnTo>
-                  <a:lnTo>
-                    <a:pt x="306274" y="29651"/>
-                  </a:lnTo>
-                  <a:lnTo>
-                    <a:pt x="228640" y="22208"/>
-                  </a:lnTo>
-                  <a:lnTo>
-                    <a:pt x="151006" y="14716"/>
-                  </a:lnTo>
-                  <a:lnTo>
-                    <a:pt x="73372" y="7174"/>
+                    <a:pt x="7293338" y="1072676"/>
+                  </a:lnTo>
+                  <a:lnTo>
+                    <a:pt x="7215704" y="1070851"/>
+                  </a:lnTo>
+                  <a:lnTo>
+                    <a:pt x="7138070" y="1068894"/>
+                  </a:lnTo>
+                  <a:lnTo>
+                    <a:pt x="7060436" y="1066793"/>
+                  </a:lnTo>
+                  <a:lnTo>
+                    <a:pt x="6982802" y="1064538"/>
+                  </a:lnTo>
+                  <a:lnTo>
+                    <a:pt x="6905168" y="1062118"/>
+                  </a:lnTo>
+                  <a:lnTo>
+                    <a:pt x="6827534" y="1059522"/>
+                  </a:lnTo>
+                  <a:lnTo>
+                    <a:pt x="6749900" y="1056736"/>
+                  </a:lnTo>
+                  <a:lnTo>
+                    <a:pt x="6672266" y="1053746"/>
+                  </a:lnTo>
+                  <a:lnTo>
+                    <a:pt x="6594632" y="1050538"/>
+                  </a:lnTo>
+                  <a:lnTo>
+                    <a:pt x="6516998" y="1047095"/>
+                  </a:lnTo>
+                  <a:lnTo>
+                    <a:pt x="6439364" y="1043400"/>
+                  </a:lnTo>
+                  <a:lnTo>
+                    <a:pt x="6361730" y="1039436"/>
+                  </a:lnTo>
+                  <a:lnTo>
+                    <a:pt x="6284096" y="1035181"/>
+                  </a:lnTo>
+                  <a:lnTo>
+                    <a:pt x="6206462" y="1030615"/>
+                  </a:lnTo>
+                  <a:lnTo>
+                    <a:pt x="6128827" y="1025716"/>
+                  </a:lnTo>
+                  <a:lnTo>
+                    <a:pt x="6051193" y="1020459"/>
+                  </a:lnTo>
+                  <a:lnTo>
+                    <a:pt x="5973559" y="1014817"/>
+                  </a:lnTo>
+                  <a:lnTo>
+                    <a:pt x="5895925" y="1008762"/>
+                  </a:lnTo>
+                  <a:lnTo>
+                    <a:pt x="5818291" y="1002266"/>
+                  </a:lnTo>
+                  <a:lnTo>
+                    <a:pt x="5740657" y="995294"/>
+                  </a:lnTo>
+                  <a:lnTo>
+                    <a:pt x="5663023" y="987812"/>
+                  </a:lnTo>
+                  <a:lnTo>
+                    <a:pt x="5585389" y="979784"/>
+                  </a:lnTo>
+                  <a:lnTo>
+                    <a:pt x="5507755" y="971169"/>
+                  </a:lnTo>
+                  <a:lnTo>
+                    <a:pt x="5430121" y="961923"/>
+                  </a:lnTo>
+                  <a:lnTo>
+                    <a:pt x="5352487" y="952002"/>
+                  </a:lnTo>
+                  <a:lnTo>
+                    <a:pt x="5274853" y="941356"/>
+                  </a:lnTo>
+                  <a:lnTo>
+                    <a:pt x="5197219" y="929932"/>
+                  </a:lnTo>
+                  <a:lnTo>
+                    <a:pt x="5119585" y="917672"/>
+                  </a:lnTo>
+                  <a:lnTo>
+                    <a:pt x="5041951" y="904516"/>
+                  </a:lnTo>
+                  <a:lnTo>
+                    <a:pt x="4964317" y="890398"/>
+                  </a:lnTo>
+                  <a:lnTo>
+                    <a:pt x="4886683" y="875249"/>
+                  </a:lnTo>
+                  <a:lnTo>
+                    <a:pt x="4809049" y="858991"/>
+                  </a:lnTo>
+                  <a:lnTo>
+                    <a:pt x="4731415" y="841546"/>
+                  </a:lnTo>
+                  <a:lnTo>
+                    <a:pt x="4653781" y="822825"/>
+                  </a:lnTo>
+                  <a:lnTo>
+                    <a:pt x="4576147" y="802735"/>
+                  </a:lnTo>
+                  <a:lnTo>
+                    <a:pt x="4498513" y="781177"/>
+                  </a:lnTo>
+                  <a:lnTo>
+                    <a:pt x="4420879" y="758042"/>
+                  </a:lnTo>
+                  <a:lnTo>
+                    <a:pt x="4343244" y="733217"/>
+                  </a:lnTo>
+                  <a:lnTo>
+                    <a:pt x="4265610" y="706576"/>
+                  </a:lnTo>
+                  <a:lnTo>
+                    <a:pt x="4187976" y="677988"/>
+                  </a:lnTo>
+                  <a:lnTo>
+                    <a:pt x="4110342" y="647311"/>
+                  </a:lnTo>
+                  <a:lnTo>
+                    <a:pt x="4032708" y="614390"/>
+                  </a:lnTo>
+                  <a:lnTo>
+                    <a:pt x="3955074" y="579063"/>
+                  </a:lnTo>
+                  <a:lnTo>
+                    <a:pt x="3877440" y="541154"/>
+                  </a:lnTo>
+                  <a:lnTo>
+                    <a:pt x="3799806" y="500473"/>
+                  </a:lnTo>
+                  <a:lnTo>
+                    <a:pt x="3722172" y="456818"/>
+                  </a:lnTo>
+                  <a:lnTo>
+                    <a:pt x="3644538" y="409972"/>
+                  </a:lnTo>
+                  <a:lnTo>
+                    <a:pt x="3566904" y="359701"/>
+                  </a:lnTo>
+                  <a:lnTo>
+                    <a:pt x="3489270" y="305755"/>
+                  </a:lnTo>
+                  <a:lnTo>
+                    <a:pt x="3411636" y="247865"/>
+                  </a:lnTo>
+                  <a:lnTo>
+                    <a:pt x="3334002" y="224833"/>
+                  </a:lnTo>
+                  <a:lnTo>
+                    <a:pt x="3256368" y="220162"/>
+                  </a:lnTo>
+                  <a:lnTo>
+                    <a:pt x="3178734" y="215467"/>
+                  </a:lnTo>
+                  <a:lnTo>
+                    <a:pt x="3101100" y="210746"/>
+                  </a:lnTo>
+                  <a:lnTo>
+                    <a:pt x="3023466" y="206000"/>
+                  </a:lnTo>
+                  <a:lnTo>
+                    <a:pt x="2945832" y="201228"/>
+                  </a:lnTo>
+                  <a:lnTo>
+                    <a:pt x="2868198" y="196431"/>
+                  </a:lnTo>
+                  <a:lnTo>
+                    <a:pt x="2790564" y="191609"/>
+                  </a:lnTo>
+                  <a:lnTo>
+                    <a:pt x="2712930" y="186760"/>
+                  </a:lnTo>
+                  <a:lnTo>
+                    <a:pt x="2635295" y="181886"/>
+                  </a:lnTo>
+                  <a:lnTo>
+                    <a:pt x="2557661" y="176985"/>
+                  </a:lnTo>
+                  <a:lnTo>
+                    <a:pt x="2480027" y="172058"/>
+                  </a:lnTo>
+                  <a:lnTo>
+                    <a:pt x="2402393" y="167105"/>
+                  </a:lnTo>
+                  <a:lnTo>
+                    <a:pt x="2324759" y="162125"/>
+                  </a:lnTo>
+                  <a:lnTo>
+                    <a:pt x="2247125" y="157119"/>
+                  </a:lnTo>
+                  <a:lnTo>
+                    <a:pt x="2169491" y="152086"/>
+                  </a:lnTo>
+                  <a:lnTo>
+                    <a:pt x="2091857" y="147026"/>
+                  </a:lnTo>
+                  <a:lnTo>
+                    <a:pt x="2014223" y="141939"/>
+                  </a:lnTo>
+                  <a:lnTo>
+                    <a:pt x="1936589" y="136825"/>
+                  </a:lnTo>
+                  <a:lnTo>
+                    <a:pt x="1858955" y="131683"/>
+                  </a:lnTo>
+                  <a:lnTo>
+                    <a:pt x="1781321" y="126514"/>
+                  </a:lnTo>
+                  <a:lnTo>
+                    <a:pt x="1703687" y="121317"/>
+                  </a:lnTo>
+                  <a:lnTo>
+                    <a:pt x="1626053" y="116092"/>
+                  </a:lnTo>
+                  <a:lnTo>
+                    <a:pt x="1548419" y="110839"/>
+                  </a:lnTo>
+                  <a:lnTo>
+                    <a:pt x="1470785" y="105559"/>
+                  </a:lnTo>
+                  <a:lnTo>
+                    <a:pt x="1393151" y="100250"/>
+                  </a:lnTo>
+                  <a:lnTo>
+                    <a:pt x="1315517" y="94912"/>
+                  </a:lnTo>
+                  <a:lnTo>
+                    <a:pt x="1237883" y="89546"/>
+                  </a:lnTo>
+                  <a:lnTo>
+                    <a:pt x="1160249" y="84152"/>
+                  </a:lnTo>
+                  <a:lnTo>
+                    <a:pt x="1082615" y="78728"/>
+                  </a:lnTo>
+                  <a:lnTo>
+                    <a:pt x="1004981" y="73275"/>
+                  </a:lnTo>
+                  <a:lnTo>
+                    <a:pt x="927346" y="67794"/>
+                  </a:lnTo>
+                  <a:lnTo>
+                    <a:pt x="849712" y="62283"/>
+                  </a:lnTo>
+                  <a:lnTo>
+                    <a:pt x="772078" y="56742"/>
+                  </a:lnTo>
+                  <a:lnTo>
+                    <a:pt x="694444" y="51172"/>
+                  </a:lnTo>
+                  <a:lnTo>
+                    <a:pt x="616810" y="45572"/>
+                  </a:lnTo>
+                  <a:lnTo>
+                    <a:pt x="539176" y="39942"/>
+                  </a:lnTo>
+                  <a:lnTo>
+                    <a:pt x="461542" y="34281"/>
+                  </a:lnTo>
+                  <a:lnTo>
+                    <a:pt x="383908" y="28591"/>
+                  </a:lnTo>
+                  <a:lnTo>
+                    <a:pt x="306274" y="22870"/>
+                  </a:lnTo>
+                  <a:lnTo>
+                    <a:pt x="228640" y="17119"/>
+                  </a:lnTo>
+                  <a:lnTo>
+                    <a:pt x="151006" y="11336"/>
+                  </a:lnTo>
+                  <a:lnTo>
+                    <a:pt x="73372" y="5523"/>
                   </a:lnTo>
                   <a:lnTo>
                     <a:pt x="0" y="0"/>
@@ -4082,267 +4097,285 @@
           </p:nvSpPr>
           <p:spPr>
             <a:xfrm>
-              <a:off x="1670574" y="1896563"/>
-              <a:ext cx="6517915" cy="3561662"/>
+              <a:off x="1267826" y="1896563"/>
+              <a:ext cx="6920664" cy="3528628"/>
             </a:xfrm>
             <a:custGeom>
               <a:avLst/>
               <a:pathLst>
-                <a:path w="6517915" h="3561662">
+                <a:path w="6920664" h="3528628">
                   <a:moveTo>
                     <a:pt x="0" y="0"/>
                   </a:moveTo>
                   <a:lnTo>
-                    <a:pt x="74290" y="150675"/>
-                  </a:lnTo>
-                  <a:lnTo>
-                    <a:pt x="151924" y="301357"/>
-                  </a:lnTo>
-                  <a:lnTo>
-                    <a:pt x="229558" y="445556"/>
-                  </a:lnTo>
-                  <a:lnTo>
-                    <a:pt x="307192" y="583550"/>
-                  </a:lnTo>
-                  <a:lnTo>
-                    <a:pt x="384826" y="715607"/>
-                  </a:lnTo>
-                  <a:lnTo>
-                    <a:pt x="462460" y="841982"/>
-                  </a:lnTo>
-                  <a:lnTo>
-                    <a:pt x="540094" y="962918"/>
-                  </a:lnTo>
-                  <a:lnTo>
-                    <a:pt x="617728" y="1078652"/>
-                  </a:lnTo>
-                  <a:lnTo>
-                    <a:pt x="695362" y="1189405"/>
-                  </a:lnTo>
-                  <a:lnTo>
-                    <a:pt x="772996" y="1295393"/>
-                  </a:lnTo>
-                  <a:lnTo>
-                    <a:pt x="850630" y="1396821"/>
-                  </a:lnTo>
-                  <a:lnTo>
-                    <a:pt x="928264" y="1493884"/>
-                  </a:lnTo>
-                  <a:lnTo>
-                    <a:pt x="1005898" y="1586771"/>
-                  </a:lnTo>
-                  <a:lnTo>
-                    <a:pt x="1083532" y="1675661"/>
-                  </a:lnTo>
-                  <a:lnTo>
-                    <a:pt x="1161166" y="1760727"/>
-                  </a:lnTo>
-                  <a:lnTo>
-                    <a:pt x="1238800" y="1842132"/>
-                  </a:lnTo>
-                  <a:lnTo>
-                    <a:pt x="1316434" y="1920035"/>
-                  </a:lnTo>
-                  <a:lnTo>
-                    <a:pt x="1394068" y="1994585"/>
-                  </a:lnTo>
-                  <a:lnTo>
-                    <a:pt x="1471702" y="2065928"/>
-                  </a:lnTo>
-                  <a:lnTo>
-                    <a:pt x="1549336" y="2134201"/>
-                  </a:lnTo>
-                  <a:lnTo>
-                    <a:pt x="1626970" y="2199536"/>
-                  </a:lnTo>
-                  <a:lnTo>
-                    <a:pt x="1704604" y="2262061"/>
-                  </a:lnTo>
-                  <a:lnTo>
-                    <a:pt x="1782238" y="2321894"/>
-                  </a:lnTo>
-                  <a:lnTo>
-                    <a:pt x="1859873" y="2379154"/>
-                  </a:lnTo>
-                  <a:lnTo>
-                    <a:pt x="1937507" y="2433949"/>
-                  </a:lnTo>
-                  <a:lnTo>
-                    <a:pt x="2015141" y="2486387"/>
-                  </a:lnTo>
-                  <a:lnTo>
-                    <a:pt x="2092775" y="2536569"/>
-                  </a:lnTo>
-                  <a:lnTo>
-                    <a:pt x="2170409" y="2584591"/>
-                  </a:lnTo>
-                  <a:lnTo>
-                    <a:pt x="2248043" y="2630547"/>
-                  </a:lnTo>
-                  <a:lnTo>
-                    <a:pt x="2325677" y="2674526"/>
-                  </a:lnTo>
-                  <a:lnTo>
-                    <a:pt x="2403311" y="2716612"/>
-                  </a:lnTo>
-                  <a:lnTo>
-                    <a:pt x="2480945" y="2756888"/>
-                  </a:lnTo>
-                  <a:lnTo>
-                    <a:pt x="2558579" y="2795430"/>
-                  </a:lnTo>
-                  <a:lnTo>
-                    <a:pt x="2636213" y="2832314"/>
-                  </a:lnTo>
-                  <a:lnTo>
-                    <a:pt x="2713847" y="2867611"/>
-                  </a:lnTo>
-                  <a:lnTo>
-                    <a:pt x="2791481" y="2901390"/>
-                  </a:lnTo>
-                  <a:lnTo>
-                    <a:pt x="2869115" y="2933715"/>
-                  </a:lnTo>
-                  <a:lnTo>
-                    <a:pt x="2946749" y="2964649"/>
-                  </a:lnTo>
-                  <a:lnTo>
-                    <a:pt x="3024383" y="2994252"/>
-                  </a:lnTo>
-                  <a:lnTo>
-                    <a:pt x="3102017" y="3022581"/>
-                  </a:lnTo>
-                  <a:lnTo>
-                    <a:pt x="3179651" y="3049691"/>
-                  </a:lnTo>
-                  <a:lnTo>
-                    <a:pt x="3257285" y="3075635"/>
-                  </a:lnTo>
-                  <a:lnTo>
-                    <a:pt x="3334919" y="3100462"/>
-                  </a:lnTo>
-                  <a:lnTo>
-                    <a:pt x="3412553" y="3124222"/>
-                  </a:lnTo>
-                  <a:lnTo>
-                    <a:pt x="3490187" y="3146958"/>
-                  </a:lnTo>
-                  <a:lnTo>
-                    <a:pt x="3567822" y="3168717"/>
-                  </a:lnTo>
-                  <a:lnTo>
-                    <a:pt x="3645456" y="3189539"/>
-                  </a:lnTo>
-                  <a:lnTo>
-                    <a:pt x="3723090" y="3209466"/>
-                  </a:lnTo>
-                  <a:lnTo>
-                    <a:pt x="3800724" y="3228535"/>
-                  </a:lnTo>
-                  <a:lnTo>
-                    <a:pt x="3878358" y="3246783"/>
-                  </a:lnTo>
-                  <a:lnTo>
-                    <a:pt x="3955992" y="3264247"/>
-                  </a:lnTo>
-                  <a:lnTo>
-                    <a:pt x="4033626" y="3280958"/>
-                  </a:lnTo>
-                  <a:lnTo>
-                    <a:pt x="4111260" y="3296951"/>
-                  </a:lnTo>
-                  <a:lnTo>
-                    <a:pt x="4188894" y="3312256"/>
-                  </a:lnTo>
-                  <a:lnTo>
-                    <a:pt x="4266528" y="3326902"/>
-                  </a:lnTo>
-                  <a:lnTo>
-                    <a:pt x="4344162" y="3340918"/>
-                  </a:lnTo>
-                  <a:lnTo>
-                    <a:pt x="4421796" y="3354331"/>
-                  </a:lnTo>
-                  <a:lnTo>
-                    <a:pt x="4499430" y="3367167"/>
-                  </a:lnTo>
-                  <a:lnTo>
-                    <a:pt x="4577064" y="3379450"/>
-                  </a:lnTo>
-                  <a:lnTo>
-                    <a:pt x="4654698" y="3391205"/>
-                  </a:lnTo>
-                  <a:lnTo>
-                    <a:pt x="4732332" y="3402454"/>
-                  </a:lnTo>
-                  <a:lnTo>
-                    <a:pt x="4809966" y="3413219"/>
-                  </a:lnTo>
-                  <a:lnTo>
-                    <a:pt x="4887600" y="3423521"/>
-                  </a:lnTo>
-                  <a:lnTo>
-                    <a:pt x="4965234" y="3433380"/>
-                  </a:lnTo>
-                  <a:lnTo>
-                    <a:pt x="5042868" y="3442814"/>
-                  </a:lnTo>
-                  <a:lnTo>
-                    <a:pt x="5120502" y="3451843"/>
-                  </a:lnTo>
-                  <a:lnTo>
-                    <a:pt x="5198136" y="3460483"/>
-                  </a:lnTo>
-                  <a:lnTo>
-                    <a:pt x="5275771" y="3468751"/>
-                  </a:lnTo>
-                  <a:lnTo>
-                    <a:pt x="5353405" y="3476664"/>
-                  </a:lnTo>
-                  <a:lnTo>
-                    <a:pt x="5431039" y="3484236"/>
-                  </a:lnTo>
-                  <a:lnTo>
-                    <a:pt x="5508673" y="3491482"/>
-                  </a:lnTo>
-                  <a:lnTo>
-                    <a:pt x="5586307" y="3498416"/>
-                  </a:lnTo>
-                  <a:lnTo>
-                    <a:pt x="5663941" y="3505052"/>
-                  </a:lnTo>
-                  <a:lnTo>
-                    <a:pt x="5741575" y="3511403"/>
-                  </a:lnTo>
-                  <a:lnTo>
-                    <a:pt x="5819209" y="3517480"/>
-                  </a:lnTo>
-                  <a:lnTo>
-                    <a:pt x="5896843" y="3523296"/>
-                  </a:lnTo>
-                  <a:lnTo>
-                    <a:pt x="5974477" y="3528862"/>
-                  </a:lnTo>
-                  <a:lnTo>
-                    <a:pt x="6052111" y="3534188"/>
-                  </a:lnTo>
-                  <a:lnTo>
-                    <a:pt x="6129745" y="3539285"/>
-                  </a:lnTo>
-                  <a:lnTo>
-                    <a:pt x="6207379" y="3544162"/>
-                  </a:lnTo>
-                  <a:lnTo>
-                    <a:pt x="6285013" y="3548830"/>
-                  </a:lnTo>
-                  <a:lnTo>
-                    <a:pt x="6362647" y="3553297"/>
-                  </a:lnTo>
-                  <a:lnTo>
-                    <a:pt x="6440281" y="3557571"/>
-                  </a:lnTo>
-                  <a:lnTo>
-                    <a:pt x="6517915" y="3561662"/>
+                    <a:pt x="11234" y="20329"/>
+                  </a:lnTo>
+                  <a:lnTo>
+                    <a:pt x="88868" y="155579"/>
+                  </a:lnTo>
+                  <a:lnTo>
+                    <a:pt x="166502" y="285793"/>
+                  </a:lnTo>
+                  <a:lnTo>
+                    <a:pt x="244136" y="411159"/>
+                  </a:lnTo>
+                  <a:lnTo>
+                    <a:pt x="321770" y="531857"/>
+                  </a:lnTo>
+                  <a:lnTo>
+                    <a:pt x="399404" y="648060"/>
+                  </a:lnTo>
+                  <a:lnTo>
+                    <a:pt x="477038" y="759937"/>
+                  </a:lnTo>
+                  <a:lnTo>
+                    <a:pt x="554672" y="867648"/>
+                  </a:lnTo>
+                  <a:lnTo>
+                    <a:pt x="632306" y="971348"/>
+                  </a:lnTo>
+                  <a:lnTo>
+                    <a:pt x="709940" y="1071187"/>
+                  </a:lnTo>
+                  <a:lnTo>
+                    <a:pt x="787574" y="1167308"/>
+                  </a:lnTo>
+                  <a:lnTo>
+                    <a:pt x="865208" y="1259851"/>
+                  </a:lnTo>
+                  <a:lnTo>
+                    <a:pt x="942842" y="1348947"/>
+                  </a:lnTo>
+                  <a:lnTo>
+                    <a:pt x="1020476" y="1434726"/>
+                  </a:lnTo>
+                  <a:lnTo>
+                    <a:pt x="1098111" y="1517311"/>
+                  </a:lnTo>
+                  <a:lnTo>
+                    <a:pt x="1175745" y="1596821"/>
+                  </a:lnTo>
+                  <a:lnTo>
+                    <a:pt x="1253379" y="1673370"/>
+                  </a:lnTo>
+                  <a:lnTo>
+                    <a:pt x="1331013" y="1747069"/>
+                  </a:lnTo>
+                  <a:lnTo>
+                    <a:pt x="1408647" y="1818023"/>
+                  </a:lnTo>
+                  <a:lnTo>
+                    <a:pt x="1486281" y="1886336"/>
+                  </a:lnTo>
+                  <a:lnTo>
+                    <a:pt x="1563915" y="1952105"/>
+                  </a:lnTo>
+                  <a:lnTo>
+                    <a:pt x="1641549" y="2015425"/>
+                  </a:lnTo>
+                  <a:lnTo>
+                    <a:pt x="1719183" y="2076388"/>
+                  </a:lnTo>
+                  <a:lnTo>
+                    <a:pt x="1796817" y="2135080"/>
+                  </a:lnTo>
+                  <a:lnTo>
+                    <a:pt x="1874451" y="2191587"/>
+                  </a:lnTo>
+                  <a:lnTo>
+                    <a:pt x="1952085" y="2245990"/>
+                  </a:lnTo>
+                  <a:lnTo>
+                    <a:pt x="2029719" y="2298367"/>
+                  </a:lnTo>
+                  <a:lnTo>
+                    <a:pt x="2107353" y="2348794"/>
+                  </a:lnTo>
+                  <a:lnTo>
+                    <a:pt x="2184987" y="2397343"/>
+                  </a:lnTo>
+                  <a:lnTo>
+                    <a:pt x="2262621" y="2444085"/>
+                  </a:lnTo>
+                  <a:lnTo>
+                    <a:pt x="2340255" y="2489086"/>
+                  </a:lnTo>
+                  <a:lnTo>
+                    <a:pt x="2417889" y="2532411"/>
+                  </a:lnTo>
+                  <a:lnTo>
+                    <a:pt x="2495523" y="2574123"/>
+                  </a:lnTo>
+                  <a:lnTo>
+                    <a:pt x="2573157" y="2614283"/>
+                  </a:lnTo>
+                  <a:lnTo>
+                    <a:pt x="2650791" y="2652946"/>
+                  </a:lnTo>
+                  <a:lnTo>
+                    <a:pt x="2728425" y="2690170"/>
+                  </a:lnTo>
+                  <a:lnTo>
+                    <a:pt x="2806060" y="2726008"/>
+                  </a:lnTo>
+                  <a:lnTo>
+                    <a:pt x="2883694" y="2760512"/>
+                  </a:lnTo>
+                  <a:lnTo>
+                    <a:pt x="2961328" y="2793731"/>
+                  </a:lnTo>
+                  <a:lnTo>
+                    <a:pt x="3038962" y="2825713"/>
+                  </a:lnTo>
+                  <a:lnTo>
+                    <a:pt x="3116596" y="2856504"/>
+                  </a:lnTo>
+                  <a:lnTo>
+                    <a:pt x="3194230" y="2886148"/>
+                  </a:lnTo>
+                  <a:lnTo>
+                    <a:pt x="3271864" y="2914689"/>
+                  </a:lnTo>
+                  <a:lnTo>
+                    <a:pt x="3349498" y="2942167"/>
+                  </a:lnTo>
+                  <a:lnTo>
+                    <a:pt x="3427132" y="2968622"/>
+                  </a:lnTo>
+                  <a:lnTo>
+                    <a:pt x="3504766" y="2994091"/>
+                  </a:lnTo>
+                  <a:lnTo>
+                    <a:pt x="3582400" y="3018613"/>
+                  </a:lnTo>
+                  <a:lnTo>
+                    <a:pt x="3660034" y="3042221"/>
+                  </a:lnTo>
+                  <a:lnTo>
+                    <a:pt x="3737668" y="3064950"/>
+                  </a:lnTo>
+                  <a:lnTo>
+                    <a:pt x="3815302" y="3086833"/>
+                  </a:lnTo>
+                  <a:lnTo>
+                    <a:pt x="3892936" y="3107901"/>
+                  </a:lnTo>
+                  <a:lnTo>
+                    <a:pt x="3970570" y="3128185"/>
+                  </a:lnTo>
+                  <a:lnTo>
+                    <a:pt x="4048204" y="3147713"/>
+                  </a:lnTo>
+                  <a:lnTo>
+                    <a:pt x="4125838" y="3166515"/>
+                  </a:lnTo>
+                  <a:lnTo>
+                    <a:pt x="4203472" y="3184616"/>
+                  </a:lnTo>
+                  <a:lnTo>
+                    <a:pt x="4281106" y="3202043"/>
+                  </a:lnTo>
+                  <a:lnTo>
+                    <a:pt x="4358740" y="3218821"/>
+                  </a:lnTo>
+                  <a:lnTo>
+                    <a:pt x="4436374" y="3234975"/>
+                  </a:lnTo>
+                  <a:lnTo>
+                    <a:pt x="4514009" y="3250527"/>
+                  </a:lnTo>
+                  <a:lnTo>
+                    <a:pt x="4591643" y="3265500"/>
+                  </a:lnTo>
+                  <a:lnTo>
+                    <a:pt x="4669277" y="3279915"/>
+                  </a:lnTo>
+                  <a:lnTo>
+                    <a:pt x="4746911" y="3293794"/>
+                  </a:lnTo>
+                  <a:lnTo>
+                    <a:pt x="4824545" y="3307156"/>
+                  </a:lnTo>
+                  <a:lnTo>
+                    <a:pt x="4902179" y="3320020"/>
+                  </a:lnTo>
+                  <a:lnTo>
+                    <a:pt x="4979813" y="3332405"/>
+                  </a:lnTo>
+                  <a:lnTo>
+                    <a:pt x="5057447" y="3344330"/>
+                  </a:lnTo>
+                  <a:lnTo>
+                    <a:pt x="5135081" y="3355810"/>
+                  </a:lnTo>
+                  <a:lnTo>
+                    <a:pt x="5212715" y="3366862"/>
+                  </a:lnTo>
+                  <a:lnTo>
+                    <a:pt x="5290349" y="3377504"/>
+                  </a:lnTo>
+                  <a:lnTo>
+                    <a:pt x="5367983" y="3387748"/>
+                  </a:lnTo>
+                  <a:lnTo>
+                    <a:pt x="5445617" y="3397612"/>
+                  </a:lnTo>
+                  <a:lnTo>
+                    <a:pt x="5523251" y="3407108"/>
+                  </a:lnTo>
+                  <a:lnTo>
+                    <a:pt x="5600885" y="3416251"/>
+                  </a:lnTo>
+                  <a:lnTo>
+                    <a:pt x="5678519" y="3425053"/>
+                  </a:lnTo>
+                  <a:lnTo>
+                    <a:pt x="5756153" y="3433527"/>
+                  </a:lnTo>
+                  <a:lnTo>
+                    <a:pt x="5833787" y="3441686"/>
+                  </a:lnTo>
+                  <a:lnTo>
+                    <a:pt x="5911421" y="3449541"/>
+                  </a:lnTo>
+                  <a:lnTo>
+                    <a:pt x="5989055" y="3457104"/>
+                  </a:lnTo>
+                  <a:lnTo>
+                    <a:pt x="6066689" y="3464385"/>
+                  </a:lnTo>
+                  <a:lnTo>
+                    <a:pt x="6144323" y="3471395"/>
+                  </a:lnTo>
+                  <a:lnTo>
+                    <a:pt x="6221957" y="3478143"/>
+                  </a:lnTo>
+                  <a:lnTo>
+                    <a:pt x="6299592" y="3484641"/>
+                  </a:lnTo>
+                  <a:lnTo>
+                    <a:pt x="6377226" y="3490897"/>
+                  </a:lnTo>
+                  <a:lnTo>
+                    <a:pt x="6454860" y="3496919"/>
+                  </a:lnTo>
+                  <a:lnTo>
+                    <a:pt x="6532494" y="3502718"/>
+                  </a:lnTo>
+                  <a:lnTo>
+                    <a:pt x="6610128" y="3508300"/>
+                  </a:lnTo>
+                  <a:lnTo>
+                    <a:pt x="6687762" y="3513675"/>
+                  </a:lnTo>
+                  <a:lnTo>
+                    <a:pt x="6765396" y="3518849"/>
+                  </a:lnTo>
+                  <a:lnTo>
+                    <a:pt x="6843030" y="3523831"/>
+                  </a:lnTo>
+                  <a:lnTo>
+                    <a:pt x="6920664" y="3528628"/>
                   </a:lnTo>
                 </a:path>
               </a:pathLst>

--- a/docs/plots/carbo/jx_carbo_linsubhr_ratio_throm2.pptx
+++ b/docs/plots/carbo/jx_carbo_linsubhr_ratio_throm2.pptx
@@ -3003,518 +3003,512 @@
           <p:spPr>
             <a:xfrm>
               <a:off x="817517" y="1896563"/>
-              <a:ext cx="7370972" cy="3629386"/>
+              <a:ext cx="7370972" cy="3639306"/>
             </a:xfrm>
             <a:custGeom>
               <a:avLst/>
               <a:pathLst>
-                <a:path w="7370972" h="3629386">
+                <a:path w="7370972" h="3639306">
                   <a:moveTo>
-                    <a:pt x="1807701" y="0"/>
+                    <a:pt x="2017411" y="0"/>
                   </a:moveTo>
                   <a:lnTo>
-                    <a:pt x="1858955" y="168171"/>
-                  </a:lnTo>
-                  <a:lnTo>
-                    <a:pt x="1936589" y="405547"/>
-                  </a:lnTo>
-                  <a:lnTo>
-                    <a:pt x="2014223" y="626752"/>
-                  </a:lnTo>
-                  <a:lnTo>
-                    <a:pt x="2091857" y="832887"/>
-                  </a:lnTo>
-                  <a:lnTo>
-                    <a:pt x="2169491" y="1024980"/>
-                  </a:lnTo>
-                  <a:lnTo>
-                    <a:pt x="2247125" y="1203986"/>
-                  </a:lnTo>
-                  <a:lnTo>
-                    <a:pt x="2324759" y="1370798"/>
-                  </a:lnTo>
-                  <a:lnTo>
-                    <a:pt x="2402393" y="1526246"/>
-                  </a:lnTo>
-                  <a:lnTo>
-                    <a:pt x="2480027" y="1671105"/>
-                  </a:lnTo>
-                  <a:lnTo>
-                    <a:pt x="2557661" y="1806095"/>
-                  </a:lnTo>
-                  <a:lnTo>
-                    <a:pt x="2635295" y="1931889"/>
-                  </a:lnTo>
-                  <a:lnTo>
-                    <a:pt x="2712930" y="2049113"/>
-                  </a:lnTo>
-                  <a:lnTo>
-                    <a:pt x="2790564" y="2158352"/>
-                  </a:lnTo>
-                  <a:lnTo>
-                    <a:pt x="2868198" y="2260149"/>
-                  </a:lnTo>
-                  <a:lnTo>
-                    <a:pt x="2945832" y="2355011"/>
-                  </a:lnTo>
-                  <a:lnTo>
-                    <a:pt x="3023466" y="2443411"/>
-                  </a:lnTo>
-                  <a:lnTo>
-                    <a:pt x="3101100" y="2525788"/>
-                  </a:lnTo>
-                  <a:lnTo>
-                    <a:pt x="3178734" y="2602554"/>
-                  </a:lnTo>
-                  <a:lnTo>
-                    <a:pt x="3256368" y="2674090"/>
-                  </a:lnTo>
-                  <a:lnTo>
-                    <a:pt x="3334002" y="2740753"/>
-                  </a:lnTo>
-                  <a:lnTo>
-                    <a:pt x="3411636" y="2784488"/>
-                  </a:lnTo>
-                  <a:lnTo>
-                    <a:pt x="3489270" y="2789109"/>
-                  </a:lnTo>
-                  <a:lnTo>
-                    <a:pt x="3566904" y="2793706"/>
-                  </a:lnTo>
-                  <a:lnTo>
-                    <a:pt x="3644538" y="2798278"/>
-                  </a:lnTo>
-                  <a:lnTo>
-                    <a:pt x="3722172" y="2802826"/>
-                  </a:lnTo>
-                  <a:lnTo>
-                    <a:pt x="3799806" y="2807349"/>
-                  </a:lnTo>
-                  <a:lnTo>
-                    <a:pt x="3877440" y="2811849"/>
-                  </a:lnTo>
-                  <a:lnTo>
-                    <a:pt x="3955074" y="2816324"/>
-                  </a:lnTo>
-                  <a:lnTo>
-                    <a:pt x="4032708" y="2820776"/>
-                  </a:lnTo>
-                  <a:lnTo>
-                    <a:pt x="4110342" y="2825204"/>
-                  </a:lnTo>
-                  <a:lnTo>
-                    <a:pt x="4187976" y="2829608"/>
-                  </a:lnTo>
-                  <a:lnTo>
-                    <a:pt x="4265610" y="2833989"/>
-                  </a:lnTo>
-                  <a:lnTo>
-                    <a:pt x="4343244" y="2838347"/>
-                  </a:lnTo>
-                  <a:lnTo>
-                    <a:pt x="4420879" y="2842681"/>
-                  </a:lnTo>
-                  <a:lnTo>
-                    <a:pt x="4498513" y="2846993"/>
-                  </a:lnTo>
-                  <a:lnTo>
-                    <a:pt x="4576147" y="2851281"/>
-                  </a:lnTo>
-                  <a:lnTo>
-                    <a:pt x="4653781" y="2855547"/>
-                  </a:lnTo>
-                  <a:lnTo>
-                    <a:pt x="4731415" y="2859790"/>
-                  </a:lnTo>
-                  <a:lnTo>
-                    <a:pt x="4809049" y="2864010"/>
-                  </a:lnTo>
-                  <a:lnTo>
-                    <a:pt x="4886683" y="2868208"/>
-                  </a:lnTo>
-                  <a:lnTo>
-                    <a:pt x="4964317" y="2872383"/>
-                  </a:lnTo>
-                  <a:lnTo>
-                    <a:pt x="5041951" y="2876537"/>
-                  </a:lnTo>
-                  <a:lnTo>
-                    <a:pt x="5119585" y="2880668"/>
-                  </a:lnTo>
-                  <a:lnTo>
-                    <a:pt x="5197219" y="2884777"/>
-                  </a:lnTo>
-                  <a:lnTo>
-                    <a:pt x="5274853" y="2888864"/>
-                  </a:lnTo>
-                  <a:lnTo>
-                    <a:pt x="5352487" y="2892930"/>
-                  </a:lnTo>
-                  <a:lnTo>
-                    <a:pt x="5430121" y="2896974"/>
-                  </a:lnTo>
-                  <a:lnTo>
-                    <a:pt x="5507755" y="2900996"/>
-                  </a:lnTo>
-                  <a:lnTo>
-                    <a:pt x="5585389" y="2904997"/>
-                  </a:lnTo>
-                  <a:lnTo>
-                    <a:pt x="5663023" y="2908977"/>
-                  </a:lnTo>
-                  <a:lnTo>
-                    <a:pt x="5740657" y="2912935"/>
-                  </a:lnTo>
-                  <a:lnTo>
-                    <a:pt x="5818291" y="2916873"/>
-                  </a:lnTo>
-                  <a:lnTo>
-                    <a:pt x="5895925" y="2920789"/>
-                  </a:lnTo>
-                  <a:lnTo>
-                    <a:pt x="5973559" y="2924685"/>
-                  </a:lnTo>
-                  <a:lnTo>
-                    <a:pt x="6051193" y="2928560"/>
-                  </a:lnTo>
-                  <a:lnTo>
-                    <a:pt x="6128827" y="2932414"/>
-                  </a:lnTo>
-                  <a:lnTo>
-                    <a:pt x="6206462" y="2936248"/>
-                  </a:lnTo>
-                  <a:lnTo>
-                    <a:pt x="6284096" y="2940061"/>
-                  </a:lnTo>
-                  <a:lnTo>
-                    <a:pt x="6361730" y="2943854"/>
-                  </a:lnTo>
-                  <a:lnTo>
-                    <a:pt x="6439364" y="2947627"/>
-                  </a:lnTo>
-                  <a:lnTo>
-                    <a:pt x="6516998" y="2951380"/>
-                  </a:lnTo>
-                  <a:lnTo>
-                    <a:pt x="6594632" y="2955112"/>
-                  </a:lnTo>
-                  <a:lnTo>
-                    <a:pt x="6672266" y="2958825"/>
-                  </a:lnTo>
-                  <a:lnTo>
-                    <a:pt x="6749900" y="2962518"/>
-                  </a:lnTo>
-                  <a:lnTo>
-                    <a:pt x="6827534" y="2966192"/>
-                  </a:lnTo>
-                  <a:lnTo>
-                    <a:pt x="6905168" y="2969846"/>
-                  </a:lnTo>
-                  <a:lnTo>
-                    <a:pt x="6982802" y="2973480"/>
-                  </a:lnTo>
-                  <a:lnTo>
-                    <a:pt x="7060436" y="2977095"/>
-                  </a:lnTo>
-                  <a:lnTo>
-                    <a:pt x="7138070" y="2980691"/>
-                  </a:lnTo>
-                  <a:lnTo>
-                    <a:pt x="7215704" y="2984268"/>
-                  </a:lnTo>
-                  <a:lnTo>
-                    <a:pt x="7293338" y="2987826"/>
-                  </a:lnTo>
-                  <a:lnTo>
-                    <a:pt x="7370972" y="2991365"/>
-                  </a:lnTo>
-                  <a:lnTo>
-                    <a:pt x="7370972" y="3629386"/>
-                  </a:lnTo>
-                  <a:lnTo>
-                    <a:pt x="7293338" y="3627685"/>
-                  </a:lnTo>
-                  <a:lnTo>
-                    <a:pt x="7215704" y="3625861"/>
-                  </a:lnTo>
-                  <a:lnTo>
-                    <a:pt x="7138070" y="3623903"/>
-                  </a:lnTo>
-                  <a:lnTo>
-                    <a:pt x="7060436" y="3621802"/>
-                  </a:lnTo>
-                  <a:lnTo>
-                    <a:pt x="6982802" y="3619547"/>
-                  </a:lnTo>
-                  <a:lnTo>
-                    <a:pt x="6905168" y="3617128"/>
-                  </a:lnTo>
-                  <a:lnTo>
-                    <a:pt x="6827534" y="3614531"/>
-                  </a:lnTo>
-                  <a:lnTo>
-                    <a:pt x="6749900" y="3611745"/>
-                  </a:lnTo>
-                  <a:lnTo>
-                    <a:pt x="6672266" y="3608755"/>
-                  </a:lnTo>
-                  <a:lnTo>
-                    <a:pt x="6594632" y="3605547"/>
-                  </a:lnTo>
-                  <a:lnTo>
-                    <a:pt x="6516998" y="3602104"/>
-                  </a:lnTo>
-                  <a:lnTo>
-                    <a:pt x="6439364" y="3598410"/>
-                  </a:lnTo>
-                  <a:lnTo>
-                    <a:pt x="6361730" y="3594445"/>
-                  </a:lnTo>
-                  <a:lnTo>
-                    <a:pt x="6284096" y="3590190"/>
-                  </a:lnTo>
-                  <a:lnTo>
-                    <a:pt x="6206462" y="3585625"/>
-                  </a:lnTo>
-                  <a:lnTo>
-                    <a:pt x="6128827" y="3580725"/>
-                  </a:lnTo>
-                  <a:lnTo>
-                    <a:pt x="6051193" y="3575468"/>
-                  </a:lnTo>
-                  <a:lnTo>
-                    <a:pt x="5973559" y="3569826"/>
-                  </a:lnTo>
-                  <a:lnTo>
-                    <a:pt x="5895925" y="3563772"/>
-                  </a:lnTo>
-                  <a:lnTo>
-                    <a:pt x="5818291" y="3557275"/>
-                  </a:lnTo>
-                  <a:lnTo>
-                    <a:pt x="5740657" y="3550303"/>
-                  </a:lnTo>
-                  <a:lnTo>
-                    <a:pt x="5663023" y="3542822"/>
-                  </a:lnTo>
-                  <a:lnTo>
-                    <a:pt x="5585389" y="3534793"/>
-                  </a:lnTo>
-                  <a:lnTo>
-                    <a:pt x="5507755" y="3526178"/>
-                  </a:lnTo>
-                  <a:lnTo>
-                    <a:pt x="5430121" y="3516933"/>
-                  </a:lnTo>
-                  <a:lnTo>
-                    <a:pt x="5352487" y="3507012"/>
-                  </a:lnTo>
-                  <a:lnTo>
-                    <a:pt x="5274853" y="3496366"/>
-                  </a:lnTo>
-                  <a:lnTo>
-                    <a:pt x="5197219" y="3484941"/>
-                  </a:lnTo>
-                  <a:lnTo>
-                    <a:pt x="5119585" y="3472681"/>
-                  </a:lnTo>
-                  <a:lnTo>
-                    <a:pt x="5041951" y="3459525"/>
-                  </a:lnTo>
-                  <a:lnTo>
-                    <a:pt x="4964317" y="3445408"/>
-                  </a:lnTo>
-                  <a:lnTo>
-                    <a:pt x="4886683" y="3430258"/>
-                  </a:lnTo>
-                  <a:lnTo>
-                    <a:pt x="4809049" y="3414001"/>
-                  </a:lnTo>
-                  <a:lnTo>
-                    <a:pt x="4731415" y="3396555"/>
-                  </a:lnTo>
-                  <a:lnTo>
-                    <a:pt x="4653781" y="3377834"/>
-                  </a:lnTo>
-                  <a:lnTo>
-                    <a:pt x="4576147" y="3357744"/>
-                  </a:lnTo>
-                  <a:lnTo>
-                    <a:pt x="4498513" y="3336186"/>
-                  </a:lnTo>
-                  <a:lnTo>
-                    <a:pt x="4420879" y="3313052"/>
-                  </a:lnTo>
-                  <a:lnTo>
-                    <a:pt x="4343244" y="3288226"/>
-                  </a:lnTo>
-                  <a:lnTo>
-                    <a:pt x="4265610" y="3261586"/>
-                  </a:lnTo>
-                  <a:lnTo>
-                    <a:pt x="4187976" y="3232998"/>
-                  </a:lnTo>
-                  <a:lnTo>
-                    <a:pt x="4110342" y="3202320"/>
-                  </a:lnTo>
-                  <a:lnTo>
-                    <a:pt x="4032708" y="3169400"/>
-                  </a:lnTo>
-                  <a:lnTo>
-                    <a:pt x="3955074" y="3134073"/>
-                  </a:lnTo>
-                  <a:lnTo>
-                    <a:pt x="3877440" y="3096163"/>
-                  </a:lnTo>
-                  <a:lnTo>
-                    <a:pt x="3799806" y="3055482"/>
-                  </a:lnTo>
-                  <a:lnTo>
-                    <a:pt x="3722172" y="3011827"/>
-                  </a:lnTo>
-                  <a:lnTo>
-                    <a:pt x="3644538" y="2964981"/>
-                  </a:lnTo>
-                  <a:lnTo>
-                    <a:pt x="3566904" y="2914710"/>
-                  </a:lnTo>
-                  <a:lnTo>
-                    <a:pt x="3489270" y="2860764"/>
-                  </a:lnTo>
-                  <a:lnTo>
-                    <a:pt x="3411636" y="2802875"/>
-                  </a:lnTo>
-                  <a:lnTo>
-                    <a:pt x="3334002" y="2779842"/>
-                  </a:lnTo>
-                  <a:lnTo>
-                    <a:pt x="3256368" y="2775172"/>
-                  </a:lnTo>
-                  <a:lnTo>
-                    <a:pt x="3178734" y="2770476"/>
-                  </a:lnTo>
-                  <a:lnTo>
-                    <a:pt x="3101100" y="2765755"/>
-                  </a:lnTo>
-                  <a:lnTo>
-                    <a:pt x="3023466" y="2761009"/>
-                  </a:lnTo>
-                  <a:lnTo>
-                    <a:pt x="2945832" y="2756238"/>
-                  </a:lnTo>
-                  <a:lnTo>
-                    <a:pt x="2868198" y="2751441"/>
-                  </a:lnTo>
-                  <a:lnTo>
-                    <a:pt x="2790564" y="2746618"/>
-                  </a:lnTo>
-                  <a:lnTo>
-                    <a:pt x="2712930" y="2741769"/>
-                  </a:lnTo>
-                  <a:lnTo>
-                    <a:pt x="2635295" y="2736895"/>
-                  </a:lnTo>
-                  <a:lnTo>
-                    <a:pt x="2557661" y="2731994"/>
-                  </a:lnTo>
-                  <a:lnTo>
-                    <a:pt x="2480027" y="2727067"/>
-                  </a:lnTo>
-                  <a:lnTo>
-                    <a:pt x="2402393" y="2722114"/>
-                  </a:lnTo>
-                  <a:lnTo>
-                    <a:pt x="2324759" y="2717135"/>
-                  </a:lnTo>
-                  <a:lnTo>
-                    <a:pt x="2247125" y="2712128"/>
-                  </a:lnTo>
-                  <a:lnTo>
-                    <a:pt x="2169491" y="2707095"/>
-                  </a:lnTo>
-                  <a:lnTo>
-                    <a:pt x="2091857" y="2702035"/>
-                  </a:lnTo>
-                  <a:lnTo>
-                    <a:pt x="2014223" y="2696948"/>
-                  </a:lnTo>
-                  <a:lnTo>
-                    <a:pt x="1936589" y="2691834"/>
-                  </a:lnTo>
-                  <a:lnTo>
-                    <a:pt x="1858955" y="2686692"/>
-                  </a:lnTo>
-                  <a:lnTo>
-                    <a:pt x="1781321" y="2681523"/>
-                  </a:lnTo>
-                  <a:lnTo>
-                    <a:pt x="1703687" y="2676326"/>
-                  </a:lnTo>
-                  <a:lnTo>
-                    <a:pt x="1626053" y="2671101"/>
-                  </a:lnTo>
-                  <a:lnTo>
-                    <a:pt x="1548419" y="2665849"/>
-                  </a:lnTo>
-                  <a:lnTo>
-                    <a:pt x="1470785" y="2660568"/>
-                  </a:lnTo>
-                  <a:lnTo>
-                    <a:pt x="1393151" y="2655259"/>
-                  </a:lnTo>
-                  <a:lnTo>
-                    <a:pt x="1315517" y="2649922"/>
-                  </a:lnTo>
-                  <a:lnTo>
-                    <a:pt x="1237883" y="2644556"/>
-                  </a:lnTo>
-                  <a:lnTo>
-                    <a:pt x="1160249" y="2639161"/>
-                  </a:lnTo>
-                  <a:lnTo>
-                    <a:pt x="1082615" y="2633737"/>
-                  </a:lnTo>
-                  <a:lnTo>
-                    <a:pt x="1004981" y="2628285"/>
-                  </a:lnTo>
-                  <a:lnTo>
-                    <a:pt x="927346" y="2622803"/>
-                  </a:lnTo>
-                  <a:lnTo>
-                    <a:pt x="849712" y="2617292"/>
-                  </a:lnTo>
-                  <a:lnTo>
-                    <a:pt x="772078" y="2611751"/>
-                  </a:lnTo>
-                  <a:lnTo>
-                    <a:pt x="694444" y="2606181"/>
-                  </a:lnTo>
-                  <a:lnTo>
-                    <a:pt x="616810" y="2600581"/>
-                  </a:lnTo>
-                  <a:lnTo>
-                    <a:pt x="539176" y="2594951"/>
-                  </a:lnTo>
-                  <a:lnTo>
-                    <a:pt x="461542" y="2589291"/>
-                  </a:lnTo>
-                  <a:lnTo>
-                    <a:pt x="383908" y="2583600"/>
-                  </a:lnTo>
-                  <a:lnTo>
-                    <a:pt x="306274" y="2577879"/>
-                  </a:lnTo>
-                  <a:lnTo>
-                    <a:pt x="228640" y="2572128"/>
-                  </a:lnTo>
-                  <a:lnTo>
-                    <a:pt x="151006" y="2566346"/>
-                  </a:lnTo>
-                  <a:lnTo>
-                    <a:pt x="73372" y="2560532"/>
-                  </a:lnTo>
-                  <a:lnTo>
-                    <a:pt x="0" y="2555009"/>
+                    <a:pt x="2091857" y="274669"/>
+                  </a:lnTo>
+                  <a:lnTo>
+                    <a:pt x="2169491" y="538711"/>
+                  </a:lnTo>
+                  <a:lnTo>
+                    <a:pt x="2247125" y="782113"/>
+                  </a:lnTo>
+                  <a:lnTo>
+                    <a:pt x="2324759" y="1006489"/>
+                  </a:lnTo>
+                  <a:lnTo>
+                    <a:pt x="2402393" y="1213327"/>
+                  </a:lnTo>
+                  <a:lnTo>
+                    <a:pt x="2480027" y="1403998"/>
+                  </a:lnTo>
+                  <a:lnTo>
+                    <a:pt x="2557661" y="1579764"/>
+                  </a:lnTo>
+                  <a:lnTo>
+                    <a:pt x="2635295" y="1741792"/>
+                  </a:lnTo>
+                  <a:lnTo>
+                    <a:pt x="2712930" y="1891155"/>
+                  </a:lnTo>
+                  <a:lnTo>
+                    <a:pt x="2790564" y="2028842"/>
+                  </a:lnTo>
+                  <a:lnTo>
+                    <a:pt x="2868198" y="2155768"/>
+                  </a:lnTo>
+                  <a:lnTo>
+                    <a:pt x="2945832" y="2272772"/>
+                  </a:lnTo>
+                  <a:lnTo>
+                    <a:pt x="3023466" y="2380630"/>
+                  </a:lnTo>
+                  <a:lnTo>
+                    <a:pt x="3101100" y="2480058"/>
+                  </a:lnTo>
+                  <a:lnTo>
+                    <a:pt x="3178734" y="2571713"/>
+                  </a:lnTo>
+                  <a:lnTo>
+                    <a:pt x="3256368" y="2656205"/>
+                  </a:lnTo>
+                  <a:lnTo>
+                    <a:pt x="3334002" y="2734092"/>
+                  </a:lnTo>
+                  <a:lnTo>
+                    <a:pt x="3411636" y="2784840"/>
+                  </a:lnTo>
+                  <a:lnTo>
+                    <a:pt x="3489270" y="2790525"/>
+                  </a:lnTo>
+                  <a:lnTo>
+                    <a:pt x="3566904" y="2796173"/>
+                  </a:lnTo>
+                  <a:lnTo>
+                    <a:pt x="3644538" y="2801784"/>
+                  </a:lnTo>
+                  <a:lnTo>
+                    <a:pt x="3722172" y="2807358"/>
+                  </a:lnTo>
+                  <a:lnTo>
+                    <a:pt x="3799806" y="2812895"/>
+                  </a:lnTo>
+                  <a:lnTo>
+                    <a:pt x="3877440" y="2818396"/>
+                  </a:lnTo>
+                  <a:lnTo>
+                    <a:pt x="3955074" y="2823861"/>
+                  </a:lnTo>
+                  <a:lnTo>
+                    <a:pt x="4032708" y="2829291"/>
+                  </a:lnTo>
+                  <a:lnTo>
+                    <a:pt x="4110342" y="2834685"/>
+                  </a:lnTo>
+                  <a:lnTo>
+                    <a:pt x="4187976" y="2840043"/>
+                  </a:lnTo>
+                  <a:lnTo>
+                    <a:pt x="4265610" y="2845366"/>
+                  </a:lnTo>
+                  <a:lnTo>
+                    <a:pt x="4343244" y="2850655"/>
+                  </a:lnTo>
+                  <a:lnTo>
+                    <a:pt x="4420879" y="2855909"/>
+                  </a:lnTo>
+                  <a:lnTo>
+                    <a:pt x="4498513" y="2861128"/>
+                  </a:lnTo>
+                  <a:lnTo>
+                    <a:pt x="4576147" y="2866313"/>
+                  </a:lnTo>
+                  <a:lnTo>
+                    <a:pt x="4653781" y="2871464"/>
+                  </a:lnTo>
+                  <a:lnTo>
+                    <a:pt x="4731415" y="2876582"/>
+                  </a:lnTo>
+                  <a:lnTo>
+                    <a:pt x="4809049" y="2881666"/>
+                  </a:lnTo>
+                  <a:lnTo>
+                    <a:pt x="4886683" y="2886717"/>
+                  </a:lnTo>
+                  <a:lnTo>
+                    <a:pt x="4964317" y="2891734"/>
+                  </a:lnTo>
+                  <a:lnTo>
+                    <a:pt x="5041951" y="2896719"/>
+                  </a:lnTo>
+                  <a:lnTo>
+                    <a:pt x="5119585" y="2901671"/>
+                  </a:lnTo>
+                  <a:lnTo>
+                    <a:pt x="5197219" y="2906590"/>
+                  </a:lnTo>
+                  <a:lnTo>
+                    <a:pt x="5274853" y="2911478"/>
+                  </a:lnTo>
+                  <a:lnTo>
+                    <a:pt x="5352487" y="2916333"/>
+                  </a:lnTo>
+                  <a:lnTo>
+                    <a:pt x="5430121" y="2921157"/>
+                  </a:lnTo>
+                  <a:lnTo>
+                    <a:pt x="5507755" y="2925949"/>
+                  </a:lnTo>
+                  <a:lnTo>
+                    <a:pt x="5585389" y="2930709"/>
+                  </a:lnTo>
+                  <a:lnTo>
+                    <a:pt x="5663023" y="2935439"/>
+                  </a:lnTo>
+                  <a:lnTo>
+                    <a:pt x="5740657" y="2940137"/>
+                  </a:lnTo>
+                  <a:lnTo>
+                    <a:pt x="5818291" y="2944805"/>
+                  </a:lnTo>
+                  <a:lnTo>
+                    <a:pt x="5895925" y="2949442"/>
+                  </a:lnTo>
+                  <a:lnTo>
+                    <a:pt x="5973559" y="2954048"/>
+                  </a:lnTo>
+                  <a:lnTo>
+                    <a:pt x="6051193" y="2958625"/>
+                  </a:lnTo>
+                  <a:lnTo>
+                    <a:pt x="6128827" y="2963171"/>
+                  </a:lnTo>
+                  <a:lnTo>
+                    <a:pt x="6206462" y="2967688"/>
+                  </a:lnTo>
+                  <a:lnTo>
+                    <a:pt x="6284096" y="2972175"/>
+                  </a:lnTo>
+                  <a:lnTo>
+                    <a:pt x="6361730" y="2976633"/>
+                  </a:lnTo>
+                  <a:lnTo>
+                    <a:pt x="6439364" y="2981061"/>
+                  </a:lnTo>
+                  <a:lnTo>
+                    <a:pt x="6516998" y="2985461"/>
+                  </a:lnTo>
+                  <a:lnTo>
+                    <a:pt x="6594632" y="2989832"/>
+                  </a:lnTo>
+                  <a:lnTo>
+                    <a:pt x="6672266" y="2994174"/>
+                  </a:lnTo>
+                  <a:lnTo>
+                    <a:pt x="6749900" y="2998487"/>
+                  </a:lnTo>
+                  <a:lnTo>
+                    <a:pt x="6827534" y="3002773"/>
+                  </a:lnTo>
+                  <a:lnTo>
+                    <a:pt x="6905168" y="3007030"/>
+                  </a:lnTo>
+                  <a:lnTo>
+                    <a:pt x="6982802" y="3011259"/>
+                  </a:lnTo>
+                  <a:lnTo>
+                    <a:pt x="7060436" y="3015461"/>
+                  </a:lnTo>
+                  <a:lnTo>
+                    <a:pt x="7138070" y="3019635"/>
+                  </a:lnTo>
+                  <a:lnTo>
+                    <a:pt x="7215704" y="3023782"/>
+                  </a:lnTo>
+                  <a:lnTo>
+                    <a:pt x="7293338" y="3027902"/>
+                  </a:lnTo>
+                  <a:lnTo>
+                    <a:pt x="7370972" y="3031994"/>
+                  </a:lnTo>
+                  <a:lnTo>
+                    <a:pt x="7370972" y="3639306"/>
+                  </a:lnTo>
+                  <a:lnTo>
+                    <a:pt x="7293338" y="3638175"/>
+                  </a:lnTo>
+                  <a:lnTo>
+                    <a:pt x="7215704" y="3636949"/>
+                  </a:lnTo>
+                  <a:lnTo>
+                    <a:pt x="7138070" y="3635618"/>
+                  </a:lnTo>
+                  <a:lnTo>
+                    <a:pt x="7060436" y="3634174"/>
+                  </a:lnTo>
+                  <a:lnTo>
+                    <a:pt x="6982802" y="3632608"/>
+                  </a:lnTo>
+                  <a:lnTo>
+                    <a:pt x="6905168" y="3630909"/>
+                  </a:lnTo>
+                  <a:lnTo>
+                    <a:pt x="6827534" y="3629066"/>
+                  </a:lnTo>
+                  <a:lnTo>
+                    <a:pt x="6749900" y="3627067"/>
+                  </a:lnTo>
+                  <a:lnTo>
+                    <a:pt x="6672266" y="3624899"/>
+                  </a:lnTo>
+                  <a:lnTo>
+                    <a:pt x="6594632" y="3622546"/>
+                  </a:lnTo>
+                  <a:lnTo>
+                    <a:pt x="6516998" y="3619994"/>
+                  </a:lnTo>
+                  <a:lnTo>
+                    <a:pt x="6439364" y="3617226"/>
+                  </a:lnTo>
+                  <a:lnTo>
+                    <a:pt x="6361730" y="3614222"/>
+                  </a:lnTo>
+                  <a:lnTo>
+                    <a:pt x="6284096" y="3610964"/>
+                  </a:lnTo>
+                  <a:lnTo>
+                    <a:pt x="6206462" y="3607430"/>
+                  </a:lnTo>
+                  <a:lnTo>
+                    <a:pt x="6128827" y="3603597"/>
+                  </a:lnTo>
+                  <a:lnTo>
+                    <a:pt x="6051193" y="3599438"/>
+                  </a:lnTo>
+                  <a:lnTo>
+                    <a:pt x="5973559" y="3594926"/>
+                  </a:lnTo>
+                  <a:lnTo>
+                    <a:pt x="5895925" y="3590032"/>
+                  </a:lnTo>
+                  <a:lnTo>
+                    <a:pt x="5818291" y="3584723"/>
+                  </a:lnTo>
+                  <a:lnTo>
+                    <a:pt x="5740657" y="3578964"/>
+                  </a:lnTo>
+                  <a:lnTo>
+                    <a:pt x="5663023" y="3572717"/>
+                  </a:lnTo>
+                  <a:lnTo>
+                    <a:pt x="5585389" y="3565939"/>
+                  </a:lnTo>
+                  <a:lnTo>
+                    <a:pt x="5507755" y="3558587"/>
+                  </a:lnTo>
+                  <a:lnTo>
+                    <a:pt x="5430121" y="3550612"/>
+                  </a:lnTo>
+                  <a:lnTo>
+                    <a:pt x="5352487" y="3541961"/>
+                  </a:lnTo>
+                  <a:lnTo>
+                    <a:pt x="5274853" y="3532575"/>
+                  </a:lnTo>
+                  <a:lnTo>
+                    <a:pt x="5197219" y="3522394"/>
+                  </a:lnTo>
+                  <a:lnTo>
+                    <a:pt x="5119585" y="3511350"/>
+                  </a:lnTo>
+                  <a:lnTo>
+                    <a:pt x="5041951" y="3499369"/>
+                  </a:lnTo>
+                  <a:lnTo>
+                    <a:pt x="4964317" y="3486373"/>
+                  </a:lnTo>
+                  <a:lnTo>
+                    <a:pt x="4886683" y="3472274"/>
+                  </a:lnTo>
+                  <a:lnTo>
+                    <a:pt x="4809049" y="3456980"/>
+                  </a:lnTo>
+                  <a:lnTo>
+                    <a:pt x="4731415" y="3440389"/>
+                  </a:lnTo>
+                  <a:lnTo>
+                    <a:pt x="4653781" y="3422391"/>
+                  </a:lnTo>
+                  <a:lnTo>
+                    <a:pt x="4576147" y="3402867"/>
+                  </a:lnTo>
+                  <a:lnTo>
+                    <a:pt x="4498513" y="3381688"/>
+                  </a:lnTo>
+                  <a:lnTo>
+                    <a:pt x="4420879" y="3358713"/>
+                  </a:lnTo>
+                  <a:lnTo>
+                    <a:pt x="4343244" y="3333789"/>
+                  </a:lnTo>
+                  <a:lnTo>
+                    <a:pt x="4265610" y="3306753"/>
+                  </a:lnTo>
+                  <a:lnTo>
+                    <a:pt x="4187976" y="3277423"/>
+                  </a:lnTo>
+                  <a:lnTo>
+                    <a:pt x="4110342" y="3245607"/>
+                  </a:lnTo>
+                  <a:lnTo>
+                    <a:pt x="4032708" y="3211093"/>
+                  </a:lnTo>
+                  <a:lnTo>
+                    <a:pt x="3955074" y="3173653"/>
+                  </a:lnTo>
+                  <a:lnTo>
+                    <a:pt x="3877440" y="3133037"/>
+                  </a:lnTo>
+                  <a:lnTo>
+                    <a:pt x="3799806" y="3088978"/>
+                  </a:lnTo>
+                  <a:lnTo>
+                    <a:pt x="3722172" y="3041183"/>
+                  </a:lnTo>
+                  <a:lnTo>
+                    <a:pt x="3644538" y="2989335"/>
+                  </a:lnTo>
+                  <a:lnTo>
+                    <a:pt x="3566904" y="2933091"/>
+                  </a:lnTo>
+                  <a:lnTo>
+                    <a:pt x="3489270" y="2872078"/>
+                  </a:lnTo>
+                  <a:lnTo>
+                    <a:pt x="3411636" y="2805891"/>
+                  </a:lnTo>
+                  <a:lnTo>
+                    <a:pt x="3334002" y="2779118"/>
+                  </a:lnTo>
+                  <a:lnTo>
+                    <a:pt x="3256368" y="2773358"/>
+                  </a:lnTo>
+                  <a:lnTo>
+                    <a:pt x="3178734" y="2767559"/>
+                  </a:lnTo>
+                  <a:lnTo>
+                    <a:pt x="3101100" y="2761723"/>
+                  </a:lnTo>
+                  <a:lnTo>
+                    <a:pt x="3023466" y="2755848"/>
+                  </a:lnTo>
+                  <a:lnTo>
+                    <a:pt x="2945832" y="2749935"/>
+                  </a:lnTo>
+                  <a:lnTo>
+                    <a:pt x="2868198" y="2743982"/>
+                  </a:lnTo>
+                  <a:lnTo>
+                    <a:pt x="2790564" y="2737990"/>
+                  </a:lnTo>
+                  <a:lnTo>
+                    <a:pt x="2712930" y="2731959"/>
+                  </a:lnTo>
+                  <a:lnTo>
+                    <a:pt x="2635295" y="2725888"/>
+                  </a:lnTo>
+                  <a:lnTo>
+                    <a:pt x="2557661" y="2719776"/>
+                  </a:lnTo>
+                  <a:lnTo>
+                    <a:pt x="2480027" y="2713625"/>
+                  </a:lnTo>
+                  <a:lnTo>
+                    <a:pt x="2402393" y="2707433"/>
+                  </a:lnTo>
+                  <a:lnTo>
+                    <a:pt x="2324759" y="2701200"/>
+                  </a:lnTo>
+                  <a:lnTo>
+                    <a:pt x="2247125" y="2694926"/>
+                  </a:lnTo>
+                  <a:lnTo>
+                    <a:pt x="2169491" y="2688611"/>
+                  </a:lnTo>
+                  <a:lnTo>
+                    <a:pt x="2091857" y="2682254"/>
+                  </a:lnTo>
+                  <a:lnTo>
+                    <a:pt x="2014223" y="2675855"/>
+                  </a:lnTo>
+                  <a:lnTo>
+                    <a:pt x="1936589" y="2669413"/>
+                  </a:lnTo>
+                  <a:lnTo>
+                    <a:pt x="1858955" y="2662930"/>
+                  </a:lnTo>
+                  <a:lnTo>
+                    <a:pt x="1781321" y="2656404"/>
+                  </a:lnTo>
+                  <a:lnTo>
+                    <a:pt x="1703687" y="2649834"/>
+                  </a:lnTo>
+                  <a:lnTo>
+                    <a:pt x="1626053" y="2643221"/>
+                  </a:lnTo>
+                  <a:lnTo>
+                    <a:pt x="1548419" y="2636565"/>
+                  </a:lnTo>
+                  <a:lnTo>
+                    <a:pt x="1470785" y="2629865"/>
+                  </a:lnTo>
+                  <a:lnTo>
+                    <a:pt x="1393151" y="2623121"/>
+                  </a:lnTo>
+                  <a:lnTo>
+                    <a:pt x="1315517" y="2616332"/>
+                  </a:lnTo>
+                  <a:lnTo>
+                    <a:pt x="1237883" y="2609498"/>
+                  </a:lnTo>
+                  <a:lnTo>
+                    <a:pt x="1160249" y="2602619"/>
+                  </a:lnTo>
+                  <a:lnTo>
+                    <a:pt x="1082615" y="2595695"/>
+                  </a:lnTo>
+                  <a:lnTo>
+                    <a:pt x="1004981" y="2588726"/>
+                  </a:lnTo>
+                  <a:lnTo>
+                    <a:pt x="927346" y="2581710"/>
+                  </a:lnTo>
+                  <a:lnTo>
+                    <a:pt x="849712" y="2574648"/>
+                  </a:lnTo>
+                  <a:lnTo>
+                    <a:pt x="772078" y="2567540"/>
+                  </a:lnTo>
+                  <a:lnTo>
+                    <a:pt x="694444" y="2560384"/>
+                  </a:lnTo>
+                  <a:lnTo>
+                    <a:pt x="616810" y="2553182"/>
+                  </a:lnTo>
+                  <a:lnTo>
+                    <a:pt x="539176" y="2545932"/>
+                  </a:lnTo>
+                  <a:lnTo>
+                    <a:pt x="461542" y="2538634"/>
+                  </a:lnTo>
+                  <a:lnTo>
+                    <a:pt x="383908" y="2531288"/>
+                  </a:lnTo>
+                  <a:lnTo>
+                    <a:pt x="306274" y="2523893"/>
+                  </a:lnTo>
+                  <a:lnTo>
+                    <a:pt x="228640" y="2516450"/>
+                  </a:lnTo>
+                  <a:lnTo>
+                    <a:pt x="151006" y="2508958"/>
+                  </a:lnTo>
+                  <a:lnTo>
+                    <a:pt x="73372" y="2501416"/>
+                  </a:lnTo>
+                  <a:lnTo>
+                    <a:pt x="0" y="2494241"/>
+                  </a:lnTo>
+                  <a:lnTo>
+                    <a:pt x="0" y="0"/>
                   </a:lnTo>
                   <a:close/>
                 </a:path>
@@ -3540,231 +3534,222 @@
           </p:nvSpPr>
           <p:spPr>
             <a:xfrm>
-              <a:off x="2625219" y="1896563"/>
-              <a:ext cx="5563271" cy="2991365"/>
+              <a:off x="2834928" y="1896563"/>
+              <a:ext cx="5353561" cy="3031994"/>
             </a:xfrm>
             <a:custGeom>
               <a:avLst/>
               <a:pathLst>
-                <a:path w="5563271" h="2991365">
+                <a:path w="5353561" h="3031994">
                   <a:moveTo>
                     <a:pt x="0" y="0"/>
                   </a:moveTo>
                   <a:lnTo>
-                    <a:pt x="51253" y="168171"/>
-                  </a:lnTo>
-                  <a:lnTo>
-                    <a:pt x="128887" y="405547"/>
-                  </a:lnTo>
-                  <a:lnTo>
-                    <a:pt x="206521" y="626752"/>
-                  </a:lnTo>
-                  <a:lnTo>
-                    <a:pt x="284155" y="832887"/>
-                  </a:lnTo>
-                  <a:lnTo>
-                    <a:pt x="361790" y="1024980"/>
-                  </a:lnTo>
-                  <a:lnTo>
-                    <a:pt x="439424" y="1203986"/>
-                  </a:lnTo>
-                  <a:lnTo>
-                    <a:pt x="517058" y="1370798"/>
-                  </a:lnTo>
-                  <a:lnTo>
-                    <a:pt x="594692" y="1526246"/>
-                  </a:lnTo>
-                  <a:lnTo>
-                    <a:pt x="672326" y="1671105"/>
-                  </a:lnTo>
-                  <a:lnTo>
-                    <a:pt x="749960" y="1806095"/>
-                  </a:lnTo>
-                  <a:lnTo>
-                    <a:pt x="827594" y="1931889"/>
-                  </a:lnTo>
-                  <a:lnTo>
-                    <a:pt x="905228" y="2049113"/>
-                  </a:lnTo>
-                  <a:lnTo>
-                    <a:pt x="982862" y="2158352"/>
-                  </a:lnTo>
-                  <a:lnTo>
-                    <a:pt x="1060496" y="2260149"/>
-                  </a:lnTo>
-                  <a:lnTo>
-                    <a:pt x="1138130" y="2355011"/>
-                  </a:lnTo>
-                  <a:lnTo>
-                    <a:pt x="1215764" y="2443411"/>
-                  </a:lnTo>
-                  <a:lnTo>
-                    <a:pt x="1293398" y="2525788"/>
-                  </a:lnTo>
-                  <a:lnTo>
-                    <a:pt x="1371032" y="2602554"/>
-                  </a:lnTo>
-                  <a:lnTo>
-                    <a:pt x="1448666" y="2674090"/>
-                  </a:lnTo>
-                  <a:lnTo>
-                    <a:pt x="1526300" y="2740753"/>
-                  </a:lnTo>
-                  <a:lnTo>
-                    <a:pt x="1603934" y="2784488"/>
-                  </a:lnTo>
-                  <a:lnTo>
-                    <a:pt x="1681568" y="2789109"/>
-                  </a:lnTo>
-                  <a:lnTo>
-                    <a:pt x="1759202" y="2793706"/>
-                  </a:lnTo>
-                  <a:lnTo>
-                    <a:pt x="1836836" y="2798278"/>
-                  </a:lnTo>
-                  <a:lnTo>
-                    <a:pt x="1914470" y="2802826"/>
-                  </a:lnTo>
-                  <a:lnTo>
-                    <a:pt x="1992104" y="2807349"/>
-                  </a:lnTo>
-                  <a:lnTo>
-                    <a:pt x="2069739" y="2811849"/>
-                  </a:lnTo>
-                  <a:lnTo>
-                    <a:pt x="2147373" y="2816324"/>
-                  </a:lnTo>
-                  <a:lnTo>
-                    <a:pt x="2225007" y="2820776"/>
-                  </a:lnTo>
-                  <a:lnTo>
-                    <a:pt x="2302641" y="2825204"/>
-                  </a:lnTo>
-                  <a:lnTo>
-                    <a:pt x="2380275" y="2829608"/>
-                  </a:lnTo>
-                  <a:lnTo>
-                    <a:pt x="2457909" y="2833989"/>
-                  </a:lnTo>
-                  <a:lnTo>
-                    <a:pt x="2535543" y="2838347"/>
-                  </a:lnTo>
-                  <a:lnTo>
-                    <a:pt x="2613177" y="2842681"/>
-                  </a:lnTo>
-                  <a:lnTo>
-                    <a:pt x="2690811" y="2846993"/>
-                  </a:lnTo>
-                  <a:lnTo>
-                    <a:pt x="2768445" y="2851281"/>
-                  </a:lnTo>
-                  <a:lnTo>
-                    <a:pt x="2846079" y="2855547"/>
-                  </a:lnTo>
-                  <a:lnTo>
-                    <a:pt x="2923713" y="2859790"/>
-                  </a:lnTo>
-                  <a:lnTo>
-                    <a:pt x="3001347" y="2864010"/>
-                  </a:lnTo>
-                  <a:lnTo>
-                    <a:pt x="3078981" y="2868208"/>
-                  </a:lnTo>
-                  <a:lnTo>
-                    <a:pt x="3156615" y="2872383"/>
-                  </a:lnTo>
-                  <a:lnTo>
-                    <a:pt x="3234249" y="2876537"/>
-                  </a:lnTo>
-                  <a:lnTo>
-                    <a:pt x="3311883" y="2880668"/>
-                  </a:lnTo>
-                  <a:lnTo>
-                    <a:pt x="3389517" y="2884777"/>
-                  </a:lnTo>
-                  <a:lnTo>
-                    <a:pt x="3467151" y="2888864"/>
-                  </a:lnTo>
-                  <a:lnTo>
-                    <a:pt x="3544785" y="2892930"/>
-                  </a:lnTo>
-                  <a:lnTo>
-                    <a:pt x="3622419" y="2896974"/>
-                  </a:lnTo>
-                  <a:lnTo>
-                    <a:pt x="3700053" y="2900996"/>
-                  </a:lnTo>
-                  <a:lnTo>
-                    <a:pt x="3777687" y="2904997"/>
-                  </a:lnTo>
-                  <a:lnTo>
-                    <a:pt x="3855322" y="2908977"/>
-                  </a:lnTo>
-                  <a:lnTo>
-                    <a:pt x="3932956" y="2912935"/>
-                  </a:lnTo>
-                  <a:lnTo>
-                    <a:pt x="4010590" y="2916873"/>
-                  </a:lnTo>
-                  <a:lnTo>
-                    <a:pt x="4088224" y="2920789"/>
-                  </a:lnTo>
-                  <a:lnTo>
-                    <a:pt x="4165858" y="2924685"/>
-                  </a:lnTo>
-                  <a:lnTo>
-                    <a:pt x="4243492" y="2928560"/>
-                  </a:lnTo>
-                  <a:lnTo>
-                    <a:pt x="4321126" y="2932414"/>
-                  </a:lnTo>
-                  <a:lnTo>
-                    <a:pt x="4398760" y="2936248"/>
-                  </a:lnTo>
-                  <a:lnTo>
-                    <a:pt x="4476394" y="2940061"/>
-                  </a:lnTo>
-                  <a:lnTo>
-                    <a:pt x="4554028" y="2943854"/>
-                  </a:lnTo>
-                  <a:lnTo>
-                    <a:pt x="4631662" y="2947627"/>
-                  </a:lnTo>
-                  <a:lnTo>
-                    <a:pt x="4709296" y="2951380"/>
-                  </a:lnTo>
-                  <a:lnTo>
-                    <a:pt x="4786930" y="2955112"/>
-                  </a:lnTo>
-                  <a:lnTo>
-                    <a:pt x="4864564" y="2958825"/>
-                  </a:lnTo>
-                  <a:lnTo>
-                    <a:pt x="4942198" y="2962518"/>
-                  </a:lnTo>
-                  <a:lnTo>
-                    <a:pt x="5019832" y="2966192"/>
-                  </a:lnTo>
-                  <a:lnTo>
-                    <a:pt x="5097466" y="2969846"/>
-                  </a:lnTo>
-                  <a:lnTo>
-                    <a:pt x="5175100" y="2973480"/>
-                  </a:lnTo>
-                  <a:lnTo>
-                    <a:pt x="5252734" y="2977095"/>
-                  </a:lnTo>
-                  <a:lnTo>
-                    <a:pt x="5330368" y="2980691"/>
-                  </a:lnTo>
-                  <a:lnTo>
-                    <a:pt x="5408002" y="2984268"/>
-                  </a:lnTo>
-                  <a:lnTo>
-                    <a:pt x="5485636" y="2987826"/>
-                  </a:lnTo>
-                  <a:lnTo>
-                    <a:pt x="5563271" y="2991365"/>
+                    <a:pt x="74446" y="274669"/>
+                  </a:lnTo>
+                  <a:lnTo>
+                    <a:pt x="152080" y="538711"/>
+                  </a:lnTo>
+                  <a:lnTo>
+                    <a:pt x="229714" y="782113"/>
+                  </a:lnTo>
+                  <a:lnTo>
+                    <a:pt x="307348" y="1006489"/>
+                  </a:lnTo>
+                  <a:lnTo>
+                    <a:pt x="384982" y="1213327"/>
+                  </a:lnTo>
+                  <a:lnTo>
+                    <a:pt x="462616" y="1403998"/>
+                  </a:lnTo>
+                  <a:lnTo>
+                    <a:pt x="540250" y="1579764"/>
+                  </a:lnTo>
+                  <a:lnTo>
+                    <a:pt x="617884" y="1741792"/>
+                  </a:lnTo>
+                  <a:lnTo>
+                    <a:pt x="695518" y="1891155"/>
+                  </a:lnTo>
+                  <a:lnTo>
+                    <a:pt x="773152" y="2028842"/>
+                  </a:lnTo>
+                  <a:lnTo>
+                    <a:pt x="850787" y="2155768"/>
+                  </a:lnTo>
+                  <a:lnTo>
+                    <a:pt x="928421" y="2272772"/>
+                  </a:lnTo>
+                  <a:lnTo>
+                    <a:pt x="1006055" y="2380630"/>
+                  </a:lnTo>
+                  <a:lnTo>
+                    <a:pt x="1083689" y="2480058"/>
+                  </a:lnTo>
+                  <a:lnTo>
+                    <a:pt x="1161323" y="2571713"/>
+                  </a:lnTo>
+                  <a:lnTo>
+                    <a:pt x="1238957" y="2656205"/>
+                  </a:lnTo>
+                  <a:lnTo>
+                    <a:pt x="1316591" y="2734092"/>
+                  </a:lnTo>
+                  <a:lnTo>
+                    <a:pt x="1394225" y="2784840"/>
+                  </a:lnTo>
+                  <a:lnTo>
+                    <a:pt x="1471859" y="2790525"/>
+                  </a:lnTo>
+                  <a:lnTo>
+                    <a:pt x="1549493" y="2796173"/>
+                  </a:lnTo>
+                  <a:lnTo>
+                    <a:pt x="1627127" y="2801784"/>
+                  </a:lnTo>
+                  <a:lnTo>
+                    <a:pt x="1704761" y="2807358"/>
+                  </a:lnTo>
+                  <a:lnTo>
+                    <a:pt x="1782395" y="2812895"/>
+                  </a:lnTo>
+                  <a:lnTo>
+                    <a:pt x="1860029" y="2818396"/>
+                  </a:lnTo>
+                  <a:lnTo>
+                    <a:pt x="1937663" y="2823861"/>
+                  </a:lnTo>
+                  <a:lnTo>
+                    <a:pt x="2015297" y="2829291"/>
+                  </a:lnTo>
+                  <a:lnTo>
+                    <a:pt x="2092931" y="2834685"/>
+                  </a:lnTo>
+                  <a:lnTo>
+                    <a:pt x="2170565" y="2840043"/>
+                  </a:lnTo>
+                  <a:lnTo>
+                    <a:pt x="2248199" y="2845366"/>
+                  </a:lnTo>
+                  <a:lnTo>
+                    <a:pt x="2325833" y="2850655"/>
+                  </a:lnTo>
+                  <a:lnTo>
+                    <a:pt x="2403467" y="2855909"/>
+                  </a:lnTo>
+                  <a:lnTo>
+                    <a:pt x="2481101" y="2861128"/>
+                  </a:lnTo>
+                  <a:lnTo>
+                    <a:pt x="2558736" y="2866313"/>
+                  </a:lnTo>
+                  <a:lnTo>
+                    <a:pt x="2636370" y="2871464"/>
+                  </a:lnTo>
+                  <a:lnTo>
+                    <a:pt x="2714004" y="2876582"/>
+                  </a:lnTo>
+                  <a:lnTo>
+                    <a:pt x="2791638" y="2881666"/>
+                  </a:lnTo>
+                  <a:lnTo>
+                    <a:pt x="2869272" y="2886717"/>
+                  </a:lnTo>
+                  <a:lnTo>
+                    <a:pt x="2946906" y="2891734"/>
+                  </a:lnTo>
+                  <a:lnTo>
+                    <a:pt x="3024540" y="2896719"/>
+                  </a:lnTo>
+                  <a:lnTo>
+                    <a:pt x="3102174" y="2901671"/>
+                  </a:lnTo>
+                  <a:lnTo>
+                    <a:pt x="3179808" y="2906590"/>
+                  </a:lnTo>
+                  <a:lnTo>
+                    <a:pt x="3257442" y="2911478"/>
+                  </a:lnTo>
+                  <a:lnTo>
+                    <a:pt x="3335076" y="2916333"/>
+                  </a:lnTo>
+                  <a:lnTo>
+                    <a:pt x="3412710" y="2921157"/>
+                  </a:lnTo>
+                  <a:lnTo>
+                    <a:pt x="3490344" y="2925949"/>
+                  </a:lnTo>
+                  <a:lnTo>
+                    <a:pt x="3567978" y="2930709"/>
+                  </a:lnTo>
+                  <a:lnTo>
+                    <a:pt x="3645612" y="2935439"/>
+                  </a:lnTo>
+                  <a:lnTo>
+                    <a:pt x="3723246" y="2940137"/>
+                  </a:lnTo>
+                  <a:lnTo>
+                    <a:pt x="3800880" y="2944805"/>
+                  </a:lnTo>
+                  <a:lnTo>
+                    <a:pt x="3878514" y="2949442"/>
+                  </a:lnTo>
+                  <a:lnTo>
+                    <a:pt x="3956148" y="2954048"/>
+                  </a:lnTo>
+                  <a:lnTo>
+                    <a:pt x="4033782" y="2958625"/>
+                  </a:lnTo>
+                  <a:lnTo>
+                    <a:pt x="4111416" y="2963171"/>
+                  </a:lnTo>
+                  <a:lnTo>
+                    <a:pt x="4189050" y="2967688"/>
+                  </a:lnTo>
+                  <a:lnTo>
+                    <a:pt x="4266685" y="2972175"/>
+                  </a:lnTo>
+                  <a:lnTo>
+                    <a:pt x="4344319" y="2976633"/>
+                  </a:lnTo>
+                  <a:lnTo>
+                    <a:pt x="4421953" y="2981061"/>
+                  </a:lnTo>
+                  <a:lnTo>
+                    <a:pt x="4499587" y="2985461"/>
+                  </a:lnTo>
+                  <a:lnTo>
+                    <a:pt x="4577221" y="2989832"/>
+                  </a:lnTo>
+                  <a:lnTo>
+                    <a:pt x="4654855" y="2994174"/>
+                  </a:lnTo>
+                  <a:lnTo>
+                    <a:pt x="4732489" y="2998487"/>
+                  </a:lnTo>
+                  <a:lnTo>
+                    <a:pt x="4810123" y="3002773"/>
+                  </a:lnTo>
+                  <a:lnTo>
+                    <a:pt x="4887757" y="3007030"/>
+                  </a:lnTo>
+                  <a:lnTo>
+                    <a:pt x="4965391" y="3011259"/>
+                  </a:lnTo>
+                  <a:lnTo>
+                    <a:pt x="5043025" y="3015461"/>
+                  </a:lnTo>
+                  <a:lnTo>
+                    <a:pt x="5120659" y="3019635"/>
+                  </a:lnTo>
+                  <a:lnTo>
+                    <a:pt x="5198293" y="3023782"/>
+                  </a:lnTo>
+                  <a:lnTo>
+                    <a:pt x="5275927" y="3027902"/>
+                  </a:lnTo>
+                  <a:lnTo>
+                    <a:pt x="5353561" y="3031994"/>
                   </a:lnTo>
                 </a:path>
               </a:pathLst>
@@ -3784,297 +3769,297 @@
           </p:nvSpPr>
           <p:spPr>
             <a:xfrm>
-              <a:off x="817517" y="4451572"/>
-              <a:ext cx="7370972" cy="1074376"/>
+              <a:off x="817517" y="4390805"/>
+              <a:ext cx="7370972" cy="1145064"/>
             </a:xfrm>
             <a:custGeom>
               <a:avLst/>
               <a:pathLst>
-                <a:path w="7370972" h="1074376">
+                <a:path w="7370972" h="1145064">
                   <a:moveTo>
-                    <a:pt x="7370972" y="1074376"/>
+                    <a:pt x="7370972" y="1145064"/>
                   </a:moveTo>
                   <a:lnTo>
-                    <a:pt x="7293338" y="1072676"/>
-                  </a:lnTo>
-                  <a:lnTo>
-                    <a:pt x="7215704" y="1070851"/>
-                  </a:lnTo>
-                  <a:lnTo>
-                    <a:pt x="7138070" y="1068894"/>
-                  </a:lnTo>
-                  <a:lnTo>
-                    <a:pt x="7060436" y="1066793"/>
-                  </a:lnTo>
-                  <a:lnTo>
-                    <a:pt x="6982802" y="1064538"/>
-                  </a:lnTo>
-                  <a:lnTo>
-                    <a:pt x="6905168" y="1062118"/>
-                  </a:lnTo>
-                  <a:lnTo>
-                    <a:pt x="6827534" y="1059522"/>
-                  </a:lnTo>
-                  <a:lnTo>
-                    <a:pt x="6749900" y="1056736"/>
-                  </a:lnTo>
-                  <a:lnTo>
-                    <a:pt x="6672266" y="1053746"/>
-                  </a:lnTo>
-                  <a:lnTo>
-                    <a:pt x="6594632" y="1050538"/>
-                  </a:lnTo>
-                  <a:lnTo>
-                    <a:pt x="6516998" y="1047095"/>
-                  </a:lnTo>
-                  <a:lnTo>
-                    <a:pt x="6439364" y="1043400"/>
-                  </a:lnTo>
-                  <a:lnTo>
-                    <a:pt x="6361730" y="1039436"/>
-                  </a:lnTo>
-                  <a:lnTo>
-                    <a:pt x="6284096" y="1035181"/>
-                  </a:lnTo>
-                  <a:lnTo>
-                    <a:pt x="6206462" y="1030615"/>
-                  </a:lnTo>
-                  <a:lnTo>
-                    <a:pt x="6128827" y="1025716"/>
-                  </a:lnTo>
-                  <a:lnTo>
-                    <a:pt x="6051193" y="1020459"/>
-                  </a:lnTo>
-                  <a:lnTo>
-                    <a:pt x="5973559" y="1014817"/>
-                  </a:lnTo>
-                  <a:lnTo>
-                    <a:pt x="5895925" y="1008762"/>
-                  </a:lnTo>
-                  <a:lnTo>
-                    <a:pt x="5818291" y="1002266"/>
-                  </a:lnTo>
-                  <a:lnTo>
-                    <a:pt x="5740657" y="995294"/>
-                  </a:lnTo>
-                  <a:lnTo>
-                    <a:pt x="5663023" y="987812"/>
-                  </a:lnTo>
-                  <a:lnTo>
-                    <a:pt x="5585389" y="979784"/>
-                  </a:lnTo>
-                  <a:lnTo>
-                    <a:pt x="5507755" y="971169"/>
-                  </a:lnTo>
-                  <a:lnTo>
-                    <a:pt x="5430121" y="961923"/>
-                  </a:lnTo>
-                  <a:lnTo>
-                    <a:pt x="5352487" y="952002"/>
-                  </a:lnTo>
-                  <a:lnTo>
-                    <a:pt x="5274853" y="941356"/>
-                  </a:lnTo>
-                  <a:lnTo>
-                    <a:pt x="5197219" y="929932"/>
-                  </a:lnTo>
-                  <a:lnTo>
-                    <a:pt x="5119585" y="917672"/>
-                  </a:lnTo>
-                  <a:lnTo>
-                    <a:pt x="5041951" y="904516"/>
-                  </a:lnTo>
-                  <a:lnTo>
-                    <a:pt x="4964317" y="890398"/>
-                  </a:lnTo>
-                  <a:lnTo>
-                    <a:pt x="4886683" y="875249"/>
-                  </a:lnTo>
-                  <a:lnTo>
-                    <a:pt x="4809049" y="858991"/>
-                  </a:lnTo>
-                  <a:lnTo>
-                    <a:pt x="4731415" y="841546"/>
-                  </a:lnTo>
-                  <a:lnTo>
-                    <a:pt x="4653781" y="822825"/>
-                  </a:lnTo>
-                  <a:lnTo>
-                    <a:pt x="4576147" y="802735"/>
-                  </a:lnTo>
-                  <a:lnTo>
-                    <a:pt x="4498513" y="781177"/>
-                  </a:lnTo>
-                  <a:lnTo>
-                    <a:pt x="4420879" y="758042"/>
-                  </a:lnTo>
-                  <a:lnTo>
-                    <a:pt x="4343244" y="733217"/>
-                  </a:lnTo>
-                  <a:lnTo>
-                    <a:pt x="4265610" y="706576"/>
-                  </a:lnTo>
-                  <a:lnTo>
-                    <a:pt x="4187976" y="677988"/>
-                  </a:lnTo>
-                  <a:lnTo>
-                    <a:pt x="4110342" y="647311"/>
-                  </a:lnTo>
-                  <a:lnTo>
-                    <a:pt x="4032708" y="614390"/>
-                  </a:lnTo>
-                  <a:lnTo>
-                    <a:pt x="3955074" y="579063"/>
-                  </a:lnTo>
-                  <a:lnTo>
-                    <a:pt x="3877440" y="541154"/>
-                  </a:lnTo>
-                  <a:lnTo>
-                    <a:pt x="3799806" y="500473"/>
-                  </a:lnTo>
-                  <a:lnTo>
-                    <a:pt x="3722172" y="456818"/>
-                  </a:lnTo>
-                  <a:lnTo>
-                    <a:pt x="3644538" y="409972"/>
-                  </a:lnTo>
-                  <a:lnTo>
-                    <a:pt x="3566904" y="359701"/>
-                  </a:lnTo>
-                  <a:lnTo>
-                    <a:pt x="3489270" y="305755"/>
-                  </a:lnTo>
-                  <a:lnTo>
-                    <a:pt x="3411636" y="247865"/>
-                  </a:lnTo>
-                  <a:lnTo>
-                    <a:pt x="3334002" y="224833"/>
-                  </a:lnTo>
-                  <a:lnTo>
-                    <a:pt x="3256368" y="220162"/>
-                  </a:lnTo>
-                  <a:lnTo>
-                    <a:pt x="3178734" y="215467"/>
-                  </a:lnTo>
-                  <a:lnTo>
-                    <a:pt x="3101100" y="210746"/>
-                  </a:lnTo>
-                  <a:lnTo>
-                    <a:pt x="3023466" y="206000"/>
-                  </a:lnTo>
-                  <a:lnTo>
-                    <a:pt x="2945832" y="201228"/>
-                  </a:lnTo>
-                  <a:lnTo>
-                    <a:pt x="2868198" y="196431"/>
-                  </a:lnTo>
-                  <a:lnTo>
-                    <a:pt x="2790564" y="191609"/>
-                  </a:lnTo>
-                  <a:lnTo>
-                    <a:pt x="2712930" y="186760"/>
-                  </a:lnTo>
-                  <a:lnTo>
-                    <a:pt x="2635295" y="181886"/>
-                  </a:lnTo>
-                  <a:lnTo>
-                    <a:pt x="2557661" y="176985"/>
-                  </a:lnTo>
-                  <a:lnTo>
-                    <a:pt x="2480027" y="172058"/>
-                  </a:lnTo>
-                  <a:lnTo>
-                    <a:pt x="2402393" y="167105"/>
-                  </a:lnTo>
-                  <a:lnTo>
-                    <a:pt x="2324759" y="162125"/>
-                  </a:lnTo>
-                  <a:lnTo>
-                    <a:pt x="2247125" y="157119"/>
-                  </a:lnTo>
-                  <a:lnTo>
-                    <a:pt x="2169491" y="152086"/>
-                  </a:lnTo>
-                  <a:lnTo>
-                    <a:pt x="2091857" y="147026"/>
-                  </a:lnTo>
-                  <a:lnTo>
-                    <a:pt x="2014223" y="141939"/>
-                  </a:lnTo>
-                  <a:lnTo>
-                    <a:pt x="1936589" y="136825"/>
-                  </a:lnTo>
-                  <a:lnTo>
-                    <a:pt x="1858955" y="131683"/>
-                  </a:lnTo>
-                  <a:lnTo>
-                    <a:pt x="1781321" y="126514"/>
-                  </a:lnTo>
-                  <a:lnTo>
-                    <a:pt x="1703687" y="121317"/>
-                  </a:lnTo>
-                  <a:lnTo>
-                    <a:pt x="1626053" y="116092"/>
-                  </a:lnTo>
-                  <a:lnTo>
-                    <a:pt x="1548419" y="110839"/>
-                  </a:lnTo>
-                  <a:lnTo>
-                    <a:pt x="1470785" y="105559"/>
-                  </a:lnTo>
-                  <a:lnTo>
-                    <a:pt x="1393151" y="100250"/>
-                  </a:lnTo>
-                  <a:lnTo>
-                    <a:pt x="1315517" y="94912"/>
-                  </a:lnTo>
-                  <a:lnTo>
-                    <a:pt x="1237883" y="89546"/>
-                  </a:lnTo>
-                  <a:lnTo>
-                    <a:pt x="1160249" y="84152"/>
-                  </a:lnTo>
-                  <a:lnTo>
-                    <a:pt x="1082615" y="78728"/>
-                  </a:lnTo>
-                  <a:lnTo>
-                    <a:pt x="1004981" y="73275"/>
-                  </a:lnTo>
-                  <a:lnTo>
-                    <a:pt x="927346" y="67794"/>
-                  </a:lnTo>
-                  <a:lnTo>
-                    <a:pt x="849712" y="62283"/>
-                  </a:lnTo>
-                  <a:lnTo>
-                    <a:pt x="772078" y="56742"/>
-                  </a:lnTo>
-                  <a:lnTo>
-                    <a:pt x="694444" y="51172"/>
-                  </a:lnTo>
-                  <a:lnTo>
-                    <a:pt x="616810" y="45572"/>
-                  </a:lnTo>
-                  <a:lnTo>
-                    <a:pt x="539176" y="39942"/>
-                  </a:lnTo>
-                  <a:lnTo>
-                    <a:pt x="461542" y="34281"/>
-                  </a:lnTo>
-                  <a:lnTo>
-                    <a:pt x="383908" y="28591"/>
-                  </a:lnTo>
-                  <a:lnTo>
-                    <a:pt x="306274" y="22870"/>
-                  </a:lnTo>
-                  <a:lnTo>
-                    <a:pt x="228640" y="17119"/>
-                  </a:lnTo>
-                  <a:lnTo>
-                    <a:pt x="151006" y="11336"/>
-                  </a:lnTo>
-                  <a:lnTo>
-                    <a:pt x="73372" y="5523"/>
+                    <a:pt x="7293338" y="1143933"/>
+                  </a:lnTo>
+                  <a:lnTo>
+                    <a:pt x="7215704" y="1142707"/>
+                  </a:lnTo>
+                  <a:lnTo>
+                    <a:pt x="7138070" y="1141376"/>
+                  </a:lnTo>
+                  <a:lnTo>
+                    <a:pt x="7060436" y="1139932"/>
+                  </a:lnTo>
+                  <a:lnTo>
+                    <a:pt x="6982802" y="1138366"/>
+                  </a:lnTo>
+                  <a:lnTo>
+                    <a:pt x="6905168" y="1136667"/>
+                  </a:lnTo>
+                  <a:lnTo>
+                    <a:pt x="6827534" y="1134824"/>
+                  </a:lnTo>
+                  <a:lnTo>
+                    <a:pt x="6749900" y="1132825"/>
+                  </a:lnTo>
+                  <a:lnTo>
+                    <a:pt x="6672266" y="1130657"/>
+                  </a:lnTo>
+                  <a:lnTo>
+                    <a:pt x="6594632" y="1128304"/>
+                  </a:lnTo>
+                  <a:lnTo>
+                    <a:pt x="6516998" y="1125752"/>
+                  </a:lnTo>
+                  <a:lnTo>
+                    <a:pt x="6439364" y="1122984"/>
+                  </a:lnTo>
+                  <a:lnTo>
+                    <a:pt x="6361730" y="1119980"/>
+                  </a:lnTo>
+                  <a:lnTo>
+                    <a:pt x="6284096" y="1116723"/>
+                  </a:lnTo>
+                  <a:lnTo>
+                    <a:pt x="6206462" y="1113188"/>
+                  </a:lnTo>
+                  <a:lnTo>
+                    <a:pt x="6128827" y="1109355"/>
+                  </a:lnTo>
+                  <a:lnTo>
+                    <a:pt x="6051193" y="1105196"/>
+                  </a:lnTo>
+                  <a:lnTo>
+                    <a:pt x="5973559" y="1100684"/>
+                  </a:lnTo>
+                  <a:lnTo>
+                    <a:pt x="5895925" y="1095790"/>
+                  </a:lnTo>
+                  <a:lnTo>
+                    <a:pt x="5818291" y="1090481"/>
+                  </a:lnTo>
+                  <a:lnTo>
+                    <a:pt x="5740657" y="1084722"/>
+                  </a:lnTo>
+                  <a:lnTo>
+                    <a:pt x="5663023" y="1078475"/>
+                  </a:lnTo>
+                  <a:lnTo>
+                    <a:pt x="5585389" y="1071697"/>
+                  </a:lnTo>
+                  <a:lnTo>
+                    <a:pt x="5507755" y="1064345"/>
+                  </a:lnTo>
+                  <a:lnTo>
+                    <a:pt x="5430121" y="1056370"/>
+                  </a:lnTo>
+                  <a:lnTo>
+                    <a:pt x="5352487" y="1047719"/>
+                  </a:lnTo>
+                  <a:lnTo>
+                    <a:pt x="5274853" y="1038333"/>
+                  </a:lnTo>
+                  <a:lnTo>
+                    <a:pt x="5197219" y="1028152"/>
+                  </a:lnTo>
+                  <a:lnTo>
+                    <a:pt x="5119585" y="1017108"/>
+                  </a:lnTo>
+                  <a:lnTo>
+                    <a:pt x="5041951" y="1005127"/>
+                  </a:lnTo>
+                  <a:lnTo>
+                    <a:pt x="4964317" y="992131"/>
+                  </a:lnTo>
+                  <a:lnTo>
+                    <a:pt x="4886683" y="978032"/>
+                  </a:lnTo>
+                  <a:lnTo>
+                    <a:pt x="4809049" y="962738"/>
+                  </a:lnTo>
+                  <a:lnTo>
+                    <a:pt x="4731415" y="946147"/>
+                  </a:lnTo>
+                  <a:lnTo>
+                    <a:pt x="4653781" y="928149"/>
+                  </a:lnTo>
+                  <a:lnTo>
+                    <a:pt x="4576147" y="908625"/>
+                  </a:lnTo>
+                  <a:lnTo>
+                    <a:pt x="4498513" y="887446"/>
+                  </a:lnTo>
+                  <a:lnTo>
+                    <a:pt x="4420879" y="864471"/>
+                  </a:lnTo>
+                  <a:lnTo>
+                    <a:pt x="4343244" y="839547"/>
+                  </a:lnTo>
+                  <a:lnTo>
+                    <a:pt x="4265610" y="812511"/>
+                  </a:lnTo>
+                  <a:lnTo>
+                    <a:pt x="4187976" y="783181"/>
+                  </a:lnTo>
+                  <a:lnTo>
+                    <a:pt x="4110342" y="751365"/>
+                  </a:lnTo>
+                  <a:lnTo>
+                    <a:pt x="4032708" y="716851"/>
+                  </a:lnTo>
+                  <a:lnTo>
+                    <a:pt x="3955074" y="679411"/>
+                  </a:lnTo>
+                  <a:lnTo>
+                    <a:pt x="3877440" y="638795"/>
+                  </a:lnTo>
+                  <a:lnTo>
+                    <a:pt x="3799806" y="594736"/>
+                  </a:lnTo>
+                  <a:lnTo>
+                    <a:pt x="3722172" y="546941"/>
+                  </a:lnTo>
+                  <a:lnTo>
+                    <a:pt x="3644538" y="495093"/>
+                  </a:lnTo>
+                  <a:lnTo>
+                    <a:pt x="3566904" y="438849"/>
+                  </a:lnTo>
+                  <a:lnTo>
+                    <a:pt x="3489270" y="377836"/>
+                  </a:lnTo>
+                  <a:lnTo>
+                    <a:pt x="3411636" y="311649"/>
+                  </a:lnTo>
+                  <a:lnTo>
+                    <a:pt x="3334002" y="284876"/>
+                  </a:lnTo>
+                  <a:lnTo>
+                    <a:pt x="3256368" y="279116"/>
+                  </a:lnTo>
+                  <a:lnTo>
+                    <a:pt x="3178734" y="273318"/>
+                  </a:lnTo>
+                  <a:lnTo>
+                    <a:pt x="3101100" y="267481"/>
+                  </a:lnTo>
+                  <a:lnTo>
+                    <a:pt x="3023466" y="261606"/>
+                  </a:lnTo>
+                  <a:lnTo>
+                    <a:pt x="2945832" y="255693"/>
+                  </a:lnTo>
+                  <a:lnTo>
+                    <a:pt x="2868198" y="249740"/>
+                  </a:lnTo>
+                  <a:lnTo>
+                    <a:pt x="2790564" y="243748"/>
+                  </a:lnTo>
+                  <a:lnTo>
+                    <a:pt x="2712930" y="237717"/>
+                  </a:lnTo>
+                  <a:lnTo>
+                    <a:pt x="2635295" y="231646"/>
+                  </a:lnTo>
+                  <a:lnTo>
+                    <a:pt x="2557661" y="225534"/>
+                  </a:lnTo>
+                  <a:lnTo>
+                    <a:pt x="2480027" y="219383"/>
+                  </a:lnTo>
+                  <a:lnTo>
+                    <a:pt x="2402393" y="213191"/>
+                  </a:lnTo>
+                  <a:lnTo>
+                    <a:pt x="2324759" y="206958"/>
+                  </a:lnTo>
+                  <a:lnTo>
+                    <a:pt x="2247125" y="200684"/>
+                  </a:lnTo>
+                  <a:lnTo>
+                    <a:pt x="2169491" y="194369"/>
+                  </a:lnTo>
+                  <a:lnTo>
+                    <a:pt x="2091857" y="188012"/>
+                  </a:lnTo>
+                  <a:lnTo>
+                    <a:pt x="2014223" y="181613"/>
+                  </a:lnTo>
+                  <a:lnTo>
+                    <a:pt x="1936589" y="175171"/>
+                  </a:lnTo>
+                  <a:lnTo>
+                    <a:pt x="1858955" y="168688"/>
+                  </a:lnTo>
+                  <a:lnTo>
+                    <a:pt x="1781321" y="162162"/>
+                  </a:lnTo>
+                  <a:lnTo>
+                    <a:pt x="1703687" y="155592"/>
+                  </a:lnTo>
+                  <a:lnTo>
+                    <a:pt x="1626053" y="148979"/>
+                  </a:lnTo>
+                  <a:lnTo>
+                    <a:pt x="1548419" y="142323"/>
+                  </a:lnTo>
+                  <a:lnTo>
+                    <a:pt x="1470785" y="135623"/>
+                  </a:lnTo>
+                  <a:lnTo>
+                    <a:pt x="1393151" y="128879"/>
+                  </a:lnTo>
+                  <a:lnTo>
+                    <a:pt x="1315517" y="122090"/>
+                  </a:lnTo>
+                  <a:lnTo>
+                    <a:pt x="1237883" y="115256"/>
+                  </a:lnTo>
+                  <a:lnTo>
+                    <a:pt x="1160249" y="108377"/>
+                  </a:lnTo>
+                  <a:lnTo>
+                    <a:pt x="1082615" y="101453"/>
+                  </a:lnTo>
+                  <a:lnTo>
+                    <a:pt x="1004981" y="94484"/>
+                  </a:lnTo>
+                  <a:lnTo>
+                    <a:pt x="927346" y="87468"/>
+                  </a:lnTo>
+                  <a:lnTo>
+                    <a:pt x="849712" y="80406"/>
+                  </a:lnTo>
+                  <a:lnTo>
+                    <a:pt x="772078" y="73298"/>
+                  </a:lnTo>
+                  <a:lnTo>
+                    <a:pt x="694444" y="66142"/>
+                  </a:lnTo>
+                  <a:lnTo>
+                    <a:pt x="616810" y="58940"/>
+                  </a:lnTo>
+                  <a:lnTo>
+                    <a:pt x="539176" y="51690"/>
+                  </a:lnTo>
+                  <a:lnTo>
+                    <a:pt x="461542" y="44392"/>
+                  </a:lnTo>
+                  <a:lnTo>
+                    <a:pt x="383908" y="37046"/>
+                  </a:lnTo>
+                  <a:lnTo>
+                    <a:pt x="306274" y="29651"/>
+                  </a:lnTo>
+                  <a:lnTo>
+                    <a:pt x="228640" y="22208"/>
+                  </a:lnTo>
+                  <a:lnTo>
+                    <a:pt x="151006" y="14716"/>
+                  </a:lnTo>
+                  <a:lnTo>
+                    <a:pt x="73372" y="7174"/>
                   </a:lnTo>
                   <a:lnTo>
                     <a:pt x="0" y="0"/>
@@ -4097,285 +4082,267 @@
           </p:nvSpPr>
           <p:spPr>
             <a:xfrm>
-              <a:off x="1267826" y="1896563"/>
-              <a:ext cx="6920664" cy="3528628"/>
+              <a:off x="1670574" y="1896563"/>
+              <a:ext cx="6517915" cy="3561662"/>
             </a:xfrm>
             <a:custGeom>
               <a:avLst/>
               <a:pathLst>
-                <a:path w="6920664" h="3528628">
+                <a:path w="6517915" h="3561662">
                   <a:moveTo>
                     <a:pt x="0" y="0"/>
                   </a:moveTo>
                   <a:lnTo>
-                    <a:pt x="11234" y="20329"/>
-                  </a:lnTo>
-                  <a:lnTo>
-                    <a:pt x="88868" y="155579"/>
-                  </a:lnTo>
-                  <a:lnTo>
-                    <a:pt x="166502" y="285793"/>
-                  </a:lnTo>
-                  <a:lnTo>
-                    <a:pt x="244136" y="411159"/>
-                  </a:lnTo>
-                  <a:lnTo>
-                    <a:pt x="321770" y="531857"/>
-                  </a:lnTo>
-                  <a:lnTo>
-                    <a:pt x="399404" y="648060"/>
-                  </a:lnTo>
-                  <a:lnTo>
-                    <a:pt x="477038" y="759937"/>
-                  </a:lnTo>
-                  <a:lnTo>
-                    <a:pt x="554672" y="867648"/>
-                  </a:lnTo>
-                  <a:lnTo>
-                    <a:pt x="632306" y="971348"/>
-                  </a:lnTo>
-                  <a:lnTo>
-                    <a:pt x="709940" y="1071187"/>
-                  </a:lnTo>
-                  <a:lnTo>
-                    <a:pt x="787574" y="1167308"/>
-                  </a:lnTo>
-                  <a:lnTo>
-                    <a:pt x="865208" y="1259851"/>
-                  </a:lnTo>
-                  <a:lnTo>
-                    <a:pt x="942842" y="1348947"/>
-                  </a:lnTo>
-                  <a:lnTo>
-                    <a:pt x="1020476" y="1434726"/>
-                  </a:lnTo>
-                  <a:lnTo>
-                    <a:pt x="1098111" y="1517311"/>
-                  </a:lnTo>
-                  <a:lnTo>
-                    <a:pt x="1175745" y="1596821"/>
-                  </a:lnTo>
-                  <a:lnTo>
-                    <a:pt x="1253379" y="1673370"/>
-                  </a:lnTo>
-                  <a:lnTo>
-                    <a:pt x="1331013" y="1747069"/>
-                  </a:lnTo>
-                  <a:lnTo>
-                    <a:pt x="1408647" y="1818023"/>
-                  </a:lnTo>
-                  <a:lnTo>
-                    <a:pt x="1486281" y="1886336"/>
-                  </a:lnTo>
-                  <a:lnTo>
-                    <a:pt x="1563915" y="1952105"/>
-                  </a:lnTo>
-                  <a:lnTo>
-                    <a:pt x="1641549" y="2015425"/>
-                  </a:lnTo>
-                  <a:lnTo>
-                    <a:pt x="1719183" y="2076388"/>
-                  </a:lnTo>
-                  <a:lnTo>
-                    <a:pt x="1796817" y="2135080"/>
-                  </a:lnTo>
-                  <a:lnTo>
-                    <a:pt x="1874451" y="2191587"/>
-                  </a:lnTo>
-                  <a:lnTo>
-                    <a:pt x="1952085" y="2245990"/>
-                  </a:lnTo>
-                  <a:lnTo>
-                    <a:pt x="2029719" y="2298367"/>
-                  </a:lnTo>
-                  <a:lnTo>
-                    <a:pt x="2107353" y="2348794"/>
-                  </a:lnTo>
-                  <a:lnTo>
-                    <a:pt x="2184987" y="2397343"/>
-                  </a:lnTo>
-                  <a:lnTo>
-                    <a:pt x="2262621" y="2444085"/>
-                  </a:lnTo>
-                  <a:lnTo>
-                    <a:pt x="2340255" y="2489086"/>
-                  </a:lnTo>
-                  <a:lnTo>
-                    <a:pt x="2417889" y="2532411"/>
-                  </a:lnTo>
-                  <a:lnTo>
-                    <a:pt x="2495523" y="2574123"/>
-                  </a:lnTo>
-                  <a:lnTo>
-                    <a:pt x="2573157" y="2614283"/>
-                  </a:lnTo>
-                  <a:lnTo>
-                    <a:pt x="2650791" y="2652946"/>
-                  </a:lnTo>
-                  <a:lnTo>
-                    <a:pt x="2728425" y="2690170"/>
-                  </a:lnTo>
-                  <a:lnTo>
-                    <a:pt x="2806060" y="2726008"/>
-                  </a:lnTo>
-                  <a:lnTo>
-                    <a:pt x="2883694" y="2760512"/>
-                  </a:lnTo>
-                  <a:lnTo>
-                    <a:pt x="2961328" y="2793731"/>
-                  </a:lnTo>
-                  <a:lnTo>
-                    <a:pt x="3038962" y="2825713"/>
-                  </a:lnTo>
-                  <a:lnTo>
-                    <a:pt x="3116596" y="2856504"/>
-                  </a:lnTo>
-                  <a:lnTo>
-                    <a:pt x="3194230" y="2886148"/>
-                  </a:lnTo>
-                  <a:lnTo>
-                    <a:pt x="3271864" y="2914689"/>
-                  </a:lnTo>
-                  <a:lnTo>
-                    <a:pt x="3349498" y="2942167"/>
-                  </a:lnTo>
-                  <a:lnTo>
-                    <a:pt x="3427132" y="2968622"/>
-                  </a:lnTo>
-                  <a:lnTo>
-                    <a:pt x="3504766" y="2994091"/>
-                  </a:lnTo>
-                  <a:lnTo>
-                    <a:pt x="3582400" y="3018613"/>
-                  </a:lnTo>
-                  <a:lnTo>
-                    <a:pt x="3660034" y="3042221"/>
-                  </a:lnTo>
-                  <a:lnTo>
-                    <a:pt x="3737668" y="3064950"/>
-                  </a:lnTo>
-                  <a:lnTo>
-                    <a:pt x="3815302" y="3086833"/>
-                  </a:lnTo>
-                  <a:lnTo>
-                    <a:pt x="3892936" y="3107901"/>
-                  </a:lnTo>
-                  <a:lnTo>
-                    <a:pt x="3970570" y="3128185"/>
-                  </a:lnTo>
-                  <a:lnTo>
-                    <a:pt x="4048204" y="3147713"/>
-                  </a:lnTo>
-                  <a:lnTo>
-                    <a:pt x="4125838" y="3166515"/>
-                  </a:lnTo>
-                  <a:lnTo>
-                    <a:pt x="4203472" y="3184616"/>
-                  </a:lnTo>
-                  <a:lnTo>
-                    <a:pt x="4281106" y="3202043"/>
-                  </a:lnTo>
-                  <a:lnTo>
-                    <a:pt x="4358740" y="3218821"/>
-                  </a:lnTo>
-                  <a:lnTo>
-                    <a:pt x="4436374" y="3234975"/>
-                  </a:lnTo>
-                  <a:lnTo>
-                    <a:pt x="4514009" y="3250527"/>
-                  </a:lnTo>
-                  <a:lnTo>
-                    <a:pt x="4591643" y="3265500"/>
-                  </a:lnTo>
-                  <a:lnTo>
-                    <a:pt x="4669277" y="3279915"/>
-                  </a:lnTo>
-                  <a:lnTo>
-                    <a:pt x="4746911" y="3293794"/>
-                  </a:lnTo>
-                  <a:lnTo>
-                    <a:pt x="4824545" y="3307156"/>
-                  </a:lnTo>
-                  <a:lnTo>
-                    <a:pt x="4902179" y="3320020"/>
-                  </a:lnTo>
-                  <a:lnTo>
-                    <a:pt x="4979813" y="3332405"/>
-                  </a:lnTo>
-                  <a:lnTo>
-                    <a:pt x="5057447" y="3344330"/>
-                  </a:lnTo>
-                  <a:lnTo>
-                    <a:pt x="5135081" y="3355810"/>
-                  </a:lnTo>
-                  <a:lnTo>
-                    <a:pt x="5212715" y="3366862"/>
-                  </a:lnTo>
-                  <a:lnTo>
-                    <a:pt x="5290349" y="3377504"/>
-                  </a:lnTo>
-                  <a:lnTo>
-                    <a:pt x="5367983" y="3387748"/>
-                  </a:lnTo>
-                  <a:lnTo>
-                    <a:pt x="5445617" y="3397612"/>
-                  </a:lnTo>
-                  <a:lnTo>
-                    <a:pt x="5523251" y="3407108"/>
-                  </a:lnTo>
-                  <a:lnTo>
-                    <a:pt x="5600885" y="3416251"/>
-                  </a:lnTo>
-                  <a:lnTo>
-                    <a:pt x="5678519" y="3425053"/>
-                  </a:lnTo>
-                  <a:lnTo>
-                    <a:pt x="5756153" y="3433527"/>
-                  </a:lnTo>
-                  <a:lnTo>
-                    <a:pt x="5833787" y="3441686"/>
-                  </a:lnTo>
-                  <a:lnTo>
-                    <a:pt x="5911421" y="3449541"/>
-                  </a:lnTo>
-                  <a:lnTo>
-                    <a:pt x="5989055" y="3457104"/>
-                  </a:lnTo>
-                  <a:lnTo>
-                    <a:pt x="6066689" y="3464385"/>
-                  </a:lnTo>
-                  <a:lnTo>
-                    <a:pt x="6144323" y="3471395"/>
-                  </a:lnTo>
-                  <a:lnTo>
-                    <a:pt x="6221957" y="3478143"/>
-                  </a:lnTo>
-                  <a:lnTo>
-                    <a:pt x="6299592" y="3484641"/>
-                  </a:lnTo>
-                  <a:lnTo>
-                    <a:pt x="6377226" y="3490897"/>
-                  </a:lnTo>
-                  <a:lnTo>
-                    <a:pt x="6454860" y="3496919"/>
-                  </a:lnTo>
-                  <a:lnTo>
-                    <a:pt x="6532494" y="3502718"/>
-                  </a:lnTo>
-                  <a:lnTo>
-                    <a:pt x="6610128" y="3508300"/>
-                  </a:lnTo>
-                  <a:lnTo>
-                    <a:pt x="6687762" y="3513675"/>
-                  </a:lnTo>
-                  <a:lnTo>
-                    <a:pt x="6765396" y="3518849"/>
-                  </a:lnTo>
-                  <a:lnTo>
-                    <a:pt x="6843030" y="3523831"/>
-                  </a:lnTo>
-                  <a:lnTo>
-                    <a:pt x="6920664" y="3528628"/>
+                    <a:pt x="74290" y="150675"/>
+                  </a:lnTo>
+                  <a:lnTo>
+                    <a:pt x="151924" y="301357"/>
+                  </a:lnTo>
+                  <a:lnTo>
+                    <a:pt x="229558" y="445556"/>
+                  </a:lnTo>
+                  <a:lnTo>
+                    <a:pt x="307192" y="583550"/>
+                  </a:lnTo>
+                  <a:lnTo>
+                    <a:pt x="384826" y="715607"/>
+                  </a:lnTo>
+                  <a:lnTo>
+                    <a:pt x="462460" y="841982"/>
+                  </a:lnTo>
+                  <a:lnTo>
+                    <a:pt x="540094" y="962918"/>
+                  </a:lnTo>
+                  <a:lnTo>
+                    <a:pt x="617728" y="1078652"/>
+                  </a:lnTo>
+                  <a:lnTo>
+                    <a:pt x="695362" y="1189405"/>
+                  </a:lnTo>
+                  <a:lnTo>
+                    <a:pt x="772996" y="1295393"/>
+                  </a:lnTo>
+                  <a:lnTo>
+                    <a:pt x="850630" y="1396821"/>
+                  </a:lnTo>
+                  <a:lnTo>
+                    <a:pt x="928264" y="1493884"/>
+                  </a:lnTo>
+                  <a:lnTo>
+                    <a:pt x="1005898" y="1586771"/>
+                  </a:lnTo>
+                  <a:lnTo>
+                    <a:pt x="1083532" y="1675661"/>
+                  </a:lnTo>
+                  <a:lnTo>
+                    <a:pt x="1161166" y="1760727"/>
+                  </a:lnTo>
+                  <a:lnTo>
+                    <a:pt x="1238800" y="1842132"/>
+                  </a:lnTo>
+                  <a:lnTo>
+                    <a:pt x="1316434" y="1920035"/>
+                  </a:lnTo>
+                  <a:lnTo>
+                    <a:pt x="1394068" y="1994585"/>
+                  </a:lnTo>
+                  <a:lnTo>
+                    <a:pt x="1471702" y="2065928"/>
+                  </a:lnTo>
+                  <a:lnTo>
+                    <a:pt x="1549336" y="2134201"/>
+                  </a:lnTo>
+                  <a:lnTo>
+                    <a:pt x="1626970" y="2199536"/>
+                  </a:lnTo>
+                  <a:lnTo>
+                    <a:pt x="1704604" y="2262061"/>
+                  </a:lnTo>
+                  <a:lnTo>
+                    <a:pt x="1782238" y="2321894"/>
+                  </a:lnTo>
+                  <a:lnTo>
+                    <a:pt x="1859873" y="2379154"/>
+                  </a:lnTo>
+                  <a:lnTo>
+                    <a:pt x="1937507" y="2433949"/>
+                  </a:lnTo>
+                  <a:lnTo>
+                    <a:pt x="2015141" y="2486387"/>
+                  </a:lnTo>
+                  <a:lnTo>
+                    <a:pt x="2092775" y="2536569"/>
+                  </a:lnTo>
+                  <a:lnTo>
+                    <a:pt x="2170409" y="2584591"/>
+                  </a:lnTo>
+                  <a:lnTo>
+                    <a:pt x="2248043" y="2630547"/>
+                  </a:lnTo>
+                  <a:lnTo>
+                    <a:pt x="2325677" y="2674526"/>
+                  </a:lnTo>
+                  <a:lnTo>
+                    <a:pt x="2403311" y="2716612"/>
+                  </a:lnTo>
+                  <a:lnTo>
+                    <a:pt x="2480945" y="2756888"/>
+                  </a:lnTo>
+                  <a:lnTo>
+                    <a:pt x="2558579" y="2795430"/>
+                  </a:lnTo>
+                  <a:lnTo>
+                    <a:pt x="2636213" y="2832314"/>
+                  </a:lnTo>
+                  <a:lnTo>
+                    <a:pt x="2713847" y="2867611"/>
+                  </a:lnTo>
+                  <a:lnTo>
+                    <a:pt x="2791481" y="2901390"/>
+                  </a:lnTo>
+                  <a:lnTo>
+                    <a:pt x="2869115" y="2933715"/>
+                  </a:lnTo>
+                  <a:lnTo>
+                    <a:pt x="2946749" y="2964649"/>
+                  </a:lnTo>
+                  <a:lnTo>
+                    <a:pt x="3024383" y="2994252"/>
+                  </a:lnTo>
+                  <a:lnTo>
+                    <a:pt x="3102017" y="3022581"/>
+                  </a:lnTo>
+                  <a:lnTo>
+                    <a:pt x="3179651" y="3049691"/>
+                  </a:lnTo>
+                  <a:lnTo>
+                    <a:pt x="3257285" y="3075635"/>
+                  </a:lnTo>
+                  <a:lnTo>
+                    <a:pt x="3334919" y="3100462"/>
+                  </a:lnTo>
+                  <a:lnTo>
+                    <a:pt x="3412553" y="3124222"/>
+                  </a:lnTo>
+                  <a:lnTo>
+                    <a:pt x="3490187" y="3146958"/>
+                  </a:lnTo>
+                  <a:lnTo>
+                    <a:pt x="3567822" y="3168717"/>
+                  </a:lnTo>
+                  <a:lnTo>
+                    <a:pt x="3645456" y="3189539"/>
+                  </a:lnTo>
+                  <a:lnTo>
+                    <a:pt x="3723090" y="3209466"/>
+                  </a:lnTo>
+                  <a:lnTo>
+                    <a:pt x="3800724" y="3228535"/>
+                  </a:lnTo>
+                  <a:lnTo>
+                    <a:pt x="3878358" y="3246783"/>
+                  </a:lnTo>
+                  <a:lnTo>
+                    <a:pt x="3955992" y="3264247"/>
+                  </a:lnTo>
+                  <a:lnTo>
+                    <a:pt x="4033626" y="3280958"/>
+                  </a:lnTo>
+                  <a:lnTo>
+                    <a:pt x="4111260" y="3296951"/>
+                  </a:lnTo>
+                  <a:lnTo>
+                    <a:pt x="4188894" y="3312256"/>
+                  </a:lnTo>
+                  <a:lnTo>
+                    <a:pt x="4266528" y="3326902"/>
+                  </a:lnTo>
+                  <a:lnTo>
+                    <a:pt x="4344162" y="3340918"/>
+                  </a:lnTo>
+                  <a:lnTo>
+                    <a:pt x="4421796" y="3354331"/>
+                  </a:lnTo>
+                  <a:lnTo>
+                    <a:pt x="4499430" y="3367167"/>
+                  </a:lnTo>
+                  <a:lnTo>
+                    <a:pt x="4577064" y="3379450"/>
+                  </a:lnTo>
+                  <a:lnTo>
+                    <a:pt x="4654698" y="3391205"/>
+                  </a:lnTo>
+                  <a:lnTo>
+                    <a:pt x="4732332" y="3402454"/>
+                  </a:lnTo>
+                  <a:lnTo>
+                    <a:pt x="4809966" y="3413219"/>
+                  </a:lnTo>
+                  <a:lnTo>
+                    <a:pt x="4887600" y="3423521"/>
+                  </a:lnTo>
+                  <a:lnTo>
+                    <a:pt x="4965234" y="3433380"/>
+                  </a:lnTo>
+                  <a:lnTo>
+                    <a:pt x="5042868" y="3442814"/>
+                  </a:lnTo>
+                  <a:lnTo>
+                    <a:pt x="5120502" y="3451843"/>
+                  </a:lnTo>
+                  <a:lnTo>
+                    <a:pt x="5198136" y="3460483"/>
+                  </a:lnTo>
+                  <a:lnTo>
+                    <a:pt x="5275771" y="3468751"/>
+                  </a:lnTo>
+                  <a:lnTo>
+                    <a:pt x="5353405" y="3476664"/>
+                  </a:lnTo>
+                  <a:lnTo>
+                    <a:pt x="5431039" y="3484236"/>
+                  </a:lnTo>
+                  <a:lnTo>
+                    <a:pt x="5508673" y="3491482"/>
+                  </a:lnTo>
+                  <a:lnTo>
+                    <a:pt x="5586307" y="3498416"/>
+                  </a:lnTo>
+                  <a:lnTo>
+                    <a:pt x="5663941" y="3505052"/>
+                  </a:lnTo>
+                  <a:lnTo>
+                    <a:pt x="5741575" y="3511403"/>
+                  </a:lnTo>
+                  <a:lnTo>
+                    <a:pt x="5819209" y="3517480"/>
+                  </a:lnTo>
+                  <a:lnTo>
+                    <a:pt x="5896843" y="3523296"/>
+                  </a:lnTo>
+                  <a:lnTo>
+                    <a:pt x="5974477" y="3528862"/>
+                  </a:lnTo>
+                  <a:lnTo>
+                    <a:pt x="6052111" y="3534188"/>
+                  </a:lnTo>
+                  <a:lnTo>
+                    <a:pt x="6129745" y="3539285"/>
+                  </a:lnTo>
+                  <a:lnTo>
+                    <a:pt x="6207379" y="3544162"/>
+                  </a:lnTo>
+                  <a:lnTo>
+                    <a:pt x="6285013" y="3548830"/>
+                  </a:lnTo>
+                  <a:lnTo>
+                    <a:pt x="6362647" y="3553297"/>
+                  </a:lnTo>
+                  <a:lnTo>
+                    <a:pt x="6440281" y="3557571"/>
+                  </a:lnTo>
+                  <a:lnTo>
+                    <a:pt x="6517915" y="3561662"/>
                   </a:lnTo>
                 </a:path>
               </a:pathLst>

--- a/docs/plots/carbo/jx_carbo_linsubhr_ratio_throm2.pptx
+++ b/docs/plots/carbo/jx_carbo_linsubhr_ratio_throm2.pptx
@@ -3010,10 +3010,10 @@
               <a:pathLst>
                 <a:path w="7370972" h="3639306">
                   <a:moveTo>
-                    <a:pt x="2017411" y="0"/>
+                    <a:pt x="2017410" y="0"/>
                   </a:moveTo>
                   <a:lnTo>
-                    <a:pt x="2091857" y="274669"/>
+                    <a:pt x="2091857" y="274670"/>
                   </a:lnTo>
                   <a:lnTo>
                     <a:pt x="2169491" y="538711"/>
@@ -3022,16 +3022,16 @@
                     <a:pt x="2247125" y="782113"/>
                   </a:lnTo>
                   <a:lnTo>
-                    <a:pt x="2324759" y="1006489"/>
-                  </a:lnTo>
-                  <a:lnTo>
-                    <a:pt x="2402393" y="1213327"/>
+                    <a:pt x="2324759" y="1006490"/>
+                  </a:lnTo>
+                  <a:lnTo>
+                    <a:pt x="2402393" y="1213328"/>
                   </a:lnTo>
                   <a:lnTo>
                     <a:pt x="2480027" y="1403998"/>
                   </a:lnTo>
                   <a:lnTo>
-                    <a:pt x="2557661" y="1579764"/>
+                    <a:pt x="2557661" y="1579765"/>
                   </a:lnTo>
                   <a:lnTo>
                     <a:pt x="2635295" y="1741792"/>
@@ -3112,7 +3112,7 @@
                     <a:pt x="4576147" y="2866313"/>
                   </a:lnTo>
                   <a:lnTo>
-                    <a:pt x="4653781" y="2871464"/>
+                    <a:pt x="4653781" y="2871465"/>
                   </a:lnTo>
                   <a:lnTo>
                     <a:pt x="4731415" y="2876582"/>
@@ -3133,7 +3133,7 @@
                     <a:pt x="5119585" y="2901671"/>
                   </a:lnTo>
                   <a:lnTo>
-                    <a:pt x="5197219" y="2906590"/>
+                    <a:pt x="5197219" y="2906591"/>
                   </a:lnTo>
                   <a:lnTo>
                     <a:pt x="5274853" y="2911478"/>
@@ -3163,13 +3163,13 @@
                     <a:pt x="5895925" y="2949442"/>
                   </a:lnTo>
                   <a:lnTo>
-                    <a:pt x="5973559" y="2954048"/>
+                    <a:pt x="5973559" y="2954049"/>
                   </a:lnTo>
                   <a:lnTo>
                     <a:pt x="6051193" y="2958625"/>
                   </a:lnTo>
                   <a:lnTo>
-                    <a:pt x="6128827" y="2963171"/>
+                    <a:pt x="6128827" y="2963172"/>
                   </a:lnTo>
                   <a:lnTo>
                     <a:pt x="6206462" y="2967688"/>
@@ -3181,7 +3181,7 @@
                     <a:pt x="6361730" y="2976633"/>
                   </a:lnTo>
                   <a:lnTo>
-                    <a:pt x="6439364" y="2981061"/>
+                    <a:pt x="6439364" y="2981062"/>
                   </a:lnTo>
                   <a:lnTo>
                     <a:pt x="6516998" y="2985461"/>
@@ -3193,7 +3193,7 @@
                     <a:pt x="6672266" y="2994174"/>
                   </a:lnTo>
                   <a:lnTo>
-                    <a:pt x="6749900" y="2998487"/>
+                    <a:pt x="6749900" y="2998488"/>
                   </a:lnTo>
                   <a:lnTo>
                     <a:pt x="6827534" y="3002773"/>
@@ -3202,13 +3202,13 @@
                     <a:pt x="6905168" y="3007030"/>
                   </a:lnTo>
                   <a:lnTo>
-                    <a:pt x="6982802" y="3011259"/>
+                    <a:pt x="6982802" y="3011260"/>
                   </a:lnTo>
                   <a:lnTo>
                     <a:pt x="7060436" y="3015461"/>
                   </a:lnTo>
                   <a:lnTo>
-                    <a:pt x="7138070" y="3019635"/>
+                    <a:pt x="7138070" y="3019636"/>
                   </a:lnTo>
                   <a:lnTo>
                     <a:pt x="7215704" y="3023782"/>
@@ -3217,7 +3217,7 @@
                     <a:pt x="7293338" y="3027902"/>
                   </a:lnTo>
                   <a:lnTo>
-                    <a:pt x="7370972" y="3031994"/>
+                    <a:pt x="7370972" y="3031995"/>
                   </a:lnTo>
                   <a:lnTo>
                     <a:pt x="7370972" y="3639306"/>
@@ -3298,7 +3298,7 @@
                     <a:pt x="5430121" y="3550612"/>
                   </a:lnTo>
                   <a:lnTo>
-                    <a:pt x="5352487" y="3541961"/>
+                    <a:pt x="5352487" y="3541960"/>
                   </a:lnTo>
                   <a:lnTo>
                     <a:pt x="5274853" y="3532575"/>
@@ -3403,7 +3403,7 @@
                     <a:pt x="2712930" y="2731959"/>
                   </a:lnTo>
                   <a:lnTo>
-                    <a:pt x="2635295" y="2725888"/>
+                    <a:pt x="2635295" y="2725887"/>
                   </a:lnTo>
                   <a:lnTo>
                     <a:pt x="2557661" y="2719776"/>
@@ -3421,13 +3421,13 @@
                     <a:pt x="2247125" y="2694926"/>
                   </a:lnTo>
                   <a:lnTo>
-                    <a:pt x="2169491" y="2688611"/>
-                  </a:lnTo>
-                  <a:lnTo>
-                    <a:pt x="2091857" y="2682254"/>
-                  </a:lnTo>
-                  <a:lnTo>
-                    <a:pt x="2014223" y="2675855"/>
+                    <a:pt x="2169491" y="2688610"/>
+                  </a:lnTo>
+                  <a:lnTo>
+                    <a:pt x="2091857" y="2682253"/>
+                  </a:lnTo>
+                  <a:lnTo>
+                    <a:pt x="2014223" y="2675854"/>
                   </a:lnTo>
                   <a:lnTo>
                     <a:pt x="1936589" y="2669413"/>
@@ -3436,7 +3436,7 @@
                     <a:pt x="1858955" y="2662930"/>
                   </a:lnTo>
                   <a:lnTo>
-                    <a:pt x="1781321" y="2656404"/>
+                    <a:pt x="1781321" y="2656403"/>
                   </a:lnTo>
                   <a:lnTo>
                     <a:pt x="1703687" y="2649834"/>
@@ -3451,10 +3451,10 @@
                     <a:pt x="1470785" y="2629865"/>
                   </a:lnTo>
                   <a:lnTo>
-                    <a:pt x="1393151" y="2623121"/>
-                  </a:lnTo>
-                  <a:lnTo>
-                    <a:pt x="1315517" y="2616332"/>
+                    <a:pt x="1393151" y="2623120"/>
+                  </a:lnTo>
+                  <a:lnTo>
+                    <a:pt x="1315517" y="2616331"/>
                   </a:lnTo>
                   <a:lnTo>
                     <a:pt x="1237883" y="2609498"/>
@@ -3466,7 +3466,7 @@
                     <a:pt x="1082615" y="2595695"/>
                   </a:lnTo>
                   <a:lnTo>
-                    <a:pt x="1004981" y="2588726"/>
+                    <a:pt x="1004981" y="2588725"/>
                   </a:lnTo>
                   <a:lnTo>
                     <a:pt x="927346" y="2581710"/>
@@ -3475,22 +3475,22 @@
                     <a:pt x="849712" y="2574648"/>
                   </a:lnTo>
                   <a:lnTo>
-                    <a:pt x="772078" y="2567540"/>
+                    <a:pt x="772078" y="2567539"/>
                   </a:lnTo>
                   <a:lnTo>
                     <a:pt x="694444" y="2560384"/>
                   </a:lnTo>
                   <a:lnTo>
-                    <a:pt x="616810" y="2553182"/>
-                  </a:lnTo>
-                  <a:lnTo>
-                    <a:pt x="539176" y="2545932"/>
-                  </a:lnTo>
-                  <a:lnTo>
-                    <a:pt x="461542" y="2538634"/>
-                  </a:lnTo>
-                  <a:lnTo>
-                    <a:pt x="383908" y="2531288"/>
+                    <a:pt x="616810" y="2553181"/>
+                  </a:lnTo>
+                  <a:lnTo>
+                    <a:pt x="539176" y="2545931"/>
+                  </a:lnTo>
+                  <a:lnTo>
+                    <a:pt x="461542" y="2538633"/>
+                  </a:lnTo>
+                  <a:lnTo>
+                    <a:pt x="383908" y="2531287"/>
                   </a:lnTo>
                   <a:lnTo>
                     <a:pt x="306274" y="2523893"/>
@@ -3499,7 +3499,7 @@
                     <a:pt x="228640" y="2516450"/>
                   </a:lnTo>
                   <a:lnTo>
-                    <a:pt x="151006" y="2508958"/>
+                    <a:pt x="151006" y="2508957"/>
                   </a:lnTo>
                   <a:lnTo>
                     <a:pt x="73372" y="2501416"/>
@@ -3535,17 +3535,17 @@
           <p:spPr>
             <a:xfrm>
               <a:off x="2834928" y="1896563"/>
-              <a:ext cx="5353561" cy="3031994"/>
+              <a:ext cx="5353561" cy="3031995"/>
             </a:xfrm>
             <a:custGeom>
               <a:avLst/>
               <a:pathLst>
-                <a:path w="5353561" h="3031994">
+                <a:path w="5353561" h="3031995">
                   <a:moveTo>
                     <a:pt x="0" y="0"/>
                   </a:moveTo>
                   <a:lnTo>
-                    <a:pt x="74446" y="274669"/>
+                    <a:pt x="74446" y="274670"/>
                   </a:lnTo>
                   <a:lnTo>
                     <a:pt x="152080" y="538711"/>
@@ -3554,25 +3554,25 @@
                     <a:pt x="229714" y="782113"/>
                   </a:lnTo>
                   <a:lnTo>
-                    <a:pt x="307348" y="1006489"/>
-                  </a:lnTo>
-                  <a:lnTo>
-                    <a:pt x="384982" y="1213327"/>
-                  </a:lnTo>
-                  <a:lnTo>
-                    <a:pt x="462616" y="1403998"/>
-                  </a:lnTo>
-                  <a:lnTo>
-                    <a:pt x="540250" y="1579764"/>
-                  </a:lnTo>
-                  <a:lnTo>
-                    <a:pt x="617884" y="1741792"/>
-                  </a:lnTo>
-                  <a:lnTo>
-                    <a:pt x="695518" y="1891155"/>
-                  </a:lnTo>
-                  <a:lnTo>
-                    <a:pt x="773152" y="2028842"/>
+                    <a:pt x="307348" y="1006490"/>
+                  </a:lnTo>
+                  <a:lnTo>
+                    <a:pt x="384982" y="1213328"/>
+                  </a:lnTo>
+                  <a:lnTo>
+                    <a:pt x="462617" y="1403998"/>
+                  </a:lnTo>
+                  <a:lnTo>
+                    <a:pt x="540251" y="1579765"/>
+                  </a:lnTo>
+                  <a:lnTo>
+                    <a:pt x="617885" y="1741792"/>
+                  </a:lnTo>
+                  <a:lnTo>
+                    <a:pt x="695519" y="1891155"/>
+                  </a:lnTo>
+                  <a:lnTo>
+                    <a:pt x="773153" y="2028842"/>
                   </a:lnTo>
                   <a:lnTo>
                     <a:pt x="850787" y="2155768"/>
@@ -3626,25 +3626,25 @@
                     <a:pt x="2092931" y="2834685"/>
                   </a:lnTo>
                   <a:lnTo>
-                    <a:pt x="2170565" y="2840043"/>
-                  </a:lnTo>
-                  <a:lnTo>
-                    <a:pt x="2248199" y="2845366"/>
-                  </a:lnTo>
-                  <a:lnTo>
-                    <a:pt x="2325833" y="2850655"/>
-                  </a:lnTo>
-                  <a:lnTo>
-                    <a:pt x="2403467" y="2855909"/>
-                  </a:lnTo>
-                  <a:lnTo>
-                    <a:pt x="2481101" y="2861128"/>
+                    <a:pt x="2170566" y="2840043"/>
+                  </a:lnTo>
+                  <a:lnTo>
+                    <a:pt x="2248200" y="2845366"/>
+                  </a:lnTo>
+                  <a:lnTo>
+                    <a:pt x="2325834" y="2850655"/>
+                  </a:lnTo>
+                  <a:lnTo>
+                    <a:pt x="2403468" y="2855909"/>
+                  </a:lnTo>
+                  <a:lnTo>
+                    <a:pt x="2481102" y="2861128"/>
                   </a:lnTo>
                   <a:lnTo>
                     <a:pt x="2558736" y="2866313"/>
                   </a:lnTo>
                   <a:lnTo>
-                    <a:pt x="2636370" y="2871464"/>
+                    <a:pt x="2636370" y="2871465"/>
                   </a:lnTo>
                   <a:lnTo>
                     <a:pt x="2714004" y="2876582"/>
@@ -3665,7 +3665,7 @@
                     <a:pt x="3102174" y="2901671"/>
                   </a:lnTo>
                   <a:lnTo>
-                    <a:pt x="3179808" y="2906590"/>
+                    <a:pt x="3179808" y="2906591"/>
                   </a:lnTo>
                   <a:lnTo>
                     <a:pt x="3257442" y="2911478"/>
@@ -3692,19 +3692,19 @@
                     <a:pt x="3800880" y="2944805"/>
                   </a:lnTo>
                   <a:lnTo>
-                    <a:pt x="3878514" y="2949442"/>
-                  </a:lnTo>
-                  <a:lnTo>
-                    <a:pt x="3956148" y="2954048"/>
-                  </a:lnTo>
-                  <a:lnTo>
-                    <a:pt x="4033782" y="2958625"/>
-                  </a:lnTo>
-                  <a:lnTo>
-                    <a:pt x="4111416" y="2963171"/>
-                  </a:lnTo>
-                  <a:lnTo>
-                    <a:pt x="4189050" y="2967688"/>
+                    <a:pt x="3878515" y="2949442"/>
+                  </a:lnTo>
+                  <a:lnTo>
+                    <a:pt x="3956149" y="2954049"/>
+                  </a:lnTo>
+                  <a:lnTo>
+                    <a:pt x="4033783" y="2958625"/>
+                  </a:lnTo>
+                  <a:lnTo>
+                    <a:pt x="4111417" y="2963172"/>
+                  </a:lnTo>
+                  <a:lnTo>
+                    <a:pt x="4189051" y="2967688"/>
                   </a:lnTo>
                   <a:lnTo>
                     <a:pt x="4266685" y="2972175"/>
@@ -3713,7 +3713,7 @@
                     <a:pt x="4344319" y="2976633"/>
                   </a:lnTo>
                   <a:lnTo>
-                    <a:pt x="4421953" y="2981061"/>
+                    <a:pt x="4421953" y="2981062"/>
                   </a:lnTo>
                   <a:lnTo>
                     <a:pt x="4499587" y="2985461"/>
@@ -3725,7 +3725,7 @@
                     <a:pt x="4654855" y="2994174"/>
                   </a:lnTo>
                   <a:lnTo>
-                    <a:pt x="4732489" y="2998487"/>
+                    <a:pt x="4732489" y="2998488"/>
                   </a:lnTo>
                   <a:lnTo>
                     <a:pt x="4810123" y="3002773"/>
@@ -3734,13 +3734,13 @@
                     <a:pt x="4887757" y="3007030"/>
                   </a:lnTo>
                   <a:lnTo>
-                    <a:pt x="4965391" y="3011259"/>
+                    <a:pt x="4965391" y="3011260"/>
                   </a:lnTo>
                   <a:lnTo>
                     <a:pt x="5043025" y="3015461"/>
                   </a:lnTo>
                   <a:lnTo>
-                    <a:pt x="5120659" y="3019635"/>
+                    <a:pt x="5120659" y="3019636"/>
                   </a:lnTo>
                   <a:lnTo>
                     <a:pt x="5198293" y="3023782"/>
@@ -3749,7 +3749,7 @@
                     <a:pt x="5275927" y="3027902"/>
                   </a:lnTo>
                   <a:lnTo>
-                    <a:pt x="5353561" y="3031994"/>
+                    <a:pt x="5353561" y="3031995"/>
                   </a:lnTo>
                 </a:path>
               </a:pathLst>
@@ -3769,18 +3769,18 @@
           </p:nvSpPr>
           <p:spPr>
             <a:xfrm>
-              <a:off x="817517" y="4390805"/>
-              <a:ext cx="7370972" cy="1145064"/>
+              <a:off x="817517" y="4390804"/>
+              <a:ext cx="7370972" cy="1145065"/>
             </a:xfrm>
             <a:custGeom>
               <a:avLst/>
               <a:pathLst>
-                <a:path w="7370972" h="1145064">
+                <a:path w="7370972" h="1145065">
                   <a:moveTo>
-                    <a:pt x="7370972" y="1145064"/>
+                    <a:pt x="7370972" y="1145065"/>
                   </a:moveTo>
                   <a:lnTo>
-                    <a:pt x="7293338" y="1143933"/>
+                    <a:pt x="7293338" y="1143934"/>
                   </a:lnTo>
                   <a:lnTo>
                     <a:pt x="7215704" y="1142707"/>
@@ -3789,40 +3789,40 @@
                     <a:pt x="7138070" y="1141376"/>
                   </a:lnTo>
                   <a:lnTo>
-                    <a:pt x="7060436" y="1139932"/>
-                  </a:lnTo>
-                  <a:lnTo>
-                    <a:pt x="6982802" y="1138366"/>
-                  </a:lnTo>
-                  <a:lnTo>
-                    <a:pt x="6905168" y="1136667"/>
-                  </a:lnTo>
-                  <a:lnTo>
-                    <a:pt x="6827534" y="1134824"/>
-                  </a:lnTo>
-                  <a:lnTo>
-                    <a:pt x="6749900" y="1132825"/>
+                    <a:pt x="7060436" y="1139933"/>
+                  </a:lnTo>
+                  <a:lnTo>
+                    <a:pt x="6982802" y="1138367"/>
+                  </a:lnTo>
+                  <a:lnTo>
+                    <a:pt x="6905168" y="1136668"/>
+                  </a:lnTo>
+                  <a:lnTo>
+                    <a:pt x="6827534" y="1134825"/>
+                  </a:lnTo>
+                  <a:lnTo>
+                    <a:pt x="6749900" y="1132826"/>
                   </a:lnTo>
                   <a:lnTo>
                     <a:pt x="6672266" y="1130657"/>
                   </a:lnTo>
                   <a:lnTo>
-                    <a:pt x="6594632" y="1128304"/>
-                  </a:lnTo>
-                  <a:lnTo>
-                    <a:pt x="6516998" y="1125752"/>
+                    <a:pt x="6594632" y="1128305"/>
+                  </a:lnTo>
+                  <a:lnTo>
+                    <a:pt x="6516998" y="1125753"/>
                   </a:lnTo>
                   <a:lnTo>
                     <a:pt x="6439364" y="1122984"/>
                   </a:lnTo>
                   <a:lnTo>
-                    <a:pt x="6361730" y="1119980"/>
+                    <a:pt x="6361730" y="1119981"/>
                   </a:lnTo>
                   <a:lnTo>
                     <a:pt x="6284096" y="1116723"/>
                   </a:lnTo>
                   <a:lnTo>
-                    <a:pt x="6206462" y="1113188"/>
+                    <a:pt x="6206462" y="1113189"/>
                   </a:lnTo>
                   <a:lnTo>
                     <a:pt x="6128827" y="1109355"/>
@@ -3831,106 +3831,106 @@
                     <a:pt x="6051193" y="1105196"/>
                   </a:lnTo>
                   <a:lnTo>
-                    <a:pt x="5973559" y="1100684"/>
-                  </a:lnTo>
-                  <a:lnTo>
-                    <a:pt x="5895925" y="1095790"/>
-                  </a:lnTo>
-                  <a:lnTo>
-                    <a:pt x="5818291" y="1090481"/>
-                  </a:lnTo>
-                  <a:lnTo>
-                    <a:pt x="5740657" y="1084722"/>
+                    <a:pt x="5973559" y="1100685"/>
+                  </a:lnTo>
+                  <a:lnTo>
+                    <a:pt x="5895925" y="1095791"/>
+                  </a:lnTo>
+                  <a:lnTo>
+                    <a:pt x="5818291" y="1090482"/>
+                  </a:lnTo>
+                  <a:lnTo>
+                    <a:pt x="5740657" y="1084723"/>
                   </a:lnTo>
                   <a:lnTo>
                     <a:pt x="5663023" y="1078475"/>
                   </a:lnTo>
                   <a:lnTo>
-                    <a:pt x="5585389" y="1071697"/>
-                  </a:lnTo>
-                  <a:lnTo>
-                    <a:pt x="5507755" y="1064345"/>
-                  </a:lnTo>
-                  <a:lnTo>
-                    <a:pt x="5430121" y="1056370"/>
+                    <a:pt x="5585389" y="1071698"/>
+                  </a:lnTo>
+                  <a:lnTo>
+                    <a:pt x="5507755" y="1064346"/>
+                  </a:lnTo>
+                  <a:lnTo>
+                    <a:pt x="5430121" y="1056371"/>
                   </a:lnTo>
                   <a:lnTo>
                     <a:pt x="5352487" y="1047719"/>
                   </a:lnTo>
                   <a:lnTo>
-                    <a:pt x="5274853" y="1038333"/>
-                  </a:lnTo>
-                  <a:lnTo>
-                    <a:pt x="5197219" y="1028152"/>
-                  </a:lnTo>
-                  <a:lnTo>
-                    <a:pt x="5119585" y="1017108"/>
-                  </a:lnTo>
-                  <a:lnTo>
-                    <a:pt x="5041951" y="1005127"/>
+                    <a:pt x="5274853" y="1038334"/>
+                  </a:lnTo>
+                  <a:lnTo>
+                    <a:pt x="5197219" y="1028153"/>
+                  </a:lnTo>
+                  <a:lnTo>
+                    <a:pt x="5119585" y="1017109"/>
+                  </a:lnTo>
+                  <a:lnTo>
+                    <a:pt x="5041951" y="1005128"/>
                   </a:lnTo>
                   <a:lnTo>
                     <a:pt x="4964317" y="992131"/>
                   </a:lnTo>
                   <a:lnTo>
-                    <a:pt x="4886683" y="978032"/>
-                  </a:lnTo>
-                  <a:lnTo>
-                    <a:pt x="4809049" y="962738"/>
-                  </a:lnTo>
-                  <a:lnTo>
-                    <a:pt x="4731415" y="946147"/>
-                  </a:lnTo>
-                  <a:lnTo>
-                    <a:pt x="4653781" y="928149"/>
-                  </a:lnTo>
-                  <a:lnTo>
-                    <a:pt x="4576147" y="908625"/>
-                  </a:lnTo>
-                  <a:lnTo>
-                    <a:pt x="4498513" y="887446"/>
+                    <a:pt x="4886683" y="978033"/>
+                  </a:lnTo>
+                  <a:lnTo>
+                    <a:pt x="4809049" y="962739"/>
+                  </a:lnTo>
+                  <a:lnTo>
+                    <a:pt x="4731415" y="946148"/>
+                  </a:lnTo>
+                  <a:lnTo>
+                    <a:pt x="4653781" y="928150"/>
+                  </a:lnTo>
+                  <a:lnTo>
+                    <a:pt x="4576147" y="908626"/>
+                  </a:lnTo>
+                  <a:lnTo>
+                    <a:pt x="4498513" y="887447"/>
                   </a:lnTo>
                   <a:lnTo>
                     <a:pt x="4420879" y="864471"/>
                   </a:lnTo>
                   <a:lnTo>
-                    <a:pt x="4343244" y="839547"/>
+                    <a:pt x="4343244" y="839548"/>
                   </a:lnTo>
                   <a:lnTo>
                     <a:pt x="4265610" y="812511"/>
                   </a:lnTo>
                   <a:lnTo>
-                    <a:pt x="4187976" y="783181"/>
-                  </a:lnTo>
-                  <a:lnTo>
-                    <a:pt x="4110342" y="751365"/>
-                  </a:lnTo>
-                  <a:lnTo>
-                    <a:pt x="4032708" y="716851"/>
+                    <a:pt x="4187976" y="783182"/>
+                  </a:lnTo>
+                  <a:lnTo>
+                    <a:pt x="4110342" y="751366"/>
+                  </a:lnTo>
+                  <a:lnTo>
+                    <a:pt x="4032708" y="716852"/>
                   </a:lnTo>
                   <a:lnTo>
                     <a:pt x="3955074" y="679411"/>
                   </a:lnTo>
                   <a:lnTo>
-                    <a:pt x="3877440" y="638795"/>
-                  </a:lnTo>
-                  <a:lnTo>
-                    <a:pt x="3799806" y="594736"/>
-                  </a:lnTo>
-                  <a:lnTo>
-                    <a:pt x="3722172" y="546941"/>
-                  </a:lnTo>
-                  <a:lnTo>
-                    <a:pt x="3644538" y="495093"/>
-                  </a:lnTo>
-                  <a:lnTo>
-                    <a:pt x="3566904" y="438849"/>
+                    <a:pt x="3877440" y="638796"/>
+                  </a:lnTo>
+                  <a:lnTo>
+                    <a:pt x="3799806" y="594737"/>
+                  </a:lnTo>
+                  <a:lnTo>
+                    <a:pt x="3722172" y="546942"/>
+                  </a:lnTo>
+                  <a:lnTo>
+                    <a:pt x="3644538" y="495094"/>
+                  </a:lnTo>
+                  <a:lnTo>
+                    <a:pt x="3566904" y="438850"/>
                   </a:lnTo>
                   <a:lnTo>
                     <a:pt x="3489270" y="377836"/>
                   </a:lnTo>
                   <a:lnTo>
-                    <a:pt x="3411636" y="311649"/>
+                    <a:pt x="3411636" y="311650"/>
                   </a:lnTo>
                   <a:lnTo>
                     <a:pt x="3334002" y="284876"/>
@@ -3942,10 +3942,10 @@
                     <a:pt x="3178734" y="273318"/>
                   </a:lnTo>
                   <a:lnTo>
-                    <a:pt x="3101100" y="267481"/>
-                  </a:lnTo>
-                  <a:lnTo>
-                    <a:pt x="3023466" y="261606"/>
+                    <a:pt x="3101100" y="267482"/>
+                  </a:lnTo>
+                  <a:lnTo>
+                    <a:pt x="3023466" y="261607"/>
                   </a:lnTo>
                   <a:lnTo>
                     <a:pt x="2945832" y="255693"/>
@@ -3954,7 +3954,7 @@
                     <a:pt x="2868198" y="249740"/>
                   </a:lnTo>
                   <a:lnTo>
-                    <a:pt x="2790564" y="243748"/>
+                    <a:pt x="2790564" y="243749"/>
                   </a:lnTo>
                   <a:lnTo>
                     <a:pt x="2712930" y="237717"/>
@@ -3963,7 +3963,7 @@
                     <a:pt x="2635295" y="231646"/>
                   </a:lnTo>
                   <a:lnTo>
-                    <a:pt x="2557661" y="225534"/>
+                    <a:pt x="2557661" y="225535"/>
                   </a:lnTo>
                   <a:lnTo>
                     <a:pt x="2480027" y="219383"/>
@@ -3987,7 +3987,7 @@
                     <a:pt x="2014223" y="181613"/>
                   </a:lnTo>
                   <a:lnTo>
-                    <a:pt x="1936589" y="175171"/>
+                    <a:pt x="1936589" y="175172"/>
                   </a:lnTo>
                   <a:lnTo>
                     <a:pt x="1858955" y="168688"/>
@@ -3999,7 +3999,7 @@
                     <a:pt x="1703687" y="155592"/>
                   </a:lnTo>
                   <a:lnTo>
-                    <a:pt x="1626053" y="148979"/>
+                    <a:pt x="1626053" y="148980"/>
                   </a:lnTo>
                   <a:lnTo>
                     <a:pt x="1548419" y="142323"/>
@@ -4017,10 +4017,10 @@
                     <a:pt x="1237883" y="115256"/>
                   </a:lnTo>
                   <a:lnTo>
-                    <a:pt x="1160249" y="108377"/>
-                  </a:lnTo>
-                  <a:lnTo>
-                    <a:pt x="1082615" y="101453"/>
+                    <a:pt x="1160249" y="108378"/>
+                  </a:lnTo>
+                  <a:lnTo>
+                    <a:pt x="1082615" y="101454"/>
                   </a:lnTo>
                   <a:lnTo>
                     <a:pt x="1004981" y="94484"/>
@@ -4111,7 +4111,7 @@
                     <a:pt x="462460" y="841982"/>
                   </a:lnTo>
                   <a:lnTo>
-                    <a:pt x="540094" y="962918"/>
+                    <a:pt x="540094" y="962919"/>
                   </a:lnTo>
                   <a:lnTo>
                     <a:pt x="617728" y="1078652"/>
@@ -4159,7 +4159,7 @@
                     <a:pt x="1704604" y="2262061"/>
                   </a:lnTo>
                   <a:lnTo>
-                    <a:pt x="1782238" y="2321894"/>
+                    <a:pt x="1782239" y="2321894"/>
                   </a:lnTo>
                   <a:lnTo>
                     <a:pt x="1859873" y="2379154"/>
@@ -4225,7 +4225,7 @@
                     <a:pt x="3412553" y="3124222"/>
                   </a:lnTo>
                   <a:lnTo>
-                    <a:pt x="3490187" y="3146958"/>
+                    <a:pt x="3490188" y="3146958"/>
                   </a:lnTo>
                   <a:lnTo>
                     <a:pt x="3567822" y="3168717"/>
@@ -4291,7 +4291,7 @@
                     <a:pt x="5120502" y="3451843"/>
                   </a:lnTo>
                   <a:lnTo>
-                    <a:pt x="5198136" y="3460483"/>
+                    <a:pt x="5198137" y="3460483"/>
                   </a:lnTo>
                   <a:lnTo>
                     <a:pt x="5275771" y="3468751"/>

--- a/docs/plots/carbo/jx_carbo_linsubhr_ratio_throm2.pptx
+++ b/docs/plots/carbo/jx_carbo_linsubhr_ratio_throm2.pptx
@@ -2271,7 +2271,7 @@
           </p:nvSpPr>
           <p:spPr>
             <a:xfrm>
-              <a:off x="817517" y="5114368"/>
+              <a:off x="817517" y="5142518"/>
               <a:ext cx="7799693" cy="0"/>
             </a:xfrm>
             <a:custGeom>
@@ -2314,7 +2314,7 @@
           </p:nvSpPr>
           <p:spPr>
             <a:xfrm>
-              <a:off x="817517" y="4244691"/>
+              <a:off x="817517" y="4313054"/>
               <a:ext cx="7799693" cy="0"/>
             </a:xfrm>
             <a:custGeom>
@@ -2357,7 +2357,7 @@
           </p:nvSpPr>
           <p:spPr>
             <a:xfrm>
-              <a:off x="817517" y="3375014"/>
+              <a:off x="817517" y="3483591"/>
               <a:ext cx="7799693" cy="0"/>
             </a:xfrm>
             <a:custGeom>
@@ -2400,7 +2400,7 @@
           </p:nvSpPr>
           <p:spPr>
             <a:xfrm>
-              <a:off x="817517" y="2505337"/>
+              <a:off x="817517" y="2654127"/>
               <a:ext cx="7799693" cy="0"/>
             </a:xfrm>
             <a:custGeom>
@@ -2443,15 +2443,15 @@
           </p:nvSpPr>
           <p:spPr>
             <a:xfrm>
-              <a:off x="1615213" y="1896563"/>
-              <a:ext cx="0" cy="3826579"/>
+              <a:off x="1615213" y="2073503"/>
+              <a:ext cx="0" cy="3649639"/>
             </a:xfrm>
             <a:custGeom>
               <a:avLst/>
               <a:pathLst>
-                <a:path w="0" h="3826579">
+                <a:path w="0" h="3649639">
                   <a:moveTo>
-                    <a:pt x="0" y="3826579"/>
+                    <a:pt x="0" y="3649639"/>
                   </a:moveTo>
                   <a:lnTo>
                     <a:pt x="0" y="0"/>
@@ -2486,15 +2486,15 @@
           </p:nvSpPr>
           <p:spPr>
             <a:xfrm>
-              <a:off x="3387871" y="1896563"/>
-              <a:ext cx="0" cy="3826579"/>
+              <a:off x="3387871" y="2073503"/>
+              <a:ext cx="0" cy="3649639"/>
             </a:xfrm>
             <a:custGeom>
               <a:avLst/>
               <a:pathLst>
-                <a:path w="0" h="3826579">
+                <a:path w="0" h="3649639">
                   <a:moveTo>
-                    <a:pt x="0" y="3826579"/>
+                    <a:pt x="0" y="3649639"/>
                   </a:moveTo>
                   <a:lnTo>
                     <a:pt x="0" y="0"/>
@@ -2529,15 +2529,15 @@
           </p:nvSpPr>
           <p:spPr>
             <a:xfrm>
-              <a:off x="5160528" y="1896563"/>
-              <a:ext cx="0" cy="3826579"/>
+              <a:off x="5160528" y="2073503"/>
+              <a:ext cx="0" cy="3649639"/>
             </a:xfrm>
             <a:custGeom>
               <a:avLst/>
               <a:pathLst>
-                <a:path w="0" h="3826579">
+                <a:path w="0" h="3649639">
                   <a:moveTo>
-                    <a:pt x="0" y="3826579"/>
+                    <a:pt x="0" y="3649639"/>
                   </a:moveTo>
                   <a:lnTo>
                     <a:pt x="0" y="0"/>
@@ -2572,15 +2572,15 @@
           </p:nvSpPr>
           <p:spPr>
             <a:xfrm>
-              <a:off x="6933186" y="1896563"/>
-              <a:ext cx="0" cy="3826579"/>
+              <a:off x="6933186" y="2073503"/>
+              <a:ext cx="0" cy="3649639"/>
             </a:xfrm>
             <a:custGeom>
               <a:avLst/>
               <a:pathLst>
-                <a:path w="0" h="3826579">
+                <a:path w="0" h="3649639">
                   <a:moveTo>
-                    <a:pt x="0" y="3826579"/>
+                    <a:pt x="0" y="3649639"/>
                   </a:moveTo>
                   <a:lnTo>
                     <a:pt x="0" y="0"/>
@@ -2615,7 +2615,7 @@
           </p:nvSpPr>
           <p:spPr>
             <a:xfrm>
-              <a:off x="817517" y="5549207"/>
+              <a:off x="817517" y="5557249"/>
               <a:ext cx="7799693" cy="0"/>
             </a:xfrm>
             <a:custGeom>
@@ -2658,7 +2658,7 @@
           </p:nvSpPr>
           <p:spPr>
             <a:xfrm>
-              <a:off x="817517" y="4679530"/>
+              <a:off x="817517" y="4727786"/>
               <a:ext cx="7799693" cy="0"/>
             </a:xfrm>
             <a:custGeom>
@@ -2701,7 +2701,7 @@
           </p:nvSpPr>
           <p:spPr>
             <a:xfrm>
-              <a:off x="817517" y="3809853"/>
+              <a:off x="817517" y="3898322"/>
               <a:ext cx="7799693" cy="0"/>
             </a:xfrm>
             <a:custGeom>
@@ -2744,7 +2744,7 @@
           </p:nvSpPr>
           <p:spPr>
             <a:xfrm>
-              <a:off x="817517" y="2940175"/>
+              <a:off x="817517" y="3068859"/>
               <a:ext cx="7799693" cy="0"/>
             </a:xfrm>
             <a:custGeom>
@@ -2787,7 +2787,7 @@
           </p:nvSpPr>
           <p:spPr>
             <a:xfrm>
-              <a:off x="817517" y="2070498"/>
+              <a:off x="817517" y="2239395"/>
               <a:ext cx="7799693" cy="0"/>
             </a:xfrm>
             <a:custGeom>
@@ -2830,15 +2830,15 @@
           </p:nvSpPr>
           <p:spPr>
             <a:xfrm>
-              <a:off x="2501542" y="1896563"/>
-              <a:ext cx="0" cy="3826579"/>
+              <a:off x="2501542" y="2073503"/>
+              <a:ext cx="0" cy="3649639"/>
             </a:xfrm>
             <a:custGeom>
               <a:avLst/>
               <a:pathLst>
-                <a:path w="0" h="3826579">
+                <a:path w="0" h="3649639">
                   <a:moveTo>
-                    <a:pt x="0" y="3826579"/>
+                    <a:pt x="0" y="3649639"/>
                   </a:moveTo>
                   <a:lnTo>
                     <a:pt x="0" y="0"/>
@@ -2873,15 +2873,15 @@
           </p:nvSpPr>
           <p:spPr>
             <a:xfrm>
-              <a:off x="4274200" y="1896563"/>
-              <a:ext cx="0" cy="3826579"/>
+              <a:off x="4274200" y="2073503"/>
+              <a:ext cx="0" cy="3649639"/>
             </a:xfrm>
             <a:custGeom>
               <a:avLst/>
               <a:pathLst>
-                <a:path w="0" h="3826579">
+                <a:path w="0" h="3649639">
                   <a:moveTo>
-                    <a:pt x="0" y="3826579"/>
+                    <a:pt x="0" y="3649639"/>
                   </a:moveTo>
                   <a:lnTo>
                     <a:pt x="0" y="0"/>
@@ -2916,15 +2916,15 @@
           </p:nvSpPr>
           <p:spPr>
             <a:xfrm>
-              <a:off x="6046857" y="1896563"/>
-              <a:ext cx="0" cy="3826579"/>
+              <a:off x="6046857" y="2073503"/>
+              <a:ext cx="0" cy="3649639"/>
             </a:xfrm>
             <a:custGeom>
               <a:avLst/>
               <a:pathLst>
-                <a:path w="0" h="3826579">
+                <a:path w="0" h="3649639">
                   <a:moveTo>
-                    <a:pt x="0" y="3826579"/>
+                    <a:pt x="0" y="3649639"/>
                   </a:moveTo>
                   <a:lnTo>
                     <a:pt x="0" y="0"/>
@@ -2959,15 +2959,15 @@
           </p:nvSpPr>
           <p:spPr>
             <a:xfrm>
-              <a:off x="7819515" y="1896563"/>
-              <a:ext cx="0" cy="3826579"/>
+              <a:off x="7819515" y="2073503"/>
+              <a:ext cx="0" cy="3649639"/>
             </a:xfrm>
             <a:custGeom>
               <a:avLst/>
               <a:pathLst>
-                <a:path w="0" h="3826579">
+                <a:path w="0" h="3649639">
                   <a:moveTo>
-                    <a:pt x="0" y="3826579"/>
+                    <a:pt x="0" y="3649639"/>
                   </a:moveTo>
                   <a:lnTo>
                     <a:pt x="0" y="0"/>
@@ -3002,510 +3002,510 @@
           </p:nvSpPr>
           <p:spPr>
             <a:xfrm>
-              <a:off x="817517" y="1896563"/>
-              <a:ext cx="7370972" cy="3639306"/>
+              <a:off x="817517" y="2073503"/>
+              <a:ext cx="7370972" cy="3471026"/>
             </a:xfrm>
             <a:custGeom>
               <a:avLst/>
               <a:pathLst>
-                <a:path w="7370972" h="3639306">
+                <a:path w="7370972" h="3471026">
                   <a:moveTo>
                     <a:pt x="2017410" y="0"/>
                   </a:moveTo>
                   <a:lnTo>
-                    <a:pt x="2091857" y="274670"/>
-                  </a:lnTo>
-                  <a:lnTo>
-                    <a:pt x="2169491" y="538711"/>
-                  </a:lnTo>
-                  <a:lnTo>
-                    <a:pt x="2247125" y="782113"/>
-                  </a:lnTo>
-                  <a:lnTo>
-                    <a:pt x="2324759" y="1006490"/>
-                  </a:lnTo>
-                  <a:lnTo>
-                    <a:pt x="2402393" y="1213328"/>
-                  </a:lnTo>
-                  <a:lnTo>
-                    <a:pt x="2480027" y="1403998"/>
-                  </a:lnTo>
-                  <a:lnTo>
-                    <a:pt x="2557661" y="1579765"/>
-                  </a:lnTo>
-                  <a:lnTo>
-                    <a:pt x="2635295" y="1741792"/>
-                  </a:lnTo>
-                  <a:lnTo>
-                    <a:pt x="2712930" y="1891155"/>
-                  </a:lnTo>
-                  <a:lnTo>
-                    <a:pt x="2790564" y="2028842"/>
-                  </a:lnTo>
-                  <a:lnTo>
-                    <a:pt x="2868198" y="2155768"/>
-                  </a:lnTo>
-                  <a:lnTo>
-                    <a:pt x="2945832" y="2272772"/>
-                  </a:lnTo>
-                  <a:lnTo>
-                    <a:pt x="3023466" y="2380630"/>
-                  </a:lnTo>
-                  <a:lnTo>
-                    <a:pt x="3101100" y="2480058"/>
-                  </a:lnTo>
-                  <a:lnTo>
-                    <a:pt x="3178734" y="2571713"/>
-                  </a:lnTo>
-                  <a:lnTo>
-                    <a:pt x="3256368" y="2656205"/>
-                  </a:lnTo>
-                  <a:lnTo>
-                    <a:pt x="3334002" y="2734092"/>
-                  </a:lnTo>
-                  <a:lnTo>
-                    <a:pt x="3411636" y="2784840"/>
-                  </a:lnTo>
-                  <a:lnTo>
-                    <a:pt x="3489270" y="2790525"/>
-                  </a:lnTo>
-                  <a:lnTo>
-                    <a:pt x="3566904" y="2796173"/>
-                  </a:lnTo>
-                  <a:lnTo>
-                    <a:pt x="3644538" y="2801784"/>
-                  </a:lnTo>
-                  <a:lnTo>
-                    <a:pt x="3722172" y="2807358"/>
-                  </a:lnTo>
-                  <a:lnTo>
-                    <a:pt x="3799806" y="2812895"/>
-                  </a:lnTo>
-                  <a:lnTo>
-                    <a:pt x="3877440" y="2818396"/>
-                  </a:lnTo>
-                  <a:lnTo>
-                    <a:pt x="3955074" y="2823861"/>
-                  </a:lnTo>
-                  <a:lnTo>
-                    <a:pt x="4032708" y="2829291"/>
-                  </a:lnTo>
-                  <a:lnTo>
-                    <a:pt x="4110342" y="2834685"/>
-                  </a:lnTo>
-                  <a:lnTo>
-                    <a:pt x="4187976" y="2840043"/>
-                  </a:lnTo>
-                  <a:lnTo>
-                    <a:pt x="4265610" y="2845366"/>
-                  </a:lnTo>
-                  <a:lnTo>
-                    <a:pt x="4343244" y="2850655"/>
-                  </a:lnTo>
-                  <a:lnTo>
-                    <a:pt x="4420879" y="2855909"/>
-                  </a:lnTo>
-                  <a:lnTo>
-                    <a:pt x="4498513" y="2861128"/>
-                  </a:lnTo>
-                  <a:lnTo>
-                    <a:pt x="4576147" y="2866313"/>
-                  </a:lnTo>
-                  <a:lnTo>
-                    <a:pt x="4653781" y="2871465"/>
-                  </a:lnTo>
-                  <a:lnTo>
-                    <a:pt x="4731415" y="2876582"/>
-                  </a:lnTo>
-                  <a:lnTo>
-                    <a:pt x="4809049" y="2881666"/>
-                  </a:lnTo>
-                  <a:lnTo>
-                    <a:pt x="4886683" y="2886717"/>
-                  </a:lnTo>
-                  <a:lnTo>
-                    <a:pt x="4964317" y="2891734"/>
-                  </a:lnTo>
-                  <a:lnTo>
-                    <a:pt x="5041951" y="2896719"/>
-                  </a:lnTo>
-                  <a:lnTo>
-                    <a:pt x="5119585" y="2901671"/>
-                  </a:lnTo>
-                  <a:lnTo>
-                    <a:pt x="5197219" y="2906591"/>
-                  </a:lnTo>
-                  <a:lnTo>
-                    <a:pt x="5274853" y="2911478"/>
-                  </a:lnTo>
-                  <a:lnTo>
-                    <a:pt x="5352487" y="2916333"/>
-                  </a:lnTo>
-                  <a:lnTo>
-                    <a:pt x="5430121" y="2921157"/>
-                  </a:lnTo>
-                  <a:lnTo>
-                    <a:pt x="5507755" y="2925949"/>
-                  </a:lnTo>
-                  <a:lnTo>
-                    <a:pt x="5585389" y="2930709"/>
-                  </a:lnTo>
-                  <a:lnTo>
-                    <a:pt x="5663023" y="2935439"/>
-                  </a:lnTo>
-                  <a:lnTo>
-                    <a:pt x="5740657" y="2940137"/>
-                  </a:lnTo>
-                  <a:lnTo>
-                    <a:pt x="5818291" y="2944805"/>
-                  </a:lnTo>
-                  <a:lnTo>
-                    <a:pt x="5895925" y="2949442"/>
-                  </a:lnTo>
-                  <a:lnTo>
-                    <a:pt x="5973559" y="2954049"/>
-                  </a:lnTo>
-                  <a:lnTo>
-                    <a:pt x="6051193" y="2958625"/>
-                  </a:lnTo>
-                  <a:lnTo>
-                    <a:pt x="6128827" y="2963172"/>
-                  </a:lnTo>
-                  <a:lnTo>
-                    <a:pt x="6206462" y="2967688"/>
-                  </a:lnTo>
-                  <a:lnTo>
-                    <a:pt x="6284096" y="2972175"/>
-                  </a:lnTo>
-                  <a:lnTo>
-                    <a:pt x="6361730" y="2976633"/>
-                  </a:lnTo>
-                  <a:lnTo>
-                    <a:pt x="6439364" y="2981062"/>
-                  </a:lnTo>
-                  <a:lnTo>
-                    <a:pt x="6516998" y="2985461"/>
-                  </a:lnTo>
-                  <a:lnTo>
-                    <a:pt x="6594632" y="2989832"/>
-                  </a:lnTo>
-                  <a:lnTo>
-                    <a:pt x="6672266" y="2994174"/>
-                  </a:lnTo>
-                  <a:lnTo>
-                    <a:pt x="6749900" y="2998488"/>
-                  </a:lnTo>
-                  <a:lnTo>
-                    <a:pt x="6827534" y="3002773"/>
-                  </a:lnTo>
-                  <a:lnTo>
-                    <a:pt x="6905168" y="3007030"/>
-                  </a:lnTo>
-                  <a:lnTo>
-                    <a:pt x="6982802" y="3011260"/>
-                  </a:lnTo>
-                  <a:lnTo>
-                    <a:pt x="7060436" y="3015461"/>
-                  </a:lnTo>
-                  <a:lnTo>
-                    <a:pt x="7138070" y="3019636"/>
-                  </a:lnTo>
-                  <a:lnTo>
-                    <a:pt x="7215704" y="3023782"/>
-                  </a:lnTo>
-                  <a:lnTo>
-                    <a:pt x="7293338" y="3027902"/>
-                  </a:lnTo>
-                  <a:lnTo>
-                    <a:pt x="7370972" y="3031995"/>
-                  </a:lnTo>
-                  <a:lnTo>
-                    <a:pt x="7370972" y="3639306"/>
-                  </a:lnTo>
-                  <a:lnTo>
-                    <a:pt x="7293338" y="3638175"/>
-                  </a:lnTo>
-                  <a:lnTo>
-                    <a:pt x="7215704" y="3636949"/>
-                  </a:lnTo>
-                  <a:lnTo>
-                    <a:pt x="7138070" y="3635618"/>
-                  </a:lnTo>
-                  <a:lnTo>
-                    <a:pt x="7060436" y="3634174"/>
-                  </a:lnTo>
-                  <a:lnTo>
-                    <a:pt x="6982802" y="3632608"/>
-                  </a:lnTo>
-                  <a:lnTo>
-                    <a:pt x="6905168" y="3630909"/>
-                  </a:lnTo>
-                  <a:lnTo>
-                    <a:pt x="6827534" y="3629066"/>
-                  </a:lnTo>
-                  <a:lnTo>
-                    <a:pt x="6749900" y="3627067"/>
-                  </a:lnTo>
-                  <a:lnTo>
-                    <a:pt x="6672266" y="3624899"/>
-                  </a:lnTo>
-                  <a:lnTo>
-                    <a:pt x="6594632" y="3622546"/>
-                  </a:lnTo>
-                  <a:lnTo>
-                    <a:pt x="6516998" y="3619994"/>
-                  </a:lnTo>
-                  <a:lnTo>
-                    <a:pt x="6439364" y="3617226"/>
-                  </a:lnTo>
-                  <a:lnTo>
-                    <a:pt x="6361730" y="3614222"/>
-                  </a:lnTo>
-                  <a:lnTo>
-                    <a:pt x="6284096" y="3610964"/>
-                  </a:lnTo>
-                  <a:lnTo>
-                    <a:pt x="6206462" y="3607430"/>
-                  </a:lnTo>
-                  <a:lnTo>
-                    <a:pt x="6128827" y="3603597"/>
-                  </a:lnTo>
-                  <a:lnTo>
-                    <a:pt x="6051193" y="3599438"/>
-                  </a:lnTo>
-                  <a:lnTo>
-                    <a:pt x="5973559" y="3594926"/>
-                  </a:lnTo>
-                  <a:lnTo>
-                    <a:pt x="5895925" y="3590032"/>
-                  </a:lnTo>
-                  <a:lnTo>
-                    <a:pt x="5818291" y="3584723"/>
-                  </a:lnTo>
-                  <a:lnTo>
-                    <a:pt x="5740657" y="3578964"/>
-                  </a:lnTo>
-                  <a:lnTo>
-                    <a:pt x="5663023" y="3572717"/>
-                  </a:lnTo>
-                  <a:lnTo>
-                    <a:pt x="5585389" y="3565939"/>
-                  </a:lnTo>
-                  <a:lnTo>
-                    <a:pt x="5507755" y="3558587"/>
-                  </a:lnTo>
-                  <a:lnTo>
-                    <a:pt x="5430121" y="3550612"/>
-                  </a:lnTo>
-                  <a:lnTo>
-                    <a:pt x="5352487" y="3541960"/>
-                  </a:lnTo>
-                  <a:lnTo>
-                    <a:pt x="5274853" y="3532575"/>
-                  </a:lnTo>
-                  <a:lnTo>
-                    <a:pt x="5197219" y="3522394"/>
-                  </a:lnTo>
-                  <a:lnTo>
-                    <a:pt x="5119585" y="3511350"/>
-                  </a:lnTo>
-                  <a:lnTo>
-                    <a:pt x="5041951" y="3499369"/>
-                  </a:lnTo>
-                  <a:lnTo>
-                    <a:pt x="4964317" y="3486373"/>
-                  </a:lnTo>
-                  <a:lnTo>
-                    <a:pt x="4886683" y="3472274"/>
-                  </a:lnTo>
-                  <a:lnTo>
-                    <a:pt x="4809049" y="3456980"/>
-                  </a:lnTo>
-                  <a:lnTo>
-                    <a:pt x="4731415" y="3440389"/>
-                  </a:lnTo>
-                  <a:lnTo>
-                    <a:pt x="4653781" y="3422391"/>
-                  </a:lnTo>
-                  <a:lnTo>
-                    <a:pt x="4576147" y="3402867"/>
-                  </a:lnTo>
-                  <a:lnTo>
-                    <a:pt x="4498513" y="3381688"/>
-                  </a:lnTo>
-                  <a:lnTo>
-                    <a:pt x="4420879" y="3358713"/>
-                  </a:lnTo>
-                  <a:lnTo>
-                    <a:pt x="4343244" y="3333789"/>
-                  </a:lnTo>
-                  <a:lnTo>
-                    <a:pt x="4265610" y="3306753"/>
-                  </a:lnTo>
-                  <a:lnTo>
-                    <a:pt x="4187976" y="3277423"/>
-                  </a:lnTo>
-                  <a:lnTo>
-                    <a:pt x="4110342" y="3245607"/>
-                  </a:lnTo>
-                  <a:lnTo>
-                    <a:pt x="4032708" y="3211093"/>
-                  </a:lnTo>
-                  <a:lnTo>
-                    <a:pt x="3955074" y="3173653"/>
-                  </a:lnTo>
-                  <a:lnTo>
-                    <a:pt x="3877440" y="3133037"/>
-                  </a:lnTo>
-                  <a:lnTo>
-                    <a:pt x="3799806" y="3088978"/>
-                  </a:lnTo>
-                  <a:lnTo>
-                    <a:pt x="3722172" y="3041183"/>
-                  </a:lnTo>
-                  <a:lnTo>
-                    <a:pt x="3644538" y="2989335"/>
-                  </a:lnTo>
-                  <a:lnTo>
-                    <a:pt x="3566904" y="2933091"/>
-                  </a:lnTo>
-                  <a:lnTo>
-                    <a:pt x="3489270" y="2872078"/>
-                  </a:lnTo>
-                  <a:lnTo>
-                    <a:pt x="3411636" y="2805891"/>
-                  </a:lnTo>
-                  <a:lnTo>
-                    <a:pt x="3334002" y="2779118"/>
-                  </a:lnTo>
-                  <a:lnTo>
-                    <a:pt x="3256368" y="2773358"/>
-                  </a:lnTo>
-                  <a:lnTo>
-                    <a:pt x="3178734" y="2767559"/>
-                  </a:lnTo>
-                  <a:lnTo>
-                    <a:pt x="3101100" y="2761723"/>
-                  </a:lnTo>
-                  <a:lnTo>
-                    <a:pt x="3023466" y="2755848"/>
-                  </a:lnTo>
-                  <a:lnTo>
-                    <a:pt x="2945832" y="2749935"/>
-                  </a:lnTo>
-                  <a:lnTo>
-                    <a:pt x="2868198" y="2743982"/>
-                  </a:lnTo>
-                  <a:lnTo>
-                    <a:pt x="2790564" y="2737990"/>
-                  </a:lnTo>
-                  <a:lnTo>
-                    <a:pt x="2712930" y="2731959"/>
-                  </a:lnTo>
-                  <a:lnTo>
-                    <a:pt x="2635295" y="2725887"/>
-                  </a:lnTo>
-                  <a:lnTo>
-                    <a:pt x="2557661" y="2719776"/>
-                  </a:lnTo>
-                  <a:lnTo>
-                    <a:pt x="2480027" y="2713625"/>
-                  </a:lnTo>
-                  <a:lnTo>
-                    <a:pt x="2402393" y="2707433"/>
-                  </a:lnTo>
-                  <a:lnTo>
-                    <a:pt x="2324759" y="2701200"/>
-                  </a:lnTo>
-                  <a:lnTo>
-                    <a:pt x="2247125" y="2694926"/>
-                  </a:lnTo>
-                  <a:lnTo>
-                    <a:pt x="2169491" y="2688610"/>
-                  </a:lnTo>
-                  <a:lnTo>
-                    <a:pt x="2091857" y="2682253"/>
-                  </a:lnTo>
-                  <a:lnTo>
-                    <a:pt x="2014223" y="2675854"/>
-                  </a:lnTo>
-                  <a:lnTo>
-                    <a:pt x="1936589" y="2669413"/>
-                  </a:lnTo>
-                  <a:lnTo>
-                    <a:pt x="1858955" y="2662930"/>
-                  </a:lnTo>
-                  <a:lnTo>
-                    <a:pt x="1781321" y="2656403"/>
-                  </a:lnTo>
-                  <a:lnTo>
-                    <a:pt x="1703687" y="2649834"/>
-                  </a:lnTo>
-                  <a:lnTo>
-                    <a:pt x="1626053" y="2643221"/>
-                  </a:lnTo>
-                  <a:lnTo>
-                    <a:pt x="1548419" y="2636565"/>
-                  </a:lnTo>
-                  <a:lnTo>
-                    <a:pt x="1470785" y="2629865"/>
-                  </a:lnTo>
-                  <a:lnTo>
-                    <a:pt x="1393151" y="2623120"/>
-                  </a:lnTo>
-                  <a:lnTo>
-                    <a:pt x="1315517" y="2616331"/>
-                  </a:lnTo>
-                  <a:lnTo>
-                    <a:pt x="1237883" y="2609498"/>
-                  </a:lnTo>
-                  <a:lnTo>
-                    <a:pt x="1160249" y="2602619"/>
-                  </a:lnTo>
-                  <a:lnTo>
-                    <a:pt x="1082615" y="2595695"/>
-                  </a:lnTo>
-                  <a:lnTo>
-                    <a:pt x="1004981" y="2588725"/>
-                  </a:lnTo>
-                  <a:lnTo>
-                    <a:pt x="927346" y="2581710"/>
-                  </a:lnTo>
-                  <a:lnTo>
-                    <a:pt x="849712" y="2574648"/>
-                  </a:lnTo>
-                  <a:lnTo>
-                    <a:pt x="772078" y="2567539"/>
-                  </a:lnTo>
-                  <a:lnTo>
-                    <a:pt x="694444" y="2560384"/>
-                  </a:lnTo>
-                  <a:lnTo>
-                    <a:pt x="616810" y="2553181"/>
-                  </a:lnTo>
-                  <a:lnTo>
-                    <a:pt x="539176" y="2545931"/>
-                  </a:lnTo>
-                  <a:lnTo>
-                    <a:pt x="461542" y="2538633"/>
-                  </a:lnTo>
-                  <a:lnTo>
-                    <a:pt x="383908" y="2531287"/>
-                  </a:lnTo>
-                  <a:lnTo>
-                    <a:pt x="306274" y="2523893"/>
-                  </a:lnTo>
-                  <a:lnTo>
-                    <a:pt x="228640" y="2516450"/>
-                  </a:lnTo>
-                  <a:lnTo>
-                    <a:pt x="151006" y="2508957"/>
-                  </a:lnTo>
-                  <a:lnTo>
-                    <a:pt x="73372" y="2501416"/>
-                  </a:lnTo>
-                  <a:lnTo>
-                    <a:pt x="0" y="2494241"/>
+                    <a:pt x="2091857" y="261969"/>
+                  </a:lnTo>
+                  <a:lnTo>
+                    <a:pt x="2169491" y="513801"/>
+                  </a:lnTo>
+                  <a:lnTo>
+                    <a:pt x="2247125" y="745949"/>
+                  </a:lnTo>
+                  <a:lnTo>
+                    <a:pt x="2324759" y="959950"/>
+                  </a:lnTo>
+                  <a:lnTo>
+                    <a:pt x="2402393" y="1157224"/>
+                  </a:lnTo>
+                  <a:lnTo>
+                    <a:pt x="2480027" y="1339078"/>
+                  </a:lnTo>
+                  <a:lnTo>
+                    <a:pt x="2557661" y="1506717"/>
+                  </a:lnTo>
+                  <a:lnTo>
+                    <a:pt x="2635295" y="1661252"/>
+                  </a:lnTo>
+                  <a:lnTo>
+                    <a:pt x="2712930" y="1803708"/>
+                  </a:lnTo>
+                  <a:lnTo>
+                    <a:pt x="2790564" y="1935029"/>
+                  </a:lnTo>
+                  <a:lnTo>
+                    <a:pt x="2868198" y="2056086"/>
+                  </a:lnTo>
+                  <a:lnTo>
+                    <a:pt x="2945832" y="2167680"/>
+                  </a:lnTo>
+                  <a:lnTo>
+                    <a:pt x="3023466" y="2270551"/>
+                  </a:lnTo>
+                  <a:lnTo>
+                    <a:pt x="3101100" y="2365381"/>
+                  </a:lnTo>
+                  <a:lnTo>
+                    <a:pt x="3178734" y="2452798"/>
+                  </a:lnTo>
+                  <a:lnTo>
+                    <a:pt x="3256368" y="2533383"/>
+                  </a:lnTo>
+                  <a:lnTo>
+                    <a:pt x="3334002" y="2607669"/>
+                  </a:lnTo>
+                  <a:lnTo>
+                    <a:pt x="3411636" y="2656070"/>
+                  </a:lnTo>
+                  <a:lnTo>
+                    <a:pt x="3489270" y="2661492"/>
+                  </a:lnTo>
+                  <a:lnTo>
+                    <a:pt x="3566904" y="2666879"/>
+                  </a:lnTo>
+                  <a:lnTo>
+                    <a:pt x="3644538" y="2672230"/>
+                  </a:lnTo>
+                  <a:lnTo>
+                    <a:pt x="3722172" y="2677547"/>
+                  </a:lnTo>
+                  <a:lnTo>
+                    <a:pt x="3799806" y="2682828"/>
+                  </a:lnTo>
+                  <a:lnTo>
+                    <a:pt x="3877440" y="2688075"/>
+                  </a:lnTo>
+                  <a:lnTo>
+                    <a:pt x="3955074" y="2693287"/>
+                  </a:lnTo>
+                  <a:lnTo>
+                    <a:pt x="4032708" y="2698465"/>
+                  </a:lnTo>
+                  <a:lnTo>
+                    <a:pt x="4110342" y="2703610"/>
+                  </a:lnTo>
+                  <a:lnTo>
+                    <a:pt x="4187976" y="2708720"/>
+                  </a:lnTo>
+                  <a:lnTo>
+                    <a:pt x="4265610" y="2713798"/>
+                  </a:lnTo>
+                  <a:lnTo>
+                    <a:pt x="4343244" y="2718842"/>
+                  </a:lnTo>
+                  <a:lnTo>
+                    <a:pt x="4420879" y="2723853"/>
+                  </a:lnTo>
+                  <a:lnTo>
+                    <a:pt x="4498513" y="2728831"/>
+                  </a:lnTo>
+                  <a:lnTo>
+                    <a:pt x="4576147" y="2733776"/>
+                  </a:lnTo>
+                  <a:lnTo>
+                    <a:pt x="4653781" y="2738689"/>
+                  </a:lnTo>
+                  <a:lnTo>
+                    <a:pt x="4731415" y="2743570"/>
+                  </a:lnTo>
+                  <a:lnTo>
+                    <a:pt x="4809049" y="2748419"/>
+                  </a:lnTo>
+                  <a:lnTo>
+                    <a:pt x="4886683" y="2753236"/>
+                  </a:lnTo>
+                  <a:lnTo>
+                    <a:pt x="4964317" y="2758022"/>
+                  </a:lnTo>
+                  <a:lnTo>
+                    <a:pt x="5041951" y="2762776"/>
+                  </a:lnTo>
+                  <a:lnTo>
+                    <a:pt x="5119585" y="2767499"/>
+                  </a:lnTo>
+                  <a:lnTo>
+                    <a:pt x="5197219" y="2772191"/>
+                  </a:lnTo>
+                  <a:lnTo>
+                    <a:pt x="5274853" y="2776852"/>
+                  </a:lnTo>
+                  <a:lnTo>
+                    <a:pt x="5352487" y="2781483"/>
+                  </a:lnTo>
+                  <a:lnTo>
+                    <a:pt x="5430121" y="2786084"/>
+                  </a:lnTo>
+                  <a:lnTo>
+                    <a:pt x="5507755" y="2790654"/>
+                  </a:lnTo>
+                  <a:lnTo>
+                    <a:pt x="5585389" y="2795195"/>
+                  </a:lnTo>
+                  <a:lnTo>
+                    <a:pt x="5663023" y="2799705"/>
+                  </a:lnTo>
+                  <a:lnTo>
+                    <a:pt x="5740657" y="2804186"/>
+                  </a:lnTo>
+                  <a:lnTo>
+                    <a:pt x="5818291" y="2808638"/>
+                  </a:lnTo>
+                  <a:lnTo>
+                    <a:pt x="5895925" y="2813061"/>
+                  </a:lnTo>
+                  <a:lnTo>
+                    <a:pt x="5973559" y="2817454"/>
+                  </a:lnTo>
+                  <a:lnTo>
+                    <a:pt x="6051193" y="2821819"/>
+                  </a:lnTo>
+                  <a:lnTo>
+                    <a:pt x="6128827" y="2826156"/>
+                  </a:lnTo>
+                  <a:lnTo>
+                    <a:pt x="6206462" y="2830464"/>
+                  </a:lnTo>
+                  <a:lnTo>
+                    <a:pt x="6284096" y="2834743"/>
+                  </a:lnTo>
+                  <a:lnTo>
+                    <a:pt x="6361730" y="2838995"/>
+                  </a:lnTo>
+                  <a:lnTo>
+                    <a:pt x="6439364" y="2843219"/>
+                  </a:lnTo>
+                  <a:lnTo>
+                    <a:pt x="6516998" y="2847415"/>
+                  </a:lnTo>
+                  <a:lnTo>
+                    <a:pt x="6594632" y="2851583"/>
+                  </a:lnTo>
+                  <a:lnTo>
+                    <a:pt x="6672266" y="2855725"/>
+                  </a:lnTo>
+                  <a:lnTo>
+                    <a:pt x="6749900" y="2859839"/>
+                  </a:lnTo>
+                  <a:lnTo>
+                    <a:pt x="6827534" y="2863926"/>
+                  </a:lnTo>
+                  <a:lnTo>
+                    <a:pt x="6905168" y="2867986"/>
+                  </a:lnTo>
+                  <a:lnTo>
+                    <a:pt x="6982802" y="2872020"/>
+                  </a:lnTo>
+                  <a:lnTo>
+                    <a:pt x="7060436" y="2876028"/>
+                  </a:lnTo>
+                  <a:lnTo>
+                    <a:pt x="7138070" y="2880009"/>
+                  </a:lnTo>
+                  <a:lnTo>
+                    <a:pt x="7215704" y="2883964"/>
+                  </a:lnTo>
+                  <a:lnTo>
+                    <a:pt x="7293338" y="2887893"/>
+                  </a:lnTo>
+                  <a:lnTo>
+                    <a:pt x="7370972" y="2891796"/>
+                  </a:lnTo>
+                  <a:lnTo>
+                    <a:pt x="7370972" y="3471026"/>
+                  </a:lnTo>
+                  <a:lnTo>
+                    <a:pt x="7293338" y="3469948"/>
+                  </a:lnTo>
+                  <a:lnTo>
+                    <a:pt x="7215704" y="3468777"/>
+                  </a:lnTo>
+                  <a:lnTo>
+                    <a:pt x="7138070" y="3467508"/>
+                  </a:lnTo>
+                  <a:lnTo>
+                    <a:pt x="7060436" y="3466131"/>
+                  </a:lnTo>
+                  <a:lnTo>
+                    <a:pt x="6982802" y="3464638"/>
+                  </a:lnTo>
+                  <a:lnTo>
+                    <a:pt x="6905168" y="3463017"/>
+                  </a:lnTo>
+                  <a:lnTo>
+                    <a:pt x="6827534" y="3461260"/>
+                  </a:lnTo>
+                  <a:lnTo>
+                    <a:pt x="6749900" y="3459353"/>
+                  </a:lnTo>
+                  <a:lnTo>
+                    <a:pt x="6672266" y="3457285"/>
+                  </a:lnTo>
+                  <a:lnTo>
+                    <a:pt x="6594632" y="3455041"/>
+                  </a:lnTo>
+                  <a:lnTo>
+                    <a:pt x="6516998" y="3452607"/>
+                  </a:lnTo>
+                  <a:lnTo>
+                    <a:pt x="6439364" y="3449966"/>
+                  </a:lnTo>
+                  <a:lnTo>
+                    <a:pt x="6361730" y="3447102"/>
+                  </a:lnTo>
+                  <a:lnTo>
+                    <a:pt x="6284096" y="3443995"/>
+                  </a:lnTo>
+                  <a:lnTo>
+                    <a:pt x="6206462" y="3440624"/>
+                  </a:lnTo>
+                  <a:lnTo>
+                    <a:pt x="6128827" y="3436968"/>
+                  </a:lnTo>
+                  <a:lnTo>
+                    <a:pt x="6051193" y="3433001"/>
+                  </a:lnTo>
+                  <a:lnTo>
+                    <a:pt x="5973559" y="3428698"/>
+                  </a:lnTo>
+                  <a:lnTo>
+                    <a:pt x="5895925" y="3424030"/>
+                  </a:lnTo>
+                  <a:lnTo>
+                    <a:pt x="5818291" y="3418967"/>
+                  </a:lnTo>
+                  <a:lnTo>
+                    <a:pt x="5740657" y="3413474"/>
+                  </a:lnTo>
+                  <a:lnTo>
+                    <a:pt x="5663023" y="3407515"/>
+                  </a:lnTo>
+                  <a:lnTo>
+                    <a:pt x="5585389" y="3401052"/>
+                  </a:lnTo>
+                  <a:lnTo>
+                    <a:pt x="5507755" y="3394040"/>
+                  </a:lnTo>
+                  <a:lnTo>
+                    <a:pt x="5430121" y="3386433"/>
+                  </a:lnTo>
+                  <a:lnTo>
+                    <a:pt x="5352487" y="3378182"/>
+                  </a:lnTo>
+                  <a:lnTo>
+                    <a:pt x="5274853" y="3369230"/>
+                  </a:lnTo>
+                  <a:lnTo>
+                    <a:pt x="5197219" y="3359520"/>
+                  </a:lnTo>
+                  <a:lnTo>
+                    <a:pt x="5119585" y="3348987"/>
+                  </a:lnTo>
+                  <a:lnTo>
+                    <a:pt x="5041951" y="3337560"/>
+                  </a:lnTo>
+                  <a:lnTo>
+                    <a:pt x="4964317" y="3325164"/>
+                  </a:lnTo>
+                  <a:lnTo>
+                    <a:pt x="4886683" y="3311717"/>
+                  </a:lnTo>
+                  <a:lnTo>
+                    <a:pt x="4809049" y="3297130"/>
+                  </a:lnTo>
+                  <a:lnTo>
+                    <a:pt x="4731415" y="3281307"/>
+                  </a:lnTo>
+                  <a:lnTo>
+                    <a:pt x="4653781" y="3264141"/>
+                  </a:lnTo>
+                  <a:lnTo>
+                    <a:pt x="4576147" y="3245520"/>
+                  </a:lnTo>
+                  <a:lnTo>
+                    <a:pt x="4498513" y="3225320"/>
+                  </a:lnTo>
+                  <a:lnTo>
+                    <a:pt x="4420879" y="3203407"/>
+                  </a:lnTo>
+                  <a:lnTo>
+                    <a:pt x="4343244" y="3179636"/>
+                  </a:lnTo>
+                  <a:lnTo>
+                    <a:pt x="4265610" y="3153850"/>
+                  </a:lnTo>
+                  <a:lnTo>
+                    <a:pt x="4187976" y="3125876"/>
+                  </a:lnTo>
+                  <a:lnTo>
+                    <a:pt x="4110342" y="3095531"/>
+                  </a:lnTo>
+                  <a:lnTo>
+                    <a:pt x="4032708" y="3062613"/>
+                  </a:lnTo>
+                  <a:lnTo>
+                    <a:pt x="3955074" y="3026904"/>
+                  </a:lnTo>
+                  <a:lnTo>
+                    <a:pt x="3877440" y="2988167"/>
+                  </a:lnTo>
+                  <a:lnTo>
+                    <a:pt x="3799806" y="2946145"/>
+                  </a:lnTo>
+                  <a:lnTo>
+                    <a:pt x="3722172" y="2900560"/>
+                  </a:lnTo>
+                  <a:lnTo>
+                    <a:pt x="3644538" y="2851109"/>
+                  </a:lnTo>
+                  <a:lnTo>
+                    <a:pt x="3566904" y="2797466"/>
+                  </a:lnTo>
+                  <a:lnTo>
+                    <a:pt x="3489270" y="2739274"/>
+                  </a:lnTo>
+                  <a:lnTo>
+                    <a:pt x="3411636" y="2676148"/>
+                  </a:lnTo>
+                  <a:lnTo>
+                    <a:pt x="3334002" y="2650612"/>
+                  </a:lnTo>
+                  <a:lnTo>
+                    <a:pt x="3256368" y="2645119"/>
+                  </a:lnTo>
+                  <a:lnTo>
+                    <a:pt x="3178734" y="2639589"/>
+                  </a:lnTo>
+                  <a:lnTo>
+                    <a:pt x="3101100" y="2634022"/>
+                  </a:lnTo>
+                  <a:lnTo>
+                    <a:pt x="3023466" y="2628419"/>
+                  </a:lnTo>
+                  <a:lnTo>
+                    <a:pt x="2945832" y="2622779"/>
+                  </a:lnTo>
+                  <a:lnTo>
+                    <a:pt x="2868198" y="2617101"/>
+                  </a:lnTo>
+                  <a:lnTo>
+                    <a:pt x="2790564" y="2611386"/>
+                  </a:lnTo>
+                  <a:lnTo>
+                    <a:pt x="2712930" y="2605634"/>
+                  </a:lnTo>
+                  <a:lnTo>
+                    <a:pt x="2635295" y="2599843"/>
+                  </a:lnTo>
+                  <a:lnTo>
+                    <a:pt x="2557661" y="2594015"/>
+                  </a:lnTo>
+                  <a:lnTo>
+                    <a:pt x="2480027" y="2588148"/>
+                  </a:lnTo>
+                  <a:lnTo>
+                    <a:pt x="2402393" y="2582242"/>
+                  </a:lnTo>
+                  <a:lnTo>
+                    <a:pt x="2324759" y="2576297"/>
+                  </a:lnTo>
+                  <a:lnTo>
+                    <a:pt x="2247125" y="2570313"/>
+                  </a:lnTo>
+                  <a:lnTo>
+                    <a:pt x="2169491" y="2564290"/>
+                  </a:lnTo>
+                  <a:lnTo>
+                    <a:pt x="2091857" y="2558227"/>
+                  </a:lnTo>
+                  <a:lnTo>
+                    <a:pt x="2014223" y="2552124"/>
+                  </a:lnTo>
+                  <a:lnTo>
+                    <a:pt x="1936589" y="2545981"/>
+                  </a:lnTo>
+                  <a:lnTo>
+                    <a:pt x="1858955" y="2539797"/>
+                  </a:lnTo>
+                  <a:lnTo>
+                    <a:pt x="1781321" y="2533572"/>
+                  </a:lnTo>
+                  <a:lnTo>
+                    <a:pt x="1703687" y="2527307"/>
+                  </a:lnTo>
+                  <a:lnTo>
+                    <a:pt x="1626053" y="2521000"/>
+                  </a:lnTo>
+                  <a:lnTo>
+                    <a:pt x="1548419" y="2514651"/>
+                  </a:lnTo>
+                  <a:lnTo>
+                    <a:pt x="1470785" y="2508261"/>
+                  </a:lnTo>
+                  <a:lnTo>
+                    <a:pt x="1393151" y="2501828"/>
+                  </a:lnTo>
+                  <a:lnTo>
+                    <a:pt x="1315517" y="2495353"/>
+                  </a:lnTo>
+                  <a:lnTo>
+                    <a:pt x="1237883" y="2488835"/>
+                  </a:lnTo>
+                  <a:lnTo>
+                    <a:pt x="1160249" y="2482275"/>
+                  </a:lnTo>
+                  <a:lnTo>
+                    <a:pt x="1082615" y="2475671"/>
+                  </a:lnTo>
+                  <a:lnTo>
+                    <a:pt x="1004981" y="2469024"/>
+                  </a:lnTo>
+                  <a:lnTo>
+                    <a:pt x="927346" y="2462332"/>
+                  </a:lnTo>
+                  <a:lnTo>
+                    <a:pt x="849712" y="2455597"/>
+                  </a:lnTo>
+                  <a:lnTo>
+                    <a:pt x="772078" y="2448817"/>
+                  </a:lnTo>
+                  <a:lnTo>
+                    <a:pt x="694444" y="2441993"/>
+                  </a:lnTo>
+                  <a:lnTo>
+                    <a:pt x="616810" y="2435123"/>
+                  </a:lnTo>
+                  <a:lnTo>
+                    <a:pt x="539176" y="2428208"/>
+                  </a:lnTo>
+                  <a:lnTo>
+                    <a:pt x="461542" y="2421248"/>
+                  </a:lnTo>
+                  <a:lnTo>
+                    <a:pt x="383908" y="2414241"/>
+                  </a:lnTo>
+                  <a:lnTo>
+                    <a:pt x="306274" y="2407189"/>
+                  </a:lnTo>
+                  <a:lnTo>
+                    <a:pt x="228640" y="2400090"/>
+                  </a:lnTo>
+                  <a:lnTo>
+                    <a:pt x="151006" y="2392944"/>
+                  </a:lnTo>
+                  <a:lnTo>
+                    <a:pt x="73372" y="2385751"/>
+                  </a:lnTo>
+                  <a:lnTo>
+                    <a:pt x="0" y="2378908"/>
                   </a:lnTo>
                   <a:lnTo>
                     <a:pt x="0" y="0"/>
@@ -3534,222 +3534,222 @@
           </p:nvSpPr>
           <p:spPr>
             <a:xfrm>
-              <a:off x="2834928" y="1896563"/>
-              <a:ext cx="5353561" cy="3031995"/>
+              <a:off x="2834928" y="2073503"/>
+              <a:ext cx="5353561" cy="2891796"/>
             </a:xfrm>
             <a:custGeom>
               <a:avLst/>
               <a:pathLst>
-                <a:path w="5353561" h="3031995">
+                <a:path w="5353561" h="2891796">
                   <a:moveTo>
                     <a:pt x="0" y="0"/>
                   </a:moveTo>
                   <a:lnTo>
-                    <a:pt x="74446" y="274670"/>
-                  </a:lnTo>
-                  <a:lnTo>
-                    <a:pt x="152080" y="538711"/>
-                  </a:lnTo>
-                  <a:lnTo>
-                    <a:pt x="229714" y="782113"/>
-                  </a:lnTo>
-                  <a:lnTo>
-                    <a:pt x="307348" y="1006490"/>
-                  </a:lnTo>
-                  <a:lnTo>
-                    <a:pt x="384982" y="1213328"/>
-                  </a:lnTo>
-                  <a:lnTo>
-                    <a:pt x="462617" y="1403998"/>
-                  </a:lnTo>
-                  <a:lnTo>
-                    <a:pt x="540251" y="1579765"/>
-                  </a:lnTo>
-                  <a:lnTo>
-                    <a:pt x="617885" y="1741792"/>
-                  </a:lnTo>
-                  <a:lnTo>
-                    <a:pt x="695519" y="1891155"/>
-                  </a:lnTo>
-                  <a:lnTo>
-                    <a:pt x="773153" y="2028842"/>
-                  </a:lnTo>
-                  <a:lnTo>
-                    <a:pt x="850787" y="2155768"/>
-                  </a:lnTo>
-                  <a:lnTo>
-                    <a:pt x="928421" y="2272772"/>
-                  </a:lnTo>
-                  <a:lnTo>
-                    <a:pt x="1006055" y="2380630"/>
-                  </a:lnTo>
-                  <a:lnTo>
-                    <a:pt x="1083689" y="2480058"/>
-                  </a:lnTo>
-                  <a:lnTo>
-                    <a:pt x="1161323" y="2571713"/>
-                  </a:lnTo>
-                  <a:lnTo>
-                    <a:pt x="1238957" y="2656205"/>
-                  </a:lnTo>
-                  <a:lnTo>
-                    <a:pt x="1316591" y="2734092"/>
-                  </a:lnTo>
-                  <a:lnTo>
-                    <a:pt x="1394225" y="2784840"/>
-                  </a:lnTo>
-                  <a:lnTo>
-                    <a:pt x="1471859" y="2790525"/>
-                  </a:lnTo>
-                  <a:lnTo>
-                    <a:pt x="1549493" y="2796173"/>
-                  </a:lnTo>
-                  <a:lnTo>
-                    <a:pt x="1627127" y="2801784"/>
-                  </a:lnTo>
-                  <a:lnTo>
-                    <a:pt x="1704761" y="2807358"/>
-                  </a:lnTo>
-                  <a:lnTo>
-                    <a:pt x="1782395" y="2812895"/>
-                  </a:lnTo>
-                  <a:lnTo>
-                    <a:pt x="1860029" y="2818396"/>
-                  </a:lnTo>
-                  <a:lnTo>
-                    <a:pt x="1937663" y="2823861"/>
-                  </a:lnTo>
-                  <a:lnTo>
-                    <a:pt x="2015297" y="2829291"/>
-                  </a:lnTo>
-                  <a:lnTo>
-                    <a:pt x="2092931" y="2834685"/>
-                  </a:lnTo>
-                  <a:lnTo>
-                    <a:pt x="2170566" y="2840043"/>
-                  </a:lnTo>
-                  <a:lnTo>
-                    <a:pt x="2248200" y="2845366"/>
-                  </a:lnTo>
-                  <a:lnTo>
-                    <a:pt x="2325834" y="2850655"/>
-                  </a:lnTo>
-                  <a:lnTo>
-                    <a:pt x="2403468" y="2855909"/>
-                  </a:lnTo>
-                  <a:lnTo>
-                    <a:pt x="2481102" y="2861128"/>
-                  </a:lnTo>
-                  <a:lnTo>
-                    <a:pt x="2558736" y="2866313"/>
-                  </a:lnTo>
-                  <a:lnTo>
-                    <a:pt x="2636370" y="2871465"/>
-                  </a:lnTo>
-                  <a:lnTo>
-                    <a:pt x="2714004" y="2876582"/>
-                  </a:lnTo>
-                  <a:lnTo>
-                    <a:pt x="2791638" y="2881666"/>
-                  </a:lnTo>
-                  <a:lnTo>
-                    <a:pt x="2869272" y="2886717"/>
-                  </a:lnTo>
-                  <a:lnTo>
-                    <a:pt x="2946906" y="2891734"/>
-                  </a:lnTo>
-                  <a:lnTo>
-                    <a:pt x="3024540" y="2896719"/>
-                  </a:lnTo>
-                  <a:lnTo>
-                    <a:pt x="3102174" y="2901671"/>
-                  </a:lnTo>
-                  <a:lnTo>
-                    <a:pt x="3179808" y="2906591"/>
-                  </a:lnTo>
-                  <a:lnTo>
-                    <a:pt x="3257442" y="2911478"/>
-                  </a:lnTo>
-                  <a:lnTo>
-                    <a:pt x="3335076" y="2916333"/>
-                  </a:lnTo>
-                  <a:lnTo>
-                    <a:pt x="3412710" y="2921157"/>
-                  </a:lnTo>
-                  <a:lnTo>
-                    <a:pt x="3490344" y="2925949"/>
-                  </a:lnTo>
-                  <a:lnTo>
-                    <a:pt x="3567978" y="2930709"/>
-                  </a:lnTo>
-                  <a:lnTo>
-                    <a:pt x="3645612" y="2935439"/>
-                  </a:lnTo>
-                  <a:lnTo>
-                    <a:pt x="3723246" y="2940137"/>
-                  </a:lnTo>
-                  <a:lnTo>
-                    <a:pt x="3800880" y="2944805"/>
-                  </a:lnTo>
-                  <a:lnTo>
-                    <a:pt x="3878515" y="2949442"/>
-                  </a:lnTo>
-                  <a:lnTo>
-                    <a:pt x="3956149" y="2954049"/>
-                  </a:lnTo>
-                  <a:lnTo>
-                    <a:pt x="4033783" y="2958625"/>
-                  </a:lnTo>
-                  <a:lnTo>
-                    <a:pt x="4111417" y="2963172"/>
-                  </a:lnTo>
-                  <a:lnTo>
-                    <a:pt x="4189051" y="2967688"/>
-                  </a:lnTo>
-                  <a:lnTo>
-                    <a:pt x="4266685" y="2972175"/>
-                  </a:lnTo>
-                  <a:lnTo>
-                    <a:pt x="4344319" y="2976633"/>
-                  </a:lnTo>
-                  <a:lnTo>
-                    <a:pt x="4421953" y="2981062"/>
-                  </a:lnTo>
-                  <a:lnTo>
-                    <a:pt x="4499587" y="2985461"/>
-                  </a:lnTo>
-                  <a:lnTo>
-                    <a:pt x="4577221" y="2989832"/>
-                  </a:lnTo>
-                  <a:lnTo>
-                    <a:pt x="4654855" y="2994174"/>
-                  </a:lnTo>
-                  <a:lnTo>
-                    <a:pt x="4732489" y="2998488"/>
-                  </a:lnTo>
-                  <a:lnTo>
-                    <a:pt x="4810123" y="3002773"/>
-                  </a:lnTo>
-                  <a:lnTo>
-                    <a:pt x="4887757" y="3007030"/>
-                  </a:lnTo>
-                  <a:lnTo>
-                    <a:pt x="4965391" y="3011260"/>
-                  </a:lnTo>
-                  <a:lnTo>
-                    <a:pt x="5043025" y="3015461"/>
-                  </a:lnTo>
-                  <a:lnTo>
-                    <a:pt x="5120659" y="3019636"/>
-                  </a:lnTo>
-                  <a:lnTo>
-                    <a:pt x="5198293" y="3023782"/>
-                  </a:lnTo>
-                  <a:lnTo>
-                    <a:pt x="5275927" y="3027902"/>
-                  </a:lnTo>
-                  <a:lnTo>
-                    <a:pt x="5353561" y="3031995"/>
+                    <a:pt x="74446" y="261969"/>
+                  </a:lnTo>
+                  <a:lnTo>
+                    <a:pt x="152080" y="513801"/>
+                  </a:lnTo>
+                  <a:lnTo>
+                    <a:pt x="229714" y="745949"/>
+                  </a:lnTo>
+                  <a:lnTo>
+                    <a:pt x="307348" y="959950"/>
+                  </a:lnTo>
+                  <a:lnTo>
+                    <a:pt x="384982" y="1157224"/>
+                  </a:lnTo>
+                  <a:lnTo>
+                    <a:pt x="462617" y="1339078"/>
+                  </a:lnTo>
+                  <a:lnTo>
+                    <a:pt x="540251" y="1506717"/>
+                  </a:lnTo>
+                  <a:lnTo>
+                    <a:pt x="617885" y="1661252"/>
+                  </a:lnTo>
+                  <a:lnTo>
+                    <a:pt x="695519" y="1803708"/>
+                  </a:lnTo>
+                  <a:lnTo>
+                    <a:pt x="773153" y="1935029"/>
+                  </a:lnTo>
+                  <a:lnTo>
+                    <a:pt x="850787" y="2056086"/>
+                  </a:lnTo>
+                  <a:lnTo>
+                    <a:pt x="928421" y="2167680"/>
+                  </a:lnTo>
+                  <a:lnTo>
+                    <a:pt x="1006055" y="2270551"/>
+                  </a:lnTo>
+                  <a:lnTo>
+                    <a:pt x="1083689" y="2365381"/>
+                  </a:lnTo>
+                  <a:lnTo>
+                    <a:pt x="1161323" y="2452798"/>
+                  </a:lnTo>
+                  <a:lnTo>
+                    <a:pt x="1238957" y="2533383"/>
+                  </a:lnTo>
+                  <a:lnTo>
+                    <a:pt x="1316591" y="2607669"/>
+                  </a:lnTo>
+                  <a:lnTo>
+                    <a:pt x="1394225" y="2656070"/>
+                  </a:lnTo>
+                  <a:lnTo>
+                    <a:pt x="1471859" y="2661492"/>
+                  </a:lnTo>
+                  <a:lnTo>
+                    <a:pt x="1549493" y="2666879"/>
+                  </a:lnTo>
+                  <a:lnTo>
+                    <a:pt x="1627127" y="2672230"/>
+                  </a:lnTo>
+                  <a:lnTo>
+                    <a:pt x="1704761" y="2677547"/>
+                  </a:lnTo>
+                  <a:lnTo>
+                    <a:pt x="1782395" y="2682828"/>
+                  </a:lnTo>
+                  <a:lnTo>
+                    <a:pt x="1860029" y="2688075"/>
+                  </a:lnTo>
+                  <a:lnTo>
+                    <a:pt x="1937663" y="2693287"/>
+                  </a:lnTo>
+                  <a:lnTo>
+                    <a:pt x="2015297" y="2698465"/>
+                  </a:lnTo>
+                  <a:lnTo>
+                    <a:pt x="2092931" y="2703610"/>
+                  </a:lnTo>
+                  <a:lnTo>
+                    <a:pt x="2170566" y="2708720"/>
+                  </a:lnTo>
+                  <a:lnTo>
+                    <a:pt x="2248200" y="2713798"/>
+                  </a:lnTo>
+                  <a:lnTo>
+                    <a:pt x="2325834" y="2718842"/>
+                  </a:lnTo>
+                  <a:lnTo>
+                    <a:pt x="2403468" y="2723853"/>
+                  </a:lnTo>
+                  <a:lnTo>
+                    <a:pt x="2481102" y="2728831"/>
+                  </a:lnTo>
+                  <a:lnTo>
+                    <a:pt x="2558736" y="2733776"/>
+                  </a:lnTo>
+                  <a:lnTo>
+                    <a:pt x="2636370" y="2738689"/>
+                  </a:lnTo>
+                  <a:lnTo>
+                    <a:pt x="2714004" y="2743570"/>
+                  </a:lnTo>
+                  <a:lnTo>
+                    <a:pt x="2791638" y="2748419"/>
+                  </a:lnTo>
+                  <a:lnTo>
+                    <a:pt x="2869272" y="2753236"/>
+                  </a:lnTo>
+                  <a:lnTo>
+                    <a:pt x="2946906" y="2758022"/>
+                  </a:lnTo>
+                  <a:lnTo>
+                    <a:pt x="3024540" y="2762776"/>
+                  </a:lnTo>
+                  <a:lnTo>
+                    <a:pt x="3102174" y="2767499"/>
+                  </a:lnTo>
+                  <a:lnTo>
+                    <a:pt x="3179808" y="2772191"/>
+                  </a:lnTo>
+                  <a:lnTo>
+                    <a:pt x="3257442" y="2776852"/>
+                  </a:lnTo>
+                  <a:lnTo>
+                    <a:pt x="3335076" y="2781483"/>
+                  </a:lnTo>
+                  <a:lnTo>
+                    <a:pt x="3412710" y="2786084"/>
+                  </a:lnTo>
+                  <a:lnTo>
+                    <a:pt x="3490344" y="2790654"/>
+                  </a:lnTo>
+                  <a:lnTo>
+                    <a:pt x="3567978" y="2795195"/>
+                  </a:lnTo>
+                  <a:lnTo>
+                    <a:pt x="3645612" y="2799705"/>
+                  </a:lnTo>
+                  <a:lnTo>
+                    <a:pt x="3723246" y="2804186"/>
+                  </a:lnTo>
+                  <a:lnTo>
+                    <a:pt x="3800880" y="2808638"/>
+                  </a:lnTo>
+                  <a:lnTo>
+                    <a:pt x="3878515" y="2813061"/>
+                  </a:lnTo>
+                  <a:lnTo>
+                    <a:pt x="3956149" y="2817454"/>
+                  </a:lnTo>
+                  <a:lnTo>
+                    <a:pt x="4033783" y="2821819"/>
+                  </a:lnTo>
+                  <a:lnTo>
+                    <a:pt x="4111417" y="2826156"/>
+                  </a:lnTo>
+                  <a:lnTo>
+                    <a:pt x="4189051" y="2830464"/>
+                  </a:lnTo>
+                  <a:lnTo>
+                    <a:pt x="4266685" y="2834743"/>
+                  </a:lnTo>
+                  <a:lnTo>
+                    <a:pt x="4344319" y="2838995"/>
+                  </a:lnTo>
+                  <a:lnTo>
+                    <a:pt x="4421953" y="2843219"/>
+                  </a:lnTo>
+                  <a:lnTo>
+                    <a:pt x="4499587" y="2847415"/>
+                  </a:lnTo>
+                  <a:lnTo>
+                    <a:pt x="4577221" y="2851583"/>
+                  </a:lnTo>
+                  <a:lnTo>
+                    <a:pt x="4654855" y="2855725"/>
+                  </a:lnTo>
+                  <a:lnTo>
+                    <a:pt x="4732489" y="2859839"/>
+                  </a:lnTo>
+                  <a:lnTo>
+                    <a:pt x="4810123" y="2863926"/>
+                  </a:lnTo>
+                  <a:lnTo>
+                    <a:pt x="4887757" y="2867986"/>
+                  </a:lnTo>
+                  <a:lnTo>
+                    <a:pt x="4965391" y="2872020"/>
+                  </a:lnTo>
+                  <a:lnTo>
+                    <a:pt x="5043025" y="2876028"/>
+                  </a:lnTo>
+                  <a:lnTo>
+                    <a:pt x="5120659" y="2880009"/>
+                  </a:lnTo>
+                  <a:lnTo>
+                    <a:pt x="5198293" y="2883964"/>
+                  </a:lnTo>
+                  <a:lnTo>
+                    <a:pt x="5275927" y="2887893"/>
+                  </a:lnTo>
+                  <a:lnTo>
+                    <a:pt x="5353561" y="2891796"/>
                   </a:lnTo>
                 </a:path>
               </a:pathLst>
@@ -3769,297 +3769,297 @@
           </p:nvSpPr>
           <p:spPr>
             <a:xfrm>
-              <a:off x="817517" y="4390804"/>
-              <a:ext cx="7370972" cy="1145065"/>
+              <a:off x="817517" y="4452411"/>
+              <a:ext cx="7370972" cy="1092118"/>
             </a:xfrm>
             <a:custGeom>
               <a:avLst/>
               <a:pathLst>
-                <a:path w="7370972" h="1145065">
+                <a:path w="7370972" h="1092118">
                   <a:moveTo>
-                    <a:pt x="7370972" y="1145065"/>
+                    <a:pt x="7370972" y="1092118"/>
                   </a:moveTo>
                   <a:lnTo>
-                    <a:pt x="7293338" y="1143934"/>
-                  </a:lnTo>
-                  <a:lnTo>
-                    <a:pt x="7215704" y="1142707"/>
-                  </a:lnTo>
-                  <a:lnTo>
-                    <a:pt x="7138070" y="1141376"/>
-                  </a:lnTo>
-                  <a:lnTo>
-                    <a:pt x="7060436" y="1139933"/>
-                  </a:lnTo>
-                  <a:lnTo>
-                    <a:pt x="6982802" y="1138367"/>
-                  </a:lnTo>
-                  <a:lnTo>
-                    <a:pt x="6905168" y="1136668"/>
-                  </a:lnTo>
-                  <a:lnTo>
-                    <a:pt x="6827534" y="1134825"/>
-                  </a:lnTo>
-                  <a:lnTo>
-                    <a:pt x="6749900" y="1132826"/>
-                  </a:lnTo>
-                  <a:lnTo>
-                    <a:pt x="6672266" y="1130657"/>
-                  </a:lnTo>
-                  <a:lnTo>
-                    <a:pt x="6594632" y="1128305"/>
-                  </a:lnTo>
-                  <a:lnTo>
-                    <a:pt x="6516998" y="1125753"/>
-                  </a:lnTo>
-                  <a:lnTo>
-                    <a:pt x="6439364" y="1122984"/>
-                  </a:lnTo>
-                  <a:lnTo>
-                    <a:pt x="6361730" y="1119981"/>
-                  </a:lnTo>
-                  <a:lnTo>
-                    <a:pt x="6284096" y="1116723"/>
-                  </a:lnTo>
-                  <a:lnTo>
-                    <a:pt x="6206462" y="1113189"/>
-                  </a:lnTo>
-                  <a:lnTo>
-                    <a:pt x="6128827" y="1109355"/>
-                  </a:lnTo>
-                  <a:lnTo>
-                    <a:pt x="6051193" y="1105196"/>
-                  </a:lnTo>
-                  <a:lnTo>
-                    <a:pt x="5973559" y="1100685"/>
-                  </a:lnTo>
-                  <a:lnTo>
-                    <a:pt x="5895925" y="1095791"/>
-                  </a:lnTo>
-                  <a:lnTo>
-                    <a:pt x="5818291" y="1090482"/>
-                  </a:lnTo>
-                  <a:lnTo>
-                    <a:pt x="5740657" y="1084723"/>
-                  </a:lnTo>
-                  <a:lnTo>
-                    <a:pt x="5663023" y="1078475"/>
-                  </a:lnTo>
-                  <a:lnTo>
-                    <a:pt x="5585389" y="1071698"/>
-                  </a:lnTo>
-                  <a:lnTo>
-                    <a:pt x="5507755" y="1064346"/>
-                  </a:lnTo>
-                  <a:lnTo>
-                    <a:pt x="5430121" y="1056371"/>
-                  </a:lnTo>
-                  <a:lnTo>
-                    <a:pt x="5352487" y="1047719"/>
-                  </a:lnTo>
-                  <a:lnTo>
-                    <a:pt x="5274853" y="1038334"/>
-                  </a:lnTo>
-                  <a:lnTo>
-                    <a:pt x="5197219" y="1028153"/>
-                  </a:lnTo>
-                  <a:lnTo>
-                    <a:pt x="5119585" y="1017109"/>
-                  </a:lnTo>
-                  <a:lnTo>
-                    <a:pt x="5041951" y="1005128"/>
-                  </a:lnTo>
-                  <a:lnTo>
-                    <a:pt x="4964317" y="992131"/>
-                  </a:lnTo>
-                  <a:lnTo>
-                    <a:pt x="4886683" y="978033"/>
-                  </a:lnTo>
-                  <a:lnTo>
-                    <a:pt x="4809049" y="962739"/>
-                  </a:lnTo>
-                  <a:lnTo>
-                    <a:pt x="4731415" y="946148"/>
-                  </a:lnTo>
-                  <a:lnTo>
-                    <a:pt x="4653781" y="928150"/>
-                  </a:lnTo>
-                  <a:lnTo>
-                    <a:pt x="4576147" y="908626"/>
-                  </a:lnTo>
-                  <a:lnTo>
-                    <a:pt x="4498513" y="887447"/>
-                  </a:lnTo>
-                  <a:lnTo>
-                    <a:pt x="4420879" y="864471"/>
-                  </a:lnTo>
-                  <a:lnTo>
-                    <a:pt x="4343244" y="839548"/>
-                  </a:lnTo>
-                  <a:lnTo>
-                    <a:pt x="4265610" y="812511"/>
-                  </a:lnTo>
-                  <a:lnTo>
-                    <a:pt x="4187976" y="783182"/>
-                  </a:lnTo>
-                  <a:lnTo>
-                    <a:pt x="4110342" y="751366"/>
-                  </a:lnTo>
-                  <a:lnTo>
-                    <a:pt x="4032708" y="716852"/>
-                  </a:lnTo>
-                  <a:lnTo>
-                    <a:pt x="3955074" y="679411"/>
-                  </a:lnTo>
-                  <a:lnTo>
-                    <a:pt x="3877440" y="638796"/>
-                  </a:lnTo>
-                  <a:lnTo>
-                    <a:pt x="3799806" y="594737"/>
-                  </a:lnTo>
-                  <a:lnTo>
-                    <a:pt x="3722172" y="546942"/>
-                  </a:lnTo>
-                  <a:lnTo>
-                    <a:pt x="3644538" y="495094"/>
-                  </a:lnTo>
-                  <a:lnTo>
-                    <a:pt x="3566904" y="438850"/>
-                  </a:lnTo>
-                  <a:lnTo>
-                    <a:pt x="3489270" y="377836"/>
-                  </a:lnTo>
-                  <a:lnTo>
-                    <a:pt x="3411636" y="311650"/>
-                  </a:lnTo>
-                  <a:lnTo>
-                    <a:pt x="3334002" y="284876"/>
-                  </a:lnTo>
-                  <a:lnTo>
-                    <a:pt x="3256368" y="279116"/>
-                  </a:lnTo>
-                  <a:lnTo>
-                    <a:pt x="3178734" y="273318"/>
-                  </a:lnTo>
-                  <a:lnTo>
-                    <a:pt x="3101100" y="267482"/>
-                  </a:lnTo>
-                  <a:lnTo>
-                    <a:pt x="3023466" y="261607"/>
-                  </a:lnTo>
-                  <a:lnTo>
-                    <a:pt x="2945832" y="255693"/>
-                  </a:lnTo>
-                  <a:lnTo>
-                    <a:pt x="2868198" y="249740"/>
-                  </a:lnTo>
-                  <a:lnTo>
-                    <a:pt x="2790564" y="243749"/>
-                  </a:lnTo>
-                  <a:lnTo>
-                    <a:pt x="2712930" y="237717"/>
-                  </a:lnTo>
-                  <a:lnTo>
-                    <a:pt x="2635295" y="231646"/>
-                  </a:lnTo>
-                  <a:lnTo>
-                    <a:pt x="2557661" y="225535"/>
-                  </a:lnTo>
-                  <a:lnTo>
-                    <a:pt x="2480027" y="219383"/>
-                  </a:lnTo>
-                  <a:lnTo>
-                    <a:pt x="2402393" y="213191"/>
-                  </a:lnTo>
-                  <a:lnTo>
-                    <a:pt x="2324759" y="206958"/>
-                  </a:lnTo>
-                  <a:lnTo>
-                    <a:pt x="2247125" y="200684"/>
-                  </a:lnTo>
-                  <a:lnTo>
-                    <a:pt x="2169491" y="194369"/>
-                  </a:lnTo>
-                  <a:lnTo>
-                    <a:pt x="2091857" y="188012"/>
-                  </a:lnTo>
-                  <a:lnTo>
-                    <a:pt x="2014223" y="181613"/>
-                  </a:lnTo>
-                  <a:lnTo>
-                    <a:pt x="1936589" y="175172"/>
-                  </a:lnTo>
-                  <a:lnTo>
-                    <a:pt x="1858955" y="168688"/>
-                  </a:lnTo>
-                  <a:lnTo>
-                    <a:pt x="1781321" y="162162"/>
-                  </a:lnTo>
-                  <a:lnTo>
-                    <a:pt x="1703687" y="155592"/>
-                  </a:lnTo>
-                  <a:lnTo>
-                    <a:pt x="1626053" y="148980"/>
-                  </a:lnTo>
-                  <a:lnTo>
-                    <a:pt x="1548419" y="142323"/>
-                  </a:lnTo>
-                  <a:lnTo>
-                    <a:pt x="1470785" y="135623"/>
-                  </a:lnTo>
-                  <a:lnTo>
-                    <a:pt x="1393151" y="128879"/>
-                  </a:lnTo>
-                  <a:lnTo>
-                    <a:pt x="1315517" y="122090"/>
-                  </a:lnTo>
-                  <a:lnTo>
-                    <a:pt x="1237883" y="115256"/>
-                  </a:lnTo>
-                  <a:lnTo>
-                    <a:pt x="1160249" y="108378"/>
-                  </a:lnTo>
-                  <a:lnTo>
-                    <a:pt x="1082615" y="101454"/>
-                  </a:lnTo>
-                  <a:lnTo>
-                    <a:pt x="1004981" y="94484"/>
-                  </a:lnTo>
-                  <a:lnTo>
-                    <a:pt x="927346" y="87468"/>
-                  </a:lnTo>
-                  <a:lnTo>
-                    <a:pt x="849712" y="80406"/>
-                  </a:lnTo>
-                  <a:lnTo>
-                    <a:pt x="772078" y="73298"/>
-                  </a:lnTo>
-                  <a:lnTo>
-                    <a:pt x="694444" y="66142"/>
-                  </a:lnTo>
-                  <a:lnTo>
-                    <a:pt x="616810" y="58940"/>
-                  </a:lnTo>
-                  <a:lnTo>
-                    <a:pt x="539176" y="51690"/>
-                  </a:lnTo>
-                  <a:lnTo>
-                    <a:pt x="461542" y="44392"/>
-                  </a:lnTo>
-                  <a:lnTo>
-                    <a:pt x="383908" y="37046"/>
-                  </a:lnTo>
-                  <a:lnTo>
-                    <a:pt x="306274" y="29651"/>
-                  </a:lnTo>
-                  <a:lnTo>
-                    <a:pt x="228640" y="22208"/>
-                  </a:lnTo>
-                  <a:lnTo>
-                    <a:pt x="151006" y="14716"/>
-                  </a:lnTo>
-                  <a:lnTo>
-                    <a:pt x="73372" y="7174"/>
+                    <a:pt x="7293338" y="1091039"/>
+                  </a:lnTo>
+                  <a:lnTo>
+                    <a:pt x="7215704" y="1089869"/>
+                  </a:lnTo>
+                  <a:lnTo>
+                    <a:pt x="7138070" y="1088600"/>
+                  </a:lnTo>
+                  <a:lnTo>
+                    <a:pt x="7060436" y="1087223"/>
+                  </a:lnTo>
+                  <a:lnTo>
+                    <a:pt x="6982802" y="1085729"/>
+                  </a:lnTo>
+                  <a:lnTo>
+                    <a:pt x="6905168" y="1084109"/>
+                  </a:lnTo>
+                  <a:lnTo>
+                    <a:pt x="6827534" y="1082351"/>
+                  </a:lnTo>
+                  <a:lnTo>
+                    <a:pt x="6749900" y="1080444"/>
+                  </a:lnTo>
+                  <a:lnTo>
+                    <a:pt x="6672266" y="1078376"/>
+                  </a:lnTo>
+                  <a:lnTo>
+                    <a:pt x="6594632" y="1076132"/>
+                  </a:lnTo>
+                  <a:lnTo>
+                    <a:pt x="6516998" y="1073698"/>
+                  </a:lnTo>
+                  <a:lnTo>
+                    <a:pt x="6439364" y="1071058"/>
+                  </a:lnTo>
+                  <a:lnTo>
+                    <a:pt x="6361730" y="1068193"/>
+                  </a:lnTo>
+                  <a:lnTo>
+                    <a:pt x="6284096" y="1065086"/>
+                  </a:lnTo>
+                  <a:lnTo>
+                    <a:pt x="6206462" y="1061715"/>
+                  </a:lnTo>
+                  <a:lnTo>
+                    <a:pt x="6128827" y="1058059"/>
+                  </a:lnTo>
+                  <a:lnTo>
+                    <a:pt x="6051193" y="1054092"/>
+                  </a:lnTo>
+                  <a:lnTo>
+                    <a:pt x="5973559" y="1049790"/>
+                  </a:lnTo>
+                  <a:lnTo>
+                    <a:pt x="5895925" y="1045122"/>
+                  </a:lnTo>
+                  <a:lnTo>
+                    <a:pt x="5818291" y="1040058"/>
+                  </a:lnTo>
+                  <a:lnTo>
+                    <a:pt x="5740657" y="1034565"/>
+                  </a:lnTo>
+                  <a:lnTo>
+                    <a:pt x="5663023" y="1028607"/>
+                  </a:lnTo>
+                  <a:lnTo>
+                    <a:pt x="5585389" y="1022143"/>
+                  </a:lnTo>
+                  <a:lnTo>
+                    <a:pt x="5507755" y="1015131"/>
+                  </a:lnTo>
+                  <a:lnTo>
+                    <a:pt x="5430121" y="1007524"/>
+                  </a:lnTo>
+                  <a:lnTo>
+                    <a:pt x="5352487" y="999273"/>
+                  </a:lnTo>
+                  <a:lnTo>
+                    <a:pt x="5274853" y="990322"/>
+                  </a:lnTo>
+                  <a:lnTo>
+                    <a:pt x="5197219" y="980611"/>
+                  </a:lnTo>
+                  <a:lnTo>
+                    <a:pt x="5119585" y="970078"/>
+                  </a:lnTo>
+                  <a:lnTo>
+                    <a:pt x="5041951" y="958651"/>
+                  </a:lnTo>
+                  <a:lnTo>
+                    <a:pt x="4964317" y="946255"/>
+                  </a:lnTo>
+                  <a:lnTo>
+                    <a:pt x="4886683" y="932809"/>
+                  </a:lnTo>
+                  <a:lnTo>
+                    <a:pt x="4809049" y="918222"/>
+                  </a:lnTo>
+                  <a:lnTo>
+                    <a:pt x="4731415" y="902398"/>
+                  </a:lnTo>
+                  <a:lnTo>
+                    <a:pt x="4653781" y="885232"/>
+                  </a:lnTo>
+                  <a:lnTo>
+                    <a:pt x="4576147" y="866611"/>
+                  </a:lnTo>
+                  <a:lnTo>
+                    <a:pt x="4498513" y="846411"/>
+                  </a:lnTo>
+                  <a:lnTo>
+                    <a:pt x="4420879" y="824498"/>
+                  </a:lnTo>
+                  <a:lnTo>
+                    <a:pt x="4343244" y="800728"/>
+                  </a:lnTo>
+                  <a:lnTo>
+                    <a:pt x="4265610" y="774941"/>
+                  </a:lnTo>
+                  <a:lnTo>
+                    <a:pt x="4187976" y="746968"/>
+                  </a:lnTo>
+                  <a:lnTo>
+                    <a:pt x="4110342" y="716623"/>
+                  </a:lnTo>
+                  <a:lnTo>
+                    <a:pt x="4032708" y="683705"/>
+                  </a:lnTo>
+                  <a:lnTo>
+                    <a:pt x="3955074" y="647995"/>
+                  </a:lnTo>
+                  <a:lnTo>
+                    <a:pt x="3877440" y="609258"/>
+                  </a:lnTo>
+                  <a:lnTo>
+                    <a:pt x="3799806" y="567236"/>
+                  </a:lnTo>
+                  <a:lnTo>
+                    <a:pt x="3722172" y="521651"/>
+                  </a:lnTo>
+                  <a:lnTo>
+                    <a:pt x="3644538" y="472201"/>
+                  </a:lnTo>
+                  <a:lnTo>
+                    <a:pt x="3566904" y="418557"/>
+                  </a:lnTo>
+                  <a:lnTo>
+                    <a:pt x="3489270" y="360365"/>
+                  </a:lnTo>
+                  <a:lnTo>
+                    <a:pt x="3411636" y="297239"/>
+                  </a:lnTo>
+                  <a:lnTo>
+                    <a:pt x="3334002" y="271704"/>
+                  </a:lnTo>
+                  <a:lnTo>
+                    <a:pt x="3256368" y="266210"/>
+                  </a:lnTo>
+                  <a:lnTo>
+                    <a:pt x="3178734" y="260680"/>
+                  </a:lnTo>
+                  <a:lnTo>
+                    <a:pt x="3101100" y="255113"/>
+                  </a:lnTo>
+                  <a:lnTo>
+                    <a:pt x="3023466" y="249510"/>
+                  </a:lnTo>
+                  <a:lnTo>
+                    <a:pt x="2945832" y="243870"/>
+                  </a:lnTo>
+                  <a:lnTo>
+                    <a:pt x="2868198" y="238193"/>
+                  </a:lnTo>
+                  <a:lnTo>
+                    <a:pt x="2790564" y="232478"/>
+                  </a:lnTo>
+                  <a:lnTo>
+                    <a:pt x="2712930" y="226725"/>
+                  </a:lnTo>
+                  <a:lnTo>
+                    <a:pt x="2635295" y="220935"/>
+                  </a:lnTo>
+                  <a:lnTo>
+                    <a:pt x="2557661" y="215106"/>
+                  </a:lnTo>
+                  <a:lnTo>
+                    <a:pt x="2480027" y="209239"/>
+                  </a:lnTo>
+                  <a:lnTo>
+                    <a:pt x="2402393" y="203333"/>
+                  </a:lnTo>
+                  <a:lnTo>
+                    <a:pt x="2324759" y="197389"/>
+                  </a:lnTo>
+                  <a:lnTo>
+                    <a:pt x="2247125" y="191405"/>
+                  </a:lnTo>
+                  <a:lnTo>
+                    <a:pt x="2169491" y="185381"/>
+                  </a:lnTo>
+                  <a:lnTo>
+                    <a:pt x="2091857" y="179318"/>
+                  </a:lnTo>
+                  <a:lnTo>
+                    <a:pt x="2014223" y="173215"/>
+                  </a:lnTo>
+                  <a:lnTo>
+                    <a:pt x="1936589" y="167072"/>
+                  </a:lnTo>
+                  <a:lnTo>
+                    <a:pt x="1858955" y="160888"/>
+                  </a:lnTo>
+                  <a:lnTo>
+                    <a:pt x="1781321" y="154664"/>
+                  </a:lnTo>
+                  <a:lnTo>
+                    <a:pt x="1703687" y="148398"/>
+                  </a:lnTo>
+                  <a:lnTo>
+                    <a:pt x="1626053" y="142091"/>
+                  </a:lnTo>
+                  <a:lnTo>
+                    <a:pt x="1548419" y="135742"/>
+                  </a:lnTo>
+                  <a:lnTo>
+                    <a:pt x="1470785" y="129352"/>
+                  </a:lnTo>
+                  <a:lnTo>
+                    <a:pt x="1393151" y="122919"/>
+                  </a:lnTo>
+                  <a:lnTo>
+                    <a:pt x="1315517" y="116445"/>
+                  </a:lnTo>
+                  <a:lnTo>
+                    <a:pt x="1237883" y="109927"/>
+                  </a:lnTo>
+                  <a:lnTo>
+                    <a:pt x="1160249" y="103366"/>
+                  </a:lnTo>
+                  <a:lnTo>
+                    <a:pt x="1082615" y="96762"/>
+                  </a:lnTo>
+                  <a:lnTo>
+                    <a:pt x="1004981" y="90115"/>
+                  </a:lnTo>
+                  <a:lnTo>
+                    <a:pt x="927346" y="83424"/>
+                  </a:lnTo>
+                  <a:lnTo>
+                    <a:pt x="849712" y="76688"/>
+                  </a:lnTo>
+                  <a:lnTo>
+                    <a:pt x="772078" y="69908"/>
+                  </a:lnTo>
+                  <a:lnTo>
+                    <a:pt x="694444" y="63084"/>
+                  </a:lnTo>
+                  <a:lnTo>
+                    <a:pt x="616810" y="56214"/>
+                  </a:lnTo>
+                  <a:lnTo>
+                    <a:pt x="539176" y="49300"/>
+                  </a:lnTo>
+                  <a:lnTo>
+                    <a:pt x="461542" y="42339"/>
+                  </a:lnTo>
+                  <a:lnTo>
+                    <a:pt x="383908" y="35333"/>
+                  </a:lnTo>
+                  <a:lnTo>
+                    <a:pt x="306274" y="28280"/>
+                  </a:lnTo>
+                  <a:lnTo>
+                    <a:pt x="228640" y="21181"/>
+                  </a:lnTo>
+                  <a:lnTo>
+                    <a:pt x="151006" y="14035"/>
+                  </a:lnTo>
+                  <a:lnTo>
+                    <a:pt x="73372" y="6842"/>
                   </a:lnTo>
                   <a:lnTo>
                     <a:pt x="0" y="0"/>
@@ -4082,267 +4082,267 @@
           </p:nvSpPr>
           <p:spPr>
             <a:xfrm>
-              <a:off x="1670574" y="1896563"/>
-              <a:ext cx="6517915" cy="3561662"/>
+              <a:off x="1670574" y="2073503"/>
+              <a:ext cx="6517915" cy="3396972"/>
             </a:xfrm>
             <a:custGeom>
               <a:avLst/>
               <a:pathLst>
-                <a:path w="6517915" h="3561662">
+                <a:path w="6517915" h="3396972">
                   <a:moveTo>
                     <a:pt x="0" y="0"/>
                   </a:moveTo>
                   <a:lnTo>
-                    <a:pt x="74290" y="150675"/>
-                  </a:lnTo>
-                  <a:lnTo>
-                    <a:pt x="151924" y="301357"/>
-                  </a:lnTo>
-                  <a:lnTo>
-                    <a:pt x="229558" y="445556"/>
-                  </a:lnTo>
-                  <a:lnTo>
-                    <a:pt x="307192" y="583550"/>
-                  </a:lnTo>
-                  <a:lnTo>
-                    <a:pt x="384826" y="715607"/>
-                  </a:lnTo>
-                  <a:lnTo>
-                    <a:pt x="462460" y="841982"/>
-                  </a:lnTo>
-                  <a:lnTo>
-                    <a:pt x="540094" y="962919"/>
-                  </a:lnTo>
-                  <a:lnTo>
-                    <a:pt x="617728" y="1078652"/>
-                  </a:lnTo>
-                  <a:lnTo>
-                    <a:pt x="695362" y="1189405"/>
-                  </a:lnTo>
-                  <a:lnTo>
-                    <a:pt x="772996" y="1295393"/>
-                  </a:lnTo>
-                  <a:lnTo>
-                    <a:pt x="850630" y="1396821"/>
-                  </a:lnTo>
-                  <a:lnTo>
-                    <a:pt x="928264" y="1493884"/>
-                  </a:lnTo>
-                  <a:lnTo>
-                    <a:pt x="1005898" y="1586771"/>
-                  </a:lnTo>
-                  <a:lnTo>
-                    <a:pt x="1083532" y="1675661"/>
-                  </a:lnTo>
-                  <a:lnTo>
-                    <a:pt x="1161166" y="1760727"/>
-                  </a:lnTo>
-                  <a:lnTo>
-                    <a:pt x="1238800" y="1842132"/>
-                  </a:lnTo>
-                  <a:lnTo>
-                    <a:pt x="1316434" y="1920035"/>
-                  </a:lnTo>
-                  <a:lnTo>
-                    <a:pt x="1394068" y="1994585"/>
-                  </a:lnTo>
-                  <a:lnTo>
-                    <a:pt x="1471702" y="2065928"/>
-                  </a:lnTo>
-                  <a:lnTo>
-                    <a:pt x="1549336" y="2134201"/>
-                  </a:lnTo>
-                  <a:lnTo>
-                    <a:pt x="1626970" y="2199536"/>
-                  </a:lnTo>
-                  <a:lnTo>
-                    <a:pt x="1704604" y="2262061"/>
-                  </a:lnTo>
-                  <a:lnTo>
-                    <a:pt x="1782239" y="2321894"/>
-                  </a:lnTo>
-                  <a:lnTo>
-                    <a:pt x="1859873" y="2379154"/>
-                  </a:lnTo>
-                  <a:lnTo>
-                    <a:pt x="1937507" y="2433949"/>
-                  </a:lnTo>
-                  <a:lnTo>
-                    <a:pt x="2015141" y="2486387"/>
-                  </a:lnTo>
-                  <a:lnTo>
-                    <a:pt x="2092775" y="2536569"/>
-                  </a:lnTo>
-                  <a:lnTo>
-                    <a:pt x="2170409" y="2584591"/>
-                  </a:lnTo>
-                  <a:lnTo>
-                    <a:pt x="2248043" y="2630547"/>
-                  </a:lnTo>
-                  <a:lnTo>
-                    <a:pt x="2325677" y="2674526"/>
-                  </a:lnTo>
-                  <a:lnTo>
-                    <a:pt x="2403311" y="2716612"/>
-                  </a:lnTo>
-                  <a:lnTo>
-                    <a:pt x="2480945" y="2756888"/>
-                  </a:lnTo>
-                  <a:lnTo>
-                    <a:pt x="2558579" y="2795430"/>
-                  </a:lnTo>
-                  <a:lnTo>
-                    <a:pt x="2636213" y="2832314"/>
-                  </a:lnTo>
-                  <a:lnTo>
-                    <a:pt x="2713847" y="2867611"/>
-                  </a:lnTo>
-                  <a:lnTo>
-                    <a:pt x="2791481" y="2901390"/>
-                  </a:lnTo>
-                  <a:lnTo>
-                    <a:pt x="2869115" y="2933715"/>
-                  </a:lnTo>
-                  <a:lnTo>
-                    <a:pt x="2946749" y="2964649"/>
-                  </a:lnTo>
-                  <a:lnTo>
-                    <a:pt x="3024383" y="2994252"/>
-                  </a:lnTo>
-                  <a:lnTo>
-                    <a:pt x="3102017" y="3022581"/>
-                  </a:lnTo>
-                  <a:lnTo>
-                    <a:pt x="3179651" y="3049691"/>
-                  </a:lnTo>
-                  <a:lnTo>
-                    <a:pt x="3257285" y="3075635"/>
-                  </a:lnTo>
-                  <a:lnTo>
-                    <a:pt x="3334919" y="3100462"/>
-                  </a:lnTo>
-                  <a:lnTo>
-                    <a:pt x="3412553" y="3124222"/>
-                  </a:lnTo>
-                  <a:lnTo>
-                    <a:pt x="3490188" y="3146958"/>
-                  </a:lnTo>
-                  <a:lnTo>
-                    <a:pt x="3567822" y="3168717"/>
-                  </a:lnTo>
-                  <a:lnTo>
-                    <a:pt x="3645456" y="3189539"/>
-                  </a:lnTo>
-                  <a:lnTo>
-                    <a:pt x="3723090" y="3209466"/>
-                  </a:lnTo>
-                  <a:lnTo>
-                    <a:pt x="3800724" y="3228535"/>
-                  </a:lnTo>
-                  <a:lnTo>
-                    <a:pt x="3878358" y="3246783"/>
-                  </a:lnTo>
-                  <a:lnTo>
-                    <a:pt x="3955992" y="3264247"/>
-                  </a:lnTo>
-                  <a:lnTo>
-                    <a:pt x="4033626" y="3280958"/>
-                  </a:lnTo>
-                  <a:lnTo>
-                    <a:pt x="4111260" y="3296951"/>
-                  </a:lnTo>
-                  <a:lnTo>
-                    <a:pt x="4188894" y="3312256"/>
-                  </a:lnTo>
-                  <a:lnTo>
-                    <a:pt x="4266528" y="3326902"/>
-                  </a:lnTo>
-                  <a:lnTo>
-                    <a:pt x="4344162" y="3340918"/>
-                  </a:lnTo>
-                  <a:lnTo>
-                    <a:pt x="4421796" y="3354331"/>
-                  </a:lnTo>
-                  <a:lnTo>
-                    <a:pt x="4499430" y="3367167"/>
-                  </a:lnTo>
-                  <a:lnTo>
-                    <a:pt x="4577064" y="3379450"/>
-                  </a:lnTo>
-                  <a:lnTo>
-                    <a:pt x="4654698" y="3391205"/>
-                  </a:lnTo>
-                  <a:lnTo>
-                    <a:pt x="4732332" y="3402454"/>
-                  </a:lnTo>
-                  <a:lnTo>
-                    <a:pt x="4809966" y="3413219"/>
-                  </a:lnTo>
-                  <a:lnTo>
-                    <a:pt x="4887600" y="3423521"/>
-                  </a:lnTo>
-                  <a:lnTo>
-                    <a:pt x="4965234" y="3433380"/>
-                  </a:lnTo>
-                  <a:lnTo>
-                    <a:pt x="5042868" y="3442814"/>
-                  </a:lnTo>
-                  <a:lnTo>
-                    <a:pt x="5120502" y="3451843"/>
-                  </a:lnTo>
-                  <a:lnTo>
-                    <a:pt x="5198137" y="3460483"/>
-                  </a:lnTo>
-                  <a:lnTo>
-                    <a:pt x="5275771" y="3468751"/>
-                  </a:lnTo>
-                  <a:lnTo>
-                    <a:pt x="5353405" y="3476664"/>
-                  </a:lnTo>
-                  <a:lnTo>
-                    <a:pt x="5431039" y="3484236"/>
-                  </a:lnTo>
-                  <a:lnTo>
-                    <a:pt x="5508673" y="3491482"/>
-                  </a:lnTo>
-                  <a:lnTo>
-                    <a:pt x="5586307" y="3498416"/>
-                  </a:lnTo>
-                  <a:lnTo>
-                    <a:pt x="5663941" y="3505052"/>
-                  </a:lnTo>
-                  <a:lnTo>
-                    <a:pt x="5741575" y="3511403"/>
-                  </a:lnTo>
-                  <a:lnTo>
-                    <a:pt x="5819209" y="3517480"/>
-                  </a:lnTo>
-                  <a:lnTo>
-                    <a:pt x="5896843" y="3523296"/>
-                  </a:lnTo>
-                  <a:lnTo>
-                    <a:pt x="5974477" y="3528862"/>
-                  </a:lnTo>
-                  <a:lnTo>
-                    <a:pt x="6052111" y="3534188"/>
-                  </a:lnTo>
-                  <a:lnTo>
-                    <a:pt x="6129745" y="3539285"/>
-                  </a:lnTo>
-                  <a:lnTo>
-                    <a:pt x="6207379" y="3544162"/>
-                  </a:lnTo>
-                  <a:lnTo>
-                    <a:pt x="6285013" y="3548830"/>
-                  </a:lnTo>
-                  <a:lnTo>
-                    <a:pt x="6362647" y="3553297"/>
-                  </a:lnTo>
-                  <a:lnTo>
-                    <a:pt x="6440281" y="3557571"/>
-                  </a:lnTo>
-                  <a:lnTo>
-                    <a:pt x="6517915" y="3561662"/>
+                    <a:pt x="74290" y="143708"/>
+                  </a:lnTo>
+                  <a:lnTo>
+                    <a:pt x="151924" y="287422"/>
+                  </a:lnTo>
+                  <a:lnTo>
+                    <a:pt x="229558" y="424954"/>
+                  </a:lnTo>
+                  <a:lnTo>
+                    <a:pt x="307192" y="556567"/>
+                  </a:lnTo>
+                  <a:lnTo>
+                    <a:pt x="384826" y="682518"/>
+                  </a:lnTo>
+                  <a:lnTo>
+                    <a:pt x="462460" y="803049"/>
+                  </a:lnTo>
+                  <a:lnTo>
+                    <a:pt x="540094" y="918393"/>
+                  </a:lnTo>
+                  <a:lnTo>
+                    <a:pt x="617728" y="1028775"/>
+                  </a:lnTo>
+                  <a:lnTo>
+                    <a:pt x="695362" y="1134408"/>
+                  </a:lnTo>
+                  <a:lnTo>
+                    <a:pt x="772996" y="1235495"/>
+                  </a:lnTo>
+                  <a:lnTo>
+                    <a:pt x="850630" y="1332232"/>
+                  </a:lnTo>
+                  <a:lnTo>
+                    <a:pt x="928264" y="1424808"/>
+                  </a:lnTo>
+                  <a:lnTo>
+                    <a:pt x="1005898" y="1513399"/>
+                  </a:lnTo>
+                  <a:lnTo>
+                    <a:pt x="1083532" y="1598179"/>
+                  </a:lnTo>
+                  <a:lnTo>
+                    <a:pt x="1161166" y="1679311"/>
+                  </a:lnTo>
+                  <a:lnTo>
+                    <a:pt x="1238800" y="1756952"/>
+                  </a:lnTo>
+                  <a:lnTo>
+                    <a:pt x="1316434" y="1831253"/>
+                  </a:lnTo>
+                  <a:lnTo>
+                    <a:pt x="1394068" y="1902356"/>
+                  </a:lnTo>
+                  <a:lnTo>
+                    <a:pt x="1471702" y="1970400"/>
+                  </a:lnTo>
+                  <a:lnTo>
+                    <a:pt x="1549336" y="2035516"/>
+                  </a:lnTo>
+                  <a:lnTo>
+                    <a:pt x="1626970" y="2097831"/>
+                  </a:lnTo>
+                  <a:lnTo>
+                    <a:pt x="1704604" y="2157464"/>
+                  </a:lnTo>
+                  <a:lnTo>
+                    <a:pt x="1782239" y="2214531"/>
+                  </a:lnTo>
+                  <a:lnTo>
+                    <a:pt x="1859873" y="2269143"/>
+                  </a:lnTo>
+                  <a:lnTo>
+                    <a:pt x="1937507" y="2321404"/>
+                  </a:lnTo>
+                  <a:lnTo>
+                    <a:pt x="2015141" y="2371418"/>
+                  </a:lnTo>
+                  <a:lnTo>
+                    <a:pt x="2092775" y="2419279"/>
+                  </a:lnTo>
+                  <a:lnTo>
+                    <a:pt x="2170409" y="2465081"/>
+                  </a:lnTo>
+                  <a:lnTo>
+                    <a:pt x="2248043" y="2508912"/>
+                  </a:lnTo>
+                  <a:lnTo>
+                    <a:pt x="2325677" y="2550857"/>
+                  </a:lnTo>
+                  <a:lnTo>
+                    <a:pt x="2403311" y="2590997"/>
+                  </a:lnTo>
+                  <a:lnTo>
+                    <a:pt x="2480945" y="2629410"/>
+                  </a:lnTo>
+                  <a:lnTo>
+                    <a:pt x="2558579" y="2666171"/>
+                  </a:lnTo>
+                  <a:lnTo>
+                    <a:pt x="2636213" y="2701349"/>
+                  </a:lnTo>
+                  <a:lnTo>
+                    <a:pt x="2713847" y="2735014"/>
+                  </a:lnTo>
+                  <a:lnTo>
+                    <a:pt x="2791481" y="2767230"/>
+                  </a:lnTo>
+                  <a:lnTo>
+                    <a:pt x="2869115" y="2798061"/>
+                  </a:lnTo>
+                  <a:lnTo>
+                    <a:pt x="2946749" y="2827564"/>
+                  </a:lnTo>
+                  <a:lnTo>
+                    <a:pt x="3024383" y="2855798"/>
+                  </a:lnTo>
+                  <a:lnTo>
+                    <a:pt x="3102017" y="2882818"/>
+                  </a:lnTo>
+                  <a:lnTo>
+                    <a:pt x="3179651" y="2908674"/>
+                  </a:lnTo>
+                  <a:lnTo>
+                    <a:pt x="3257285" y="2933419"/>
+                  </a:lnTo>
+                  <a:lnTo>
+                    <a:pt x="3334919" y="2957098"/>
+                  </a:lnTo>
+                  <a:lnTo>
+                    <a:pt x="3412553" y="2979759"/>
+                  </a:lnTo>
+                  <a:lnTo>
+                    <a:pt x="3490188" y="3001444"/>
+                  </a:lnTo>
+                  <a:lnTo>
+                    <a:pt x="3567822" y="3022197"/>
+                  </a:lnTo>
+                  <a:lnTo>
+                    <a:pt x="3645456" y="3042056"/>
+                  </a:lnTo>
+                  <a:lnTo>
+                    <a:pt x="3723090" y="3061061"/>
+                  </a:lnTo>
+                  <a:lnTo>
+                    <a:pt x="3800724" y="3079248"/>
+                  </a:lnTo>
+                  <a:lnTo>
+                    <a:pt x="3878358" y="3096653"/>
+                  </a:lnTo>
+                  <a:lnTo>
+                    <a:pt x="3955992" y="3113309"/>
+                  </a:lnTo>
+                  <a:lnTo>
+                    <a:pt x="4033626" y="3129248"/>
+                  </a:lnTo>
+                  <a:lnTo>
+                    <a:pt x="4111260" y="3144501"/>
+                  </a:lnTo>
+                  <a:lnTo>
+                    <a:pt x="4188894" y="3159098"/>
+                  </a:lnTo>
+                  <a:lnTo>
+                    <a:pt x="4266528" y="3173067"/>
+                  </a:lnTo>
+                  <a:lnTo>
+                    <a:pt x="4344162" y="3186435"/>
+                  </a:lnTo>
+                  <a:lnTo>
+                    <a:pt x="4421796" y="3199228"/>
+                  </a:lnTo>
+                  <a:lnTo>
+                    <a:pt x="4499430" y="3211470"/>
+                  </a:lnTo>
+                  <a:lnTo>
+                    <a:pt x="4577064" y="3223186"/>
+                  </a:lnTo>
+                  <a:lnTo>
+                    <a:pt x="4654698" y="3234397"/>
+                  </a:lnTo>
+                  <a:lnTo>
+                    <a:pt x="4732332" y="3245126"/>
+                  </a:lnTo>
+                  <a:lnTo>
+                    <a:pt x="4809966" y="3255393"/>
+                  </a:lnTo>
+                  <a:lnTo>
+                    <a:pt x="4887600" y="3265219"/>
+                  </a:lnTo>
+                  <a:lnTo>
+                    <a:pt x="4965234" y="3274622"/>
+                  </a:lnTo>
+                  <a:lnTo>
+                    <a:pt x="5042868" y="3283620"/>
+                  </a:lnTo>
+                  <a:lnTo>
+                    <a:pt x="5120502" y="3292231"/>
+                  </a:lnTo>
+                  <a:lnTo>
+                    <a:pt x="5198137" y="3300471"/>
+                  </a:lnTo>
+                  <a:lnTo>
+                    <a:pt x="5275771" y="3308357"/>
+                  </a:lnTo>
+                  <a:lnTo>
+                    <a:pt x="5353405" y="3315904"/>
+                  </a:lnTo>
+                  <a:lnTo>
+                    <a:pt x="5431039" y="3323126"/>
+                  </a:lnTo>
+                  <a:lnTo>
+                    <a:pt x="5508673" y="3330037"/>
+                  </a:lnTo>
+                  <a:lnTo>
+                    <a:pt x="5586307" y="3336651"/>
+                  </a:lnTo>
+                  <a:lnTo>
+                    <a:pt x="5663941" y="3342980"/>
+                  </a:lnTo>
+                  <a:lnTo>
+                    <a:pt x="5741575" y="3349037"/>
+                  </a:lnTo>
+                  <a:lnTo>
+                    <a:pt x="5819209" y="3354833"/>
+                  </a:lnTo>
+                  <a:lnTo>
+                    <a:pt x="5896843" y="3360380"/>
+                  </a:lnTo>
+                  <a:lnTo>
+                    <a:pt x="5974477" y="3365688"/>
+                  </a:lnTo>
+                  <a:lnTo>
+                    <a:pt x="6052111" y="3370768"/>
+                  </a:lnTo>
+                  <a:lnTo>
+                    <a:pt x="6129745" y="3375629"/>
+                  </a:lnTo>
+                  <a:lnTo>
+                    <a:pt x="6207379" y="3380281"/>
+                  </a:lnTo>
+                  <a:lnTo>
+                    <a:pt x="6285013" y="3384733"/>
+                  </a:lnTo>
+                  <a:lnTo>
+                    <a:pt x="6362647" y="3388994"/>
+                  </a:lnTo>
+                  <a:lnTo>
+                    <a:pt x="6440281" y="3393071"/>
+                  </a:lnTo>
+                  <a:lnTo>
+                    <a:pt x="6517915" y="3396972"/>
                   </a:lnTo>
                 </a:path>
               </a:pathLst>
@@ -4371,7 +4371,7 @@
           </p:nvSpPr>
           <p:spPr>
             <a:xfrm>
-              <a:off x="817517" y="4679530"/>
+              <a:off x="817517" y="4727786"/>
               <a:ext cx="7799693" cy="0"/>
             </a:xfrm>
             <a:custGeom>
@@ -4414,15 +4414,15 @@
           </p:nvSpPr>
           <p:spPr>
             <a:xfrm>
-              <a:off x="4203673" y="1896563"/>
-              <a:ext cx="0" cy="3826579"/>
+              <a:off x="4203673" y="2073503"/>
+              <a:ext cx="0" cy="3649639"/>
             </a:xfrm>
             <a:custGeom>
               <a:avLst/>
               <a:pathLst>
-                <a:path w="0" h="3826579">
+                <a:path w="0" h="3649639">
                   <a:moveTo>
-                    <a:pt x="0" y="3826579"/>
+                    <a:pt x="0" y="3649639"/>
                   </a:moveTo>
                   <a:lnTo>
                     <a:pt x="0" y="0"/>
@@ -4457,7 +4457,7 @@
           </p:nvSpPr>
           <p:spPr>
             <a:xfrm>
-              <a:off x="692708" y="5509156"/>
+              <a:off x="692708" y="5517199"/>
               <a:ext cx="62179" cy="80101"/>
             </a:xfrm>
             <a:prstGeom prst="rect">
@@ -4503,7 +4503,7 @@
           </p:nvSpPr>
           <p:spPr>
             <a:xfrm>
-              <a:off x="692708" y="4639479"/>
+              <a:off x="692708" y="4687735"/>
               <a:ext cx="62179" cy="80101"/>
             </a:xfrm>
             <a:prstGeom prst="rect">
@@ -4549,7 +4549,7 @@
           </p:nvSpPr>
           <p:spPr>
             <a:xfrm>
-              <a:off x="692708" y="3769802"/>
+              <a:off x="692708" y="3858272"/>
               <a:ext cx="62179" cy="80101"/>
             </a:xfrm>
             <a:prstGeom prst="rect">
@@ -4595,7 +4595,7 @@
           </p:nvSpPr>
           <p:spPr>
             <a:xfrm>
-              <a:off x="692708" y="2900125"/>
+              <a:off x="692708" y="3028808"/>
               <a:ext cx="62179" cy="80101"/>
             </a:xfrm>
             <a:prstGeom prst="rect">
@@ -4641,7 +4641,7 @@
           </p:nvSpPr>
           <p:spPr>
             <a:xfrm>
-              <a:off x="692708" y="2030448"/>
+              <a:off x="692708" y="2199345"/>
               <a:ext cx="62179" cy="80101"/>
             </a:xfrm>
             <a:prstGeom prst="rect">
@@ -4917,7 +4917,7 @@
           </p:nvSpPr>
           <p:spPr>
             <a:xfrm rot="-5400000">
-              <a:off x="68446" y="3759743"/>
+              <a:off x="68446" y="3848213"/>
               <a:ext cx="1016904" cy="100218"/>
             </a:xfrm>
             <a:prstGeom prst="rect">
@@ -4958,6 +4958,52 @@
         <p:sp>
           <p:nvSpPr>
             <p:cNvPr id="38" name="tx38"/>
+            <p:cNvSpPr/>
+            <p:nvPr/>
+          </p:nvSpPr>
+          <p:spPr>
+            <a:xfrm>
+              <a:off x="817517" y="1896563"/>
+              <a:ext cx="4166463" cy="82021"/>
+            </a:xfrm>
+            <a:prstGeom prst="rect">
+              <a:avLst/>
+            </a:prstGeom>
+            <a:noFill/>
+          </p:spPr>
+          <p:txBody>
+            <a:bodyPr lIns="0" rIns="0" tIns="0" bIns="0" anchorCtr="1" anchor="ctr" wrap="none"/>
+            <a:lstStyle/>
+            <a:p>
+              <a:pPr algn="l" marL="0" marR="0" indent="0">
+                <a:lnSpc>
+                  <a:spcPts val="900"/>
+                </a:lnSpc>
+                <a:spcBef>
+                  <a:spcPts val="0"/>
+                </a:spcBef>
+                <a:spcAft>
+                  <a:spcPts val="0"/>
+                </a:spcAft>
+              </a:pPr>
+              <a:r>
+                <a:rPr sz="900">
+                  <a:solidFill>
+                    <a:srgbClr val="404040">
+                      <a:alpha val="100000"/>
+                    </a:srgbClr>
+                  </a:solidFill>
+                  <a:latin typeface="Helvetica"/>
+                  <a:cs typeface="Helvetica"/>
+                </a:rPr>
+                <a:t>subHR = 0.61 (95% CI 0.39-0.93), p = 0.021   (per 0.1-unit increase in eGFR ratio)</a:t>
+              </a:r>
+            </a:p>
+          </p:txBody>
+        </p:sp>
+        <p:sp>
+          <p:nvSpPr>
+            <p:cNvPr id="39" name="tx39"/>
             <p:cNvSpPr/>
             <p:nvPr/>
           </p:nvSpPr>

--- a/docs/plots/carbo/jx_carbo_linsubhr_ratio_throm2.pptx
+++ b/docs/plots/carbo/jx_carbo_linsubhr_ratio_throm2.pptx
@@ -2271,26 +2271,26 @@
           </p:nvSpPr>
           <p:spPr>
             <a:xfrm>
-              <a:off x="817517" y="5142518"/>
-              <a:ext cx="7799693" cy="0"/>
+              <a:off x="915645" y="5071743"/>
+              <a:ext cx="7682587" cy="0"/>
             </a:xfrm>
             <a:custGeom>
               <a:avLst/>
               <a:pathLst>
-                <a:path w="7799693" h="0">
+                <a:path w="7682587" h="0">
                   <a:moveTo>
                     <a:pt x="0" y="0"/>
                   </a:moveTo>
                   <a:lnTo>
-                    <a:pt x="7799693" y="0"/>
-                  </a:lnTo>
-                  <a:lnTo>
-                    <a:pt x="7799693" y="0"/>
+                    <a:pt x="7682587" y="0"/>
+                  </a:lnTo>
+                  <a:lnTo>
+                    <a:pt x="7682587" y="0"/>
                   </a:lnTo>
                 </a:path>
               </a:pathLst>
             </a:custGeom>
-            <a:ln w="6775" cap="flat">
+            <a:ln w="8623" cap="flat">
               <a:solidFill>
                 <a:srgbClr val="EBEBEB">
                   <a:alpha val="100000"/>
@@ -2314,26 +2314,26 @@
           </p:nvSpPr>
           <p:spPr>
             <a:xfrm>
-              <a:off x="817517" y="4313054"/>
-              <a:ext cx="7799693" cy="0"/>
+              <a:off x="915645" y="4298074"/>
+              <a:ext cx="7682587" cy="0"/>
             </a:xfrm>
             <a:custGeom>
               <a:avLst/>
               <a:pathLst>
-                <a:path w="7799693" h="0">
+                <a:path w="7682587" h="0">
                   <a:moveTo>
                     <a:pt x="0" y="0"/>
                   </a:moveTo>
                   <a:lnTo>
-                    <a:pt x="7799693" y="0"/>
-                  </a:lnTo>
-                  <a:lnTo>
-                    <a:pt x="7799693" y="0"/>
+                    <a:pt x="7682587" y="0"/>
+                  </a:lnTo>
+                  <a:lnTo>
+                    <a:pt x="7682587" y="0"/>
                   </a:lnTo>
                 </a:path>
               </a:pathLst>
             </a:custGeom>
-            <a:ln w="6775" cap="flat">
+            <a:ln w="8623" cap="flat">
               <a:solidFill>
                 <a:srgbClr val="EBEBEB">
                   <a:alpha val="100000"/>
@@ -2357,26 +2357,26 @@
           </p:nvSpPr>
           <p:spPr>
             <a:xfrm>
-              <a:off x="817517" y="3483591"/>
-              <a:ext cx="7799693" cy="0"/>
+              <a:off x="915645" y="3524405"/>
+              <a:ext cx="7682587" cy="0"/>
             </a:xfrm>
             <a:custGeom>
               <a:avLst/>
               <a:pathLst>
-                <a:path w="7799693" h="0">
+                <a:path w="7682587" h="0">
                   <a:moveTo>
                     <a:pt x="0" y="0"/>
                   </a:moveTo>
                   <a:lnTo>
-                    <a:pt x="7799693" y="0"/>
-                  </a:lnTo>
-                  <a:lnTo>
-                    <a:pt x="7799693" y="0"/>
+                    <a:pt x="7682587" y="0"/>
+                  </a:lnTo>
+                  <a:lnTo>
+                    <a:pt x="7682587" y="0"/>
                   </a:lnTo>
                 </a:path>
               </a:pathLst>
             </a:custGeom>
-            <a:ln w="6775" cap="flat">
+            <a:ln w="8623" cap="flat">
               <a:solidFill>
                 <a:srgbClr val="EBEBEB">
                   <a:alpha val="100000"/>
@@ -2400,26 +2400,26 @@
           </p:nvSpPr>
           <p:spPr>
             <a:xfrm>
-              <a:off x="817517" y="2654127"/>
-              <a:ext cx="7799693" cy="0"/>
+              <a:off x="915645" y="2750737"/>
+              <a:ext cx="7682587" cy="0"/>
             </a:xfrm>
             <a:custGeom>
               <a:avLst/>
               <a:pathLst>
-                <a:path w="7799693" h="0">
+                <a:path w="7682587" h="0">
                   <a:moveTo>
                     <a:pt x="0" y="0"/>
                   </a:moveTo>
                   <a:lnTo>
-                    <a:pt x="7799693" y="0"/>
-                  </a:lnTo>
-                  <a:lnTo>
-                    <a:pt x="7799693" y="0"/>
+                    <a:pt x="7682587" y="0"/>
+                  </a:lnTo>
+                  <a:lnTo>
+                    <a:pt x="7682587" y="0"/>
                   </a:lnTo>
                 </a:path>
               </a:pathLst>
             </a:custGeom>
-            <a:ln w="6775" cap="flat">
+            <a:ln w="8623" cap="flat">
               <a:solidFill>
                 <a:srgbClr val="EBEBEB">
                   <a:alpha val="100000"/>
@@ -2443,15 +2443,15 @@
           </p:nvSpPr>
           <p:spPr>
             <a:xfrm>
-              <a:off x="1615213" y="2073503"/>
-              <a:ext cx="0" cy="3649639"/>
+              <a:off x="1701364" y="2209169"/>
+              <a:ext cx="0" cy="3404141"/>
             </a:xfrm>
             <a:custGeom>
               <a:avLst/>
               <a:pathLst>
-                <a:path w="0" h="3649639">
+                <a:path w="0" h="3404141">
                   <a:moveTo>
-                    <a:pt x="0" y="3649639"/>
+                    <a:pt x="0" y="3404141"/>
                   </a:moveTo>
                   <a:lnTo>
                     <a:pt x="0" y="0"/>
@@ -2462,7 +2462,7 @@
                 </a:path>
               </a:pathLst>
             </a:custGeom>
-            <a:ln w="6775" cap="flat">
+            <a:ln w="8623" cap="flat">
               <a:solidFill>
                 <a:srgbClr val="EBEBEB">
                   <a:alpha val="100000"/>
@@ -2486,15 +2486,15 @@
           </p:nvSpPr>
           <p:spPr>
             <a:xfrm>
-              <a:off x="3387871" y="2073503"/>
-              <a:ext cx="0" cy="3649639"/>
+              <a:off x="3447406" y="2209169"/>
+              <a:ext cx="0" cy="3404141"/>
             </a:xfrm>
             <a:custGeom>
               <a:avLst/>
               <a:pathLst>
-                <a:path w="0" h="3649639">
+                <a:path w="0" h="3404141">
                   <a:moveTo>
-                    <a:pt x="0" y="3649639"/>
+                    <a:pt x="0" y="3404141"/>
                   </a:moveTo>
                   <a:lnTo>
                     <a:pt x="0" y="0"/>
@@ -2505,7 +2505,7 @@
                 </a:path>
               </a:pathLst>
             </a:custGeom>
-            <a:ln w="6775" cap="flat">
+            <a:ln w="8623" cap="flat">
               <a:solidFill>
                 <a:srgbClr val="EBEBEB">
                   <a:alpha val="100000"/>
@@ -2529,15 +2529,15 @@
           </p:nvSpPr>
           <p:spPr>
             <a:xfrm>
-              <a:off x="5160528" y="2073503"/>
-              <a:ext cx="0" cy="3649639"/>
+              <a:off x="5193449" y="2209169"/>
+              <a:ext cx="0" cy="3404141"/>
             </a:xfrm>
             <a:custGeom>
               <a:avLst/>
               <a:pathLst>
-                <a:path w="0" h="3649639">
+                <a:path w="0" h="3404141">
                   <a:moveTo>
-                    <a:pt x="0" y="3649639"/>
+                    <a:pt x="0" y="3404141"/>
                   </a:moveTo>
                   <a:lnTo>
                     <a:pt x="0" y="0"/>
@@ -2548,7 +2548,7 @@
                 </a:path>
               </a:pathLst>
             </a:custGeom>
-            <a:ln w="6775" cap="flat">
+            <a:ln w="8623" cap="flat">
               <a:solidFill>
                 <a:srgbClr val="EBEBEB">
                   <a:alpha val="100000"/>
@@ -2572,15 +2572,15 @@
           </p:nvSpPr>
           <p:spPr>
             <a:xfrm>
-              <a:off x="6933186" y="2073503"/>
-              <a:ext cx="0" cy="3649639"/>
+              <a:off x="6939491" y="2209169"/>
+              <a:ext cx="0" cy="3404141"/>
             </a:xfrm>
             <a:custGeom>
               <a:avLst/>
               <a:pathLst>
-                <a:path w="0" h="3649639">
+                <a:path w="0" h="3404141">
                   <a:moveTo>
-                    <a:pt x="0" y="3649639"/>
+                    <a:pt x="0" y="3404141"/>
                   </a:moveTo>
                   <a:lnTo>
                     <a:pt x="0" y="0"/>
@@ -2591,7 +2591,7 @@
                 </a:path>
               </a:pathLst>
             </a:custGeom>
-            <a:ln w="6775" cap="flat">
+            <a:ln w="8623" cap="flat">
               <a:solidFill>
                 <a:srgbClr val="EBEBEB">
                   <a:alpha val="100000"/>
@@ -2615,26 +2615,26 @@
           </p:nvSpPr>
           <p:spPr>
             <a:xfrm>
-              <a:off x="817517" y="5557249"/>
-              <a:ext cx="7799693" cy="0"/>
+              <a:off x="915645" y="5458577"/>
+              <a:ext cx="7682587" cy="0"/>
             </a:xfrm>
             <a:custGeom>
               <a:avLst/>
               <a:pathLst>
-                <a:path w="7799693" h="0">
+                <a:path w="7682587" h="0">
                   <a:moveTo>
                     <a:pt x="0" y="0"/>
                   </a:moveTo>
                   <a:lnTo>
-                    <a:pt x="7799693" y="0"/>
-                  </a:lnTo>
-                  <a:lnTo>
-                    <a:pt x="7799693" y="0"/>
+                    <a:pt x="7682587" y="0"/>
+                  </a:lnTo>
+                  <a:lnTo>
+                    <a:pt x="7682587" y="0"/>
                   </a:lnTo>
                 </a:path>
               </a:pathLst>
             </a:custGeom>
-            <a:ln w="13550" cap="flat">
+            <a:ln w="17246" cap="flat">
               <a:solidFill>
                 <a:srgbClr val="EBEBEB">
                   <a:alpha val="100000"/>
@@ -2658,26 +2658,26 @@
           </p:nvSpPr>
           <p:spPr>
             <a:xfrm>
-              <a:off x="817517" y="4727786"/>
-              <a:ext cx="7799693" cy="0"/>
+              <a:off x="915645" y="4684908"/>
+              <a:ext cx="7682587" cy="0"/>
             </a:xfrm>
             <a:custGeom>
               <a:avLst/>
               <a:pathLst>
-                <a:path w="7799693" h="0">
+                <a:path w="7682587" h="0">
                   <a:moveTo>
                     <a:pt x="0" y="0"/>
                   </a:moveTo>
                   <a:lnTo>
-                    <a:pt x="7799693" y="0"/>
-                  </a:lnTo>
-                  <a:lnTo>
-                    <a:pt x="7799693" y="0"/>
+                    <a:pt x="7682587" y="0"/>
+                  </a:lnTo>
+                  <a:lnTo>
+                    <a:pt x="7682587" y="0"/>
                   </a:lnTo>
                 </a:path>
               </a:pathLst>
             </a:custGeom>
-            <a:ln w="13550" cap="flat">
+            <a:ln w="17246" cap="flat">
               <a:solidFill>
                 <a:srgbClr val="EBEBEB">
                   <a:alpha val="100000"/>
@@ -2701,26 +2701,26 @@
           </p:nvSpPr>
           <p:spPr>
             <a:xfrm>
-              <a:off x="817517" y="3898322"/>
-              <a:ext cx="7799693" cy="0"/>
+              <a:off x="915645" y="3911240"/>
+              <a:ext cx="7682587" cy="0"/>
             </a:xfrm>
             <a:custGeom>
               <a:avLst/>
               <a:pathLst>
-                <a:path w="7799693" h="0">
+                <a:path w="7682587" h="0">
                   <a:moveTo>
                     <a:pt x="0" y="0"/>
                   </a:moveTo>
                   <a:lnTo>
-                    <a:pt x="7799693" y="0"/>
-                  </a:lnTo>
-                  <a:lnTo>
-                    <a:pt x="7799693" y="0"/>
+                    <a:pt x="7682587" y="0"/>
+                  </a:lnTo>
+                  <a:lnTo>
+                    <a:pt x="7682587" y="0"/>
                   </a:lnTo>
                 </a:path>
               </a:pathLst>
             </a:custGeom>
-            <a:ln w="13550" cap="flat">
+            <a:ln w="17246" cap="flat">
               <a:solidFill>
                 <a:srgbClr val="EBEBEB">
                   <a:alpha val="100000"/>
@@ -2744,26 +2744,26 @@
           </p:nvSpPr>
           <p:spPr>
             <a:xfrm>
-              <a:off x="817517" y="3068859"/>
-              <a:ext cx="7799693" cy="0"/>
+              <a:off x="915645" y="3137571"/>
+              <a:ext cx="7682587" cy="0"/>
             </a:xfrm>
             <a:custGeom>
               <a:avLst/>
               <a:pathLst>
-                <a:path w="7799693" h="0">
+                <a:path w="7682587" h="0">
                   <a:moveTo>
                     <a:pt x="0" y="0"/>
                   </a:moveTo>
                   <a:lnTo>
-                    <a:pt x="7799693" y="0"/>
-                  </a:lnTo>
-                  <a:lnTo>
-                    <a:pt x="7799693" y="0"/>
+                    <a:pt x="7682587" y="0"/>
+                  </a:lnTo>
+                  <a:lnTo>
+                    <a:pt x="7682587" y="0"/>
                   </a:lnTo>
                 </a:path>
               </a:pathLst>
             </a:custGeom>
-            <a:ln w="13550" cap="flat">
+            <a:ln w="17246" cap="flat">
               <a:solidFill>
                 <a:srgbClr val="EBEBEB">
                   <a:alpha val="100000"/>
@@ -2787,26 +2787,26 @@
           </p:nvSpPr>
           <p:spPr>
             <a:xfrm>
-              <a:off x="817517" y="2239395"/>
-              <a:ext cx="7799693" cy="0"/>
+              <a:off x="915645" y="2363903"/>
+              <a:ext cx="7682587" cy="0"/>
             </a:xfrm>
             <a:custGeom>
               <a:avLst/>
               <a:pathLst>
-                <a:path w="7799693" h="0">
+                <a:path w="7682587" h="0">
                   <a:moveTo>
                     <a:pt x="0" y="0"/>
                   </a:moveTo>
                   <a:lnTo>
-                    <a:pt x="7799693" y="0"/>
-                  </a:lnTo>
-                  <a:lnTo>
-                    <a:pt x="7799693" y="0"/>
+                    <a:pt x="7682587" y="0"/>
+                  </a:lnTo>
+                  <a:lnTo>
+                    <a:pt x="7682587" y="0"/>
                   </a:lnTo>
                 </a:path>
               </a:pathLst>
             </a:custGeom>
-            <a:ln w="13550" cap="flat">
+            <a:ln w="17246" cap="flat">
               <a:solidFill>
                 <a:srgbClr val="EBEBEB">
                   <a:alpha val="100000"/>
@@ -2830,15 +2830,15 @@
           </p:nvSpPr>
           <p:spPr>
             <a:xfrm>
-              <a:off x="2501542" y="2073503"/>
-              <a:ext cx="0" cy="3649639"/>
+              <a:off x="2574385" y="2209169"/>
+              <a:ext cx="0" cy="3404141"/>
             </a:xfrm>
             <a:custGeom>
               <a:avLst/>
               <a:pathLst>
-                <a:path w="0" h="3649639">
+                <a:path w="0" h="3404141">
                   <a:moveTo>
-                    <a:pt x="0" y="3649639"/>
+                    <a:pt x="0" y="3404141"/>
                   </a:moveTo>
                   <a:lnTo>
                     <a:pt x="0" y="0"/>
@@ -2849,7 +2849,7 @@
                 </a:path>
               </a:pathLst>
             </a:custGeom>
-            <a:ln w="13550" cap="flat">
+            <a:ln w="17246" cap="flat">
               <a:solidFill>
                 <a:srgbClr val="EBEBEB">
                   <a:alpha val="100000"/>
@@ -2873,15 +2873,15 @@
           </p:nvSpPr>
           <p:spPr>
             <a:xfrm>
-              <a:off x="4274200" y="2073503"/>
-              <a:ext cx="0" cy="3649639"/>
+              <a:off x="4320427" y="2209169"/>
+              <a:ext cx="0" cy="3404141"/>
             </a:xfrm>
             <a:custGeom>
               <a:avLst/>
               <a:pathLst>
-                <a:path w="0" h="3649639">
+                <a:path w="0" h="3404141">
                   <a:moveTo>
-                    <a:pt x="0" y="3649639"/>
+                    <a:pt x="0" y="3404141"/>
                   </a:moveTo>
                   <a:lnTo>
                     <a:pt x="0" y="0"/>
@@ -2892,7 +2892,7 @@
                 </a:path>
               </a:pathLst>
             </a:custGeom>
-            <a:ln w="13550" cap="flat">
+            <a:ln w="17246" cap="flat">
               <a:solidFill>
                 <a:srgbClr val="EBEBEB">
                   <a:alpha val="100000"/>
@@ -2916,15 +2916,15 @@
           </p:nvSpPr>
           <p:spPr>
             <a:xfrm>
-              <a:off x="6046857" y="2073503"/>
-              <a:ext cx="0" cy="3649639"/>
+              <a:off x="6066470" y="2209169"/>
+              <a:ext cx="0" cy="3404141"/>
             </a:xfrm>
             <a:custGeom>
               <a:avLst/>
               <a:pathLst>
-                <a:path w="0" h="3649639">
+                <a:path w="0" h="3404141">
                   <a:moveTo>
-                    <a:pt x="0" y="3649639"/>
+                    <a:pt x="0" y="3404141"/>
                   </a:moveTo>
                   <a:lnTo>
                     <a:pt x="0" y="0"/>
@@ -2935,7 +2935,7 @@
                 </a:path>
               </a:pathLst>
             </a:custGeom>
-            <a:ln w="13550" cap="flat">
+            <a:ln w="17246" cap="flat">
               <a:solidFill>
                 <a:srgbClr val="EBEBEB">
                   <a:alpha val="100000"/>
@@ -2959,15 +2959,15 @@
           </p:nvSpPr>
           <p:spPr>
             <a:xfrm>
-              <a:off x="7819515" y="2073503"/>
-              <a:ext cx="0" cy="3649639"/>
+              <a:off x="7812512" y="2209169"/>
+              <a:ext cx="0" cy="3404141"/>
             </a:xfrm>
             <a:custGeom>
               <a:avLst/>
               <a:pathLst>
-                <a:path w="0" h="3649639">
+                <a:path w="0" h="3404141">
                   <a:moveTo>
-                    <a:pt x="0" y="3649639"/>
+                    <a:pt x="0" y="3404141"/>
                   </a:moveTo>
                   <a:lnTo>
                     <a:pt x="0" y="0"/>
@@ -2978,7 +2978,7 @@
                 </a:path>
               </a:pathLst>
             </a:custGeom>
-            <a:ln w="13550" cap="flat">
+            <a:ln w="17246" cap="flat">
               <a:solidFill>
                 <a:srgbClr val="EBEBEB">
                   <a:alpha val="100000"/>
@@ -3002,510 +3002,510 @@
           </p:nvSpPr>
           <p:spPr>
             <a:xfrm>
-              <a:off x="817517" y="2073503"/>
-              <a:ext cx="7370972" cy="3471026"/>
+              <a:off x="915645" y="2209169"/>
+              <a:ext cx="7260303" cy="3237543"/>
             </a:xfrm>
             <a:custGeom>
               <a:avLst/>
               <a:pathLst>
-                <a:path w="7370972" h="3471026">
+                <a:path w="7260303" h="3237543">
                   <a:moveTo>
-                    <a:pt x="2017410" y="0"/>
+                    <a:pt x="1987121" y="0"/>
                   </a:moveTo>
                   <a:lnTo>
-                    <a:pt x="2091857" y="261969"/>
-                  </a:lnTo>
-                  <a:lnTo>
-                    <a:pt x="2169491" y="513801"/>
-                  </a:lnTo>
-                  <a:lnTo>
-                    <a:pt x="2247125" y="745949"/>
-                  </a:lnTo>
-                  <a:lnTo>
-                    <a:pt x="2324759" y="959950"/>
-                  </a:lnTo>
-                  <a:lnTo>
-                    <a:pt x="2402393" y="1157224"/>
-                  </a:lnTo>
-                  <a:lnTo>
-                    <a:pt x="2480027" y="1339078"/>
-                  </a:lnTo>
-                  <a:lnTo>
-                    <a:pt x="2557661" y="1506717"/>
-                  </a:lnTo>
-                  <a:lnTo>
-                    <a:pt x="2635295" y="1661252"/>
-                  </a:lnTo>
-                  <a:lnTo>
-                    <a:pt x="2712930" y="1803708"/>
-                  </a:lnTo>
-                  <a:lnTo>
-                    <a:pt x="2790564" y="1935029"/>
-                  </a:lnTo>
-                  <a:lnTo>
-                    <a:pt x="2868198" y="2056086"/>
-                  </a:lnTo>
-                  <a:lnTo>
-                    <a:pt x="2945832" y="2167680"/>
-                  </a:lnTo>
-                  <a:lnTo>
-                    <a:pt x="3023466" y="2270551"/>
-                  </a:lnTo>
-                  <a:lnTo>
-                    <a:pt x="3101100" y="2365381"/>
-                  </a:lnTo>
-                  <a:lnTo>
-                    <a:pt x="3178734" y="2452798"/>
-                  </a:lnTo>
-                  <a:lnTo>
-                    <a:pt x="3256368" y="2533383"/>
-                  </a:lnTo>
-                  <a:lnTo>
-                    <a:pt x="3334002" y="2607669"/>
-                  </a:lnTo>
-                  <a:lnTo>
-                    <a:pt x="3411636" y="2656070"/>
-                  </a:lnTo>
-                  <a:lnTo>
-                    <a:pt x="3489270" y="2661492"/>
-                  </a:lnTo>
-                  <a:lnTo>
-                    <a:pt x="3566904" y="2666879"/>
-                  </a:lnTo>
-                  <a:lnTo>
-                    <a:pt x="3644538" y="2672230"/>
-                  </a:lnTo>
-                  <a:lnTo>
-                    <a:pt x="3722172" y="2677547"/>
-                  </a:lnTo>
-                  <a:lnTo>
-                    <a:pt x="3799806" y="2682828"/>
-                  </a:lnTo>
-                  <a:lnTo>
-                    <a:pt x="3877440" y="2688075"/>
-                  </a:lnTo>
-                  <a:lnTo>
-                    <a:pt x="3955074" y="2693287"/>
-                  </a:lnTo>
-                  <a:lnTo>
-                    <a:pt x="4032708" y="2698465"/>
-                  </a:lnTo>
-                  <a:lnTo>
-                    <a:pt x="4110342" y="2703610"/>
-                  </a:lnTo>
-                  <a:lnTo>
-                    <a:pt x="4187976" y="2708720"/>
-                  </a:lnTo>
-                  <a:lnTo>
-                    <a:pt x="4265610" y="2713798"/>
-                  </a:lnTo>
-                  <a:lnTo>
-                    <a:pt x="4343244" y="2718842"/>
-                  </a:lnTo>
-                  <a:lnTo>
-                    <a:pt x="4420879" y="2723853"/>
-                  </a:lnTo>
-                  <a:lnTo>
-                    <a:pt x="4498513" y="2728831"/>
-                  </a:lnTo>
-                  <a:lnTo>
-                    <a:pt x="4576147" y="2733776"/>
-                  </a:lnTo>
-                  <a:lnTo>
-                    <a:pt x="4653781" y="2738689"/>
-                  </a:lnTo>
-                  <a:lnTo>
-                    <a:pt x="4731415" y="2743570"/>
-                  </a:lnTo>
-                  <a:lnTo>
-                    <a:pt x="4809049" y="2748419"/>
-                  </a:lnTo>
-                  <a:lnTo>
-                    <a:pt x="4886683" y="2753236"/>
-                  </a:lnTo>
-                  <a:lnTo>
-                    <a:pt x="4964317" y="2758022"/>
-                  </a:lnTo>
-                  <a:lnTo>
-                    <a:pt x="5041951" y="2762776"/>
-                  </a:lnTo>
-                  <a:lnTo>
-                    <a:pt x="5119585" y="2767499"/>
-                  </a:lnTo>
-                  <a:lnTo>
-                    <a:pt x="5197219" y="2772191"/>
-                  </a:lnTo>
-                  <a:lnTo>
-                    <a:pt x="5274853" y="2776852"/>
-                  </a:lnTo>
-                  <a:lnTo>
-                    <a:pt x="5352487" y="2781483"/>
-                  </a:lnTo>
-                  <a:lnTo>
-                    <a:pt x="5430121" y="2786084"/>
-                  </a:lnTo>
-                  <a:lnTo>
-                    <a:pt x="5507755" y="2790654"/>
-                  </a:lnTo>
-                  <a:lnTo>
-                    <a:pt x="5585389" y="2795195"/>
-                  </a:lnTo>
-                  <a:lnTo>
-                    <a:pt x="5663023" y="2799705"/>
-                  </a:lnTo>
-                  <a:lnTo>
-                    <a:pt x="5740657" y="2804186"/>
-                  </a:lnTo>
-                  <a:lnTo>
-                    <a:pt x="5818291" y="2808638"/>
-                  </a:lnTo>
-                  <a:lnTo>
-                    <a:pt x="5895925" y="2813061"/>
-                  </a:lnTo>
-                  <a:lnTo>
-                    <a:pt x="5973559" y="2817454"/>
-                  </a:lnTo>
-                  <a:lnTo>
-                    <a:pt x="6051193" y="2821819"/>
-                  </a:lnTo>
-                  <a:lnTo>
-                    <a:pt x="6128827" y="2826156"/>
-                  </a:lnTo>
-                  <a:lnTo>
-                    <a:pt x="6206462" y="2830464"/>
-                  </a:lnTo>
-                  <a:lnTo>
-                    <a:pt x="6284096" y="2834743"/>
-                  </a:lnTo>
-                  <a:lnTo>
-                    <a:pt x="6361730" y="2838995"/>
-                  </a:lnTo>
-                  <a:lnTo>
-                    <a:pt x="6439364" y="2843219"/>
-                  </a:lnTo>
-                  <a:lnTo>
-                    <a:pt x="6516998" y="2847415"/>
-                  </a:lnTo>
-                  <a:lnTo>
-                    <a:pt x="6594632" y="2851583"/>
-                  </a:lnTo>
-                  <a:lnTo>
-                    <a:pt x="6672266" y="2855725"/>
-                  </a:lnTo>
-                  <a:lnTo>
-                    <a:pt x="6749900" y="2859839"/>
-                  </a:lnTo>
-                  <a:lnTo>
-                    <a:pt x="6827534" y="2863926"/>
-                  </a:lnTo>
-                  <a:lnTo>
-                    <a:pt x="6905168" y="2867986"/>
-                  </a:lnTo>
-                  <a:lnTo>
-                    <a:pt x="6982802" y="2872020"/>
-                  </a:lnTo>
-                  <a:lnTo>
-                    <a:pt x="7060436" y="2876028"/>
-                  </a:lnTo>
-                  <a:lnTo>
-                    <a:pt x="7138070" y="2880009"/>
-                  </a:lnTo>
-                  <a:lnTo>
-                    <a:pt x="7215704" y="2883964"/>
-                  </a:lnTo>
-                  <a:lnTo>
-                    <a:pt x="7293338" y="2887893"/>
-                  </a:lnTo>
-                  <a:lnTo>
-                    <a:pt x="7370972" y="2891796"/>
-                  </a:lnTo>
-                  <a:lnTo>
-                    <a:pt x="7370972" y="3471026"/>
-                  </a:lnTo>
-                  <a:lnTo>
-                    <a:pt x="7293338" y="3469948"/>
-                  </a:lnTo>
-                  <a:lnTo>
-                    <a:pt x="7215704" y="3468777"/>
-                  </a:lnTo>
-                  <a:lnTo>
-                    <a:pt x="7138070" y="3467508"/>
-                  </a:lnTo>
-                  <a:lnTo>
-                    <a:pt x="7060436" y="3466131"/>
-                  </a:lnTo>
-                  <a:lnTo>
-                    <a:pt x="6982802" y="3464638"/>
-                  </a:lnTo>
-                  <a:lnTo>
-                    <a:pt x="6905168" y="3463017"/>
-                  </a:lnTo>
-                  <a:lnTo>
-                    <a:pt x="6827534" y="3461260"/>
-                  </a:lnTo>
-                  <a:lnTo>
-                    <a:pt x="6749900" y="3459353"/>
-                  </a:lnTo>
-                  <a:lnTo>
-                    <a:pt x="6672266" y="3457285"/>
-                  </a:lnTo>
-                  <a:lnTo>
-                    <a:pt x="6594632" y="3455041"/>
-                  </a:lnTo>
-                  <a:lnTo>
-                    <a:pt x="6516998" y="3452607"/>
-                  </a:lnTo>
-                  <a:lnTo>
-                    <a:pt x="6439364" y="3449966"/>
-                  </a:lnTo>
-                  <a:lnTo>
-                    <a:pt x="6361730" y="3447102"/>
-                  </a:lnTo>
-                  <a:lnTo>
-                    <a:pt x="6284096" y="3443995"/>
-                  </a:lnTo>
-                  <a:lnTo>
-                    <a:pt x="6206462" y="3440624"/>
-                  </a:lnTo>
-                  <a:lnTo>
-                    <a:pt x="6128827" y="3436968"/>
-                  </a:lnTo>
-                  <a:lnTo>
-                    <a:pt x="6051193" y="3433001"/>
-                  </a:lnTo>
-                  <a:lnTo>
-                    <a:pt x="5973559" y="3428698"/>
-                  </a:lnTo>
-                  <a:lnTo>
-                    <a:pt x="5895925" y="3424030"/>
-                  </a:lnTo>
-                  <a:lnTo>
-                    <a:pt x="5818291" y="3418967"/>
-                  </a:lnTo>
-                  <a:lnTo>
-                    <a:pt x="5740657" y="3413474"/>
-                  </a:lnTo>
-                  <a:lnTo>
-                    <a:pt x="5663023" y="3407515"/>
-                  </a:lnTo>
-                  <a:lnTo>
-                    <a:pt x="5585389" y="3401052"/>
-                  </a:lnTo>
-                  <a:lnTo>
-                    <a:pt x="5507755" y="3394040"/>
-                  </a:lnTo>
-                  <a:lnTo>
-                    <a:pt x="5430121" y="3386433"/>
-                  </a:lnTo>
-                  <a:lnTo>
-                    <a:pt x="5352487" y="3378182"/>
-                  </a:lnTo>
-                  <a:lnTo>
-                    <a:pt x="5274853" y="3369230"/>
-                  </a:lnTo>
-                  <a:lnTo>
-                    <a:pt x="5197219" y="3359520"/>
-                  </a:lnTo>
-                  <a:lnTo>
-                    <a:pt x="5119585" y="3348987"/>
-                  </a:lnTo>
-                  <a:lnTo>
-                    <a:pt x="5041951" y="3337560"/>
-                  </a:lnTo>
-                  <a:lnTo>
-                    <a:pt x="4964317" y="3325164"/>
-                  </a:lnTo>
-                  <a:lnTo>
-                    <a:pt x="4886683" y="3311717"/>
-                  </a:lnTo>
-                  <a:lnTo>
-                    <a:pt x="4809049" y="3297130"/>
-                  </a:lnTo>
-                  <a:lnTo>
-                    <a:pt x="4731415" y="3281307"/>
-                  </a:lnTo>
-                  <a:lnTo>
-                    <a:pt x="4653781" y="3264141"/>
-                  </a:lnTo>
-                  <a:lnTo>
-                    <a:pt x="4576147" y="3245520"/>
-                  </a:lnTo>
-                  <a:lnTo>
-                    <a:pt x="4498513" y="3225320"/>
-                  </a:lnTo>
-                  <a:lnTo>
-                    <a:pt x="4420879" y="3203407"/>
-                  </a:lnTo>
-                  <a:lnTo>
-                    <a:pt x="4343244" y="3179636"/>
-                  </a:lnTo>
-                  <a:lnTo>
-                    <a:pt x="4265610" y="3153850"/>
-                  </a:lnTo>
-                  <a:lnTo>
-                    <a:pt x="4187976" y="3125876"/>
-                  </a:lnTo>
-                  <a:lnTo>
-                    <a:pt x="4110342" y="3095531"/>
-                  </a:lnTo>
-                  <a:lnTo>
-                    <a:pt x="4032708" y="3062613"/>
-                  </a:lnTo>
-                  <a:lnTo>
-                    <a:pt x="3955074" y="3026904"/>
-                  </a:lnTo>
-                  <a:lnTo>
-                    <a:pt x="3877440" y="2988167"/>
-                  </a:lnTo>
-                  <a:lnTo>
-                    <a:pt x="3799806" y="2946145"/>
-                  </a:lnTo>
-                  <a:lnTo>
-                    <a:pt x="3722172" y="2900560"/>
-                  </a:lnTo>
-                  <a:lnTo>
-                    <a:pt x="3644538" y="2851109"/>
-                  </a:lnTo>
-                  <a:lnTo>
-                    <a:pt x="3566904" y="2797466"/>
-                  </a:lnTo>
-                  <a:lnTo>
-                    <a:pt x="3489270" y="2739274"/>
-                  </a:lnTo>
-                  <a:lnTo>
-                    <a:pt x="3411636" y="2676148"/>
-                  </a:lnTo>
-                  <a:lnTo>
-                    <a:pt x="3334002" y="2650612"/>
-                  </a:lnTo>
-                  <a:lnTo>
-                    <a:pt x="3256368" y="2645119"/>
-                  </a:lnTo>
-                  <a:lnTo>
-                    <a:pt x="3178734" y="2639589"/>
-                  </a:lnTo>
-                  <a:lnTo>
-                    <a:pt x="3101100" y="2634022"/>
-                  </a:lnTo>
-                  <a:lnTo>
-                    <a:pt x="3023466" y="2628419"/>
-                  </a:lnTo>
-                  <a:lnTo>
-                    <a:pt x="2945832" y="2622779"/>
-                  </a:lnTo>
-                  <a:lnTo>
-                    <a:pt x="2868198" y="2617101"/>
-                  </a:lnTo>
-                  <a:lnTo>
-                    <a:pt x="2790564" y="2611386"/>
-                  </a:lnTo>
-                  <a:lnTo>
-                    <a:pt x="2712930" y="2605634"/>
-                  </a:lnTo>
-                  <a:lnTo>
-                    <a:pt x="2635295" y="2599843"/>
-                  </a:lnTo>
-                  <a:lnTo>
-                    <a:pt x="2557661" y="2594015"/>
-                  </a:lnTo>
-                  <a:lnTo>
-                    <a:pt x="2480027" y="2588148"/>
-                  </a:lnTo>
-                  <a:lnTo>
-                    <a:pt x="2402393" y="2582242"/>
-                  </a:lnTo>
-                  <a:lnTo>
-                    <a:pt x="2324759" y="2576297"/>
-                  </a:lnTo>
-                  <a:lnTo>
-                    <a:pt x="2247125" y="2570313"/>
-                  </a:lnTo>
-                  <a:lnTo>
-                    <a:pt x="2169491" y="2564290"/>
-                  </a:lnTo>
-                  <a:lnTo>
-                    <a:pt x="2091857" y="2558227"/>
-                  </a:lnTo>
-                  <a:lnTo>
-                    <a:pt x="2014223" y="2552124"/>
-                  </a:lnTo>
-                  <a:lnTo>
-                    <a:pt x="1936589" y="2545981"/>
-                  </a:lnTo>
-                  <a:lnTo>
-                    <a:pt x="1858955" y="2539797"/>
-                  </a:lnTo>
-                  <a:lnTo>
-                    <a:pt x="1781321" y="2533572"/>
-                  </a:lnTo>
-                  <a:lnTo>
-                    <a:pt x="1703687" y="2527307"/>
-                  </a:lnTo>
-                  <a:lnTo>
-                    <a:pt x="1626053" y="2521000"/>
-                  </a:lnTo>
-                  <a:lnTo>
-                    <a:pt x="1548419" y="2514651"/>
-                  </a:lnTo>
-                  <a:lnTo>
-                    <a:pt x="1470785" y="2508261"/>
-                  </a:lnTo>
-                  <a:lnTo>
-                    <a:pt x="1393151" y="2501828"/>
-                  </a:lnTo>
-                  <a:lnTo>
-                    <a:pt x="1315517" y="2495353"/>
-                  </a:lnTo>
-                  <a:lnTo>
-                    <a:pt x="1237883" y="2488835"/>
-                  </a:lnTo>
-                  <a:lnTo>
-                    <a:pt x="1160249" y="2482275"/>
-                  </a:lnTo>
-                  <a:lnTo>
-                    <a:pt x="1082615" y="2475671"/>
-                  </a:lnTo>
-                  <a:lnTo>
-                    <a:pt x="1004981" y="2469024"/>
-                  </a:lnTo>
-                  <a:lnTo>
-                    <a:pt x="927346" y="2462332"/>
-                  </a:lnTo>
-                  <a:lnTo>
-                    <a:pt x="849712" y="2455597"/>
-                  </a:lnTo>
-                  <a:lnTo>
-                    <a:pt x="772078" y="2448817"/>
-                  </a:lnTo>
-                  <a:lnTo>
-                    <a:pt x="694444" y="2441993"/>
-                  </a:lnTo>
-                  <a:lnTo>
-                    <a:pt x="616810" y="2435123"/>
-                  </a:lnTo>
-                  <a:lnTo>
-                    <a:pt x="539176" y="2428208"/>
-                  </a:lnTo>
-                  <a:lnTo>
-                    <a:pt x="461542" y="2421248"/>
-                  </a:lnTo>
-                  <a:lnTo>
-                    <a:pt x="383908" y="2414241"/>
-                  </a:lnTo>
-                  <a:lnTo>
-                    <a:pt x="306274" y="2407189"/>
-                  </a:lnTo>
-                  <a:lnTo>
-                    <a:pt x="228640" y="2400090"/>
-                  </a:lnTo>
-                  <a:lnTo>
-                    <a:pt x="151006" y="2392944"/>
-                  </a:lnTo>
-                  <a:lnTo>
-                    <a:pt x="73372" y="2385751"/>
-                  </a:lnTo>
-                  <a:lnTo>
-                    <a:pt x="0" y="2378908"/>
+                    <a:pt x="2060450" y="244348"/>
+                  </a:lnTo>
+                  <a:lnTo>
+                    <a:pt x="2136918" y="479240"/>
+                  </a:lnTo>
+                  <a:lnTo>
+                    <a:pt x="2213386" y="695771"/>
+                  </a:lnTo>
+                  <a:lnTo>
+                    <a:pt x="2289855" y="895378"/>
+                  </a:lnTo>
+                  <a:lnTo>
+                    <a:pt x="2366323" y="1079382"/>
+                  </a:lnTo>
+                  <a:lnTo>
+                    <a:pt x="2442792" y="1249003"/>
+                  </a:lnTo>
+                  <a:lnTo>
+                    <a:pt x="2519260" y="1405365"/>
+                  </a:lnTo>
+                  <a:lnTo>
+                    <a:pt x="2595729" y="1549506"/>
+                  </a:lnTo>
+                  <a:lnTo>
+                    <a:pt x="2672197" y="1682380"/>
+                  </a:lnTo>
+                  <a:lnTo>
+                    <a:pt x="2748666" y="1804867"/>
+                  </a:lnTo>
+                  <a:lnTo>
+                    <a:pt x="2825134" y="1917780"/>
+                  </a:lnTo>
+                  <a:lnTo>
+                    <a:pt x="2901602" y="2021868"/>
+                  </a:lnTo>
+                  <a:lnTo>
+                    <a:pt x="2978071" y="2117819"/>
+                  </a:lnTo>
+                  <a:lnTo>
+                    <a:pt x="3054539" y="2206270"/>
+                  </a:lnTo>
+                  <a:lnTo>
+                    <a:pt x="3131008" y="2287808"/>
+                  </a:lnTo>
+                  <a:lnTo>
+                    <a:pt x="3207476" y="2362971"/>
+                  </a:lnTo>
+                  <a:lnTo>
+                    <a:pt x="3283945" y="2432260"/>
+                  </a:lnTo>
+                  <a:lnTo>
+                    <a:pt x="3360413" y="2477406"/>
+                  </a:lnTo>
+                  <a:lnTo>
+                    <a:pt x="3436881" y="2482464"/>
+                  </a:lnTo>
+                  <a:lnTo>
+                    <a:pt x="3513350" y="2487488"/>
+                  </a:lnTo>
+                  <a:lnTo>
+                    <a:pt x="3589818" y="2492479"/>
+                  </a:lnTo>
+                  <a:lnTo>
+                    <a:pt x="3666287" y="2497438"/>
+                  </a:lnTo>
+                  <a:lnTo>
+                    <a:pt x="3742755" y="2502364"/>
+                  </a:lnTo>
+                  <a:lnTo>
+                    <a:pt x="3819224" y="2507258"/>
+                  </a:lnTo>
+                  <a:lnTo>
+                    <a:pt x="3895692" y="2512120"/>
+                  </a:lnTo>
+                  <a:lnTo>
+                    <a:pt x="3972160" y="2516950"/>
+                  </a:lnTo>
+                  <a:lnTo>
+                    <a:pt x="4048629" y="2521748"/>
+                  </a:lnTo>
+                  <a:lnTo>
+                    <a:pt x="4125097" y="2526515"/>
+                  </a:lnTo>
+                  <a:lnTo>
+                    <a:pt x="4201566" y="2531250"/>
+                  </a:lnTo>
+                  <a:lnTo>
+                    <a:pt x="4278034" y="2535955"/>
+                  </a:lnTo>
+                  <a:lnTo>
+                    <a:pt x="4354503" y="2540629"/>
+                  </a:lnTo>
+                  <a:lnTo>
+                    <a:pt x="4430971" y="2545272"/>
+                  </a:lnTo>
+                  <a:lnTo>
+                    <a:pt x="4507439" y="2549885"/>
+                  </a:lnTo>
+                  <a:lnTo>
+                    <a:pt x="4583908" y="2554467"/>
+                  </a:lnTo>
+                  <a:lnTo>
+                    <a:pt x="4660376" y="2559020"/>
+                  </a:lnTo>
+                  <a:lnTo>
+                    <a:pt x="4736845" y="2563543"/>
+                  </a:lnTo>
+                  <a:lnTo>
+                    <a:pt x="4813313" y="2568036"/>
+                  </a:lnTo>
+                  <a:lnTo>
+                    <a:pt x="4889782" y="2572500"/>
+                  </a:lnTo>
+                  <a:lnTo>
+                    <a:pt x="4966250" y="2576934"/>
+                  </a:lnTo>
+                  <a:lnTo>
+                    <a:pt x="5042719" y="2581339"/>
+                  </a:lnTo>
+                  <a:lnTo>
+                    <a:pt x="5119187" y="2585716"/>
+                  </a:lnTo>
+                  <a:lnTo>
+                    <a:pt x="5195655" y="2590064"/>
+                  </a:lnTo>
+                  <a:lnTo>
+                    <a:pt x="5272124" y="2594383"/>
+                  </a:lnTo>
+                  <a:lnTo>
+                    <a:pt x="5348592" y="2598674"/>
+                  </a:lnTo>
+                  <a:lnTo>
+                    <a:pt x="5425061" y="2602937"/>
+                  </a:lnTo>
+                  <a:lnTo>
+                    <a:pt x="5501529" y="2607172"/>
+                  </a:lnTo>
+                  <a:lnTo>
+                    <a:pt x="5577998" y="2611379"/>
+                  </a:lnTo>
+                  <a:lnTo>
+                    <a:pt x="5654466" y="2615559"/>
+                  </a:lnTo>
+                  <a:lnTo>
+                    <a:pt x="5730934" y="2619711"/>
+                  </a:lnTo>
+                  <a:lnTo>
+                    <a:pt x="5807403" y="2623837"/>
+                  </a:lnTo>
+                  <a:lnTo>
+                    <a:pt x="5883871" y="2627935"/>
+                  </a:lnTo>
+                  <a:lnTo>
+                    <a:pt x="5960340" y="2632006"/>
+                  </a:lnTo>
+                  <a:lnTo>
+                    <a:pt x="6036808" y="2636050"/>
+                  </a:lnTo>
+                  <a:lnTo>
+                    <a:pt x="6113277" y="2640069"/>
+                  </a:lnTo>
+                  <a:lnTo>
+                    <a:pt x="6189745" y="2644060"/>
+                  </a:lnTo>
+                  <a:lnTo>
+                    <a:pt x="6266213" y="2648026"/>
+                  </a:lnTo>
+                  <a:lnTo>
+                    <a:pt x="6342682" y="2651966"/>
+                  </a:lnTo>
+                  <a:lnTo>
+                    <a:pt x="6419150" y="2655879"/>
+                  </a:lnTo>
+                  <a:lnTo>
+                    <a:pt x="6495619" y="2659768"/>
+                  </a:lnTo>
+                  <a:lnTo>
+                    <a:pt x="6572087" y="2663630"/>
+                  </a:lnTo>
+                  <a:lnTo>
+                    <a:pt x="6648556" y="2667468"/>
+                  </a:lnTo>
+                  <a:lnTo>
+                    <a:pt x="6725024" y="2671280"/>
+                  </a:lnTo>
+                  <a:lnTo>
+                    <a:pt x="6801492" y="2675067"/>
+                  </a:lnTo>
+                  <a:lnTo>
+                    <a:pt x="6877961" y="2678830"/>
+                  </a:lnTo>
+                  <a:lnTo>
+                    <a:pt x="6954429" y="2682568"/>
+                  </a:lnTo>
+                  <a:lnTo>
+                    <a:pt x="7030898" y="2686281"/>
+                  </a:lnTo>
+                  <a:lnTo>
+                    <a:pt x="7107366" y="2689970"/>
+                  </a:lnTo>
+                  <a:lnTo>
+                    <a:pt x="7183835" y="2693635"/>
+                  </a:lnTo>
+                  <a:lnTo>
+                    <a:pt x="7260303" y="2697276"/>
+                  </a:lnTo>
+                  <a:lnTo>
+                    <a:pt x="7260303" y="3237543"/>
+                  </a:lnTo>
+                  <a:lnTo>
+                    <a:pt x="7183835" y="3236537"/>
+                  </a:lnTo>
+                  <a:lnTo>
+                    <a:pt x="7107366" y="3235446"/>
+                  </a:lnTo>
+                  <a:lnTo>
+                    <a:pt x="7030898" y="3234262"/>
+                  </a:lnTo>
+                  <a:lnTo>
+                    <a:pt x="6954429" y="3232977"/>
+                  </a:lnTo>
+                  <a:lnTo>
+                    <a:pt x="6877961" y="3231584"/>
+                  </a:lnTo>
+                  <a:lnTo>
+                    <a:pt x="6801492" y="3230073"/>
+                  </a:lnTo>
+                  <a:lnTo>
+                    <a:pt x="6725024" y="3228433"/>
+                  </a:lnTo>
+                  <a:lnTo>
+                    <a:pt x="6648556" y="3226655"/>
+                  </a:lnTo>
+                  <a:lnTo>
+                    <a:pt x="6572087" y="3224726"/>
+                  </a:lnTo>
+                  <a:lnTo>
+                    <a:pt x="6495619" y="3222633"/>
+                  </a:lnTo>
+                  <a:lnTo>
+                    <a:pt x="6419150" y="3220363"/>
+                  </a:lnTo>
+                  <a:lnTo>
+                    <a:pt x="6342682" y="3217900"/>
+                  </a:lnTo>
+                  <a:lnTo>
+                    <a:pt x="6266213" y="3215228"/>
+                  </a:lnTo>
+                  <a:lnTo>
+                    <a:pt x="6189745" y="3212330"/>
+                  </a:lnTo>
+                  <a:lnTo>
+                    <a:pt x="6113277" y="3209186"/>
+                  </a:lnTo>
+                  <a:lnTo>
+                    <a:pt x="6036808" y="3205775"/>
+                  </a:lnTo>
+                  <a:lnTo>
+                    <a:pt x="5960340" y="3202076"/>
+                  </a:lnTo>
+                  <a:lnTo>
+                    <a:pt x="5883871" y="3198062"/>
+                  </a:lnTo>
+                  <a:lnTo>
+                    <a:pt x="5807403" y="3193709"/>
+                  </a:lnTo>
+                  <a:lnTo>
+                    <a:pt x="5730934" y="3188986"/>
+                  </a:lnTo>
+                  <a:lnTo>
+                    <a:pt x="5654466" y="3183862"/>
+                  </a:lnTo>
+                  <a:lnTo>
+                    <a:pt x="5577998" y="3178304"/>
+                  </a:lnTo>
+                  <a:lnTo>
+                    <a:pt x="5501529" y="3172275"/>
+                  </a:lnTo>
+                  <a:lnTo>
+                    <a:pt x="5425061" y="3165735"/>
+                  </a:lnTo>
+                  <a:lnTo>
+                    <a:pt x="5348592" y="3158640"/>
+                  </a:lnTo>
+                  <a:lnTo>
+                    <a:pt x="5272124" y="3150944"/>
+                  </a:lnTo>
+                  <a:lnTo>
+                    <a:pt x="5195655" y="3142595"/>
+                  </a:lnTo>
+                  <a:lnTo>
+                    <a:pt x="5119187" y="3133537"/>
+                  </a:lnTo>
+                  <a:lnTo>
+                    <a:pt x="5042719" y="3123712"/>
+                  </a:lnTo>
+                  <a:lnTo>
+                    <a:pt x="4966250" y="3113054"/>
+                  </a:lnTo>
+                  <a:lnTo>
+                    <a:pt x="4889782" y="3101493"/>
+                  </a:lnTo>
+                  <a:lnTo>
+                    <a:pt x="4813313" y="3088950"/>
+                  </a:lnTo>
+                  <a:lnTo>
+                    <a:pt x="4736845" y="3075345"/>
+                  </a:lnTo>
+                  <a:lnTo>
+                    <a:pt x="4660376" y="3060585"/>
+                  </a:lnTo>
+                  <a:lnTo>
+                    <a:pt x="4583908" y="3044574"/>
+                  </a:lnTo>
+                  <a:lnTo>
+                    <a:pt x="4507439" y="3027206"/>
+                  </a:lnTo>
+                  <a:lnTo>
+                    <a:pt x="4430971" y="3008364"/>
+                  </a:lnTo>
+                  <a:lnTo>
+                    <a:pt x="4354503" y="2987926"/>
+                  </a:lnTo>
+                  <a:lnTo>
+                    <a:pt x="4278034" y="2965754"/>
+                  </a:lnTo>
+                  <a:lnTo>
+                    <a:pt x="4201566" y="2941702"/>
+                  </a:lnTo>
+                  <a:lnTo>
+                    <a:pt x="4125097" y="2915610"/>
+                  </a:lnTo>
+                  <a:lnTo>
+                    <a:pt x="4048629" y="2887306"/>
+                  </a:lnTo>
+                  <a:lnTo>
+                    <a:pt x="3972160" y="2856603"/>
+                  </a:lnTo>
+                  <a:lnTo>
+                    <a:pt x="3895692" y="2823295"/>
+                  </a:lnTo>
+                  <a:lnTo>
+                    <a:pt x="3819224" y="2787164"/>
+                  </a:lnTo>
+                  <a:lnTo>
+                    <a:pt x="3742755" y="2747969"/>
+                  </a:lnTo>
+                  <a:lnTo>
+                    <a:pt x="3666287" y="2705450"/>
+                  </a:lnTo>
+                  <a:lnTo>
+                    <a:pt x="3589818" y="2659326"/>
+                  </a:lnTo>
+                  <a:lnTo>
+                    <a:pt x="3513350" y="2609291"/>
+                  </a:lnTo>
+                  <a:lnTo>
+                    <a:pt x="3436881" y="2555013"/>
+                  </a:lnTo>
+                  <a:lnTo>
+                    <a:pt x="3360413" y="2496133"/>
+                  </a:lnTo>
+                  <a:lnTo>
+                    <a:pt x="3283945" y="2472315"/>
+                  </a:lnTo>
+                  <a:lnTo>
+                    <a:pt x="3207476" y="2467191"/>
+                  </a:lnTo>
+                  <a:lnTo>
+                    <a:pt x="3131008" y="2462033"/>
+                  </a:lnTo>
+                  <a:lnTo>
+                    <a:pt x="3054539" y="2456841"/>
+                  </a:lnTo>
+                  <a:lnTo>
+                    <a:pt x="2978071" y="2451615"/>
+                  </a:lnTo>
+                  <a:lnTo>
+                    <a:pt x="2901602" y="2446354"/>
+                  </a:lnTo>
+                  <a:lnTo>
+                    <a:pt x="2825134" y="2441058"/>
+                  </a:lnTo>
+                  <a:lnTo>
+                    <a:pt x="2748666" y="2435728"/>
+                  </a:lnTo>
+                  <a:lnTo>
+                    <a:pt x="2672197" y="2430362"/>
+                  </a:lnTo>
+                  <a:lnTo>
+                    <a:pt x="2595729" y="2424961"/>
+                  </a:lnTo>
+                  <a:lnTo>
+                    <a:pt x="2519260" y="2419525"/>
+                  </a:lnTo>
+                  <a:lnTo>
+                    <a:pt x="2442792" y="2414052"/>
+                  </a:lnTo>
+                  <a:lnTo>
+                    <a:pt x="2366323" y="2408544"/>
+                  </a:lnTo>
+                  <a:lnTo>
+                    <a:pt x="2289855" y="2402999"/>
+                  </a:lnTo>
+                  <a:lnTo>
+                    <a:pt x="2213386" y="2397418"/>
+                  </a:lnTo>
+                  <a:lnTo>
+                    <a:pt x="2136918" y="2391800"/>
+                  </a:lnTo>
+                  <a:lnTo>
+                    <a:pt x="2060450" y="2386144"/>
+                  </a:lnTo>
+                  <a:lnTo>
+                    <a:pt x="1983981" y="2380452"/>
+                  </a:lnTo>
+                  <a:lnTo>
+                    <a:pt x="1907513" y="2374722"/>
+                  </a:lnTo>
+                  <a:lnTo>
+                    <a:pt x="1831044" y="2368954"/>
+                  </a:lnTo>
+                  <a:lnTo>
+                    <a:pt x="1754576" y="2363148"/>
+                  </a:lnTo>
+                  <a:lnTo>
+                    <a:pt x="1678107" y="2357304"/>
+                  </a:lnTo>
+                  <a:lnTo>
+                    <a:pt x="1601639" y="2351421"/>
+                  </a:lnTo>
+                  <a:lnTo>
+                    <a:pt x="1525171" y="2345500"/>
+                  </a:lnTo>
+                  <a:lnTo>
+                    <a:pt x="1448702" y="2339539"/>
+                  </a:lnTo>
+                  <a:lnTo>
+                    <a:pt x="1372234" y="2333539"/>
+                  </a:lnTo>
+                  <a:lnTo>
+                    <a:pt x="1295765" y="2327500"/>
+                  </a:lnTo>
+                  <a:lnTo>
+                    <a:pt x="1219297" y="2321421"/>
+                  </a:lnTo>
+                  <a:lnTo>
+                    <a:pt x="1142828" y="2315301"/>
+                  </a:lnTo>
+                  <a:lnTo>
+                    <a:pt x="1066360" y="2309142"/>
+                  </a:lnTo>
+                  <a:lnTo>
+                    <a:pt x="989892" y="2302941"/>
+                  </a:lnTo>
+                  <a:lnTo>
+                    <a:pt x="913423" y="2296700"/>
+                  </a:lnTo>
+                  <a:lnTo>
+                    <a:pt x="836955" y="2290418"/>
+                  </a:lnTo>
+                  <a:lnTo>
+                    <a:pt x="760486" y="2284094"/>
+                  </a:lnTo>
+                  <a:lnTo>
+                    <a:pt x="684018" y="2277729"/>
+                  </a:lnTo>
+                  <a:lnTo>
+                    <a:pt x="607549" y="2271321"/>
+                  </a:lnTo>
+                  <a:lnTo>
+                    <a:pt x="531081" y="2264871"/>
+                  </a:lnTo>
+                  <a:lnTo>
+                    <a:pt x="454613" y="2258379"/>
+                  </a:lnTo>
+                  <a:lnTo>
+                    <a:pt x="378144" y="2251844"/>
+                  </a:lnTo>
+                  <a:lnTo>
+                    <a:pt x="301676" y="2245266"/>
+                  </a:lnTo>
+                  <a:lnTo>
+                    <a:pt x="225207" y="2238645"/>
+                  </a:lnTo>
+                  <a:lnTo>
+                    <a:pt x="148739" y="2231979"/>
+                  </a:lnTo>
+                  <a:lnTo>
+                    <a:pt x="72270" y="2225270"/>
+                  </a:lnTo>
+                  <a:lnTo>
+                    <a:pt x="0" y="2218888"/>
                   </a:lnTo>
                   <a:lnTo>
                     <a:pt x="0" y="0"/>
@@ -3534,222 +3534,222 @@
           </p:nvSpPr>
           <p:spPr>
             <a:xfrm>
-              <a:off x="2834928" y="2073503"/>
-              <a:ext cx="5353561" cy="2891796"/>
+              <a:off x="2902766" y="2209169"/>
+              <a:ext cx="5273182" cy="2697276"/>
             </a:xfrm>
             <a:custGeom>
               <a:avLst/>
               <a:pathLst>
-                <a:path w="5353561" h="2891796">
+                <a:path w="5273182" h="2697276">
                   <a:moveTo>
                     <a:pt x="0" y="0"/>
                   </a:moveTo>
                   <a:lnTo>
-                    <a:pt x="74446" y="261969"/>
-                  </a:lnTo>
-                  <a:lnTo>
-                    <a:pt x="152080" y="513801"/>
-                  </a:lnTo>
-                  <a:lnTo>
-                    <a:pt x="229714" y="745949"/>
-                  </a:lnTo>
-                  <a:lnTo>
-                    <a:pt x="307348" y="959950"/>
-                  </a:lnTo>
-                  <a:lnTo>
-                    <a:pt x="384982" y="1157224"/>
-                  </a:lnTo>
-                  <a:lnTo>
-                    <a:pt x="462617" y="1339078"/>
-                  </a:lnTo>
-                  <a:lnTo>
-                    <a:pt x="540251" y="1506717"/>
-                  </a:lnTo>
-                  <a:lnTo>
-                    <a:pt x="617885" y="1661252"/>
-                  </a:lnTo>
-                  <a:lnTo>
-                    <a:pt x="695519" y="1803708"/>
-                  </a:lnTo>
-                  <a:lnTo>
-                    <a:pt x="773153" y="1935029"/>
-                  </a:lnTo>
-                  <a:lnTo>
-                    <a:pt x="850787" y="2056086"/>
-                  </a:lnTo>
-                  <a:lnTo>
-                    <a:pt x="928421" y="2167680"/>
-                  </a:lnTo>
-                  <a:lnTo>
-                    <a:pt x="1006055" y="2270551"/>
-                  </a:lnTo>
-                  <a:lnTo>
-                    <a:pt x="1083689" y="2365381"/>
-                  </a:lnTo>
-                  <a:lnTo>
-                    <a:pt x="1161323" y="2452798"/>
-                  </a:lnTo>
-                  <a:lnTo>
-                    <a:pt x="1238957" y="2533383"/>
-                  </a:lnTo>
-                  <a:lnTo>
-                    <a:pt x="1316591" y="2607669"/>
-                  </a:lnTo>
-                  <a:lnTo>
-                    <a:pt x="1394225" y="2656070"/>
-                  </a:lnTo>
-                  <a:lnTo>
-                    <a:pt x="1471859" y="2661492"/>
-                  </a:lnTo>
-                  <a:lnTo>
-                    <a:pt x="1549493" y="2666879"/>
-                  </a:lnTo>
-                  <a:lnTo>
-                    <a:pt x="1627127" y="2672230"/>
-                  </a:lnTo>
-                  <a:lnTo>
-                    <a:pt x="1704761" y="2677547"/>
-                  </a:lnTo>
-                  <a:lnTo>
-                    <a:pt x="1782395" y="2682828"/>
-                  </a:lnTo>
-                  <a:lnTo>
-                    <a:pt x="1860029" y="2688075"/>
-                  </a:lnTo>
-                  <a:lnTo>
-                    <a:pt x="1937663" y="2693287"/>
-                  </a:lnTo>
-                  <a:lnTo>
-                    <a:pt x="2015297" y="2698465"/>
-                  </a:lnTo>
-                  <a:lnTo>
-                    <a:pt x="2092931" y="2703610"/>
-                  </a:lnTo>
-                  <a:lnTo>
-                    <a:pt x="2170566" y="2708720"/>
-                  </a:lnTo>
-                  <a:lnTo>
-                    <a:pt x="2248200" y="2713798"/>
-                  </a:lnTo>
-                  <a:lnTo>
-                    <a:pt x="2325834" y="2718842"/>
-                  </a:lnTo>
-                  <a:lnTo>
-                    <a:pt x="2403468" y="2723853"/>
-                  </a:lnTo>
-                  <a:lnTo>
-                    <a:pt x="2481102" y="2728831"/>
-                  </a:lnTo>
-                  <a:lnTo>
-                    <a:pt x="2558736" y="2733776"/>
-                  </a:lnTo>
-                  <a:lnTo>
-                    <a:pt x="2636370" y="2738689"/>
-                  </a:lnTo>
-                  <a:lnTo>
-                    <a:pt x="2714004" y="2743570"/>
-                  </a:lnTo>
-                  <a:lnTo>
-                    <a:pt x="2791638" y="2748419"/>
-                  </a:lnTo>
-                  <a:lnTo>
-                    <a:pt x="2869272" y="2753236"/>
-                  </a:lnTo>
-                  <a:lnTo>
-                    <a:pt x="2946906" y="2758022"/>
-                  </a:lnTo>
-                  <a:lnTo>
-                    <a:pt x="3024540" y="2762776"/>
-                  </a:lnTo>
-                  <a:lnTo>
-                    <a:pt x="3102174" y="2767499"/>
-                  </a:lnTo>
-                  <a:lnTo>
-                    <a:pt x="3179808" y="2772191"/>
-                  </a:lnTo>
-                  <a:lnTo>
-                    <a:pt x="3257442" y="2776852"/>
-                  </a:lnTo>
-                  <a:lnTo>
-                    <a:pt x="3335076" y="2781483"/>
-                  </a:lnTo>
-                  <a:lnTo>
-                    <a:pt x="3412710" y="2786084"/>
-                  </a:lnTo>
-                  <a:lnTo>
-                    <a:pt x="3490344" y="2790654"/>
-                  </a:lnTo>
-                  <a:lnTo>
-                    <a:pt x="3567978" y="2795195"/>
-                  </a:lnTo>
-                  <a:lnTo>
-                    <a:pt x="3645612" y="2799705"/>
-                  </a:lnTo>
-                  <a:lnTo>
-                    <a:pt x="3723246" y="2804186"/>
-                  </a:lnTo>
-                  <a:lnTo>
-                    <a:pt x="3800880" y="2808638"/>
-                  </a:lnTo>
-                  <a:lnTo>
-                    <a:pt x="3878515" y="2813061"/>
-                  </a:lnTo>
-                  <a:lnTo>
-                    <a:pt x="3956149" y="2817454"/>
-                  </a:lnTo>
-                  <a:lnTo>
-                    <a:pt x="4033783" y="2821819"/>
-                  </a:lnTo>
-                  <a:lnTo>
-                    <a:pt x="4111417" y="2826156"/>
-                  </a:lnTo>
-                  <a:lnTo>
-                    <a:pt x="4189051" y="2830464"/>
-                  </a:lnTo>
-                  <a:lnTo>
-                    <a:pt x="4266685" y="2834743"/>
-                  </a:lnTo>
-                  <a:lnTo>
-                    <a:pt x="4344319" y="2838995"/>
-                  </a:lnTo>
-                  <a:lnTo>
-                    <a:pt x="4421953" y="2843219"/>
-                  </a:lnTo>
-                  <a:lnTo>
-                    <a:pt x="4499587" y="2847415"/>
-                  </a:lnTo>
-                  <a:lnTo>
-                    <a:pt x="4577221" y="2851583"/>
-                  </a:lnTo>
-                  <a:lnTo>
-                    <a:pt x="4654855" y="2855725"/>
-                  </a:lnTo>
-                  <a:lnTo>
-                    <a:pt x="4732489" y="2859839"/>
-                  </a:lnTo>
-                  <a:lnTo>
-                    <a:pt x="4810123" y="2863926"/>
-                  </a:lnTo>
-                  <a:lnTo>
-                    <a:pt x="4887757" y="2867986"/>
-                  </a:lnTo>
-                  <a:lnTo>
-                    <a:pt x="4965391" y="2872020"/>
-                  </a:lnTo>
-                  <a:lnTo>
-                    <a:pt x="5043025" y="2876028"/>
-                  </a:lnTo>
-                  <a:lnTo>
-                    <a:pt x="5120659" y="2880009"/>
-                  </a:lnTo>
-                  <a:lnTo>
-                    <a:pt x="5198293" y="2883964"/>
-                  </a:lnTo>
-                  <a:lnTo>
-                    <a:pt x="5275927" y="2887893"/>
-                  </a:lnTo>
-                  <a:lnTo>
-                    <a:pt x="5353561" y="2891796"/>
+                    <a:pt x="73329" y="244348"/>
+                  </a:lnTo>
+                  <a:lnTo>
+                    <a:pt x="149797" y="479240"/>
+                  </a:lnTo>
+                  <a:lnTo>
+                    <a:pt x="226265" y="695771"/>
+                  </a:lnTo>
+                  <a:lnTo>
+                    <a:pt x="302734" y="895378"/>
+                  </a:lnTo>
+                  <a:lnTo>
+                    <a:pt x="379202" y="1079382"/>
+                  </a:lnTo>
+                  <a:lnTo>
+                    <a:pt x="455671" y="1249003"/>
+                  </a:lnTo>
+                  <a:lnTo>
+                    <a:pt x="532139" y="1405365"/>
+                  </a:lnTo>
+                  <a:lnTo>
+                    <a:pt x="608608" y="1549506"/>
+                  </a:lnTo>
+                  <a:lnTo>
+                    <a:pt x="685076" y="1682380"/>
+                  </a:lnTo>
+                  <a:lnTo>
+                    <a:pt x="761544" y="1804867"/>
+                  </a:lnTo>
+                  <a:lnTo>
+                    <a:pt x="838013" y="1917780"/>
+                  </a:lnTo>
+                  <a:lnTo>
+                    <a:pt x="914481" y="2021868"/>
+                  </a:lnTo>
+                  <a:lnTo>
+                    <a:pt x="990950" y="2117819"/>
+                  </a:lnTo>
+                  <a:lnTo>
+                    <a:pt x="1067418" y="2206270"/>
+                  </a:lnTo>
+                  <a:lnTo>
+                    <a:pt x="1143887" y="2287808"/>
+                  </a:lnTo>
+                  <a:lnTo>
+                    <a:pt x="1220355" y="2362971"/>
+                  </a:lnTo>
+                  <a:lnTo>
+                    <a:pt x="1296823" y="2432260"/>
+                  </a:lnTo>
+                  <a:lnTo>
+                    <a:pt x="1373292" y="2477406"/>
+                  </a:lnTo>
+                  <a:lnTo>
+                    <a:pt x="1449760" y="2482464"/>
+                  </a:lnTo>
+                  <a:lnTo>
+                    <a:pt x="1526229" y="2487488"/>
+                  </a:lnTo>
+                  <a:lnTo>
+                    <a:pt x="1602697" y="2492479"/>
+                  </a:lnTo>
+                  <a:lnTo>
+                    <a:pt x="1679166" y="2497438"/>
+                  </a:lnTo>
+                  <a:lnTo>
+                    <a:pt x="1755634" y="2502364"/>
+                  </a:lnTo>
+                  <a:lnTo>
+                    <a:pt x="1832103" y="2507258"/>
+                  </a:lnTo>
+                  <a:lnTo>
+                    <a:pt x="1908571" y="2512120"/>
+                  </a:lnTo>
+                  <a:lnTo>
+                    <a:pt x="1985039" y="2516950"/>
+                  </a:lnTo>
+                  <a:lnTo>
+                    <a:pt x="2061508" y="2521748"/>
+                  </a:lnTo>
+                  <a:lnTo>
+                    <a:pt x="2137976" y="2526515"/>
+                  </a:lnTo>
+                  <a:lnTo>
+                    <a:pt x="2214445" y="2531250"/>
+                  </a:lnTo>
+                  <a:lnTo>
+                    <a:pt x="2290913" y="2535955"/>
+                  </a:lnTo>
+                  <a:lnTo>
+                    <a:pt x="2367382" y="2540629"/>
+                  </a:lnTo>
+                  <a:lnTo>
+                    <a:pt x="2443850" y="2545272"/>
+                  </a:lnTo>
+                  <a:lnTo>
+                    <a:pt x="2520318" y="2549885"/>
+                  </a:lnTo>
+                  <a:lnTo>
+                    <a:pt x="2596787" y="2554467"/>
+                  </a:lnTo>
+                  <a:lnTo>
+                    <a:pt x="2673255" y="2559020"/>
+                  </a:lnTo>
+                  <a:lnTo>
+                    <a:pt x="2749724" y="2563543"/>
+                  </a:lnTo>
+                  <a:lnTo>
+                    <a:pt x="2826192" y="2568036"/>
+                  </a:lnTo>
+                  <a:lnTo>
+                    <a:pt x="2902661" y="2572500"/>
+                  </a:lnTo>
+                  <a:lnTo>
+                    <a:pt x="2979129" y="2576934"/>
+                  </a:lnTo>
+                  <a:lnTo>
+                    <a:pt x="3055597" y="2581339"/>
+                  </a:lnTo>
+                  <a:lnTo>
+                    <a:pt x="3132066" y="2585716"/>
+                  </a:lnTo>
+                  <a:lnTo>
+                    <a:pt x="3208534" y="2590064"/>
+                  </a:lnTo>
+                  <a:lnTo>
+                    <a:pt x="3285003" y="2594383"/>
+                  </a:lnTo>
+                  <a:lnTo>
+                    <a:pt x="3361471" y="2598674"/>
+                  </a:lnTo>
+                  <a:lnTo>
+                    <a:pt x="3437940" y="2602937"/>
+                  </a:lnTo>
+                  <a:lnTo>
+                    <a:pt x="3514408" y="2607172"/>
+                  </a:lnTo>
+                  <a:lnTo>
+                    <a:pt x="3590876" y="2611379"/>
+                  </a:lnTo>
+                  <a:lnTo>
+                    <a:pt x="3667345" y="2615559"/>
+                  </a:lnTo>
+                  <a:lnTo>
+                    <a:pt x="3743813" y="2619711"/>
+                  </a:lnTo>
+                  <a:lnTo>
+                    <a:pt x="3820282" y="2623837"/>
+                  </a:lnTo>
+                  <a:lnTo>
+                    <a:pt x="3896750" y="2627935"/>
+                  </a:lnTo>
+                  <a:lnTo>
+                    <a:pt x="3973219" y="2632006"/>
+                  </a:lnTo>
+                  <a:lnTo>
+                    <a:pt x="4049687" y="2636050"/>
+                  </a:lnTo>
+                  <a:lnTo>
+                    <a:pt x="4126156" y="2640069"/>
+                  </a:lnTo>
+                  <a:lnTo>
+                    <a:pt x="4202624" y="2644060"/>
+                  </a:lnTo>
+                  <a:lnTo>
+                    <a:pt x="4279092" y="2648026"/>
+                  </a:lnTo>
+                  <a:lnTo>
+                    <a:pt x="4355561" y="2651966"/>
+                  </a:lnTo>
+                  <a:lnTo>
+                    <a:pt x="4432029" y="2655879"/>
+                  </a:lnTo>
+                  <a:lnTo>
+                    <a:pt x="4508498" y="2659768"/>
+                  </a:lnTo>
+                  <a:lnTo>
+                    <a:pt x="4584966" y="2663630"/>
+                  </a:lnTo>
+                  <a:lnTo>
+                    <a:pt x="4661435" y="2667468"/>
+                  </a:lnTo>
+                  <a:lnTo>
+                    <a:pt x="4737903" y="2671280"/>
+                  </a:lnTo>
+                  <a:lnTo>
+                    <a:pt x="4814371" y="2675067"/>
+                  </a:lnTo>
+                  <a:lnTo>
+                    <a:pt x="4890840" y="2678830"/>
+                  </a:lnTo>
+                  <a:lnTo>
+                    <a:pt x="4967308" y="2682568"/>
+                  </a:lnTo>
+                  <a:lnTo>
+                    <a:pt x="5043777" y="2686281"/>
+                  </a:lnTo>
+                  <a:lnTo>
+                    <a:pt x="5120245" y="2689970"/>
+                  </a:lnTo>
+                  <a:lnTo>
+                    <a:pt x="5196714" y="2693635"/>
+                  </a:lnTo>
+                  <a:lnTo>
+                    <a:pt x="5273182" y="2697276"/>
                   </a:lnTo>
                 </a:path>
               </a:pathLst>
@@ -3769,297 +3769,297 @@
           </p:nvSpPr>
           <p:spPr>
             <a:xfrm>
-              <a:off x="817517" y="4452411"/>
-              <a:ext cx="7370972" cy="1092118"/>
+              <a:off x="915645" y="4428057"/>
+              <a:ext cx="7260303" cy="1018655"/>
             </a:xfrm>
             <a:custGeom>
               <a:avLst/>
               <a:pathLst>
-                <a:path w="7370972" h="1092118">
+                <a:path w="7260303" h="1018655">
                   <a:moveTo>
-                    <a:pt x="7370972" y="1092118"/>
+                    <a:pt x="7260303" y="1018655"/>
                   </a:moveTo>
                   <a:lnTo>
-                    <a:pt x="7293338" y="1091039"/>
-                  </a:lnTo>
-                  <a:lnTo>
-                    <a:pt x="7215704" y="1089869"/>
-                  </a:lnTo>
-                  <a:lnTo>
-                    <a:pt x="7138070" y="1088600"/>
-                  </a:lnTo>
-                  <a:lnTo>
-                    <a:pt x="7060436" y="1087223"/>
-                  </a:lnTo>
-                  <a:lnTo>
-                    <a:pt x="6982802" y="1085729"/>
-                  </a:lnTo>
-                  <a:lnTo>
-                    <a:pt x="6905168" y="1084109"/>
-                  </a:lnTo>
-                  <a:lnTo>
-                    <a:pt x="6827534" y="1082351"/>
-                  </a:lnTo>
-                  <a:lnTo>
-                    <a:pt x="6749900" y="1080444"/>
-                  </a:lnTo>
-                  <a:lnTo>
-                    <a:pt x="6672266" y="1078376"/>
-                  </a:lnTo>
-                  <a:lnTo>
-                    <a:pt x="6594632" y="1076132"/>
-                  </a:lnTo>
-                  <a:lnTo>
-                    <a:pt x="6516998" y="1073698"/>
-                  </a:lnTo>
-                  <a:lnTo>
-                    <a:pt x="6439364" y="1071058"/>
-                  </a:lnTo>
-                  <a:lnTo>
-                    <a:pt x="6361730" y="1068193"/>
-                  </a:lnTo>
-                  <a:lnTo>
-                    <a:pt x="6284096" y="1065086"/>
-                  </a:lnTo>
-                  <a:lnTo>
-                    <a:pt x="6206462" y="1061715"/>
-                  </a:lnTo>
-                  <a:lnTo>
-                    <a:pt x="6128827" y="1058059"/>
-                  </a:lnTo>
-                  <a:lnTo>
-                    <a:pt x="6051193" y="1054092"/>
-                  </a:lnTo>
-                  <a:lnTo>
-                    <a:pt x="5973559" y="1049790"/>
-                  </a:lnTo>
-                  <a:lnTo>
-                    <a:pt x="5895925" y="1045122"/>
-                  </a:lnTo>
-                  <a:lnTo>
-                    <a:pt x="5818291" y="1040058"/>
-                  </a:lnTo>
-                  <a:lnTo>
-                    <a:pt x="5740657" y="1034565"/>
-                  </a:lnTo>
-                  <a:lnTo>
-                    <a:pt x="5663023" y="1028607"/>
-                  </a:lnTo>
-                  <a:lnTo>
-                    <a:pt x="5585389" y="1022143"/>
-                  </a:lnTo>
-                  <a:lnTo>
-                    <a:pt x="5507755" y="1015131"/>
-                  </a:lnTo>
-                  <a:lnTo>
-                    <a:pt x="5430121" y="1007524"/>
-                  </a:lnTo>
-                  <a:lnTo>
-                    <a:pt x="5352487" y="999273"/>
-                  </a:lnTo>
-                  <a:lnTo>
-                    <a:pt x="5274853" y="990322"/>
-                  </a:lnTo>
-                  <a:lnTo>
-                    <a:pt x="5197219" y="980611"/>
-                  </a:lnTo>
-                  <a:lnTo>
-                    <a:pt x="5119585" y="970078"/>
-                  </a:lnTo>
-                  <a:lnTo>
-                    <a:pt x="5041951" y="958651"/>
-                  </a:lnTo>
-                  <a:lnTo>
-                    <a:pt x="4964317" y="946255"/>
-                  </a:lnTo>
-                  <a:lnTo>
-                    <a:pt x="4886683" y="932809"/>
-                  </a:lnTo>
-                  <a:lnTo>
-                    <a:pt x="4809049" y="918222"/>
-                  </a:lnTo>
-                  <a:lnTo>
-                    <a:pt x="4731415" y="902398"/>
-                  </a:lnTo>
-                  <a:lnTo>
-                    <a:pt x="4653781" y="885232"/>
-                  </a:lnTo>
-                  <a:lnTo>
-                    <a:pt x="4576147" y="866611"/>
-                  </a:lnTo>
-                  <a:lnTo>
-                    <a:pt x="4498513" y="846411"/>
-                  </a:lnTo>
-                  <a:lnTo>
-                    <a:pt x="4420879" y="824498"/>
-                  </a:lnTo>
-                  <a:lnTo>
-                    <a:pt x="4343244" y="800728"/>
-                  </a:lnTo>
-                  <a:lnTo>
-                    <a:pt x="4265610" y="774941"/>
-                  </a:lnTo>
-                  <a:lnTo>
-                    <a:pt x="4187976" y="746968"/>
-                  </a:lnTo>
-                  <a:lnTo>
-                    <a:pt x="4110342" y="716623"/>
-                  </a:lnTo>
-                  <a:lnTo>
-                    <a:pt x="4032708" y="683705"/>
-                  </a:lnTo>
-                  <a:lnTo>
-                    <a:pt x="3955074" y="647995"/>
-                  </a:lnTo>
-                  <a:lnTo>
-                    <a:pt x="3877440" y="609258"/>
-                  </a:lnTo>
-                  <a:lnTo>
-                    <a:pt x="3799806" y="567236"/>
-                  </a:lnTo>
-                  <a:lnTo>
-                    <a:pt x="3722172" y="521651"/>
-                  </a:lnTo>
-                  <a:lnTo>
-                    <a:pt x="3644538" y="472201"/>
-                  </a:lnTo>
-                  <a:lnTo>
-                    <a:pt x="3566904" y="418557"/>
-                  </a:lnTo>
-                  <a:lnTo>
-                    <a:pt x="3489270" y="360365"/>
-                  </a:lnTo>
-                  <a:lnTo>
-                    <a:pt x="3411636" y="297239"/>
-                  </a:lnTo>
-                  <a:lnTo>
-                    <a:pt x="3334002" y="271704"/>
-                  </a:lnTo>
-                  <a:lnTo>
-                    <a:pt x="3256368" y="266210"/>
-                  </a:lnTo>
-                  <a:lnTo>
-                    <a:pt x="3178734" y="260680"/>
-                  </a:lnTo>
-                  <a:lnTo>
-                    <a:pt x="3101100" y="255113"/>
-                  </a:lnTo>
-                  <a:lnTo>
-                    <a:pt x="3023466" y="249510"/>
-                  </a:lnTo>
-                  <a:lnTo>
-                    <a:pt x="2945832" y="243870"/>
-                  </a:lnTo>
-                  <a:lnTo>
-                    <a:pt x="2868198" y="238193"/>
-                  </a:lnTo>
-                  <a:lnTo>
-                    <a:pt x="2790564" y="232478"/>
-                  </a:lnTo>
-                  <a:lnTo>
-                    <a:pt x="2712930" y="226725"/>
-                  </a:lnTo>
-                  <a:lnTo>
-                    <a:pt x="2635295" y="220935"/>
-                  </a:lnTo>
-                  <a:lnTo>
-                    <a:pt x="2557661" y="215106"/>
-                  </a:lnTo>
-                  <a:lnTo>
-                    <a:pt x="2480027" y="209239"/>
-                  </a:lnTo>
-                  <a:lnTo>
-                    <a:pt x="2402393" y="203333"/>
-                  </a:lnTo>
-                  <a:lnTo>
-                    <a:pt x="2324759" y="197389"/>
-                  </a:lnTo>
-                  <a:lnTo>
-                    <a:pt x="2247125" y="191405"/>
-                  </a:lnTo>
-                  <a:lnTo>
-                    <a:pt x="2169491" y="185381"/>
-                  </a:lnTo>
-                  <a:lnTo>
-                    <a:pt x="2091857" y="179318"/>
-                  </a:lnTo>
-                  <a:lnTo>
-                    <a:pt x="2014223" y="173215"/>
-                  </a:lnTo>
-                  <a:lnTo>
-                    <a:pt x="1936589" y="167072"/>
-                  </a:lnTo>
-                  <a:lnTo>
-                    <a:pt x="1858955" y="160888"/>
-                  </a:lnTo>
-                  <a:lnTo>
-                    <a:pt x="1781321" y="154664"/>
-                  </a:lnTo>
-                  <a:lnTo>
-                    <a:pt x="1703687" y="148398"/>
-                  </a:lnTo>
-                  <a:lnTo>
-                    <a:pt x="1626053" y="142091"/>
-                  </a:lnTo>
-                  <a:lnTo>
-                    <a:pt x="1548419" y="135742"/>
-                  </a:lnTo>
-                  <a:lnTo>
-                    <a:pt x="1470785" y="129352"/>
-                  </a:lnTo>
-                  <a:lnTo>
-                    <a:pt x="1393151" y="122919"/>
-                  </a:lnTo>
-                  <a:lnTo>
-                    <a:pt x="1315517" y="116445"/>
-                  </a:lnTo>
-                  <a:lnTo>
-                    <a:pt x="1237883" y="109927"/>
-                  </a:lnTo>
-                  <a:lnTo>
-                    <a:pt x="1160249" y="103366"/>
-                  </a:lnTo>
-                  <a:lnTo>
-                    <a:pt x="1082615" y="96762"/>
-                  </a:lnTo>
-                  <a:lnTo>
-                    <a:pt x="1004981" y="90115"/>
-                  </a:lnTo>
-                  <a:lnTo>
-                    <a:pt x="927346" y="83424"/>
-                  </a:lnTo>
-                  <a:lnTo>
-                    <a:pt x="849712" y="76688"/>
-                  </a:lnTo>
-                  <a:lnTo>
-                    <a:pt x="772078" y="69908"/>
-                  </a:lnTo>
-                  <a:lnTo>
-                    <a:pt x="694444" y="63084"/>
-                  </a:lnTo>
-                  <a:lnTo>
-                    <a:pt x="616810" y="56214"/>
-                  </a:lnTo>
-                  <a:lnTo>
-                    <a:pt x="539176" y="49300"/>
-                  </a:lnTo>
-                  <a:lnTo>
-                    <a:pt x="461542" y="42339"/>
-                  </a:lnTo>
-                  <a:lnTo>
-                    <a:pt x="383908" y="35333"/>
-                  </a:lnTo>
-                  <a:lnTo>
-                    <a:pt x="306274" y="28280"/>
-                  </a:lnTo>
-                  <a:lnTo>
-                    <a:pt x="228640" y="21181"/>
-                  </a:lnTo>
-                  <a:lnTo>
-                    <a:pt x="151006" y="14035"/>
-                  </a:lnTo>
-                  <a:lnTo>
-                    <a:pt x="73372" y="6842"/>
+                    <a:pt x="7183835" y="1017649"/>
+                  </a:lnTo>
+                  <a:lnTo>
+                    <a:pt x="7107366" y="1016557"/>
+                  </a:lnTo>
+                  <a:lnTo>
+                    <a:pt x="7030898" y="1015373"/>
+                  </a:lnTo>
+                  <a:lnTo>
+                    <a:pt x="6954429" y="1014089"/>
+                  </a:lnTo>
+                  <a:lnTo>
+                    <a:pt x="6877961" y="1012696"/>
+                  </a:lnTo>
+                  <a:lnTo>
+                    <a:pt x="6801492" y="1011185"/>
+                  </a:lnTo>
+                  <a:lnTo>
+                    <a:pt x="6725024" y="1009545"/>
+                  </a:lnTo>
+                  <a:lnTo>
+                    <a:pt x="6648556" y="1007767"/>
+                  </a:lnTo>
+                  <a:lnTo>
+                    <a:pt x="6572087" y="1005838"/>
+                  </a:lnTo>
+                  <a:lnTo>
+                    <a:pt x="6495619" y="1003745"/>
+                  </a:lnTo>
+                  <a:lnTo>
+                    <a:pt x="6419150" y="1001474"/>
+                  </a:lnTo>
+                  <a:lnTo>
+                    <a:pt x="6342682" y="999012"/>
+                  </a:lnTo>
+                  <a:lnTo>
+                    <a:pt x="6266213" y="996340"/>
+                  </a:lnTo>
+                  <a:lnTo>
+                    <a:pt x="6189745" y="993442"/>
+                  </a:lnTo>
+                  <a:lnTo>
+                    <a:pt x="6113277" y="990298"/>
+                  </a:lnTo>
+                  <a:lnTo>
+                    <a:pt x="6036808" y="986887"/>
+                  </a:lnTo>
+                  <a:lnTo>
+                    <a:pt x="5960340" y="983188"/>
+                  </a:lnTo>
+                  <a:lnTo>
+                    <a:pt x="5883871" y="979174"/>
+                  </a:lnTo>
+                  <a:lnTo>
+                    <a:pt x="5807403" y="974820"/>
+                  </a:lnTo>
+                  <a:lnTo>
+                    <a:pt x="5730934" y="970097"/>
+                  </a:lnTo>
+                  <a:lnTo>
+                    <a:pt x="5654466" y="964974"/>
+                  </a:lnTo>
+                  <a:lnTo>
+                    <a:pt x="5577998" y="959416"/>
+                  </a:lnTo>
+                  <a:lnTo>
+                    <a:pt x="5501529" y="953387"/>
+                  </a:lnTo>
+                  <a:lnTo>
+                    <a:pt x="5425061" y="946847"/>
+                  </a:lnTo>
+                  <a:lnTo>
+                    <a:pt x="5348592" y="939752"/>
+                  </a:lnTo>
+                  <a:lnTo>
+                    <a:pt x="5272124" y="932055"/>
+                  </a:lnTo>
+                  <a:lnTo>
+                    <a:pt x="5195655" y="923706"/>
+                  </a:lnTo>
+                  <a:lnTo>
+                    <a:pt x="5119187" y="914649"/>
+                  </a:lnTo>
+                  <a:lnTo>
+                    <a:pt x="5042719" y="904824"/>
+                  </a:lnTo>
+                  <a:lnTo>
+                    <a:pt x="4966250" y="894166"/>
+                  </a:lnTo>
+                  <a:lnTo>
+                    <a:pt x="4889782" y="882604"/>
+                  </a:lnTo>
+                  <a:lnTo>
+                    <a:pt x="4813313" y="870062"/>
+                  </a:lnTo>
+                  <a:lnTo>
+                    <a:pt x="4736845" y="856456"/>
+                  </a:lnTo>
+                  <a:lnTo>
+                    <a:pt x="4660376" y="841697"/>
+                  </a:lnTo>
+                  <a:lnTo>
+                    <a:pt x="4583908" y="825686"/>
+                  </a:lnTo>
+                  <a:lnTo>
+                    <a:pt x="4507439" y="808318"/>
+                  </a:lnTo>
+                  <a:lnTo>
+                    <a:pt x="4430971" y="789476"/>
+                  </a:lnTo>
+                  <a:lnTo>
+                    <a:pt x="4354503" y="769037"/>
+                  </a:lnTo>
+                  <a:lnTo>
+                    <a:pt x="4278034" y="746865"/>
+                  </a:lnTo>
+                  <a:lnTo>
+                    <a:pt x="4201566" y="722813"/>
+                  </a:lnTo>
+                  <a:lnTo>
+                    <a:pt x="4125097" y="696722"/>
+                  </a:lnTo>
+                  <a:lnTo>
+                    <a:pt x="4048629" y="668418"/>
+                  </a:lnTo>
+                  <a:lnTo>
+                    <a:pt x="3972160" y="637714"/>
+                  </a:lnTo>
+                  <a:lnTo>
+                    <a:pt x="3895692" y="604407"/>
+                  </a:lnTo>
+                  <a:lnTo>
+                    <a:pt x="3819224" y="568276"/>
+                  </a:lnTo>
+                  <a:lnTo>
+                    <a:pt x="3742755" y="529080"/>
+                  </a:lnTo>
+                  <a:lnTo>
+                    <a:pt x="3666287" y="486562"/>
+                  </a:lnTo>
+                  <a:lnTo>
+                    <a:pt x="3589818" y="440438"/>
+                  </a:lnTo>
+                  <a:lnTo>
+                    <a:pt x="3513350" y="390403"/>
+                  </a:lnTo>
+                  <a:lnTo>
+                    <a:pt x="3436881" y="336125"/>
+                  </a:lnTo>
+                  <a:lnTo>
+                    <a:pt x="3360413" y="277245"/>
+                  </a:lnTo>
+                  <a:lnTo>
+                    <a:pt x="3283945" y="253427"/>
+                  </a:lnTo>
+                  <a:lnTo>
+                    <a:pt x="3207476" y="248303"/>
+                  </a:lnTo>
+                  <a:lnTo>
+                    <a:pt x="3131008" y="243145"/>
+                  </a:lnTo>
+                  <a:lnTo>
+                    <a:pt x="3054539" y="237953"/>
+                  </a:lnTo>
+                  <a:lnTo>
+                    <a:pt x="2978071" y="232726"/>
+                  </a:lnTo>
+                  <a:lnTo>
+                    <a:pt x="2901602" y="227466"/>
+                  </a:lnTo>
+                  <a:lnTo>
+                    <a:pt x="2825134" y="222170"/>
+                  </a:lnTo>
+                  <a:lnTo>
+                    <a:pt x="2748666" y="216840"/>
+                  </a:lnTo>
+                  <a:lnTo>
+                    <a:pt x="2672197" y="211474"/>
+                  </a:lnTo>
+                  <a:lnTo>
+                    <a:pt x="2595729" y="206073"/>
+                  </a:lnTo>
+                  <a:lnTo>
+                    <a:pt x="2519260" y="200637"/>
+                  </a:lnTo>
+                  <a:lnTo>
+                    <a:pt x="2442792" y="195164"/>
+                  </a:lnTo>
+                  <a:lnTo>
+                    <a:pt x="2366323" y="189656"/>
+                  </a:lnTo>
+                  <a:lnTo>
+                    <a:pt x="2289855" y="184111"/>
+                  </a:lnTo>
+                  <a:lnTo>
+                    <a:pt x="2213386" y="178530"/>
+                  </a:lnTo>
+                  <a:lnTo>
+                    <a:pt x="2136918" y="172911"/>
+                  </a:lnTo>
+                  <a:lnTo>
+                    <a:pt x="2060450" y="167256"/>
+                  </a:lnTo>
+                  <a:lnTo>
+                    <a:pt x="1983981" y="161564"/>
+                  </a:lnTo>
+                  <a:lnTo>
+                    <a:pt x="1907513" y="155834"/>
+                  </a:lnTo>
+                  <a:lnTo>
+                    <a:pt x="1831044" y="150066"/>
+                  </a:lnTo>
+                  <a:lnTo>
+                    <a:pt x="1754576" y="144260"/>
+                  </a:lnTo>
+                  <a:lnTo>
+                    <a:pt x="1678107" y="138416"/>
+                  </a:lnTo>
+                  <a:lnTo>
+                    <a:pt x="1601639" y="132533"/>
+                  </a:lnTo>
+                  <a:lnTo>
+                    <a:pt x="1525171" y="126612"/>
+                  </a:lnTo>
+                  <a:lnTo>
+                    <a:pt x="1448702" y="120651"/>
+                  </a:lnTo>
+                  <a:lnTo>
+                    <a:pt x="1372234" y="114651"/>
+                  </a:lnTo>
+                  <a:lnTo>
+                    <a:pt x="1295765" y="108612"/>
+                  </a:lnTo>
+                  <a:lnTo>
+                    <a:pt x="1219297" y="102532"/>
+                  </a:lnTo>
+                  <a:lnTo>
+                    <a:pt x="1142828" y="96413"/>
+                  </a:lnTo>
+                  <a:lnTo>
+                    <a:pt x="1066360" y="90253"/>
+                  </a:lnTo>
+                  <a:lnTo>
+                    <a:pt x="989892" y="84053"/>
+                  </a:lnTo>
+                  <a:lnTo>
+                    <a:pt x="913423" y="77812"/>
+                  </a:lnTo>
+                  <a:lnTo>
+                    <a:pt x="836955" y="71530"/>
+                  </a:lnTo>
+                  <a:lnTo>
+                    <a:pt x="760486" y="65206"/>
+                  </a:lnTo>
+                  <a:lnTo>
+                    <a:pt x="684018" y="58840"/>
+                  </a:lnTo>
+                  <a:lnTo>
+                    <a:pt x="607549" y="52433"/>
+                  </a:lnTo>
+                  <a:lnTo>
+                    <a:pt x="531081" y="45983"/>
+                  </a:lnTo>
+                  <a:lnTo>
+                    <a:pt x="454613" y="39491"/>
+                  </a:lnTo>
+                  <a:lnTo>
+                    <a:pt x="378144" y="32956"/>
+                  </a:lnTo>
+                  <a:lnTo>
+                    <a:pt x="301676" y="26378"/>
+                  </a:lnTo>
+                  <a:lnTo>
+                    <a:pt x="225207" y="19756"/>
+                  </a:lnTo>
+                  <a:lnTo>
+                    <a:pt x="148739" y="13091"/>
+                  </a:lnTo>
+                  <a:lnTo>
+                    <a:pt x="72270" y="6382"/>
                   </a:lnTo>
                   <a:lnTo>
                     <a:pt x="0" y="0"/>
@@ -4082,267 +4082,267 @@
           </p:nvSpPr>
           <p:spPr>
             <a:xfrm>
-              <a:off x="1670574" y="2073503"/>
-              <a:ext cx="6517915" cy="3396972"/>
+              <a:off x="1755894" y="2209169"/>
+              <a:ext cx="6420054" cy="3168470"/>
             </a:xfrm>
             <a:custGeom>
               <a:avLst/>
               <a:pathLst>
-                <a:path w="6517915" h="3396972">
+                <a:path w="6420054" h="3168470">
                   <a:moveTo>
                     <a:pt x="0" y="0"/>
                   </a:moveTo>
                   <a:lnTo>
-                    <a:pt x="74290" y="143708"/>
-                  </a:lnTo>
-                  <a:lnTo>
-                    <a:pt x="151924" y="287422"/>
-                  </a:lnTo>
-                  <a:lnTo>
-                    <a:pt x="229558" y="424954"/>
-                  </a:lnTo>
-                  <a:lnTo>
-                    <a:pt x="307192" y="556567"/>
-                  </a:lnTo>
-                  <a:lnTo>
-                    <a:pt x="384826" y="682518"/>
-                  </a:lnTo>
-                  <a:lnTo>
-                    <a:pt x="462460" y="803049"/>
-                  </a:lnTo>
-                  <a:lnTo>
-                    <a:pt x="540094" y="918393"/>
-                  </a:lnTo>
-                  <a:lnTo>
-                    <a:pt x="617728" y="1028775"/>
-                  </a:lnTo>
-                  <a:lnTo>
-                    <a:pt x="695362" y="1134408"/>
-                  </a:lnTo>
-                  <a:lnTo>
-                    <a:pt x="772996" y="1235495"/>
-                  </a:lnTo>
-                  <a:lnTo>
-                    <a:pt x="850630" y="1332232"/>
-                  </a:lnTo>
-                  <a:lnTo>
-                    <a:pt x="928264" y="1424808"/>
-                  </a:lnTo>
-                  <a:lnTo>
-                    <a:pt x="1005898" y="1513399"/>
-                  </a:lnTo>
-                  <a:lnTo>
-                    <a:pt x="1083532" y="1598179"/>
-                  </a:lnTo>
-                  <a:lnTo>
-                    <a:pt x="1161166" y="1679311"/>
-                  </a:lnTo>
-                  <a:lnTo>
-                    <a:pt x="1238800" y="1756952"/>
-                  </a:lnTo>
-                  <a:lnTo>
-                    <a:pt x="1316434" y="1831253"/>
-                  </a:lnTo>
-                  <a:lnTo>
-                    <a:pt x="1394068" y="1902356"/>
-                  </a:lnTo>
-                  <a:lnTo>
-                    <a:pt x="1471702" y="1970400"/>
-                  </a:lnTo>
-                  <a:lnTo>
-                    <a:pt x="1549336" y="2035516"/>
-                  </a:lnTo>
-                  <a:lnTo>
-                    <a:pt x="1626970" y="2097831"/>
-                  </a:lnTo>
-                  <a:lnTo>
-                    <a:pt x="1704604" y="2157464"/>
-                  </a:lnTo>
-                  <a:lnTo>
-                    <a:pt x="1782239" y="2214531"/>
-                  </a:lnTo>
-                  <a:lnTo>
-                    <a:pt x="1859873" y="2269143"/>
-                  </a:lnTo>
-                  <a:lnTo>
-                    <a:pt x="1937507" y="2321404"/>
-                  </a:lnTo>
-                  <a:lnTo>
-                    <a:pt x="2015141" y="2371418"/>
-                  </a:lnTo>
-                  <a:lnTo>
-                    <a:pt x="2092775" y="2419279"/>
-                  </a:lnTo>
-                  <a:lnTo>
-                    <a:pt x="2170409" y="2465081"/>
-                  </a:lnTo>
-                  <a:lnTo>
-                    <a:pt x="2248043" y="2508912"/>
-                  </a:lnTo>
-                  <a:lnTo>
-                    <a:pt x="2325677" y="2550857"/>
-                  </a:lnTo>
-                  <a:lnTo>
-                    <a:pt x="2403311" y="2590997"/>
-                  </a:lnTo>
-                  <a:lnTo>
-                    <a:pt x="2480945" y="2629410"/>
-                  </a:lnTo>
-                  <a:lnTo>
-                    <a:pt x="2558579" y="2666171"/>
-                  </a:lnTo>
-                  <a:lnTo>
-                    <a:pt x="2636213" y="2701349"/>
-                  </a:lnTo>
-                  <a:lnTo>
-                    <a:pt x="2713847" y="2735014"/>
-                  </a:lnTo>
-                  <a:lnTo>
-                    <a:pt x="2791481" y="2767230"/>
-                  </a:lnTo>
-                  <a:lnTo>
-                    <a:pt x="2869115" y="2798061"/>
-                  </a:lnTo>
-                  <a:lnTo>
-                    <a:pt x="2946749" y="2827564"/>
-                  </a:lnTo>
-                  <a:lnTo>
-                    <a:pt x="3024383" y="2855798"/>
-                  </a:lnTo>
-                  <a:lnTo>
-                    <a:pt x="3102017" y="2882818"/>
-                  </a:lnTo>
-                  <a:lnTo>
-                    <a:pt x="3179651" y="2908674"/>
-                  </a:lnTo>
-                  <a:lnTo>
-                    <a:pt x="3257285" y="2933419"/>
-                  </a:lnTo>
-                  <a:lnTo>
-                    <a:pt x="3334919" y="2957098"/>
-                  </a:lnTo>
-                  <a:lnTo>
-                    <a:pt x="3412553" y="2979759"/>
-                  </a:lnTo>
-                  <a:lnTo>
-                    <a:pt x="3490188" y="3001444"/>
-                  </a:lnTo>
-                  <a:lnTo>
-                    <a:pt x="3567822" y="3022197"/>
-                  </a:lnTo>
-                  <a:lnTo>
-                    <a:pt x="3645456" y="3042056"/>
-                  </a:lnTo>
-                  <a:lnTo>
-                    <a:pt x="3723090" y="3061061"/>
-                  </a:lnTo>
-                  <a:lnTo>
-                    <a:pt x="3800724" y="3079248"/>
-                  </a:lnTo>
-                  <a:lnTo>
-                    <a:pt x="3878358" y="3096653"/>
-                  </a:lnTo>
-                  <a:lnTo>
-                    <a:pt x="3955992" y="3113309"/>
-                  </a:lnTo>
-                  <a:lnTo>
-                    <a:pt x="4033626" y="3129248"/>
-                  </a:lnTo>
-                  <a:lnTo>
-                    <a:pt x="4111260" y="3144501"/>
-                  </a:lnTo>
-                  <a:lnTo>
-                    <a:pt x="4188894" y="3159098"/>
-                  </a:lnTo>
-                  <a:lnTo>
-                    <a:pt x="4266528" y="3173067"/>
-                  </a:lnTo>
-                  <a:lnTo>
-                    <a:pt x="4344162" y="3186435"/>
-                  </a:lnTo>
-                  <a:lnTo>
-                    <a:pt x="4421796" y="3199228"/>
-                  </a:lnTo>
-                  <a:lnTo>
-                    <a:pt x="4499430" y="3211470"/>
-                  </a:lnTo>
-                  <a:lnTo>
-                    <a:pt x="4577064" y="3223186"/>
-                  </a:lnTo>
-                  <a:lnTo>
-                    <a:pt x="4654698" y="3234397"/>
-                  </a:lnTo>
-                  <a:lnTo>
-                    <a:pt x="4732332" y="3245126"/>
-                  </a:lnTo>
-                  <a:lnTo>
-                    <a:pt x="4809966" y="3255393"/>
-                  </a:lnTo>
-                  <a:lnTo>
-                    <a:pt x="4887600" y="3265219"/>
-                  </a:lnTo>
-                  <a:lnTo>
-                    <a:pt x="4965234" y="3274622"/>
-                  </a:lnTo>
-                  <a:lnTo>
-                    <a:pt x="5042868" y="3283620"/>
-                  </a:lnTo>
-                  <a:lnTo>
-                    <a:pt x="5120502" y="3292231"/>
-                  </a:lnTo>
-                  <a:lnTo>
-                    <a:pt x="5198137" y="3300471"/>
-                  </a:lnTo>
-                  <a:lnTo>
-                    <a:pt x="5275771" y="3308357"/>
-                  </a:lnTo>
-                  <a:lnTo>
-                    <a:pt x="5353405" y="3315904"/>
-                  </a:lnTo>
-                  <a:lnTo>
-                    <a:pt x="5431039" y="3323126"/>
-                  </a:lnTo>
-                  <a:lnTo>
-                    <a:pt x="5508673" y="3330037"/>
-                  </a:lnTo>
-                  <a:lnTo>
-                    <a:pt x="5586307" y="3336651"/>
-                  </a:lnTo>
-                  <a:lnTo>
-                    <a:pt x="5663941" y="3342980"/>
-                  </a:lnTo>
-                  <a:lnTo>
-                    <a:pt x="5741575" y="3349037"/>
-                  </a:lnTo>
-                  <a:lnTo>
-                    <a:pt x="5819209" y="3354833"/>
-                  </a:lnTo>
-                  <a:lnTo>
-                    <a:pt x="5896843" y="3360380"/>
-                  </a:lnTo>
-                  <a:lnTo>
-                    <a:pt x="5974477" y="3365688"/>
-                  </a:lnTo>
-                  <a:lnTo>
-                    <a:pt x="6052111" y="3370768"/>
-                  </a:lnTo>
-                  <a:lnTo>
-                    <a:pt x="6129745" y="3375629"/>
-                  </a:lnTo>
-                  <a:lnTo>
-                    <a:pt x="6207379" y="3380281"/>
-                  </a:lnTo>
-                  <a:lnTo>
-                    <a:pt x="6285013" y="3384733"/>
-                  </a:lnTo>
-                  <a:lnTo>
-                    <a:pt x="6362647" y="3388994"/>
-                  </a:lnTo>
-                  <a:lnTo>
-                    <a:pt x="6440281" y="3393071"/>
-                  </a:lnTo>
-                  <a:lnTo>
-                    <a:pt x="6517915" y="3396972"/>
+                    <a:pt x="73174" y="134041"/>
+                  </a:lnTo>
+                  <a:lnTo>
+                    <a:pt x="149643" y="268089"/>
+                  </a:lnTo>
+                  <a:lnTo>
+                    <a:pt x="226111" y="396369"/>
+                  </a:lnTo>
+                  <a:lnTo>
+                    <a:pt x="302579" y="519129"/>
+                  </a:lnTo>
+                  <a:lnTo>
+                    <a:pt x="379048" y="636607"/>
+                  </a:lnTo>
+                  <a:lnTo>
+                    <a:pt x="455516" y="749030"/>
+                  </a:lnTo>
+                  <a:lnTo>
+                    <a:pt x="531985" y="856616"/>
+                  </a:lnTo>
+                  <a:lnTo>
+                    <a:pt x="608453" y="959573"/>
+                  </a:lnTo>
+                  <a:lnTo>
+                    <a:pt x="684922" y="1058100"/>
+                  </a:lnTo>
+                  <a:lnTo>
+                    <a:pt x="761390" y="1152388"/>
+                  </a:lnTo>
+                  <a:lnTo>
+                    <a:pt x="837858" y="1242618"/>
+                  </a:lnTo>
+                  <a:lnTo>
+                    <a:pt x="914327" y="1328966"/>
+                  </a:lnTo>
+                  <a:lnTo>
+                    <a:pt x="990795" y="1411599"/>
+                  </a:lnTo>
+                  <a:lnTo>
+                    <a:pt x="1067264" y="1490676"/>
+                  </a:lnTo>
+                  <a:lnTo>
+                    <a:pt x="1143732" y="1566350"/>
+                  </a:lnTo>
+                  <a:lnTo>
+                    <a:pt x="1220201" y="1638769"/>
+                  </a:lnTo>
+                  <a:lnTo>
+                    <a:pt x="1296669" y="1708071"/>
+                  </a:lnTo>
+                  <a:lnTo>
+                    <a:pt x="1373138" y="1774392"/>
+                  </a:lnTo>
+                  <a:lnTo>
+                    <a:pt x="1449606" y="1837859"/>
+                  </a:lnTo>
+                  <a:lnTo>
+                    <a:pt x="1526074" y="1898595"/>
+                  </a:lnTo>
+                  <a:lnTo>
+                    <a:pt x="1602543" y="1956717"/>
+                  </a:lnTo>
+                  <a:lnTo>
+                    <a:pt x="1679011" y="2012339"/>
+                  </a:lnTo>
+                  <a:lnTo>
+                    <a:pt x="1755480" y="2065567"/>
+                  </a:lnTo>
+                  <a:lnTo>
+                    <a:pt x="1831948" y="2116506"/>
+                  </a:lnTo>
+                  <a:lnTo>
+                    <a:pt x="1908417" y="2165252"/>
+                  </a:lnTo>
+                  <a:lnTo>
+                    <a:pt x="1984885" y="2211901"/>
+                  </a:lnTo>
+                  <a:lnTo>
+                    <a:pt x="2061353" y="2256543"/>
+                  </a:lnTo>
+                  <a:lnTo>
+                    <a:pt x="2137822" y="2299264"/>
+                  </a:lnTo>
+                  <a:lnTo>
+                    <a:pt x="2214290" y="2340146"/>
+                  </a:lnTo>
+                  <a:lnTo>
+                    <a:pt x="2290759" y="2379270"/>
+                  </a:lnTo>
+                  <a:lnTo>
+                    <a:pt x="2367227" y="2416710"/>
+                  </a:lnTo>
+                  <a:lnTo>
+                    <a:pt x="2443696" y="2452539"/>
+                  </a:lnTo>
+                  <a:lnTo>
+                    <a:pt x="2520164" y="2486827"/>
+                  </a:lnTo>
+                  <a:lnTo>
+                    <a:pt x="2596632" y="2519639"/>
+                  </a:lnTo>
+                  <a:lnTo>
+                    <a:pt x="2673101" y="2551040"/>
+                  </a:lnTo>
+                  <a:lnTo>
+                    <a:pt x="2749569" y="2581089"/>
+                  </a:lnTo>
+                  <a:lnTo>
+                    <a:pt x="2826038" y="2609845"/>
+                  </a:lnTo>
+                  <a:lnTo>
+                    <a:pt x="2902506" y="2637364"/>
+                  </a:lnTo>
+                  <a:lnTo>
+                    <a:pt x="2978975" y="2663699"/>
+                  </a:lnTo>
+                  <a:lnTo>
+                    <a:pt x="3055443" y="2688901"/>
+                  </a:lnTo>
+                  <a:lnTo>
+                    <a:pt x="3131911" y="2713019"/>
+                  </a:lnTo>
+                  <a:lnTo>
+                    <a:pt x="3208380" y="2736098"/>
+                  </a:lnTo>
+                  <a:lnTo>
+                    <a:pt x="3284848" y="2758185"/>
+                  </a:lnTo>
+                  <a:lnTo>
+                    <a:pt x="3361317" y="2779321"/>
+                  </a:lnTo>
+                  <a:lnTo>
+                    <a:pt x="3437785" y="2799548"/>
+                  </a:lnTo>
+                  <a:lnTo>
+                    <a:pt x="3514254" y="2818905"/>
+                  </a:lnTo>
+                  <a:lnTo>
+                    <a:pt x="3590722" y="2837428"/>
+                  </a:lnTo>
+                  <a:lnTo>
+                    <a:pt x="3667190" y="2855155"/>
+                  </a:lnTo>
+                  <a:lnTo>
+                    <a:pt x="3743659" y="2872119"/>
+                  </a:lnTo>
+                  <a:lnTo>
+                    <a:pt x="3820127" y="2888353"/>
+                  </a:lnTo>
+                  <a:lnTo>
+                    <a:pt x="3896596" y="2903888"/>
+                  </a:lnTo>
+                  <a:lnTo>
+                    <a:pt x="3973064" y="2918755"/>
+                  </a:lnTo>
+                  <a:lnTo>
+                    <a:pt x="4049533" y="2932982"/>
+                  </a:lnTo>
+                  <a:lnTo>
+                    <a:pt x="4126001" y="2946598"/>
+                  </a:lnTo>
+                  <a:lnTo>
+                    <a:pt x="4202470" y="2959627"/>
+                  </a:lnTo>
+                  <a:lnTo>
+                    <a:pt x="4278938" y="2972095"/>
+                  </a:lnTo>
+                  <a:lnTo>
+                    <a:pt x="4355406" y="2984028"/>
+                  </a:lnTo>
+                  <a:lnTo>
+                    <a:pt x="4431875" y="2995446"/>
+                  </a:lnTo>
+                  <a:lnTo>
+                    <a:pt x="4508343" y="3006374"/>
+                  </a:lnTo>
+                  <a:lnTo>
+                    <a:pt x="4584812" y="3016831"/>
+                  </a:lnTo>
+                  <a:lnTo>
+                    <a:pt x="4661280" y="3026838"/>
+                  </a:lnTo>
+                  <a:lnTo>
+                    <a:pt x="4737749" y="3036415"/>
+                  </a:lnTo>
+                  <a:lnTo>
+                    <a:pt x="4814217" y="3045580"/>
+                  </a:lnTo>
+                  <a:lnTo>
+                    <a:pt x="4890685" y="3054350"/>
+                  </a:lnTo>
+                  <a:lnTo>
+                    <a:pt x="4967154" y="3062743"/>
+                  </a:lnTo>
+                  <a:lnTo>
+                    <a:pt x="5043622" y="3070775"/>
+                  </a:lnTo>
+                  <a:lnTo>
+                    <a:pt x="5120091" y="3078461"/>
+                  </a:lnTo>
+                  <a:lnTo>
+                    <a:pt x="5196559" y="3085816"/>
+                  </a:lnTo>
+                  <a:lnTo>
+                    <a:pt x="5273028" y="3092855"/>
+                  </a:lnTo>
+                  <a:lnTo>
+                    <a:pt x="5349496" y="3099591"/>
+                  </a:lnTo>
+                  <a:lnTo>
+                    <a:pt x="5425964" y="3106038"/>
+                  </a:lnTo>
+                  <a:lnTo>
+                    <a:pt x="5502433" y="3112207"/>
+                  </a:lnTo>
+                  <a:lnTo>
+                    <a:pt x="5578901" y="3118110"/>
+                  </a:lnTo>
+                  <a:lnTo>
+                    <a:pt x="5655370" y="3123760"/>
+                  </a:lnTo>
+                  <a:lnTo>
+                    <a:pt x="5731838" y="3129166"/>
+                  </a:lnTo>
+                  <a:lnTo>
+                    <a:pt x="5808307" y="3134340"/>
+                  </a:lnTo>
+                  <a:lnTo>
+                    <a:pt x="5884775" y="3139291"/>
+                  </a:lnTo>
+                  <a:lnTo>
+                    <a:pt x="5961243" y="3144029"/>
+                  </a:lnTo>
+                  <a:lnTo>
+                    <a:pt x="6037712" y="3148563"/>
+                  </a:lnTo>
+                  <a:lnTo>
+                    <a:pt x="6114180" y="3152902"/>
+                  </a:lnTo>
+                  <a:lnTo>
+                    <a:pt x="6190649" y="3157055"/>
+                  </a:lnTo>
+                  <a:lnTo>
+                    <a:pt x="6267117" y="3161028"/>
+                  </a:lnTo>
+                  <a:lnTo>
+                    <a:pt x="6343586" y="3164831"/>
+                  </a:lnTo>
+                  <a:lnTo>
+                    <a:pt x="6420054" y="3168470"/>
                   </a:lnTo>
                 </a:path>
               </a:pathLst>
@@ -4371,21 +4371,21 @@
           </p:nvSpPr>
           <p:spPr>
             <a:xfrm>
-              <a:off x="817517" y="4727786"/>
-              <a:ext cx="7799693" cy="0"/>
+              <a:off x="915645" y="4684908"/>
+              <a:ext cx="7682587" cy="0"/>
             </a:xfrm>
             <a:custGeom>
               <a:avLst/>
               <a:pathLst>
-                <a:path w="7799693" h="0">
+                <a:path w="7682587" h="0">
                   <a:moveTo>
                     <a:pt x="0" y="0"/>
                   </a:moveTo>
                   <a:lnTo>
-                    <a:pt x="7799693" y="0"/>
-                  </a:lnTo>
-                  <a:lnTo>
-                    <a:pt x="7799693" y="0"/>
+                    <a:pt x="7682587" y="0"/>
+                  </a:lnTo>
+                  <a:lnTo>
+                    <a:pt x="7682587" y="0"/>
                   </a:lnTo>
                 </a:path>
               </a:pathLst>
@@ -4414,15 +4414,15 @@
           </p:nvSpPr>
           <p:spPr>
             <a:xfrm>
-              <a:off x="4203673" y="2073503"/>
-              <a:ext cx="0" cy="3649639"/>
+              <a:off x="4250960" y="2209169"/>
+              <a:ext cx="0" cy="3404141"/>
             </a:xfrm>
             <a:custGeom>
               <a:avLst/>
               <a:pathLst>
-                <a:path w="0" h="3649639">
+                <a:path w="0" h="3404141">
                   <a:moveTo>
-                    <a:pt x="0" y="3649639"/>
+                    <a:pt x="0" y="3404141"/>
                   </a:moveTo>
                   <a:lnTo>
                     <a:pt x="0" y="0"/>
@@ -4457,8 +4457,8 @@
           </p:nvSpPr>
           <p:spPr>
             <a:xfrm>
-              <a:off x="692708" y="5517199"/>
-              <a:ext cx="62179" cy="80101"/>
+              <a:off x="756929" y="5407599"/>
+              <a:ext cx="79004" cy="101955"/>
             </a:xfrm>
             <a:prstGeom prst="rect">
               <a:avLst/>
@@ -4471,7 +4471,7 @@
             <a:p>
               <a:pPr algn="l" marL="0" marR="0" indent="0">
                 <a:lnSpc>
-                  <a:spcPts val="880"/>
+                  <a:spcPts val="1120"/>
                 </a:lnSpc>
                 <a:spcBef>
                   <a:spcPts val="0"/>
@@ -4481,7 +4481,7 @@
                 </a:spcAft>
               </a:pPr>
               <a:r>
-                <a:rPr sz="880">
+                <a:rPr sz="1120">
                   <a:solidFill>
                     <a:srgbClr val="4D4D4D">
                       <a:alpha val="100000"/>
@@ -4503,8 +4503,8 @@
           </p:nvSpPr>
           <p:spPr>
             <a:xfrm>
-              <a:off x="692708" y="4687735"/>
-              <a:ext cx="62179" cy="80101"/>
+              <a:off x="756929" y="4633931"/>
+              <a:ext cx="79004" cy="101955"/>
             </a:xfrm>
             <a:prstGeom prst="rect">
               <a:avLst/>
@@ -4517,7 +4517,7 @@
             <a:p>
               <a:pPr algn="l" marL="0" marR="0" indent="0">
                 <a:lnSpc>
-                  <a:spcPts val="880"/>
+                  <a:spcPts val="1120"/>
                 </a:lnSpc>
                 <a:spcBef>
                   <a:spcPts val="0"/>
@@ -4527,7 +4527,7 @@
                 </a:spcAft>
               </a:pPr>
               <a:r>
-                <a:rPr sz="880">
+                <a:rPr sz="1120">
                   <a:solidFill>
                     <a:srgbClr val="4D4D4D">
                       <a:alpha val="100000"/>
@@ -4549,8 +4549,8 @@
           </p:nvSpPr>
           <p:spPr>
             <a:xfrm>
-              <a:off x="692708" y="3858272"/>
-              <a:ext cx="62179" cy="80101"/>
+              <a:off x="756929" y="3860262"/>
+              <a:ext cx="79004" cy="101955"/>
             </a:xfrm>
             <a:prstGeom prst="rect">
               <a:avLst/>
@@ -4563,7 +4563,7 @@
             <a:p>
               <a:pPr algn="l" marL="0" marR="0" indent="0">
                 <a:lnSpc>
-                  <a:spcPts val="880"/>
+                  <a:spcPts val="1120"/>
                 </a:lnSpc>
                 <a:spcBef>
                   <a:spcPts val="0"/>
@@ -4573,7 +4573,7 @@
                 </a:spcAft>
               </a:pPr>
               <a:r>
-                <a:rPr sz="880">
+                <a:rPr sz="1120">
                   <a:solidFill>
                     <a:srgbClr val="4D4D4D">
                       <a:alpha val="100000"/>
@@ -4595,8 +4595,8 @@
           </p:nvSpPr>
           <p:spPr>
             <a:xfrm>
-              <a:off x="692708" y="3028808"/>
-              <a:ext cx="62179" cy="80101"/>
+              <a:off x="756929" y="3086593"/>
+              <a:ext cx="79004" cy="101955"/>
             </a:xfrm>
             <a:prstGeom prst="rect">
               <a:avLst/>
@@ -4609,7 +4609,7 @@
             <a:p>
               <a:pPr algn="l" marL="0" marR="0" indent="0">
                 <a:lnSpc>
-                  <a:spcPts val="880"/>
+                  <a:spcPts val="1120"/>
                 </a:lnSpc>
                 <a:spcBef>
                   <a:spcPts val="0"/>
@@ -4619,7 +4619,7 @@
                 </a:spcAft>
               </a:pPr>
               <a:r>
-                <a:rPr sz="880">
+                <a:rPr sz="1120">
                   <a:solidFill>
                     <a:srgbClr val="4D4D4D">
                       <a:alpha val="100000"/>
@@ -4641,8 +4641,8 @@
           </p:nvSpPr>
           <p:spPr>
             <a:xfrm>
-              <a:off x="692708" y="2199345"/>
-              <a:ext cx="62179" cy="80101"/>
+              <a:off x="756929" y="2312925"/>
+              <a:ext cx="79004" cy="101955"/>
             </a:xfrm>
             <a:prstGeom prst="rect">
               <a:avLst/>
@@ -4655,7 +4655,7 @@
             <a:p>
               <a:pPr algn="l" marL="0" marR="0" indent="0">
                 <a:lnSpc>
-                  <a:spcPts val="880"/>
+                  <a:spcPts val="1120"/>
                 </a:lnSpc>
                 <a:spcBef>
                   <a:spcPts val="0"/>
@@ -4665,7 +4665,7 @@
                 </a:spcAft>
               </a:pPr>
               <a:r>
-                <a:rPr sz="880">
+                <a:rPr sz="1120">
                   <a:solidFill>
                     <a:srgbClr val="4D4D4D">
                       <a:alpha val="100000"/>
@@ -4687,8 +4687,8 @@
           </p:nvSpPr>
           <p:spPr>
             <a:xfrm>
-              <a:off x="2423864" y="5785772"/>
-              <a:ext cx="155356" cy="80101"/>
+              <a:off x="2475630" y="5693022"/>
+              <a:ext cx="197510" cy="101955"/>
             </a:xfrm>
             <a:prstGeom prst="rect">
               <a:avLst/>
@@ -4701,7 +4701,7 @@
             <a:p>
               <a:pPr algn="l" marL="0" marR="0" indent="0">
                 <a:lnSpc>
-                  <a:spcPts val="880"/>
+                  <a:spcPts val="1120"/>
                 </a:lnSpc>
                 <a:spcBef>
                   <a:spcPts val="0"/>
@@ -4711,7 +4711,7 @@
                 </a:spcAft>
               </a:pPr>
               <a:r>
-                <a:rPr sz="880">
+                <a:rPr sz="1120">
                   <a:solidFill>
                     <a:srgbClr val="4D4D4D">
                       <a:alpha val="100000"/>
@@ -4733,8 +4733,8 @@
           </p:nvSpPr>
           <p:spPr>
             <a:xfrm>
-              <a:off x="4196521" y="5785772"/>
-              <a:ext cx="155356" cy="80101"/>
+              <a:off x="4221672" y="5693022"/>
+              <a:ext cx="197510" cy="101955"/>
             </a:xfrm>
             <a:prstGeom prst="rect">
               <a:avLst/>
@@ -4747,7 +4747,7 @@
             <a:p>
               <a:pPr algn="l" marL="0" marR="0" indent="0">
                 <a:lnSpc>
-                  <a:spcPts val="880"/>
+                  <a:spcPts val="1120"/>
                 </a:lnSpc>
                 <a:spcBef>
                   <a:spcPts val="0"/>
@@ -4757,7 +4757,7 @@
                 </a:spcAft>
               </a:pPr>
               <a:r>
-                <a:rPr sz="880">
+                <a:rPr sz="1120">
                   <a:solidFill>
                     <a:srgbClr val="4D4D4D">
                       <a:alpha val="100000"/>
@@ -4779,8 +4779,8 @@
           </p:nvSpPr>
           <p:spPr>
             <a:xfrm>
-              <a:off x="5969179" y="5785772"/>
-              <a:ext cx="155356" cy="80101"/>
+              <a:off x="5967715" y="5693022"/>
+              <a:ext cx="197510" cy="101955"/>
             </a:xfrm>
             <a:prstGeom prst="rect">
               <a:avLst/>
@@ -4793,7 +4793,7 @@
             <a:p>
               <a:pPr algn="l" marL="0" marR="0" indent="0">
                 <a:lnSpc>
-                  <a:spcPts val="880"/>
+                  <a:spcPts val="1120"/>
                 </a:lnSpc>
                 <a:spcBef>
                   <a:spcPts val="0"/>
@@ -4803,7 +4803,7 @@
                 </a:spcAft>
               </a:pPr>
               <a:r>
-                <a:rPr sz="880">
+                <a:rPr sz="1120">
                   <a:solidFill>
                     <a:srgbClr val="4D4D4D">
                       <a:alpha val="100000"/>
@@ -4825,8 +4825,8 @@
           </p:nvSpPr>
           <p:spPr>
             <a:xfrm>
-              <a:off x="7741836" y="5785772"/>
-              <a:ext cx="155356" cy="80101"/>
+              <a:off x="7713757" y="5693022"/>
+              <a:ext cx="197510" cy="101955"/>
             </a:xfrm>
             <a:prstGeom prst="rect">
               <a:avLst/>
@@ -4839,7 +4839,7 @@
             <a:p>
               <a:pPr algn="l" marL="0" marR="0" indent="0">
                 <a:lnSpc>
-                  <a:spcPts val="880"/>
+                  <a:spcPts val="1120"/>
                 </a:lnSpc>
                 <a:spcBef>
                   <a:spcPts val="0"/>
@@ -4849,7 +4849,7 @@
                 </a:spcAft>
               </a:pPr>
               <a:r>
-                <a:rPr sz="880">
+                <a:rPr sz="1120">
                   <a:solidFill>
                     <a:srgbClr val="4D4D4D">
                       <a:alpha val="100000"/>
@@ -4871,8 +4871,8 @@
           </p:nvSpPr>
           <p:spPr>
             <a:xfrm>
-              <a:off x="3879271" y="5925448"/>
-              <a:ext cx="1676186" cy="100218"/>
+              <a:off x="3690153" y="5870717"/>
+              <a:ext cx="2133569" cy="127558"/>
             </a:xfrm>
             <a:prstGeom prst="rect">
               <a:avLst/>
@@ -4885,7 +4885,7 @@
             <a:p>
               <a:pPr algn="l" marL="0" marR="0" indent="0">
                 <a:lnSpc>
-                  <a:spcPts val="1100"/>
+                  <a:spcPts val="1400"/>
                 </a:lnSpc>
                 <a:spcBef>
                   <a:spcPts val="0"/>
@@ -4895,7 +4895,7 @@
                 </a:spcAft>
               </a:pPr>
               <a:r>
-                <a:rPr sz="1100">
+                <a:rPr sz="1400">
                   <a:solidFill>
                     <a:srgbClr val="000000">
                       <a:alpha val="100000"/>
@@ -4917,8 +4917,8 @@
           </p:nvSpPr>
           <p:spPr>
             <a:xfrm rot="-5400000">
-              <a:off x="68446" y="3848213"/>
-              <a:ext cx="1016904" cy="100218"/>
+              <a:off x="-37527" y="3847460"/>
+              <a:ext cx="1294150" cy="127558"/>
             </a:xfrm>
             <a:prstGeom prst="rect">
               <a:avLst/>
@@ -4931,7 +4931,7 @@
             <a:p>
               <a:pPr algn="l" marL="0" marR="0" indent="0">
                 <a:lnSpc>
-                  <a:spcPts val="1100"/>
+                  <a:spcPts val="1400"/>
                 </a:lnSpc>
                 <a:spcBef>
                   <a:spcPts val="0"/>
@@ -4941,7 +4941,7 @@
                 </a:spcAft>
               </a:pPr>
               <a:r>
-                <a:rPr sz="1100">
+                <a:rPr sz="1400">
                   <a:solidFill>
                     <a:srgbClr val="000000">
                       <a:alpha val="100000"/>
@@ -4963,8 +4963,8 @@
           </p:nvSpPr>
           <p:spPr>
             <a:xfrm>
-              <a:off x="817517" y="1896563"/>
-              <a:ext cx="4166463" cy="82021"/>
+              <a:off x="915645" y="1977589"/>
+              <a:ext cx="5556900" cy="109362"/>
             </a:xfrm>
             <a:prstGeom prst="rect">
               <a:avLst/>
@@ -4977,7 +4977,7 @@
             <a:p>
               <a:pPr algn="l" marL="0" marR="0" indent="0">
                 <a:lnSpc>
-                  <a:spcPts val="900"/>
+                  <a:spcPts val="1200"/>
                 </a:lnSpc>
                 <a:spcBef>
                   <a:spcPts val="0"/>
@@ -4987,7 +4987,7 @@
                 </a:spcAft>
               </a:pPr>
               <a:r>
-                <a:rPr sz="900">
+                <a:rPr sz="1200">
                   <a:solidFill>
                     <a:srgbClr val="404040">
                       <a:alpha val="100000"/>
@@ -5009,8 +5009,8 @@
           </p:nvSpPr>
           <p:spPr>
             <a:xfrm>
-              <a:off x="817517" y="1669789"/>
-              <a:ext cx="3054278" cy="120152"/>
+              <a:off x="915645" y="1688767"/>
+              <a:ext cx="3888211" cy="153070"/>
             </a:xfrm>
             <a:prstGeom prst="rect">
               <a:avLst/>
@@ -5023,7 +5023,7 @@
             <a:p>
               <a:pPr algn="l" marL="0" marR="0" indent="0">
                 <a:lnSpc>
-                  <a:spcPts val="1320"/>
+                  <a:spcPts val="1680"/>
                 </a:lnSpc>
                 <a:spcBef>
                   <a:spcPts val="0"/>
@@ -5033,7 +5033,7 @@
                 </a:spcAft>
               </a:pPr>
               <a:r>
-                <a:rPr sz="1320">
+                <a:rPr sz="1680">
                   <a:solidFill>
                     <a:srgbClr val="000000">
                       <a:alpha val="100000"/>
